--- a/public/downloads/praesentation/M15.pptx
+++ b/public/downloads/praesentation/M15.pptx
@@ -21,6 +21,13 @@
     <p:sldId id="269" r:id="rId20"/>
     <p:sldId id="270" r:id="rId21"/>
     <p:sldId id="271" r:id="rId22"/>
+    <p:sldId id="272" r:id="rId23"/>
+    <p:sldId id="273" r:id="rId24"/>
+    <p:sldId id="274" r:id="rId25"/>
+    <p:sldId id="275" r:id="rId26"/>
+    <p:sldId id="276" r:id="rId27"/>
+    <p:sldId id="277" r:id="rId28"/>
+    <p:sldId id="278" r:id="rId29"/>
   </p:sldIdLst>
   <p:sldSz cx="12188952" cy="6858000" type="screen4x3"/>
   <p:notesSz cx="6858000" cy="9144000"/>
@@ -3162,8 +3169,8 @@
         </p:nvSpPr>
         <p:spPr>
           <a:xfrm>
-            <a:off x="365760" y="365760"/>
-            <a:ext cx="11430000" cy="457200"/>
+            <a:off x="365760" y="320040"/>
+            <a:ext cx="11430000" cy="411480"/>
           </a:xfrm>
           <a:prstGeom prst="rect">
             <a:avLst/>
@@ -3178,13 +3185,13 @@
           <a:p>
             <a:pPr algn="l"/>
             <a:r>
-              <a:rPr sz="1100" b="0">
+              <a:rPr sz="1100" b="0" i="0">
                 <a:solidFill>
-                  <a:srgbClr val="FFFFFF"/>
+                  <a:srgbClr val="BBCCEE"/>
                 </a:solidFill>
                 <a:latin typeface="Arial"/>
               </a:rPr>
-              <a:t>M15  ·  K-04 Vertrieb &amp; Ertragsoptimierung  ·  Stratege  ·  1 Tag</a:t>
+              <a:t>M15  ·  K-04 Vertrieb &amp; Ertragsoptimierung  ·  Zielstufe: Stratege  ·  1 Tag</a:t>
             </a:r>
           </a:p>
         </p:txBody>
@@ -3197,14 +3204,14 @@
         </p:nvSpPr>
         <p:spPr>
           <a:xfrm>
-            <a:off x="365760" y="868680"/>
-            <a:ext cx="7315200" cy="27432"/>
+            <a:off x="365760" y="804672"/>
+            <a:ext cx="8229600" cy="22860"/>
           </a:xfrm>
           <a:prstGeom prst="rect">
             <a:avLst/>
           </a:prstGeom>
           <a:solidFill>
-            <a:srgbClr val="FFFFFF"/>
+            <a:srgbClr val="335CC0"/>
           </a:solidFill>
           <a:ln>
             <a:noFill/>
@@ -3240,8 +3247,8 @@
         </p:nvSpPr>
         <p:spPr>
           <a:xfrm>
-            <a:off x="365760" y="1097280"/>
-            <a:ext cx="11430000" cy="2286000"/>
+            <a:off x="365760" y="1005840"/>
+            <a:ext cx="11430000" cy="2560320"/>
           </a:xfrm>
           <a:prstGeom prst="rect">
             <a:avLst/>
@@ -3256,7 +3263,7 @@
           <a:p>
             <a:pPr algn="l"/>
             <a:r>
-              <a:rPr sz="4000" b="1">
+              <a:rPr sz="4200" b="1" i="0">
                 <a:solidFill>
                   <a:srgbClr val="FFFFFF"/>
                 </a:solidFill>
@@ -3275,8 +3282,8 @@
         </p:nvSpPr>
         <p:spPr>
           <a:xfrm>
-            <a:off x="365760" y="3200400"/>
-            <a:ext cx="9144000" cy="914400"/>
+            <a:off x="365760" y="3383280"/>
+            <a:ext cx="10058400" cy="822960"/>
           </a:xfrm>
           <a:prstGeom prst="rect">
             <a:avLst/>
@@ -3291,7 +3298,7 @@
           <a:p>
             <a:pPr algn="l"/>
             <a:r>
-              <a:rPr sz="2000" b="0">
+              <a:rPr sz="2000" b="0" i="1">
                 <a:solidFill>
                   <a:srgbClr val="CCD6F0"/>
                 </a:solidFill>
@@ -3310,8 +3317,8 @@
         </p:nvSpPr>
         <p:spPr>
           <a:xfrm>
-            <a:off x="365760" y="6217920"/>
-            <a:ext cx="11430000" cy="457200"/>
+            <a:off x="365760" y="6309360"/>
+            <a:ext cx="11430000" cy="365760"/>
           </a:xfrm>
           <a:prstGeom prst="rect">
             <a:avLst/>
@@ -3326,9 +3333,9 @@
           <a:p>
             <a:pPr algn="l"/>
             <a:r>
-              <a:rPr sz="1000" b="0">
+              <a:rPr sz="900" b="0" i="0">
                 <a:solidFill>
-                  <a:srgbClr val="99AACC"/>
+                  <a:srgbClr val="889ACC"/>
                 </a:solidFill>
                 <a:latin typeface="Arial"/>
               </a:rPr>
@@ -3346,6 +3353,536 @@
 </file>
 
 <file path=ppt/slides/slide10.xml><?xml version="1.0" encoding="utf-8"?>
+<p:sld xmlns:a="http://schemas.openxmlformats.org/drawingml/2006/main" xmlns:p="http://schemas.openxmlformats.org/presentationml/2006/main" xmlns:r="http://schemas.openxmlformats.org/officeDocument/2006/relationships">
+  <p:cSld>
+    <p:bg>
+      <p:bgPr>
+        <a:solidFill>
+          <a:srgbClr val="FFFFFF"/>
+        </a:solidFill>
+        <a:effectLst/>
+      </p:bgPr>
+    </p:bg>
+    <p:spTree>
+      <p:nvGrpSpPr>
+        <p:cNvPr id="1" name=""/>
+        <p:cNvGrpSpPr/>
+        <p:nvPr/>
+      </p:nvGrpSpPr>
+      <p:grpSpPr/>
+      <p:sp>
+        <p:nvSpPr>
+          <p:cNvPr id="2" name="Rectangle 1"/>
+          <p:cNvSpPr/>
+          <p:nvPr/>
+        </p:nvSpPr>
+        <p:spPr>
+          <a:xfrm>
+            <a:off x="0" y="0"/>
+            <a:ext cx="73152" cy="6858000"/>
+          </a:xfrm>
+          <a:prstGeom prst="rect">
+            <a:avLst/>
+          </a:prstGeom>
+          <a:solidFill>
+            <a:srgbClr val="003DA5"/>
+          </a:solidFill>
+          <a:ln>
+            <a:noFill/>
+          </a:ln>
+        </p:spPr>
+        <p:style>
+          <a:lnRef idx="1">
+            <a:schemeClr val="accent1"/>
+          </a:lnRef>
+          <a:fillRef idx="3">
+            <a:schemeClr val="accent1"/>
+          </a:fillRef>
+          <a:effectRef idx="2">
+            <a:schemeClr val="accent1"/>
+          </a:effectRef>
+          <a:fontRef idx="minor">
+            <a:schemeClr val="lt1"/>
+          </a:fontRef>
+        </p:style>
+        <p:txBody>
+          <a:bodyPr rtlCol="0" anchor="ctr"/>
+          <a:lstStyle/>
+          <a:p>
+            <a:pPr algn="ctr"/>
+          </a:p>
+        </p:txBody>
+      </p:sp>
+      <p:sp>
+        <p:nvSpPr>
+          <p:cNvPr id="3" name="TextBox 2"/>
+          <p:cNvSpPr txBox="1"/>
+          <p:nvPr/>
+        </p:nvSpPr>
+        <p:spPr>
+          <a:xfrm>
+            <a:off x="228600" y="182880"/>
+            <a:ext cx="11430000" cy="320040"/>
+          </a:xfrm>
+          <a:prstGeom prst="rect">
+            <a:avLst/>
+          </a:prstGeom>
+          <a:noFill/>
+        </p:spPr>
+        <p:txBody>
+          <a:bodyPr wrap="square">
+            <a:spAutoFit/>
+          </a:bodyPr>
+          <a:lstStyle/>
+          <a:p>
+            <a:pPr algn="l"/>
+            <a:r>
+              <a:rPr sz="900" b="0" i="0">
+                <a:solidFill>
+                  <a:srgbClr val="556575"/>
+                </a:solidFill>
+                <a:latin typeface="Arial"/>
+              </a:rPr>
+              <a:t>M15 · 4.3 Marktpotenzialanalyse</a:t>
+            </a:r>
+          </a:p>
+        </p:txBody>
+      </p:sp>
+      <p:sp>
+        <p:nvSpPr>
+          <p:cNvPr id="4" name="TextBox 3"/>
+          <p:cNvSpPr txBox="1"/>
+          <p:nvPr/>
+        </p:nvSpPr>
+        <p:spPr>
+          <a:xfrm>
+            <a:off x="365760" y="274320"/>
+            <a:ext cx="11430000" cy="777240"/>
+          </a:xfrm>
+          <a:prstGeom prst="rect">
+            <a:avLst/>
+          </a:prstGeom>
+          <a:noFill/>
+        </p:spPr>
+        <p:txBody>
+          <a:bodyPr wrap="square">
+            <a:spAutoFit/>
+          </a:bodyPr>
+          <a:lstStyle/>
+          <a:p>
+            <a:pPr algn="l"/>
+            <a:r>
+              <a:rPr sz="2200" b="1" i="0">
+                <a:solidFill>
+                  <a:srgbClr val="003DA5"/>
+                </a:solidFill>
+                <a:latin typeface="Arial"/>
+              </a:rPr>
+              <a:t>Wie groß ist mein adressierbarer Markt?</a:t>
+            </a:r>
+          </a:p>
+        </p:txBody>
+      </p:sp>
+      <p:sp>
+        <p:nvSpPr>
+          <p:cNvPr id="5" name="Rectangle 4"/>
+          <p:cNvSpPr/>
+          <p:nvPr/>
+        </p:nvSpPr>
+        <p:spPr>
+          <a:xfrm>
+            <a:off x="365760" y="1005840"/>
+            <a:ext cx="11430000" cy="27432"/>
+          </a:xfrm>
+          <a:prstGeom prst="rect">
+            <a:avLst/>
+          </a:prstGeom>
+          <a:solidFill>
+            <a:srgbClr val="D1D5DB"/>
+          </a:solidFill>
+          <a:ln>
+            <a:noFill/>
+          </a:ln>
+        </p:spPr>
+        <p:style>
+          <a:lnRef idx="1">
+            <a:schemeClr val="accent1"/>
+          </a:lnRef>
+          <a:fillRef idx="3">
+            <a:schemeClr val="accent1"/>
+          </a:fillRef>
+          <a:effectRef idx="2">
+            <a:schemeClr val="accent1"/>
+          </a:effectRef>
+          <a:fontRef idx="minor">
+            <a:schemeClr val="lt1"/>
+          </a:fontRef>
+        </p:style>
+        <p:txBody>
+          <a:bodyPr rtlCol="0" anchor="ctr"/>
+          <a:lstStyle/>
+          <a:p>
+            <a:pPr algn="ctr"/>
+          </a:p>
+        </p:txBody>
+      </p:sp>
+      <p:graphicFrame>
+        <p:nvGraphicFramePr>
+          <p:cNvPr id="6" name="Table 5"/>
+          <p:cNvGraphicFramePr>
+            <a:graphicFrameLocks noGrp="1"/>
+          </p:cNvGraphicFramePr>
+          <p:nvPr/>
+        </p:nvGraphicFramePr>
+        <p:xfrm>
+          <a:off x="365760" y="1143000"/>
+          <a:ext cx="11430000" cy="3328416"/>
+        </p:xfrm>
+        <a:graphic>
+          <a:graphicData uri="http://schemas.openxmlformats.org/drawingml/2006/table">
+            <a:tbl>
+              <a:tblPr firstRow="1" bandRow="1">
+                <a:tableStyleId>{5C22544A-7EE6-4342-B048-85BDC9FD1C3A}</a:tableStyleId>
+              </a:tblPr>
+              <a:tblGrid>
+                <a:gridCol w="5715000"/>
+                <a:gridCol w="5715000"/>
+              </a:tblGrid>
+              <a:tr h="475488">
+                <a:tc>
+                  <a:txBody>
+                    <a:bodyPr wrap="square"/>
+                    <a:lstStyle/>
+                    <a:p>
+                      <a:r>
+                        <a:rPr sz="1100" b="1">
+                          <a:solidFill>
+                            <a:srgbClr val="FFFFFF"/>
+                          </a:solidFill>
+                          <a:latin typeface="Arial"/>
+                        </a:rPr>
+                        <a:t>Quelle</a:t>
+                      </a:r>
+                    </a:p>
+                  </a:txBody>
+                  <a:tcPr>
+                    <a:solidFill>
+                      <a:srgbClr val="003DA5"/>
+                    </a:solidFill>
+                  </a:tcPr>
+                </a:tc>
+                <a:tc>
+                  <a:txBody>
+                    <a:bodyPr wrap="square"/>
+                    <a:lstStyle/>
+                    <a:p>
+                      <a:r>
+                        <a:rPr sz="1100" b="1">
+                          <a:solidFill>
+                            <a:srgbClr val="FFFFFF"/>
+                          </a:solidFill>
+                          <a:latin typeface="Arial"/>
+                        </a:rPr>
+                        <a:t>Information</a:t>
+                      </a:r>
+                    </a:p>
+                  </a:txBody>
+                  <a:tcPr>
+                    <a:solidFill>
+                      <a:srgbClr val="003DA5"/>
+                    </a:solidFill>
+                  </a:tcPr>
+                </a:tc>
+              </a:tr>
+              <a:tr h="475488">
+                <a:tc>
+                  <a:txBody>
+                    <a:bodyPr wrap="square"/>
+                    <a:lstStyle/>
+                    <a:p>
+                      <a:r>
+                        <a:rPr sz="1100" b="0">
+                          <a:solidFill>
+                            <a:srgbClr val="1A1A1A"/>
+                          </a:solidFill>
+                          <a:latin typeface="Arial"/>
+                        </a:rPr>
+                        <a:t>Destatis / Statistisches Landesamt</a:t>
+                      </a:r>
+                    </a:p>
+                  </a:txBody>
+                  <a:tcPr>
+                    <a:solidFill>
+                      <a:srgbClr val="FFFFFF"/>
+                    </a:solidFill>
+                  </a:tcPr>
+                </a:tc>
+                <a:tc>
+                  <a:txBody>
+                    <a:bodyPr wrap="square"/>
+                    <a:lstStyle/>
+                    <a:p>
+                      <a:r>
+                        <a:rPr sz="1100" b="0">
+                          <a:solidFill>
+                            <a:srgbClr val="1A1A1A"/>
+                          </a:solidFill>
+                          <a:latin typeface="Arial"/>
+                        </a:rPr>
+                        <a:t>Unternehmensanzahl nach Branche, Größe, Region</a:t>
+                      </a:r>
+                    </a:p>
+                  </a:txBody>
+                  <a:tcPr>
+                    <a:solidFill>
+                      <a:srgbClr val="FFFFFF"/>
+                    </a:solidFill>
+                  </a:tcPr>
+                </a:tc>
+              </a:tr>
+              <a:tr h="475488">
+                <a:tc>
+                  <a:txBody>
+                    <a:bodyPr wrap="square"/>
+                    <a:lstStyle/>
+                    <a:p>
+                      <a:r>
+                        <a:rPr sz="1100" b="0">
+                          <a:solidFill>
+                            <a:srgbClr val="1A1A1A"/>
+                          </a:solidFill>
+                          <a:latin typeface="Arial"/>
+                        </a:rPr>
+                        <a:t>IHK / HWK Konjunkturbericht</a:t>
+                      </a:r>
+                    </a:p>
+                  </a:txBody>
+                  <a:tcPr>
+                    <a:solidFill>
+                      <a:srgbClr val="F4F6FA"/>
+                    </a:solidFill>
+                  </a:tcPr>
+                </a:tc>
+                <a:tc>
+                  <a:txBody>
+                    <a:bodyPr wrap="square"/>
+                    <a:lstStyle/>
+                    <a:p>
+                      <a:r>
+                        <a:rPr sz="1100" b="0">
+                          <a:solidFill>
+                            <a:srgbClr val="1A1A1A"/>
+                          </a:solidFill>
+                          <a:latin typeface="Arial"/>
+                        </a:rPr>
+                        <a:t>Branchendaten, Investitionsklima, Mitgliederzahlen</a:t>
+                      </a:r>
+                    </a:p>
+                  </a:txBody>
+                  <a:tcPr>
+                    <a:solidFill>
+                      <a:srgbClr val="F4F6FA"/>
+                    </a:solidFill>
+                  </a:tcPr>
+                </a:tc>
+              </a:tr>
+              <a:tr h="475488">
+                <a:tc>
+                  <a:txBody>
+                    <a:bodyPr wrap="square"/>
+                    <a:lstStyle/>
+                    <a:p>
+                      <a:r>
+                        <a:rPr sz="1100" b="0">
+                          <a:solidFill>
+                            <a:srgbClr val="1A1A1A"/>
+                          </a:solidFill>
+                          <a:latin typeface="Arial"/>
+                        </a:rPr>
+                        <a:t>agree CRM-Auswertung</a:t>
+                      </a:r>
+                    </a:p>
+                  </a:txBody>
+                  <a:tcPr>
+                    <a:solidFill>
+                      <a:srgbClr val="FFFFFF"/>
+                    </a:solidFill>
+                  </a:tcPr>
+                </a:tc>
+                <a:tc>
+                  <a:txBody>
+                    <a:bodyPr wrap="square"/>
+                    <a:lstStyle/>
+                    <a:p>
+                      <a:r>
+                        <a:rPr sz="1100" b="0">
+                          <a:solidFill>
+                            <a:srgbClr val="1A1A1A"/>
+                          </a:solidFill>
+                          <a:latin typeface="Arial"/>
+                        </a:rPr>
+                        <a:t>Bestehende Firmenkunden nach Segment – wer fehlt noch?</a:t>
+                      </a:r>
+                    </a:p>
+                  </a:txBody>
+                  <a:tcPr>
+                    <a:solidFill>
+                      <a:srgbClr val="FFFFFF"/>
+                    </a:solidFill>
+                  </a:tcPr>
+                </a:tc>
+              </a:tr>
+              <a:tr h="475488">
+                <a:tc>
+                  <a:txBody>
+                    <a:bodyPr wrap="square"/>
+                    <a:lstStyle/>
+                    <a:p>
+                      <a:r>
+                        <a:rPr sz="1100" b="0">
+                          <a:solidFill>
+                            <a:srgbClr val="1A1A1A"/>
+                          </a:solidFill>
+                          <a:latin typeface="Arial"/>
+                        </a:rPr>
+                        <a:t>BVR Regionalstatistik</a:t>
+                      </a:r>
+                    </a:p>
+                  </a:txBody>
+                  <a:tcPr>
+                    <a:solidFill>
+                      <a:srgbClr val="F4F6FA"/>
+                    </a:solidFill>
+                  </a:tcPr>
+                </a:tc>
+                <a:tc>
+                  <a:txBody>
+                    <a:bodyPr wrap="square"/>
+                    <a:lstStyle/>
+                    <a:p>
+                      <a:r>
+                        <a:rPr sz="1100" b="0">
+                          <a:solidFill>
+                            <a:srgbClr val="1A1A1A"/>
+                          </a:solidFill>
+                          <a:latin typeface="Arial"/>
+                        </a:rPr>
+                        <a:t>Marktanteile und Segmentdaten nach Bundesland/Region (Verbund-Intranet)</a:t>
+                      </a:r>
+                    </a:p>
+                  </a:txBody>
+                  <a:tcPr>
+                    <a:solidFill>
+                      <a:srgbClr val="F4F6FA"/>
+                    </a:solidFill>
+                  </a:tcPr>
+                </a:tc>
+              </a:tr>
+              <a:tr h="475488">
+                <a:tc>
+                  <a:txBody>
+                    <a:bodyPr wrap="square"/>
+                    <a:lstStyle/>
+                    <a:p>
+                      <a:r>
+                        <a:rPr sz="1100" b="0">
+                          <a:solidFill>
+                            <a:srgbClr val="1A1A1A"/>
+                          </a:solidFill>
+                          <a:latin typeface="Arial"/>
+                        </a:rPr>
+                        <a:t>Unternehmensregister</a:t>
+                      </a:r>
+                    </a:p>
+                  </a:txBody>
+                  <a:tcPr>
+                    <a:solidFill>
+                      <a:srgbClr val="FFFFFF"/>
+                    </a:solidFill>
+                  </a:tcPr>
+                </a:tc>
+                <a:tc>
+                  <a:txBody>
+                    <a:bodyPr wrap="square"/>
+                    <a:lstStyle/>
+                    <a:p>
+                      <a:r>
+                        <a:rPr sz="1100" b="0">
+                          <a:solidFill>
+                            <a:srgbClr val="1A1A1A"/>
+                          </a:solidFill>
+                          <a:latin typeface="Arial"/>
+                        </a:rPr>
+                        <a:t>Neugründungen, Inhaberwechsel, Insolvenzaustritte</a:t>
+                      </a:r>
+                    </a:p>
+                  </a:txBody>
+                  <a:tcPr>
+                    <a:solidFill>
+                      <a:srgbClr val="FFFFFF"/>
+                    </a:solidFill>
+                  </a:tcPr>
+                </a:tc>
+              </a:tr>
+              <a:tr h="475488">
+                <a:tc>
+                  <a:txBody>
+                    <a:bodyPr wrap="square"/>
+                    <a:lstStyle/>
+                    <a:p>
+                      <a:r>
+                        <a:rPr sz="1100" b="0">
+                          <a:solidFill>
+                            <a:srgbClr val="1A1A1A"/>
+                          </a:solidFill>
+                          <a:latin typeface="Arial"/>
+                        </a:rPr>
+                        <a:t>Verbandsmitgliederlisten</a:t>
+                      </a:r>
+                    </a:p>
+                  </a:txBody>
+                  <a:tcPr>
+                    <a:solidFill>
+                      <a:srgbClr val="F4F6FA"/>
+                    </a:solidFill>
+                  </a:tcPr>
+                </a:tc>
+                <a:tc>
+                  <a:txBody>
+                    <a:bodyPr wrap="square"/>
+                    <a:lstStyle/>
+                    <a:p>
+                      <a:r>
+                        <a:rPr sz="1100" b="0">
+                          <a:solidFill>
+                            <a:srgbClr val="1A1A1A"/>
+                          </a:solidFill>
+                          <a:latin typeface="Arial"/>
+                        </a:rPr>
+                        <a:t>Zielunternehmen in Branchenverbänden</a:t>
+                      </a:r>
+                    </a:p>
+                  </a:txBody>
+                  <a:tcPr>
+                    <a:solidFill>
+                      <a:srgbClr val="F4F6FA"/>
+                    </a:solidFill>
+                  </a:tcPr>
+                </a:tc>
+              </a:tr>
+            </a:tbl>
+          </a:graphicData>
+        </a:graphic>
+      </p:graphicFrame>
+    </p:spTree>
+  </p:cSld>
+  <p:clrMapOvr>
+    <a:masterClrMapping/>
+  </p:clrMapOvr>
+</p:sld>
+</file>
+
+<file path=ppt/slides/slide11.xml><?xml version="1.0" encoding="utf-8"?>
 <p:sld xmlns:a="http://schemas.openxmlformats.org/drawingml/2006/main" xmlns:p="http://schemas.openxmlformats.org/presentationml/2006/main" xmlns:r="http://schemas.openxmlformats.org/officeDocument/2006/relationships">
   <p:cSld>
     <p:bg>
@@ -3414,8 +3951,8 @@
         </p:nvSpPr>
         <p:spPr>
           <a:xfrm>
-            <a:off x="365760" y="2286000"/>
-            <a:ext cx="11430000" cy="1828800"/>
+            <a:off x="365760" y="2011680"/>
+            <a:ext cx="11430000" cy="2011680"/>
           </a:xfrm>
           <a:prstGeom prst="rect">
             <a:avLst/>
@@ -3430,13 +3967,13 @@
           <a:p>
             <a:pPr algn="l"/>
             <a:r>
-              <a:rPr sz="3600" b="1">
+              <a:rPr sz="3600" b="1" i="0">
                 <a:solidFill>
                   <a:srgbClr val="FFFFFF"/>
                 </a:solidFill>
                 <a:latin typeface="Arial"/>
               </a:rPr>
-              <a:t>Empfehlungsmanagement systematisieren</a:t>
+              <a:t>SWOT im Firmenkundensegment</a:t>
             </a:r>
           </a:p>
         </p:txBody>
@@ -3449,7 +3986,420 @@
 </p:sld>
 </file>
 
-<file path=ppt/slides/slide11.xml><?xml version="1.0" encoding="utf-8"?>
+<file path=ppt/slides/slide12.xml><?xml version="1.0" encoding="utf-8"?>
+<p:sld xmlns:a="http://schemas.openxmlformats.org/drawingml/2006/main" xmlns:p="http://schemas.openxmlformats.org/presentationml/2006/main" xmlns:r="http://schemas.openxmlformats.org/officeDocument/2006/relationships">
+  <p:cSld>
+    <p:bg>
+      <p:bgPr>
+        <a:solidFill>
+          <a:srgbClr val="FFFFFF"/>
+        </a:solidFill>
+        <a:effectLst/>
+      </p:bgPr>
+    </p:bg>
+    <p:spTree>
+      <p:nvGrpSpPr>
+        <p:cNvPr id="1" name=""/>
+        <p:cNvGrpSpPr/>
+        <p:nvPr/>
+      </p:nvGrpSpPr>
+      <p:grpSpPr/>
+      <p:sp>
+        <p:nvSpPr>
+          <p:cNvPr id="2" name="Rectangle 1"/>
+          <p:cNvSpPr/>
+          <p:nvPr/>
+        </p:nvSpPr>
+        <p:spPr>
+          <a:xfrm>
+            <a:off x="0" y="0"/>
+            <a:ext cx="73152" cy="6858000"/>
+          </a:xfrm>
+          <a:prstGeom prst="rect">
+            <a:avLst/>
+          </a:prstGeom>
+          <a:solidFill>
+            <a:srgbClr val="003DA5"/>
+          </a:solidFill>
+          <a:ln>
+            <a:noFill/>
+          </a:ln>
+        </p:spPr>
+        <p:style>
+          <a:lnRef idx="1">
+            <a:schemeClr val="accent1"/>
+          </a:lnRef>
+          <a:fillRef idx="3">
+            <a:schemeClr val="accent1"/>
+          </a:fillRef>
+          <a:effectRef idx="2">
+            <a:schemeClr val="accent1"/>
+          </a:effectRef>
+          <a:fontRef idx="minor">
+            <a:schemeClr val="lt1"/>
+          </a:fontRef>
+        </p:style>
+        <p:txBody>
+          <a:bodyPr rtlCol="0" anchor="ctr"/>
+          <a:lstStyle/>
+          <a:p>
+            <a:pPr algn="ctr"/>
+          </a:p>
+        </p:txBody>
+      </p:sp>
+      <p:sp>
+        <p:nvSpPr>
+          <p:cNvPr id="3" name="TextBox 2"/>
+          <p:cNvSpPr txBox="1"/>
+          <p:nvPr/>
+        </p:nvSpPr>
+        <p:spPr>
+          <a:xfrm>
+            <a:off x="228600" y="182880"/>
+            <a:ext cx="11430000" cy="320040"/>
+          </a:xfrm>
+          <a:prstGeom prst="rect">
+            <a:avLst/>
+          </a:prstGeom>
+          <a:noFill/>
+        </p:spPr>
+        <p:txBody>
+          <a:bodyPr wrap="square">
+            <a:spAutoFit/>
+          </a:bodyPr>
+          <a:lstStyle/>
+          <a:p>
+            <a:pPr algn="l"/>
+            <a:r>
+              <a:rPr sz="900" b="0" i="0">
+                <a:solidFill>
+                  <a:srgbClr val="556575"/>
+                </a:solidFill>
+                <a:latin typeface="Arial"/>
+              </a:rPr>
+              <a:t>M15 · 4.4 Strategische Positionierung: Stärken-Schwächen vs. Wettbewerb</a:t>
+            </a:r>
+          </a:p>
+        </p:txBody>
+      </p:sp>
+      <p:sp>
+        <p:nvSpPr>
+          <p:cNvPr id="4" name="TextBox 3"/>
+          <p:cNvSpPr txBox="1"/>
+          <p:nvPr/>
+        </p:nvSpPr>
+        <p:spPr>
+          <a:xfrm>
+            <a:off x="365760" y="274320"/>
+            <a:ext cx="11430000" cy="777240"/>
+          </a:xfrm>
+          <a:prstGeom prst="rect">
+            <a:avLst/>
+          </a:prstGeom>
+          <a:noFill/>
+        </p:spPr>
+        <p:txBody>
+          <a:bodyPr wrap="square">
+            <a:spAutoFit/>
+          </a:bodyPr>
+          <a:lstStyle/>
+          <a:p>
+            <a:pPr algn="l"/>
+            <a:r>
+              <a:rPr sz="2200" b="1" i="0">
+                <a:solidFill>
+                  <a:srgbClr val="003DA5"/>
+                </a:solidFill>
+                <a:latin typeface="Arial"/>
+              </a:rPr>
+              <a:t>SWOT im Firmenkundensegment</a:t>
+            </a:r>
+          </a:p>
+        </p:txBody>
+      </p:sp>
+      <p:sp>
+        <p:nvSpPr>
+          <p:cNvPr id="5" name="Rectangle 4"/>
+          <p:cNvSpPr/>
+          <p:nvPr/>
+        </p:nvSpPr>
+        <p:spPr>
+          <a:xfrm>
+            <a:off x="365760" y="1005840"/>
+            <a:ext cx="11430000" cy="27432"/>
+          </a:xfrm>
+          <a:prstGeom prst="rect">
+            <a:avLst/>
+          </a:prstGeom>
+          <a:solidFill>
+            <a:srgbClr val="D1D5DB"/>
+          </a:solidFill>
+          <a:ln>
+            <a:noFill/>
+          </a:ln>
+        </p:spPr>
+        <p:style>
+          <a:lnRef idx="1">
+            <a:schemeClr val="accent1"/>
+          </a:lnRef>
+          <a:fillRef idx="3">
+            <a:schemeClr val="accent1"/>
+          </a:fillRef>
+          <a:effectRef idx="2">
+            <a:schemeClr val="accent1"/>
+          </a:effectRef>
+          <a:fontRef idx="minor">
+            <a:schemeClr val="lt1"/>
+          </a:fontRef>
+        </p:style>
+        <p:txBody>
+          <a:bodyPr rtlCol="0" anchor="ctr"/>
+          <a:lstStyle/>
+          <a:p>
+            <a:pPr algn="ctr"/>
+          </a:p>
+        </p:txBody>
+      </p:sp>
+      <p:graphicFrame>
+        <p:nvGraphicFramePr>
+          <p:cNvPr id="6" name="Table 5"/>
+          <p:cNvGraphicFramePr>
+            <a:graphicFrameLocks noGrp="1"/>
+          </p:cNvGraphicFramePr>
+          <p:nvPr/>
+        </p:nvGraphicFramePr>
+        <p:xfrm>
+          <a:off x="365760" y="1143000"/>
+          <a:ext cx="11430000" cy="1426464"/>
+        </p:xfrm>
+        <a:graphic>
+          <a:graphicData uri="http://schemas.openxmlformats.org/drawingml/2006/table">
+            <a:tbl>
+              <a:tblPr firstRow="1" bandRow="1">
+                <a:tableStyleId>{5C22544A-7EE6-4342-B048-85BDC9FD1C3A}</a:tableStyleId>
+              </a:tblPr>
+              <a:tblGrid>
+                <a:gridCol w="3810000"/>
+                <a:gridCol w="3810000"/>
+                <a:gridCol w="3810000"/>
+              </a:tblGrid>
+              <a:tr h="475488">
+                <a:tc>
+                  <a:txBody>
+                    <a:bodyPr wrap="square"/>
+                    <a:lstStyle/>
+                    <a:p>
+                      <a:r>
+                        <a:rPr sz="1100" b="1">
+                          <a:solidFill>
+                            <a:srgbClr val="FFFFFF"/>
+                          </a:solidFill>
+                          <a:latin typeface="Arial"/>
+                        </a:rPr>
+                        <a:t/>
+                      </a:r>
+                    </a:p>
+                  </a:txBody>
+                  <a:tcPr>
+                    <a:solidFill>
+                      <a:srgbClr val="003DA5"/>
+                    </a:solidFill>
+                  </a:tcPr>
+                </a:tc>
+                <a:tc>
+                  <a:txBody>
+                    <a:bodyPr wrap="square"/>
+                    <a:lstStyle/>
+                    <a:p>
+                      <a:r>
+                        <a:rPr sz="1100" b="1">
+                          <a:solidFill>
+                            <a:srgbClr val="FFFFFF"/>
+                          </a:solidFill>
+                          <a:latin typeface="Arial"/>
+                        </a:rPr>
+                        <a:t>Intern</a:t>
+                      </a:r>
+                    </a:p>
+                  </a:txBody>
+                  <a:tcPr>
+                    <a:solidFill>
+                      <a:srgbClr val="003DA5"/>
+                    </a:solidFill>
+                  </a:tcPr>
+                </a:tc>
+                <a:tc>
+                  <a:txBody>
+                    <a:bodyPr wrap="square"/>
+                    <a:lstStyle/>
+                    <a:p>
+                      <a:r>
+                        <a:rPr sz="1100" b="1">
+                          <a:solidFill>
+                            <a:srgbClr val="FFFFFF"/>
+                          </a:solidFill>
+                          <a:latin typeface="Arial"/>
+                        </a:rPr>
+                        <a:t>Extern</a:t>
+                      </a:r>
+                    </a:p>
+                  </a:txBody>
+                  <a:tcPr>
+                    <a:solidFill>
+                      <a:srgbClr val="003DA5"/>
+                    </a:solidFill>
+                  </a:tcPr>
+                </a:tc>
+              </a:tr>
+              <a:tr h="475488">
+                <a:tc>
+                  <a:txBody>
+                    <a:bodyPr wrap="square"/>
+                    <a:lstStyle/>
+                    <a:p>
+                      <a:r>
+                        <a:rPr sz="1100" b="0">
+                          <a:solidFill>
+                            <a:srgbClr val="1A1A1A"/>
+                          </a:solidFill>
+                          <a:latin typeface="Arial"/>
+                        </a:rPr>
+                        <a:t>Positiv</a:t>
+                      </a:r>
+                    </a:p>
+                  </a:txBody>
+                  <a:tcPr>
+                    <a:solidFill>
+                      <a:srgbClr val="FFFFFF"/>
+                    </a:solidFill>
+                  </a:tcPr>
+                </a:tc>
+                <a:tc>
+                  <a:txBody>
+                    <a:bodyPr wrap="square"/>
+                    <a:lstStyle/>
+                    <a:p>
+                      <a:r>
+                        <a:rPr sz="1100" b="0">
+                          <a:solidFill>
+                            <a:srgbClr val="1A1A1A"/>
+                          </a:solidFill>
+                          <a:latin typeface="Arial"/>
+                        </a:rPr>
+                        <a:t>Stärken: Regionalpräsenz, Verbundpartner-Breite, Kundennähe, Entscheidungsschnelligkeit</a:t>
+                      </a:r>
+                    </a:p>
+                  </a:txBody>
+                  <a:tcPr>
+                    <a:solidFill>
+                      <a:srgbClr val="FFFFFF"/>
+                    </a:solidFill>
+                  </a:tcPr>
+                </a:tc>
+                <a:tc>
+                  <a:txBody>
+                    <a:bodyPr wrap="square"/>
+                    <a:lstStyle/>
+                    <a:p>
+                      <a:r>
+                        <a:rPr sz="1100" b="0">
+                          <a:solidFill>
+                            <a:srgbClr val="1A1A1A"/>
+                          </a:solidFill>
+                          <a:latin typeface="Arial"/>
+                        </a:rPr>
+                        <a:t>Chancen: Digitalisierungsbedarf Mittelstand, Nachfolgewelle, Transformationsfinanzierungen</a:t>
+                      </a:r>
+                    </a:p>
+                  </a:txBody>
+                  <a:tcPr>
+                    <a:solidFill>
+                      <a:srgbClr val="FFFFFF"/>
+                    </a:solidFill>
+                  </a:tcPr>
+                </a:tc>
+              </a:tr>
+              <a:tr h="475488">
+                <a:tc>
+                  <a:txBody>
+                    <a:bodyPr wrap="square"/>
+                    <a:lstStyle/>
+                    <a:p>
+                      <a:r>
+                        <a:rPr sz="1100" b="0">
+                          <a:solidFill>
+                            <a:srgbClr val="1A1A1A"/>
+                          </a:solidFill>
+                          <a:latin typeface="Arial"/>
+                        </a:rPr>
+                        <a:t>Negativ</a:t>
+                      </a:r>
+                    </a:p>
+                  </a:txBody>
+                  <a:tcPr>
+                    <a:solidFill>
+                      <a:srgbClr val="F4F6FA"/>
+                    </a:solidFill>
+                  </a:tcPr>
+                </a:tc>
+                <a:tc>
+                  <a:txBody>
+                    <a:bodyPr wrap="square"/>
+                    <a:lstStyle/>
+                    <a:p>
+                      <a:r>
+                        <a:rPr sz="1100" b="0">
+                          <a:solidFill>
+                            <a:srgbClr val="1A1A1A"/>
+                          </a:solidFill>
+                          <a:latin typeface="Arial"/>
+                        </a:rPr>
+                        <a:t>Schwächen: Teils geringere Produkttiefe als Großbanken, begrenzte Spezialisten-Ressourcen</a:t>
+                      </a:r>
+                    </a:p>
+                  </a:txBody>
+                  <a:tcPr>
+                    <a:solidFill>
+                      <a:srgbClr val="F4F6FA"/>
+                    </a:solidFill>
+                  </a:tcPr>
+                </a:tc>
+                <a:tc>
+                  <a:txBody>
+                    <a:bodyPr wrap="square"/>
+                    <a:lstStyle/>
+                    <a:p>
+                      <a:r>
+                        <a:rPr sz="1100" b="0">
+                          <a:solidFill>
+                            <a:srgbClr val="1A1A1A"/>
+                          </a:solidFill>
+                          <a:latin typeface="Arial"/>
+                        </a:rPr>
+                        <a:t>Risiken: Direktbanken, Fintechs, überregionale Spezialfinanzierer</a:t>
+                      </a:r>
+                    </a:p>
+                  </a:txBody>
+                  <a:tcPr>
+                    <a:solidFill>
+                      <a:srgbClr val="F4F6FA"/>
+                    </a:solidFill>
+                  </a:tcPr>
+                </a:tc>
+              </a:tr>
+            </a:tbl>
+          </a:graphicData>
+        </a:graphic>
+      </p:graphicFrame>
+    </p:spTree>
+  </p:cSld>
+  <p:clrMapOvr>
+    <a:masterClrMapping/>
+  </p:clrMapOvr>
+</p:sld>
+</file>
+
+<file path=ppt/slides/slide13.xml><?xml version="1.0" encoding="utf-8"?>
 <p:sld xmlns:a="http://schemas.openxmlformats.org/drawingml/2006/main" xmlns:p="http://schemas.openxmlformats.org/presentationml/2006/main" xmlns:r="http://schemas.openxmlformats.org/officeDocument/2006/relationships">
   <p:cSld>
     <p:bg>
@@ -3518,8 +4468,8 @@
         </p:nvSpPr>
         <p:spPr>
           <a:xfrm>
-            <a:off x="365760" y="2286000"/>
-            <a:ext cx="11430000" cy="1828800"/>
+            <a:off x="365760" y="2011680"/>
+            <a:ext cx="11430000" cy="2011680"/>
           </a:xfrm>
           <a:prstGeom prst="rect">
             <a:avLst/>
@@ -3534,13 +4484,13 @@
           <a:p>
             <a:pPr algn="l"/>
             <a:r>
-              <a:rPr sz="3600" b="1">
+              <a:rPr sz="3600" b="1" i="0">
                 <a:solidFill>
                   <a:srgbClr val="FFFFFF"/>
                 </a:solidFill>
                 <a:latin typeface="Arial"/>
               </a:rPr>
-              <a:t>Arbeitsblatt A: Segmentpriorisierung – Scoring</a:t>
+              <a:t>Wertversprechen formulieren</a:t>
             </a:r>
           </a:p>
         </p:txBody>
@@ -3553,7 +4503,314 @@
 </p:sld>
 </file>
 
-<file path=ppt/slides/slide12.xml><?xml version="1.0" encoding="utf-8"?>
+<file path=ppt/slides/slide14.xml><?xml version="1.0" encoding="utf-8"?>
+<p:sld xmlns:a="http://schemas.openxmlformats.org/drawingml/2006/main" xmlns:p="http://schemas.openxmlformats.org/presentationml/2006/main" xmlns:r="http://schemas.openxmlformats.org/officeDocument/2006/relationships">
+  <p:cSld>
+    <p:bg>
+      <p:bgPr>
+        <a:solidFill>
+          <a:srgbClr val="FFFFFF"/>
+        </a:solidFill>
+        <a:effectLst/>
+      </p:bgPr>
+    </p:bg>
+    <p:spTree>
+      <p:nvGrpSpPr>
+        <p:cNvPr id="1" name=""/>
+        <p:cNvGrpSpPr/>
+        <p:nvPr/>
+      </p:nvGrpSpPr>
+      <p:grpSpPr/>
+      <p:sp>
+        <p:nvSpPr>
+          <p:cNvPr id="2" name="Rectangle 1"/>
+          <p:cNvSpPr/>
+          <p:nvPr/>
+        </p:nvSpPr>
+        <p:spPr>
+          <a:xfrm>
+            <a:off x="0" y="0"/>
+            <a:ext cx="73152" cy="6858000"/>
+          </a:xfrm>
+          <a:prstGeom prst="rect">
+            <a:avLst/>
+          </a:prstGeom>
+          <a:solidFill>
+            <a:srgbClr val="003DA5"/>
+          </a:solidFill>
+          <a:ln>
+            <a:noFill/>
+          </a:ln>
+        </p:spPr>
+        <p:style>
+          <a:lnRef idx="1">
+            <a:schemeClr val="accent1"/>
+          </a:lnRef>
+          <a:fillRef idx="3">
+            <a:schemeClr val="accent1"/>
+          </a:fillRef>
+          <a:effectRef idx="2">
+            <a:schemeClr val="accent1"/>
+          </a:effectRef>
+          <a:fontRef idx="minor">
+            <a:schemeClr val="lt1"/>
+          </a:fontRef>
+        </p:style>
+        <p:txBody>
+          <a:bodyPr rtlCol="0" anchor="ctr"/>
+          <a:lstStyle/>
+          <a:p>
+            <a:pPr algn="ctr"/>
+          </a:p>
+        </p:txBody>
+      </p:sp>
+      <p:sp>
+        <p:nvSpPr>
+          <p:cNvPr id="3" name="TextBox 2"/>
+          <p:cNvSpPr txBox="1"/>
+          <p:nvPr/>
+        </p:nvSpPr>
+        <p:spPr>
+          <a:xfrm>
+            <a:off x="228600" y="182880"/>
+            <a:ext cx="11430000" cy="320040"/>
+          </a:xfrm>
+          <a:prstGeom prst="rect">
+            <a:avLst/>
+          </a:prstGeom>
+          <a:noFill/>
+        </p:spPr>
+        <p:txBody>
+          <a:bodyPr wrap="square">
+            <a:spAutoFit/>
+          </a:bodyPr>
+          <a:lstStyle/>
+          <a:p>
+            <a:pPr algn="l"/>
+            <a:r>
+              <a:rPr sz="900" b="0" i="0">
+                <a:solidFill>
+                  <a:srgbClr val="556575"/>
+                </a:solidFill>
+                <a:latin typeface="Arial"/>
+              </a:rPr>
+              <a:t>M15 · 4.4 Strategische Positionierung: Stärken-Schwächen vs. Wettbewerb</a:t>
+            </a:r>
+          </a:p>
+        </p:txBody>
+      </p:sp>
+      <p:sp>
+        <p:nvSpPr>
+          <p:cNvPr id="4" name="TextBox 3"/>
+          <p:cNvSpPr txBox="1"/>
+          <p:nvPr/>
+        </p:nvSpPr>
+        <p:spPr>
+          <a:xfrm>
+            <a:off x="365760" y="274320"/>
+            <a:ext cx="11430000" cy="777240"/>
+          </a:xfrm>
+          <a:prstGeom prst="rect">
+            <a:avLst/>
+          </a:prstGeom>
+          <a:noFill/>
+        </p:spPr>
+        <p:txBody>
+          <a:bodyPr wrap="square">
+            <a:spAutoFit/>
+          </a:bodyPr>
+          <a:lstStyle/>
+          <a:p>
+            <a:pPr algn="l"/>
+            <a:r>
+              <a:rPr sz="2200" b="1" i="0">
+                <a:solidFill>
+                  <a:srgbClr val="003DA5"/>
+                </a:solidFill>
+                <a:latin typeface="Arial"/>
+              </a:rPr>
+              <a:t>Wertversprechen formulieren</a:t>
+            </a:r>
+          </a:p>
+        </p:txBody>
+      </p:sp>
+      <p:sp>
+        <p:nvSpPr>
+          <p:cNvPr id="5" name="Rectangle 4"/>
+          <p:cNvSpPr/>
+          <p:nvPr/>
+        </p:nvSpPr>
+        <p:spPr>
+          <a:xfrm>
+            <a:off x="365760" y="1005840"/>
+            <a:ext cx="11430000" cy="27432"/>
+          </a:xfrm>
+          <a:prstGeom prst="rect">
+            <a:avLst/>
+          </a:prstGeom>
+          <a:solidFill>
+            <a:srgbClr val="D1D5DB"/>
+          </a:solidFill>
+          <a:ln>
+            <a:noFill/>
+          </a:ln>
+        </p:spPr>
+        <p:style>
+          <a:lnRef idx="1">
+            <a:schemeClr val="accent1"/>
+          </a:lnRef>
+          <a:fillRef idx="3">
+            <a:schemeClr val="accent1"/>
+          </a:fillRef>
+          <a:effectRef idx="2">
+            <a:schemeClr val="accent1"/>
+          </a:effectRef>
+          <a:fontRef idx="minor">
+            <a:schemeClr val="lt1"/>
+          </a:fontRef>
+        </p:style>
+        <p:txBody>
+          <a:bodyPr rtlCol="0" anchor="ctr"/>
+          <a:lstStyle/>
+          <a:p>
+            <a:pPr algn="ctr"/>
+          </a:p>
+        </p:txBody>
+      </p:sp>
+      <p:sp>
+        <p:nvSpPr>
+          <p:cNvPr id="6" name="TextBox 5"/>
+          <p:cNvSpPr txBox="1"/>
+          <p:nvPr/>
+        </p:nvSpPr>
+        <p:spPr>
+          <a:xfrm>
+            <a:off x="365760" y="1143000"/>
+            <a:ext cx="11430000" cy="5212080"/>
+          </a:xfrm>
+          <a:prstGeom prst="rect">
+            <a:avLst/>
+          </a:prstGeom>
+          <a:noFill/>
+        </p:spPr>
+        <p:txBody>
+          <a:bodyPr wrap="square">
+            <a:spAutoFit/>
+          </a:bodyPr>
+          <a:lstStyle/>
+          <a:p>
+            <a:pPr>
+              <a:spcBef>
+                <a:spcPts val="500"/>
+              </a:spcBef>
+            </a:pPr>
+            <a:r>
+              <a:rPr sz="1500">
+                <a:solidFill>
+                  <a:srgbClr val="003DA5"/>
+                </a:solidFill>
+                <a:latin typeface="Arial"/>
+              </a:rPr>
+              <a:t>▪  </a:t>
+            </a:r>
+            <a:r>
+              <a:rPr sz="1700" b="1">
+                <a:solidFill>
+                  <a:srgbClr val="003DA5"/>
+                </a:solidFill>
+                <a:latin typeface="Arial"/>
+              </a:rPr>
+              <a:t>Spezifisch: </a:t>
+            </a:r>
+            <a:r>
+              <a:rPr sz="1700">
+                <a:solidFill>
+                  <a:srgbClr val="1A1A1A"/>
+                </a:solidFill>
+                <a:latin typeface="Arial"/>
+              </a:rPr>
+              <a:t>(nicht „wir sind die beste Bank"): „Für Handwerksbetriebe in der Region sind wir der Partner, der Finanzierungsentscheidungen in 48 Stunden trifft." -</a:t>
+            </a:r>
+          </a:p>
+          <a:p>
+            <a:pPr>
+              <a:spcBef>
+                <a:spcPts val="500"/>
+              </a:spcBef>
+            </a:pPr>
+            <a:r>
+              <a:rPr sz="1500">
+                <a:solidFill>
+                  <a:srgbClr val="003DA5"/>
+                </a:solidFill>
+                <a:latin typeface="Arial"/>
+              </a:rPr>
+              <a:t>▪  </a:t>
+            </a:r>
+            <a:r>
+              <a:rPr sz="1700" b="1">
+                <a:solidFill>
+                  <a:srgbClr val="003DA5"/>
+                </a:solidFill>
+                <a:latin typeface="Arial"/>
+              </a:rPr>
+              <a:t>Belegbar: </a:t>
+            </a:r>
+            <a:r>
+              <a:rPr sz="1700">
+                <a:solidFill>
+                  <a:srgbClr val="1A1A1A"/>
+                </a:solidFill>
+                <a:latin typeface="Arial"/>
+              </a:rPr>
+              <a:t>Konkrete Referenzen, Bearbeitungszeiten, Verbundpartner-Einbindung -</a:t>
+            </a:r>
+          </a:p>
+          <a:p>
+            <a:pPr>
+              <a:spcBef>
+                <a:spcPts val="500"/>
+              </a:spcBef>
+            </a:pPr>
+            <a:r>
+              <a:rPr sz="1500">
+                <a:solidFill>
+                  <a:srgbClr val="003DA5"/>
+                </a:solidFill>
+                <a:latin typeface="Arial"/>
+              </a:rPr>
+              <a:t>▪  </a:t>
+            </a:r>
+            <a:r>
+              <a:rPr sz="1700" b="1">
+                <a:solidFill>
+                  <a:srgbClr val="003DA5"/>
+                </a:solidFill>
+                <a:latin typeface="Arial"/>
+              </a:rPr>
+              <a:t>Differenzierend: </a:t>
+            </a:r>
+            <a:r>
+              <a:rPr sz="1700">
+                <a:solidFill>
+                  <a:srgbClr val="1A1A1A"/>
+                </a:solidFill>
+                <a:latin typeface="Arial"/>
+              </a:rPr>
+              <a:t>Was kann ich, was die Sparkasse oder Commerzbank nicht kann?</a:t>
+            </a:r>
+          </a:p>
+        </p:txBody>
+      </p:sp>
+    </p:spTree>
+  </p:cSld>
+  <p:clrMapOvr>
+    <a:masterClrMapping/>
+  </p:clrMapOvr>
+</p:sld>
+</file>
+
+<file path=ppt/slides/slide15.xml><?xml version="1.0" encoding="utf-8"?>
 <p:sld xmlns:a="http://schemas.openxmlformats.org/drawingml/2006/main" xmlns:p="http://schemas.openxmlformats.org/presentationml/2006/main" xmlns:r="http://schemas.openxmlformats.org/officeDocument/2006/relationships">
   <p:cSld>
     <p:bg>
@@ -3622,8 +4879,8 @@
         </p:nvSpPr>
         <p:spPr>
           <a:xfrm>
-            <a:off x="365760" y="2286000"/>
-            <a:ext cx="11430000" cy="1828800"/>
+            <a:off x="365760" y="2011680"/>
+            <a:ext cx="11430000" cy="2011680"/>
           </a:xfrm>
           <a:prstGeom prst="rect">
             <a:avLst/>
@@ -3638,13 +4895,13 @@
           <a:p>
             <a:pPr algn="l"/>
             <a:r>
-              <a:rPr sz="3600" b="1">
+              <a:rPr sz="3600" b="1" i="0">
                 <a:solidFill>
                   <a:srgbClr val="FFFFFF"/>
                 </a:solidFill>
                 <a:latin typeface="Arial"/>
               </a:rPr>
-              <a:t>Arbeitsblatt B: Marktbearbeitungs-Jahresplan</a:t>
+              <a:t>Welche Kanäle funktionieren wirklich?</a:t>
             </a:r>
           </a:p>
         </p:txBody>
@@ -3657,7 +4914,1114 @@
 </p:sld>
 </file>
 
-<file path=ppt/slides/slide13.xml><?xml version="1.0" encoding="utf-8"?>
+<file path=ppt/slides/slide16.xml><?xml version="1.0" encoding="utf-8"?>
+<p:sld xmlns:a="http://schemas.openxmlformats.org/drawingml/2006/main" xmlns:p="http://schemas.openxmlformats.org/presentationml/2006/main" xmlns:r="http://schemas.openxmlformats.org/officeDocument/2006/relationships">
+  <p:cSld>
+    <p:bg>
+      <p:bgPr>
+        <a:solidFill>
+          <a:srgbClr val="FFFFFF"/>
+        </a:solidFill>
+        <a:effectLst/>
+      </p:bgPr>
+    </p:bg>
+    <p:spTree>
+      <p:nvGrpSpPr>
+        <p:cNvPr id="1" name=""/>
+        <p:cNvGrpSpPr/>
+        <p:nvPr/>
+      </p:nvGrpSpPr>
+      <p:grpSpPr/>
+      <p:sp>
+        <p:nvSpPr>
+          <p:cNvPr id="2" name="Rectangle 1"/>
+          <p:cNvSpPr/>
+          <p:nvPr/>
+        </p:nvSpPr>
+        <p:spPr>
+          <a:xfrm>
+            <a:off x="0" y="0"/>
+            <a:ext cx="73152" cy="6858000"/>
+          </a:xfrm>
+          <a:prstGeom prst="rect">
+            <a:avLst/>
+          </a:prstGeom>
+          <a:solidFill>
+            <a:srgbClr val="003DA5"/>
+          </a:solidFill>
+          <a:ln>
+            <a:noFill/>
+          </a:ln>
+        </p:spPr>
+        <p:style>
+          <a:lnRef idx="1">
+            <a:schemeClr val="accent1"/>
+          </a:lnRef>
+          <a:fillRef idx="3">
+            <a:schemeClr val="accent1"/>
+          </a:fillRef>
+          <a:effectRef idx="2">
+            <a:schemeClr val="accent1"/>
+          </a:effectRef>
+          <a:fontRef idx="minor">
+            <a:schemeClr val="lt1"/>
+          </a:fontRef>
+        </p:style>
+        <p:txBody>
+          <a:bodyPr rtlCol="0" anchor="ctr"/>
+          <a:lstStyle/>
+          <a:p>
+            <a:pPr algn="ctr"/>
+          </a:p>
+        </p:txBody>
+      </p:sp>
+      <p:sp>
+        <p:nvSpPr>
+          <p:cNvPr id="3" name="TextBox 2"/>
+          <p:cNvSpPr txBox="1"/>
+          <p:nvPr/>
+        </p:nvSpPr>
+        <p:spPr>
+          <a:xfrm>
+            <a:off x="228600" y="182880"/>
+            <a:ext cx="11430000" cy="320040"/>
+          </a:xfrm>
+          <a:prstGeom prst="rect">
+            <a:avLst/>
+          </a:prstGeom>
+          <a:noFill/>
+        </p:spPr>
+        <p:txBody>
+          <a:bodyPr wrap="square">
+            <a:spAutoFit/>
+          </a:bodyPr>
+          <a:lstStyle/>
+          <a:p>
+            <a:pPr algn="l"/>
+            <a:r>
+              <a:rPr sz="900" b="0" i="0">
+                <a:solidFill>
+                  <a:srgbClr val="556575"/>
+                </a:solidFill>
+                <a:latin typeface="Arial"/>
+              </a:rPr>
+              <a:t>M15 · 4.5 Neukundenansprache: Kanäle und Maßnahmen</a:t>
+            </a:r>
+          </a:p>
+        </p:txBody>
+      </p:sp>
+      <p:sp>
+        <p:nvSpPr>
+          <p:cNvPr id="4" name="TextBox 3"/>
+          <p:cNvSpPr txBox="1"/>
+          <p:nvPr/>
+        </p:nvSpPr>
+        <p:spPr>
+          <a:xfrm>
+            <a:off x="365760" y="274320"/>
+            <a:ext cx="11430000" cy="777240"/>
+          </a:xfrm>
+          <a:prstGeom prst="rect">
+            <a:avLst/>
+          </a:prstGeom>
+          <a:noFill/>
+        </p:spPr>
+        <p:txBody>
+          <a:bodyPr wrap="square">
+            <a:spAutoFit/>
+          </a:bodyPr>
+          <a:lstStyle/>
+          <a:p>
+            <a:pPr algn="l"/>
+            <a:r>
+              <a:rPr sz="2200" b="1" i="0">
+                <a:solidFill>
+                  <a:srgbClr val="003DA5"/>
+                </a:solidFill>
+                <a:latin typeface="Arial"/>
+              </a:rPr>
+              <a:t>Welche Kanäle funktionieren wirklich?</a:t>
+            </a:r>
+          </a:p>
+        </p:txBody>
+      </p:sp>
+      <p:sp>
+        <p:nvSpPr>
+          <p:cNvPr id="5" name="Rectangle 4"/>
+          <p:cNvSpPr/>
+          <p:nvPr/>
+        </p:nvSpPr>
+        <p:spPr>
+          <a:xfrm>
+            <a:off x="365760" y="1005840"/>
+            <a:ext cx="11430000" cy="27432"/>
+          </a:xfrm>
+          <a:prstGeom prst="rect">
+            <a:avLst/>
+          </a:prstGeom>
+          <a:solidFill>
+            <a:srgbClr val="D1D5DB"/>
+          </a:solidFill>
+          <a:ln>
+            <a:noFill/>
+          </a:ln>
+        </p:spPr>
+        <p:style>
+          <a:lnRef idx="1">
+            <a:schemeClr val="accent1"/>
+          </a:lnRef>
+          <a:fillRef idx="3">
+            <a:schemeClr val="accent1"/>
+          </a:fillRef>
+          <a:effectRef idx="2">
+            <a:schemeClr val="accent1"/>
+          </a:effectRef>
+          <a:fontRef idx="minor">
+            <a:schemeClr val="lt1"/>
+          </a:fontRef>
+        </p:style>
+        <p:txBody>
+          <a:bodyPr rtlCol="0" anchor="ctr"/>
+          <a:lstStyle/>
+          <a:p>
+            <a:pPr algn="ctr"/>
+          </a:p>
+        </p:txBody>
+      </p:sp>
+      <p:graphicFrame>
+        <p:nvGraphicFramePr>
+          <p:cNvPr id="6" name="Table 5"/>
+          <p:cNvGraphicFramePr>
+            <a:graphicFrameLocks noGrp="1"/>
+          </p:cNvGraphicFramePr>
+          <p:nvPr/>
+        </p:nvGraphicFramePr>
+        <p:xfrm>
+          <a:off x="365760" y="1143000"/>
+          <a:ext cx="11430000" cy="3803904"/>
+        </p:xfrm>
+        <a:graphic>
+          <a:graphicData uri="http://schemas.openxmlformats.org/drawingml/2006/table">
+            <a:tbl>
+              <a:tblPr firstRow="1" bandRow="1">
+                <a:tableStyleId>{5C22544A-7EE6-4342-B048-85BDC9FD1C3A}</a:tableStyleId>
+              </a:tblPr>
+              <a:tblGrid>
+                <a:gridCol w="2286000"/>
+                <a:gridCol w="2286000"/>
+                <a:gridCol w="2286000"/>
+                <a:gridCol w="2286000"/>
+                <a:gridCol w="2286000"/>
+              </a:tblGrid>
+              <a:tr h="475488">
+                <a:tc>
+                  <a:txBody>
+                    <a:bodyPr wrap="square"/>
+                    <a:lstStyle/>
+                    <a:p>
+                      <a:r>
+                        <a:rPr sz="1100" b="1">
+                          <a:solidFill>
+                            <a:srgbClr val="FFFFFF"/>
+                          </a:solidFill>
+                          <a:latin typeface="Arial"/>
+                        </a:rPr>
+                        <a:t>Kanal</a:t>
+                      </a:r>
+                    </a:p>
+                  </a:txBody>
+                  <a:tcPr>
+                    <a:solidFill>
+                      <a:srgbClr val="003DA5"/>
+                    </a:solidFill>
+                  </a:tcPr>
+                </a:tc>
+                <a:tc>
+                  <a:txBody>
+                    <a:bodyPr wrap="square"/>
+                    <a:lstStyle/>
+                    <a:p>
+                      <a:r>
+                        <a:rPr sz="1100" b="1">
+                          <a:solidFill>
+                            <a:srgbClr val="FFFFFF"/>
+                          </a:solidFill>
+                          <a:latin typeface="Arial"/>
+                        </a:rPr>
+                        <a:t>Beschreibung</a:t>
+                      </a:r>
+                    </a:p>
+                  </a:txBody>
+                  <a:tcPr>
+                    <a:solidFill>
+                      <a:srgbClr val="003DA5"/>
+                    </a:solidFill>
+                  </a:tcPr>
+                </a:tc>
+                <a:tc>
+                  <a:txBody>
+                    <a:bodyPr wrap="square"/>
+                    <a:lstStyle/>
+                    <a:p>
+                      <a:r>
+                        <a:rPr sz="1100" b="1">
+                          <a:solidFill>
+                            <a:srgbClr val="FFFFFF"/>
+                          </a:solidFill>
+                          <a:latin typeface="Arial"/>
+                        </a:rPr>
+                        <a:t>Typische Konversionsrate</a:t>
+                      </a:r>
+                    </a:p>
+                  </a:txBody>
+                  <a:tcPr>
+                    <a:solidFill>
+                      <a:srgbClr val="003DA5"/>
+                    </a:solidFill>
+                  </a:tcPr>
+                </a:tc>
+                <a:tc>
+                  <a:txBody>
+                    <a:bodyPr wrap="square"/>
+                    <a:lstStyle/>
+                    <a:p>
+                      <a:r>
+                        <a:rPr sz="1100" b="1">
+                          <a:solidFill>
+                            <a:srgbClr val="FFFFFF"/>
+                          </a:solidFill>
+                          <a:latin typeface="Arial"/>
+                        </a:rPr>
+                        <a:t>Stärke</a:t>
+                      </a:r>
+                    </a:p>
+                  </a:txBody>
+                  <a:tcPr>
+                    <a:solidFill>
+                      <a:srgbClr val="003DA5"/>
+                    </a:solidFill>
+                  </a:tcPr>
+                </a:tc>
+                <a:tc>
+                  <a:txBody>
+                    <a:bodyPr wrap="square"/>
+                    <a:lstStyle/>
+                    <a:p>
+                      <a:r>
+                        <a:rPr sz="1100" b="1">
+                          <a:solidFill>
+                            <a:srgbClr val="FFFFFF"/>
+                          </a:solidFill>
+                          <a:latin typeface="Arial"/>
+                        </a:rPr>
+                        <a:t>Aufwand</a:t>
+                      </a:r>
+                    </a:p>
+                  </a:txBody>
+                  <a:tcPr>
+                    <a:solidFill>
+                      <a:srgbClr val="003DA5"/>
+                    </a:solidFill>
+                  </a:tcPr>
+                </a:tc>
+              </a:tr>
+              <a:tr h="475488">
+                <a:tc>
+                  <a:txBody>
+                    <a:bodyPr wrap="square"/>
+                    <a:lstStyle/>
+                    <a:p>
+                      <a:r>
+                        <a:rPr sz="1100" b="0">
+                          <a:solidFill>
+                            <a:srgbClr val="1A1A1A"/>
+                          </a:solidFill>
+                          <a:latin typeface="Arial"/>
+                        </a:rPr>
+                        <a:t>Persönliche Empfehlung (Bestandskunde, StB)</a:t>
+                      </a:r>
+                    </a:p>
+                  </a:txBody>
+                  <a:tcPr>
+                    <a:solidFill>
+                      <a:srgbClr val="FFFFFF"/>
+                    </a:solidFill>
+                  </a:tcPr>
+                </a:tc>
+                <a:tc>
+                  <a:txBody>
+                    <a:bodyPr wrap="square"/>
+                    <a:lstStyle/>
+                    <a:p>
+                      <a:r>
+                        <a:rPr sz="1100" b="0">
+                          <a:solidFill>
+                            <a:srgbClr val="1A1A1A"/>
+                          </a:solidFill>
+                          <a:latin typeface="Arial"/>
+                        </a:rPr>
+                        <a:t>Bestandskunde oder Steuerberater empfiehlt aktiv</a:t>
+                      </a:r>
+                    </a:p>
+                  </a:txBody>
+                  <a:tcPr>
+                    <a:solidFill>
+                      <a:srgbClr val="FFFFFF"/>
+                    </a:solidFill>
+                  </a:tcPr>
+                </a:tc>
+                <a:tc>
+                  <a:txBody>
+                    <a:bodyPr wrap="square"/>
+                    <a:lstStyle/>
+                    <a:p>
+                      <a:r>
+                        <a:rPr sz="1100" b="0">
+                          <a:solidFill>
+                            <a:srgbClr val="1A1A1A"/>
+                          </a:solidFill>
+                          <a:latin typeface="Arial"/>
+                        </a:rPr>
+                        <a:t>20–30 %</a:t>
+                      </a:r>
+                    </a:p>
+                  </a:txBody>
+                  <a:tcPr>
+                    <a:solidFill>
+                      <a:srgbClr val="FFFFFF"/>
+                    </a:solidFill>
+                  </a:tcPr>
+                </a:tc>
+                <a:tc>
+                  <a:txBody>
+                    <a:bodyPr wrap="square"/>
+                    <a:lstStyle/>
+                    <a:p>
+                      <a:r>
+                        <a:rPr sz="1100" b="0">
+                          <a:solidFill>
+                            <a:srgbClr val="1A1A1A"/>
+                          </a:solidFill>
+                          <a:latin typeface="Arial"/>
+                        </a:rPr>
+                        <a:t>Vertrauen bereits vorhanden</a:t>
+                      </a:r>
+                    </a:p>
+                  </a:txBody>
+                  <a:tcPr>
+                    <a:solidFill>
+                      <a:srgbClr val="FFFFFF"/>
+                    </a:solidFill>
+                  </a:tcPr>
+                </a:tc>
+                <a:tc>
+                  <a:txBody>
+                    <a:bodyPr wrap="square"/>
+                    <a:lstStyle/>
+                    <a:p>
+                      <a:r>
+                        <a:rPr sz="1100" b="0">
+                          <a:solidFill>
+                            <a:srgbClr val="1A1A1A"/>
+                          </a:solidFill>
+                          <a:latin typeface="Arial"/>
+                        </a:rPr>
+                        <a:t>Mittel</a:t>
+                      </a:r>
+                    </a:p>
+                  </a:txBody>
+                  <a:tcPr>
+                    <a:solidFill>
+                      <a:srgbClr val="FFFFFF"/>
+                    </a:solidFill>
+                  </a:tcPr>
+                </a:tc>
+              </a:tr>
+              <a:tr h="475488">
+                <a:tc>
+                  <a:txBody>
+                    <a:bodyPr wrap="square"/>
+                    <a:lstStyle/>
+                    <a:p>
+                      <a:r>
+                        <a:rPr sz="1100" b="0">
+                          <a:solidFill>
+                            <a:srgbClr val="1A1A1A"/>
+                          </a:solidFill>
+                          <a:latin typeface="Arial"/>
+                        </a:rPr>
+                        <a:t>IHK / Kammer / Verband</a:t>
+                      </a:r>
+                    </a:p>
+                  </a:txBody>
+                  <a:tcPr>
+                    <a:solidFill>
+                      <a:srgbClr val="F4F6FA"/>
+                    </a:solidFill>
+                  </a:tcPr>
+                </a:tc>
+                <a:tc>
+                  <a:txBody>
+                    <a:bodyPr wrap="square"/>
+                    <a:lstStyle/>
+                    <a:p>
+                      <a:r>
+                        <a:rPr sz="1100" b="0">
+                          <a:solidFill>
+                            <a:srgbClr val="1A1A1A"/>
+                          </a:solidFill>
+                          <a:latin typeface="Arial"/>
+                        </a:rPr>
+                        <a:t>Netzwerkveranstaltungen, Mitgliederlisten, Gemeinschaftsaktionen</a:t>
+                      </a:r>
+                    </a:p>
+                  </a:txBody>
+                  <a:tcPr>
+                    <a:solidFill>
+                      <a:srgbClr val="F4F6FA"/>
+                    </a:solidFill>
+                  </a:tcPr>
+                </a:tc>
+                <a:tc>
+                  <a:txBody>
+                    <a:bodyPr wrap="square"/>
+                    <a:lstStyle/>
+                    <a:p>
+                      <a:r>
+                        <a:rPr sz="1100" b="0">
+                          <a:solidFill>
+                            <a:srgbClr val="1A1A1A"/>
+                          </a:solidFill>
+                          <a:latin typeface="Arial"/>
+                        </a:rPr>
+                        <a:t>10–20 %</a:t>
+                      </a:r>
+                    </a:p>
+                  </a:txBody>
+                  <a:tcPr>
+                    <a:solidFill>
+                      <a:srgbClr val="F4F6FA"/>
+                    </a:solidFill>
+                  </a:tcPr>
+                </a:tc>
+                <a:tc>
+                  <a:txBody>
+                    <a:bodyPr wrap="square"/>
+                    <a:lstStyle/>
+                    <a:p>
+                      <a:r>
+                        <a:rPr sz="1100" b="0">
+                          <a:solidFill>
+                            <a:srgbClr val="1A1A1A"/>
+                          </a:solidFill>
+                          <a:latin typeface="Arial"/>
+                        </a:rPr>
+                        <a:t>Breite Zielgruppe, Glaubwürdigkeit</a:t>
+                      </a:r>
+                    </a:p>
+                  </a:txBody>
+                  <a:tcPr>
+                    <a:solidFill>
+                      <a:srgbClr val="F4F6FA"/>
+                    </a:solidFill>
+                  </a:tcPr>
+                </a:tc>
+                <a:tc>
+                  <a:txBody>
+                    <a:bodyPr wrap="square"/>
+                    <a:lstStyle/>
+                    <a:p>
+                      <a:r>
+                        <a:rPr sz="1100" b="0">
+                          <a:solidFill>
+                            <a:srgbClr val="1A1A1A"/>
+                          </a:solidFill>
+                          <a:latin typeface="Arial"/>
+                        </a:rPr>
+                        <a:t>Hoch</a:t>
+                      </a:r>
+                    </a:p>
+                  </a:txBody>
+                  <a:tcPr>
+                    <a:solidFill>
+                      <a:srgbClr val="F4F6FA"/>
+                    </a:solidFill>
+                  </a:tcPr>
+                </a:tc>
+              </a:tr>
+              <a:tr h="475488">
+                <a:tc>
+                  <a:txBody>
+                    <a:bodyPr wrap="square"/>
+                    <a:lstStyle/>
+                    <a:p>
+                      <a:r>
+                        <a:rPr sz="1100" b="0">
+                          <a:solidFill>
+                            <a:srgbClr val="1A1A1A"/>
+                          </a:solidFill>
+                          <a:latin typeface="Arial"/>
+                        </a:rPr>
+                        <a:t>Messe / Fachveranstaltung</a:t>
+                      </a:r>
+                    </a:p>
+                  </a:txBody>
+                  <a:tcPr>
+                    <a:solidFill>
+                      <a:srgbClr val="FFFFFF"/>
+                    </a:solidFill>
+                  </a:tcPr>
+                </a:tc>
+                <a:tc>
+                  <a:txBody>
+                    <a:bodyPr wrap="square"/>
+                    <a:lstStyle/>
+                    <a:p>
+                      <a:r>
+                        <a:rPr sz="1100" b="0">
+                          <a:solidFill>
+                            <a:srgbClr val="1A1A1A"/>
+                          </a:solidFill>
+                          <a:latin typeface="Arial"/>
+                        </a:rPr>
+                        <a:t>Direkte Ansprache an Branchenveranstaltungen</a:t>
+                      </a:r>
+                    </a:p>
+                  </a:txBody>
+                  <a:tcPr>
+                    <a:solidFill>
+                      <a:srgbClr val="FFFFFF"/>
+                    </a:solidFill>
+                  </a:tcPr>
+                </a:tc>
+                <a:tc>
+                  <a:txBody>
+                    <a:bodyPr wrap="square"/>
+                    <a:lstStyle/>
+                    <a:p>
+                      <a:r>
+                        <a:rPr sz="1100" b="0">
+                          <a:solidFill>
+                            <a:srgbClr val="1A1A1A"/>
+                          </a:solidFill>
+                          <a:latin typeface="Arial"/>
+                        </a:rPr>
+                        <a:t>5–15 %</a:t>
+                      </a:r>
+                    </a:p>
+                  </a:txBody>
+                  <a:tcPr>
+                    <a:solidFill>
+                      <a:srgbClr val="FFFFFF"/>
+                    </a:solidFill>
+                  </a:tcPr>
+                </a:tc>
+                <a:tc>
+                  <a:txBody>
+                    <a:bodyPr wrap="square"/>
+                    <a:lstStyle/>
+                    <a:p>
+                      <a:r>
+                        <a:rPr sz="1100" b="0">
+                          <a:solidFill>
+                            <a:srgbClr val="1A1A1A"/>
+                          </a:solidFill>
+                          <a:latin typeface="Arial"/>
+                        </a:rPr>
+                        <a:t>Direkt und persönlich</a:t>
+                      </a:r>
+                    </a:p>
+                  </a:txBody>
+                  <a:tcPr>
+                    <a:solidFill>
+                      <a:srgbClr val="FFFFFF"/>
+                    </a:solidFill>
+                  </a:tcPr>
+                </a:tc>
+                <a:tc>
+                  <a:txBody>
+                    <a:bodyPr wrap="square"/>
+                    <a:lstStyle/>
+                    <a:p>
+                      <a:r>
+                        <a:rPr sz="1100" b="0">
+                          <a:solidFill>
+                            <a:srgbClr val="1A1A1A"/>
+                          </a:solidFill>
+                          <a:latin typeface="Arial"/>
+                        </a:rPr>
+                        <a:t>Hoch</a:t>
+                      </a:r>
+                    </a:p>
+                  </a:txBody>
+                  <a:tcPr>
+                    <a:solidFill>
+                      <a:srgbClr val="FFFFFF"/>
+                    </a:solidFill>
+                  </a:tcPr>
+                </a:tc>
+              </a:tr>
+              <a:tr h="475488">
+                <a:tc>
+                  <a:txBody>
+                    <a:bodyPr wrap="square"/>
+                    <a:lstStyle/>
+                    <a:p>
+                      <a:r>
+                        <a:rPr sz="1100" b="0">
+                          <a:solidFill>
+                            <a:srgbClr val="1A1A1A"/>
+                          </a:solidFill>
+                          <a:latin typeface="Arial"/>
+                        </a:rPr>
+                        <a:t>Kaltakquise (Telefon/Brief)</a:t>
+                      </a:r>
+                    </a:p>
+                  </a:txBody>
+                  <a:tcPr>
+                    <a:solidFill>
+                      <a:srgbClr val="F4F6FA"/>
+                    </a:solidFill>
+                  </a:tcPr>
+                </a:tc>
+                <a:tc>
+                  <a:txBody>
+                    <a:bodyPr wrap="square"/>
+                    <a:lstStyle/>
+                    <a:p>
+                      <a:r>
+                        <a:rPr sz="1100" b="0">
+                          <a:solidFill>
+                            <a:srgbClr val="1A1A1A"/>
+                          </a:solidFill>
+                          <a:latin typeface="Arial"/>
+                        </a:rPr>
+                        <a:t>Unaufgeforderter Erstkontakt</a:t>
+                      </a:r>
+                    </a:p>
+                  </a:txBody>
+                  <a:tcPr>
+                    <a:solidFill>
+                      <a:srgbClr val="F4F6FA"/>
+                    </a:solidFill>
+                  </a:tcPr>
+                </a:tc>
+                <a:tc>
+                  <a:txBody>
+                    <a:bodyPr wrap="square"/>
+                    <a:lstStyle/>
+                    <a:p>
+                      <a:r>
+                        <a:rPr sz="1100" b="0">
+                          <a:solidFill>
+                            <a:srgbClr val="1A1A1A"/>
+                          </a:solidFill>
+                          <a:latin typeface="Arial"/>
+                        </a:rPr>
+                        <a:t>1–5 %</a:t>
+                      </a:r>
+                    </a:p>
+                  </a:txBody>
+                  <a:tcPr>
+                    <a:solidFill>
+                      <a:srgbClr val="F4F6FA"/>
+                    </a:solidFill>
+                  </a:tcPr>
+                </a:tc>
+                <a:tc>
+                  <a:txBody>
+                    <a:bodyPr wrap="square"/>
+                    <a:lstStyle/>
+                    <a:p>
+                      <a:r>
+                        <a:rPr sz="1100" b="0">
+                          <a:solidFill>
+                            <a:srgbClr val="1A1A1A"/>
+                          </a:solidFill>
+                          <a:latin typeface="Arial"/>
+                        </a:rPr>
+                        <a:t>Skalierbar</a:t>
+                      </a:r>
+                    </a:p>
+                  </a:txBody>
+                  <a:tcPr>
+                    <a:solidFill>
+                      <a:srgbClr val="F4F6FA"/>
+                    </a:solidFill>
+                  </a:tcPr>
+                </a:tc>
+                <a:tc>
+                  <a:txBody>
+                    <a:bodyPr wrap="square"/>
+                    <a:lstStyle/>
+                    <a:p>
+                      <a:r>
+                        <a:rPr sz="1100" b="0">
+                          <a:solidFill>
+                            <a:srgbClr val="1A1A1A"/>
+                          </a:solidFill>
+                          <a:latin typeface="Arial"/>
+                        </a:rPr>
+                        <a:t>Niedrig – ⚠️ rechtl. Grenzen beachten</a:t>
+                      </a:r>
+                    </a:p>
+                  </a:txBody>
+                  <a:tcPr>
+                    <a:solidFill>
+                      <a:srgbClr val="F4F6FA"/>
+                    </a:solidFill>
+                  </a:tcPr>
+                </a:tc>
+              </a:tr>
+              <a:tr h="475488">
+                <a:tc>
+                  <a:txBody>
+                    <a:bodyPr wrap="square"/>
+                    <a:lstStyle/>
+                    <a:p>
+                      <a:r>
+                        <a:rPr sz="1100" b="0">
+                          <a:solidFill>
+                            <a:srgbClr val="1A1A1A"/>
+                          </a:solidFill>
+                          <a:latin typeface="Arial"/>
+                        </a:rPr>
+                        <a:t>Digitale Kampagne (Social, Website)</a:t>
+                      </a:r>
+                    </a:p>
+                  </a:txBody>
+                  <a:tcPr>
+                    <a:solidFill>
+                      <a:srgbClr val="FFFFFF"/>
+                    </a:solidFill>
+                  </a:tcPr>
+                </a:tc>
+                <a:tc>
+                  <a:txBody>
+                    <a:bodyPr wrap="square"/>
+                    <a:lstStyle/>
+                    <a:p>
+                      <a:r>
+                        <a:rPr sz="1100" b="0">
+                          <a:solidFill>
+                            <a:srgbClr val="1A1A1A"/>
+                          </a:solidFill>
+                          <a:latin typeface="Arial"/>
+                        </a:rPr>
+                        <a:t>Online-Präsenz, LinkedIn, Website-Content</a:t>
+                      </a:r>
+                    </a:p>
+                  </a:txBody>
+                  <a:tcPr>
+                    <a:solidFill>
+                      <a:srgbClr val="FFFFFF"/>
+                    </a:solidFill>
+                  </a:tcPr>
+                </a:tc>
+                <a:tc>
+                  <a:txBody>
+                    <a:bodyPr wrap="square"/>
+                    <a:lstStyle/>
+                    <a:p>
+                      <a:r>
+                        <a:rPr sz="1100" b="0">
+                          <a:solidFill>
+                            <a:srgbClr val="1A1A1A"/>
+                          </a:solidFill>
+                          <a:latin typeface="Arial"/>
+                        </a:rPr>
+                        <a:t>1–3 %</a:t>
+                      </a:r>
+                    </a:p>
+                  </a:txBody>
+                  <a:tcPr>
+                    <a:solidFill>
+                      <a:srgbClr val="FFFFFF"/>
+                    </a:solidFill>
+                  </a:tcPr>
+                </a:tc>
+                <a:tc>
+                  <a:txBody>
+                    <a:bodyPr wrap="square"/>
+                    <a:lstStyle/>
+                    <a:p>
+                      <a:r>
+                        <a:rPr sz="1100" b="0">
+                          <a:solidFill>
+                            <a:srgbClr val="1A1A1A"/>
+                          </a:solidFill>
+                          <a:latin typeface="Arial"/>
+                        </a:rPr>
+                        <a:t>Reichweite</a:t>
+                      </a:r>
+                    </a:p>
+                  </a:txBody>
+                  <a:tcPr>
+                    <a:solidFill>
+                      <a:srgbClr val="FFFFFF"/>
+                    </a:solidFill>
+                  </a:tcPr>
+                </a:tc>
+                <a:tc>
+                  <a:txBody>
+                    <a:bodyPr wrap="square"/>
+                    <a:lstStyle/>
+                    <a:p>
+                      <a:r>
+                        <a:rPr sz="1100" b="0">
+                          <a:solidFill>
+                            <a:srgbClr val="1A1A1A"/>
+                          </a:solidFill>
+                          <a:latin typeface="Arial"/>
+                        </a:rPr>
+                        <a:t>Mittel</a:t>
+                      </a:r>
+                    </a:p>
+                  </a:txBody>
+                  <a:tcPr>
+                    <a:solidFill>
+                      <a:srgbClr val="FFFFFF"/>
+                    </a:solidFill>
+                  </a:tcPr>
+                </a:tc>
+              </a:tr>
+              <a:tr h="475488">
+                <a:tc>
+                  <a:txBody>
+                    <a:bodyPr wrap="square"/>
+                    <a:lstStyle/>
+                    <a:p>
+                      <a:r>
+                        <a:rPr sz="1100" b="0">
+                          <a:solidFill>
+                            <a:srgbClr val="1A1A1A"/>
+                          </a:solidFill>
+                          <a:latin typeface="Arial"/>
+                        </a:rPr>
+                        <a:t>Partnervertrieb (Verbundpartner-Empfehlung)</a:t>
+                      </a:r>
+                    </a:p>
+                  </a:txBody>
+                  <a:tcPr>
+                    <a:solidFill>
+                      <a:srgbClr val="F4F6FA"/>
+                    </a:solidFill>
+                  </a:tcPr>
+                </a:tc>
+                <a:tc>
+                  <a:txBody>
+                    <a:bodyPr wrap="square"/>
+                    <a:lstStyle/>
+                    <a:p>
+                      <a:r>
+                        <a:rPr sz="1100" b="0">
+                          <a:solidFill>
+                            <a:srgbClr val="1A1A1A"/>
+                          </a:solidFill>
+                          <a:latin typeface="Arial"/>
+                        </a:rPr>
+                        <a:t>Co-Akquise mit R+V, Union Investment, Schwäbisch Hall</a:t>
+                      </a:r>
+                    </a:p>
+                  </a:txBody>
+                  <a:tcPr>
+                    <a:solidFill>
+                      <a:srgbClr val="F4F6FA"/>
+                    </a:solidFill>
+                  </a:tcPr>
+                </a:tc>
+                <a:tc>
+                  <a:txBody>
+                    <a:bodyPr wrap="square"/>
+                    <a:lstStyle/>
+                    <a:p>
+                      <a:r>
+                        <a:rPr sz="1100" b="0">
+                          <a:solidFill>
+                            <a:srgbClr val="1A1A1A"/>
+                          </a:solidFill>
+                          <a:latin typeface="Arial"/>
+                        </a:rPr>
+                        <a:t>15–25 %</a:t>
+                      </a:r>
+                    </a:p>
+                  </a:txBody>
+                  <a:tcPr>
+                    <a:solidFill>
+                      <a:srgbClr val="F4F6FA"/>
+                    </a:solidFill>
+                  </a:tcPr>
+                </a:tc>
+                <a:tc>
+                  <a:txBody>
+                    <a:bodyPr wrap="square"/>
+                    <a:lstStyle/>
+                    <a:p>
+                      <a:r>
+                        <a:rPr sz="1100" b="0">
+                          <a:solidFill>
+                            <a:srgbClr val="1A1A1A"/>
+                          </a:solidFill>
+                          <a:latin typeface="Arial"/>
+                        </a:rPr>
+                        <a:t>Qualifizierter Lead</a:t>
+                      </a:r>
+                    </a:p>
+                  </a:txBody>
+                  <a:tcPr>
+                    <a:solidFill>
+                      <a:srgbClr val="F4F6FA"/>
+                    </a:solidFill>
+                  </a:tcPr>
+                </a:tc>
+                <a:tc>
+                  <a:txBody>
+                    <a:bodyPr wrap="square"/>
+                    <a:lstStyle/>
+                    <a:p>
+                      <a:r>
+                        <a:rPr sz="1100" b="0">
+                          <a:solidFill>
+                            <a:srgbClr val="1A1A1A"/>
+                          </a:solidFill>
+                          <a:latin typeface="Arial"/>
+                        </a:rPr>
+                        <a:t>Niedrig</a:t>
+                      </a:r>
+                    </a:p>
+                  </a:txBody>
+                  <a:tcPr>
+                    <a:solidFill>
+                      <a:srgbClr val="F4F6FA"/>
+                    </a:solidFill>
+                  </a:tcPr>
+                </a:tc>
+              </a:tr>
+              <a:tr h="475488">
+                <a:tc>
+                  <a:txBody>
+                    <a:bodyPr wrap="square"/>
+                    <a:lstStyle/>
+                    <a:p>
+                      <a:r>
+                        <a:rPr sz="1100" b="0">
+                          <a:solidFill>
+                            <a:srgbClr val="1A1A1A"/>
+                          </a:solidFill>
+                          <a:latin typeface="Arial"/>
+                        </a:rPr>
+                        <a:t>Anlass-Brief / persönliches Schreiben</a:t>
+                      </a:r>
+                    </a:p>
+                  </a:txBody>
+                  <a:tcPr>
+                    <a:solidFill>
+                      <a:srgbClr val="FFFFFF"/>
+                    </a:solidFill>
+                  </a:tcPr>
+                </a:tc>
+                <a:tc>
+                  <a:txBody>
+                    <a:bodyPr wrap="square"/>
+                    <a:lstStyle/>
+                    <a:p>
+                      <a:r>
+                        <a:rPr sz="1100" b="0">
+                          <a:solidFill>
+                            <a:srgbClr val="1A1A1A"/>
+                          </a:solidFill>
+                          <a:latin typeface="Arial"/>
+                        </a:rPr>
+                        <a:t>Persönlicher Brief mit konkretem fachlichen Mehrwert (Branchenentwicklung, Förderprogramm, Veranstaltungseinladung)</a:t>
+                      </a:r>
+                    </a:p>
+                  </a:txBody>
+                  <a:tcPr>
+                    <a:solidFill>
+                      <a:srgbClr val="FFFFFF"/>
+                    </a:solidFill>
+                  </a:tcPr>
+                </a:tc>
+                <a:tc>
+                  <a:txBody>
+                    <a:bodyPr wrap="square"/>
+                    <a:lstStyle/>
+                    <a:p>
+                      <a:r>
+                        <a:rPr sz="1100" b="0">
+                          <a:solidFill>
+                            <a:srgbClr val="1A1A1A"/>
+                          </a:solidFill>
+                          <a:latin typeface="Arial"/>
+                        </a:rPr>
+                        <a:t>~5–10 %</a:t>
+                      </a:r>
+                    </a:p>
+                  </a:txBody>
+                  <a:tcPr>
+                    <a:solidFill>
+                      <a:srgbClr val="FFFFFF"/>
+                    </a:solidFill>
+                  </a:tcPr>
+                </a:tc>
+                <a:tc>
+                  <a:txBody>
+                    <a:bodyPr wrap="square"/>
+                    <a:lstStyle/>
+                    <a:p>
+                      <a:r>
+                        <a:rPr sz="1100" b="0">
+                          <a:solidFill>
+                            <a:srgbClr val="1A1A1A"/>
+                          </a:solidFill>
+                          <a:latin typeface="Arial"/>
+                        </a:rPr>
+                        <a:t>Rechtssicher, persönlich, skalierbar</a:t>
+                      </a:r>
+                    </a:p>
+                  </a:txBody>
+                  <a:tcPr>
+                    <a:solidFill>
+                      <a:srgbClr val="FFFFFF"/>
+                    </a:solidFill>
+                  </a:tcPr>
+                </a:tc>
+                <a:tc>
+                  <a:txBody>
+                    <a:bodyPr wrap="square"/>
+                    <a:lstStyle/>
+                    <a:p>
+                      <a:r>
+                        <a:rPr sz="1100" b="0">
+                          <a:solidFill>
+                            <a:srgbClr val="1A1A1A"/>
+                          </a:solidFill>
+                          <a:latin typeface="Arial"/>
+                        </a:rPr>
+                        <a:t>Mittel</a:t>
+                      </a:r>
+                    </a:p>
+                  </a:txBody>
+                  <a:tcPr>
+                    <a:solidFill>
+                      <a:srgbClr val="FFFFFF"/>
+                    </a:solidFill>
+                  </a:tcPr>
+                </a:tc>
+              </a:tr>
+            </a:tbl>
+          </a:graphicData>
+        </a:graphic>
+      </p:graphicFrame>
+    </p:spTree>
+  </p:cSld>
+  <p:clrMapOvr>
+    <a:masterClrMapping/>
+  </p:clrMapOvr>
+</p:sld>
+</file>
+
+<file path=ppt/slides/slide17.xml><?xml version="1.0" encoding="utf-8"?>
 <p:sld xmlns:a="http://schemas.openxmlformats.org/drawingml/2006/main" xmlns:p="http://schemas.openxmlformats.org/presentationml/2006/main" xmlns:r="http://schemas.openxmlformats.org/officeDocument/2006/relationships">
   <p:cSld>
     <p:bg>
@@ -3726,8 +6090,8 @@
         </p:nvSpPr>
         <p:spPr>
           <a:xfrm>
-            <a:off x="365760" y="2286000"/>
-            <a:ext cx="11430000" cy="1828800"/>
+            <a:off x="365760" y="2011680"/>
+            <a:ext cx="11430000" cy="2011680"/>
           </a:xfrm>
           <a:prstGeom prst="rect">
             <a:avLst/>
@@ -3742,13 +6106,13 @@
           <a:p>
             <a:pPr algn="l"/>
             <a:r>
-              <a:rPr sz="3600" b="1">
+              <a:rPr sz="3600" b="1" i="0">
                 <a:solidFill>
                   <a:srgbClr val="FFFFFF"/>
                 </a:solidFill>
                 <a:latin typeface="Arial"/>
               </a:rPr>
-              <a:t>Strategie</a:t>
+              <a:t>Empfehlungsmanagement systematisieren</a:t>
             </a:r>
           </a:p>
         </p:txBody>
@@ -3761,7 +6125,348 @@
 </p:sld>
 </file>
 
-<file path=ppt/slides/slide14.xml><?xml version="1.0" encoding="utf-8"?>
+<file path=ppt/slides/slide18.xml><?xml version="1.0" encoding="utf-8"?>
+<p:sld xmlns:a="http://schemas.openxmlformats.org/drawingml/2006/main" xmlns:p="http://schemas.openxmlformats.org/presentationml/2006/main" xmlns:r="http://schemas.openxmlformats.org/officeDocument/2006/relationships">
+  <p:cSld>
+    <p:bg>
+      <p:bgPr>
+        <a:solidFill>
+          <a:srgbClr val="FFFFFF"/>
+        </a:solidFill>
+        <a:effectLst/>
+      </p:bgPr>
+    </p:bg>
+    <p:spTree>
+      <p:nvGrpSpPr>
+        <p:cNvPr id="1" name=""/>
+        <p:cNvGrpSpPr/>
+        <p:nvPr/>
+      </p:nvGrpSpPr>
+      <p:grpSpPr/>
+      <p:sp>
+        <p:nvSpPr>
+          <p:cNvPr id="2" name="Rectangle 1"/>
+          <p:cNvSpPr/>
+          <p:nvPr/>
+        </p:nvSpPr>
+        <p:spPr>
+          <a:xfrm>
+            <a:off x="0" y="0"/>
+            <a:ext cx="73152" cy="6858000"/>
+          </a:xfrm>
+          <a:prstGeom prst="rect">
+            <a:avLst/>
+          </a:prstGeom>
+          <a:solidFill>
+            <a:srgbClr val="003DA5"/>
+          </a:solidFill>
+          <a:ln>
+            <a:noFill/>
+          </a:ln>
+        </p:spPr>
+        <p:style>
+          <a:lnRef idx="1">
+            <a:schemeClr val="accent1"/>
+          </a:lnRef>
+          <a:fillRef idx="3">
+            <a:schemeClr val="accent1"/>
+          </a:fillRef>
+          <a:effectRef idx="2">
+            <a:schemeClr val="accent1"/>
+          </a:effectRef>
+          <a:fontRef idx="minor">
+            <a:schemeClr val="lt1"/>
+          </a:fontRef>
+        </p:style>
+        <p:txBody>
+          <a:bodyPr rtlCol="0" anchor="ctr"/>
+          <a:lstStyle/>
+          <a:p>
+            <a:pPr algn="ctr"/>
+          </a:p>
+        </p:txBody>
+      </p:sp>
+      <p:sp>
+        <p:nvSpPr>
+          <p:cNvPr id="3" name="TextBox 2"/>
+          <p:cNvSpPr txBox="1"/>
+          <p:nvPr/>
+        </p:nvSpPr>
+        <p:spPr>
+          <a:xfrm>
+            <a:off x="228600" y="182880"/>
+            <a:ext cx="11430000" cy="320040"/>
+          </a:xfrm>
+          <a:prstGeom prst="rect">
+            <a:avLst/>
+          </a:prstGeom>
+          <a:noFill/>
+        </p:spPr>
+        <p:txBody>
+          <a:bodyPr wrap="square">
+            <a:spAutoFit/>
+          </a:bodyPr>
+          <a:lstStyle/>
+          <a:p>
+            <a:pPr algn="l"/>
+            <a:r>
+              <a:rPr sz="900" b="0" i="0">
+                <a:solidFill>
+                  <a:srgbClr val="556575"/>
+                </a:solidFill>
+                <a:latin typeface="Arial"/>
+              </a:rPr>
+              <a:t>M15 · 4.5 Neukundenansprache: Kanäle und Maßnahmen</a:t>
+            </a:r>
+          </a:p>
+        </p:txBody>
+      </p:sp>
+      <p:sp>
+        <p:nvSpPr>
+          <p:cNvPr id="4" name="TextBox 3"/>
+          <p:cNvSpPr txBox="1"/>
+          <p:nvPr/>
+        </p:nvSpPr>
+        <p:spPr>
+          <a:xfrm>
+            <a:off x="365760" y="274320"/>
+            <a:ext cx="11430000" cy="777240"/>
+          </a:xfrm>
+          <a:prstGeom prst="rect">
+            <a:avLst/>
+          </a:prstGeom>
+          <a:noFill/>
+        </p:spPr>
+        <p:txBody>
+          <a:bodyPr wrap="square">
+            <a:spAutoFit/>
+          </a:bodyPr>
+          <a:lstStyle/>
+          <a:p>
+            <a:pPr algn="l"/>
+            <a:r>
+              <a:rPr sz="2200" b="1" i="0">
+                <a:solidFill>
+                  <a:srgbClr val="003DA5"/>
+                </a:solidFill>
+                <a:latin typeface="Arial"/>
+              </a:rPr>
+              <a:t>Empfehlungsmanagement systematisieren</a:t>
+            </a:r>
+          </a:p>
+        </p:txBody>
+      </p:sp>
+      <p:sp>
+        <p:nvSpPr>
+          <p:cNvPr id="5" name="Rectangle 4"/>
+          <p:cNvSpPr/>
+          <p:nvPr/>
+        </p:nvSpPr>
+        <p:spPr>
+          <a:xfrm>
+            <a:off x="365760" y="1005840"/>
+            <a:ext cx="11430000" cy="27432"/>
+          </a:xfrm>
+          <a:prstGeom prst="rect">
+            <a:avLst/>
+          </a:prstGeom>
+          <a:solidFill>
+            <a:srgbClr val="D1D5DB"/>
+          </a:solidFill>
+          <a:ln>
+            <a:noFill/>
+          </a:ln>
+        </p:spPr>
+        <p:style>
+          <a:lnRef idx="1">
+            <a:schemeClr val="accent1"/>
+          </a:lnRef>
+          <a:fillRef idx="3">
+            <a:schemeClr val="accent1"/>
+          </a:fillRef>
+          <a:effectRef idx="2">
+            <a:schemeClr val="accent1"/>
+          </a:effectRef>
+          <a:fontRef idx="minor">
+            <a:schemeClr val="lt1"/>
+          </a:fontRef>
+        </p:style>
+        <p:txBody>
+          <a:bodyPr rtlCol="0" anchor="ctr"/>
+          <a:lstStyle/>
+          <a:p>
+            <a:pPr algn="ctr"/>
+          </a:p>
+        </p:txBody>
+      </p:sp>
+      <p:sp>
+        <p:nvSpPr>
+          <p:cNvPr id="6" name="TextBox 5"/>
+          <p:cNvSpPr txBox="1"/>
+          <p:nvPr/>
+        </p:nvSpPr>
+        <p:spPr>
+          <a:xfrm>
+            <a:off x="365760" y="1143000"/>
+            <a:ext cx="11430000" cy="5212080"/>
+          </a:xfrm>
+          <a:prstGeom prst="rect">
+            <a:avLst/>
+          </a:prstGeom>
+          <a:noFill/>
+        </p:spPr>
+        <p:txBody>
+          <a:bodyPr wrap="square">
+            <a:spAutoFit/>
+          </a:bodyPr>
+          <a:lstStyle/>
+          <a:p>
+            <a:pPr>
+              <a:spcBef>
+                <a:spcPts val="500"/>
+              </a:spcBef>
+            </a:pPr>
+            <a:r>
+              <a:rPr sz="1500">
+                <a:solidFill>
+                  <a:srgbClr val="003DA5"/>
+                </a:solidFill>
+                <a:latin typeface="Arial"/>
+              </a:rPr>
+              <a:t>▪  </a:t>
+            </a:r>
+            <a:r>
+              <a:rPr sz="1700" b="1">
+                <a:solidFill>
+                  <a:srgbClr val="003DA5"/>
+                </a:solidFill>
+                <a:latin typeface="Arial"/>
+              </a:rPr>
+              <a:t>Identifizieren: </a:t>
+            </a:r>
+            <a:r>
+              <a:rPr sz="1700">
+                <a:solidFill>
+                  <a:srgbClr val="1A1A1A"/>
+                </a:solidFill>
+                <a:latin typeface="Arial"/>
+              </a:rPr>
+              <a:t>Welche meiner Bestandskunden sind Meinungsführer in ihrem Branchenumfeld? 2.</a:t>
+            </a:r>
+          </a:p>
+          <a:p>
+            <a:pPr>
+              <a:spcBef>
+                <a:spcPts val="500"/>
+              </a:spcBef>
+            </a:pPr>
+            <a:r>
+              <a:rPr sz="1500">
+                <a:solidFill>
+                  <a:srgbClr val="003DA5"/>
+                </a:solidFill>
+                <a:latin typeface="Arial"/>
+              </a:rPr>
+              <a:t>▪  </a:t>
+            </a:r>
+            <a:r>
+              <a:rPr sz="1700" b="1">
+                <a:solidFill>
+                  <a:srgbClr val="003DA5"/>
+                </a:solidFill>
+                <a:latin typeface="Arial"/>
+              </a:rPr>
+              <a:t>Beziehung vertiefen: </a:t>
+            </a:r>
+            <a:r>
+              <a:rPr sz="1700">
+                <a:solidFill>
+                  <a:srgbClr val="1A1A1A"/>
+                </a:solidFill>
+                <a:latin typeface="Arial"/>
+              </a:rPr>
+              <a:t>Diese Kunden erhalten besondere Aufmerksamkeit – nicht wegen der Empfehlung, sondern wegen ihres Werts. 3.</a:t>
+            </a:r>
+          </a:p>
+          <a:p>
+            <a:pPr>
+              <a:spcBef>
+                <a:spcPts val="500"/>
+              </a:spcBef>
+            </a:pPr>
+            <a:r>
+              <a:rPr sz="1500">
+                <a:solidFill>
+                  <a:srgbClr val="003DA5"/>
+                </a:solidFill>
+                <a:latin typeface="Arial"/>
+              </a:rPr>
+              <a:t>▪  </a:t>
+            </a:r>
+            <a:r>
+              <a:rPr sz="1700" b="1">
+                <a:solidFill>
+                  <a:srgbClr val="003DA5"/>
+                </a:solidFill>
+                <a:latin typeface="Arial"/>
+              </a:rPr>
+              <a:t>Aktiv bitten: </a:t>
+            </a:r>
+            <a:r>
+              <a:rPr sz="1700">
+                <a:solidFill>
+                  <a:srgbClr val="1A1A1A"/>
+                </a:solidFill>
+                <a:latin typeface="Arial"/>
+              </a:rPr>
+              <a:t>Am Ende eines erfolgreichen Gesprächs: „Gibt es Unternehmen in Ihrem Umfeld, die unsere Zusammenarbeit kennenlernen sollten?" 4.</a:t>
+            </a:r>
+          </a:p>
+          <a:p>
+            <a:pPr>
+              <a:spcBef>
+                <a:spcPts val="500"/>
+              </a:spcBef>
+            </a:pPr>
+            <a:r>
+              <a:rPr sz="1500">
+                <a:solidFill>
+                  <a:srgbClr val="003DA5"/>
+                </a:solidFill>
+                <a:latin typeface="Arial"/>
+              </a:rPr>
+              <a:t>▪  </a:t>
+            </a:r>
+            <a:r>
+              <a:rPr sz="1700" b="1">
+                <a:solidFill>
+                  <a:srgbClr val="003DA5"/>
+                </a:solidFill>
+                <a:latin typeface="Arial"/>
+              </a:rPr>
+              <a:t>Danken und schließen: </a:t>
+            </a:r>
+            <a:r>
+              <a:rPr sz="1700">
+                <a:solidFill>
+                  <a:srgbClr val="1A1A1A"/>
+                </a:solidFill>
+                <a:latin typeface="Arial"/>
+              </a:rPr>
+              <a:t>Rückmeldung geben, ob der Kontakt erfolgreich war.</a:t>
+            </a:r>
+          </a:p>
+        </p:txBody>
+      </p:sp>
+    </p:spTree>
+  </p:cSld>
+  <p:clrMapOvr>
+    <a:masterClrMapping/>
+  </p:clrMapOvr>
+</p:sld>
+</file>
+
+<file path=ppt/slides/slide19.xml><?xml version="1.0" encoding="utf-8"?>
 <p:sld xmlns:a="http://schemas.openxmlformats.org/drawingml/2006/main" xmlns:p="http://schemas.openxmlformats.org/presentationml/2006/main" xmlns:r="http://schemas.openxmlformats.org/officeDocument/2006/relationships">
   <p:cSld>
     <p:bg>
@@ -3830,8 +6535,8 @@
         </p:nvSpPr>
         <p:spPr>
           <a:xfrm>
-            <a:off x="365760" y="2286000"/>
-            <a:ext cx="11430000" cy="1828800"/>
+            <a:off x="365760" y="2011680"/>
+            <a:ext cx="11430000" cy="2011680"/>
           </a:xfrm>
           <a:prstGeom prst="rect">
             <a:avLst/>
@@ -3846,13 +6551,13 @@
           <a:p>
             <a:pPr algn="l"/>
             <a:r>
-              <a:rPr sz="3600" b="1">
+              <a:rPr sz="3600" b="1" i="0">
                 <a:solidFill>
                   <a:srgbClr val="FFFFFF"/>
                 </a:solidFill>
                 <a:latin typeface="Arial"/>
               </a:rPr>
-              <a:t>Bankfachlich</a:t>
+              <a:t>Arbeitsblatt A: Segmentpriorisierung – Scoring</a:t>
             </a:r>
           </a:p>
         </p:txBody>
@@ -3865,7 +6570,1220 @@
 </p:sld>
 </file>
 
-<file path=ppt/slides/slide15.xml><?xml version="1.0" encoding="utf-8"?>
+<file path=ppt/slides/slide2.xml><?xml version="1.0" encoding="utf-8"?>
+<p:sld xmlns:a="http://schemas.openxmlformats.org/drawingml/2006/main" xmlns:p="http://schemas.openxmlformats.org/presentationml/2006/main" xmlns:r="http://schemas.openxmlformats.org/officeDocument/2006/relationships">
+  <p:cSld>
+    <p:bg>
+      <p:bgPr>
+        <a:solidFill>
+          <a:srgbClr val="F4F6FA"/>
+        </a:solidFill>
+        <a:effectLst/>
+      </p:bgPr>
+    </p:bg>
+    <p:spTree>
+      <p:nvGrpSpPr>
+        <p:cNvPr id="1" name=""/>
+        <p:cNvGrpSpPr/>
+        <p:nvPr/>
+      </p:nvGrpSpPr>
+      <p:grpSpPr/>
+      <p:sp>
+        <p:nvSpPr>
+          <p:cNvPr id="2" name="Rectangle 1"/>
+          <p:cNvSpPr/>
+          <p:nvPr/>
+        </p:nvSpPr>
+        <p:spPr>
+          <a:xfrm>
+            <a:off x="0" y="0"/>
+            <a:ext cx="73152" cy="6858000"/>
+          </a:xfrm>
+          <a:prstGeom prst="rect">
+            <a:avLst/>
+          </a:prstGeom>
+          <a:solidFill>
+            <a:srgbClr val="003DA5"/>
+          </a:solidFill>
+          <a:ln>
+            <a:noFill/>
+          </a:ln>
+        </p:spPr>
+        <p:style>
+          <a:lnRef idx="1">
+            <a:schemeClr val="accent1"/>
+          </a:lnRef>
+          <a:fillRef idx="3">
+            <a:schemeClr val="accent1"/>
+          </a:fillRef>
+          <a:effectRef idx="2">
+            <a:schemeClr val="accent1"/>
+          </a:effectRef>
+          <a:fontRef idx="minor">
+            <a:schemeClr val="lt1"/>
+          </a:fontRef>
+        </p:style>
+        <p:txBody>
+          <a:bodyPr rtlCol="0" anchor="ctr"/>
+          <a:lstStyle/>
+          <a:p>
+            <a:pPr algn="ctr"/>
+          </a:p>
+        </p:txBody>
+      </p:sp>
+      <p:sp>
+        <p:nvSpPr>
+          <p:cNvPr id="3" name="Rectangle 2"/>
+          <p:cNvSpPr/>
+          <p:nvPr/>
+        </p:nvSpPr>
+        <p:spPr>
+          <a:xfrm>
+            <a:off x="228600" y="804672"/>
+            <a:ext cx="11612880" cy="22860"/>
+          </a:xfrm>
+          <a:prstGeom prst="rect">
+            <a:avLst/>
+          </a:prstGeom>
+          <a:solidFill>
+            <a:srgbClr val="D1D5DB"/>
+          </a:solidFill>
+          <a:ln>
+            <a:noFill/>
+          </a:ln>
+        </p:spPr>
+        <p:style>
+          <a:lnRef idx="1">
+            <a:schemeClr val="accent1"/>
+          </a:lnRef>
+          <a:fillRef idx="3">
+            <a:schemeClr val="accent1"/>
+          </a:fillRef>
+          <a:effectRef idx="2">
+            <a:schemeClr val="accent1"/>
+          </a:effectRef>
+          <a:fontRef idx="minor">
+            <a:schemeClr val="lt1"/>
+          </a:fontRef>
+        </p:style>
+        <p:txBody>
+          <a:bodyPr rtlCol="0" anchor="ctr"/>
+          <a:lstStyle/>
+          <a:p>
+            <a:pPr algn="ctr"/>
+          </a:p>
+        </p:txBody>
+      </p:sp>
+      <p:sp>
+        <p:nvSpPr>
+          <p:cNvPr id="4" name="TextBox 3"/>
+          <p:cNvSpPr txBox="1"/>
+          <p:nvPr/>
+        </p:nvSpPr>
+        <p:spPr>
+          <a:xfrm>
+            <a:off x="365760" y="320040"/>
+            <a:ext cx="4572000" cy="347472"/>
+          </a:xfrm>
+          <a:prstGeom prst="rect">
+            <a:avLst/>
+          </a:prstGeom>
+          <a:noFill/>
+        </p:spPr>
+        <p:txBody>
+          <a:bodyPr wrap="square">
+            <a:spAutoFit/>
+          </a:bodyPr>
+          <a:lstStyle/>
+          <a:p>
+            <a:pPr algn="l"/>
+            <a:r>
+              <a:rPr sz="900" b="1" i="0">
+                <a:solidFill>
+                  <a:srgbClr val="003DA5"/>
+                </a:solidFill>
+                <a:latin typeface="Arial"/>
+              </a:rPr>
+              <a:t>LERNZIELE</a:t>
+            </a:r>
+          </a:p>
+        </p:txBody>
+      </p:sp>
+      <p:sp>
+        <p:nvSpPr>
+          <p:cNvPr id="5" name="TextBox 4"/>
+          <p:cNvSpPr txBox="1"/>
+          <p:nvPr/>
+        </p:nvSpPr>
+        <p:spPr>
+          <a:xfrm>
+            <a:off x="365760" y="502920"/>
+            <a:ext cx="10058400" cy="640080"/>
+          </a:xfrm>
+          <a:prstGeom prst="rect">
+            <a:avLst/>
+          </a:prstGeom>
+          <a:noFill/>
+        </p:spPr>
+        <p:txBody>
+          <a:bodyPr wrap="square">
+            <a:spAutoFit/>
+          </a:bodyPr>
+          <a:lstStyle/>
+          <a:p>
+            <a:pPr algn="l"/>
+            <a:r>
+              <a:rPr sz="2400" b="1" i="0">
+                <a:solidFill>
+                  <a:srgbClr val="1A1A1A"/>
+                </a:solidFill>
+                <a:latin typeface="Arial"/>
+              </a:rPr>
+              <a:t>Was Sie nach diesem Modul können.</a:t>
+            </a:r>
+          </a:p>
+        </p:txBody>
+      </p:sp>
+      <p:sp>
+        <p:nvSpPr>
+          <p:cNvPr id="6" name="TextBox 5"/>
+          <p:cNvSpPr txBox="1"/>
+          <p:nvPr/>
+        </p:nvSpPr>
+        <p:spPr>
+          <a:xfrm>
+            <a:off x="365760" y="1234440"/>
+            <a:ext cx="11430000" cy="5303520"/>
+          </a:xfrm>
+          <a:prstGeom prst="rect">
+            <a:avLst/>
+          </a:prstGeom>
+          <a:noFill/>
+        </p:spPr>
+        <p:txBody>
+          <a:bodyPr wrap="square">
+            <a:spAutoFit/>
+          </a:bodyPr>
+          <a:lstStyle/>
+          <a:p>
+            <a:pPr>
+              <a:spcBef>
+                <a:spcPts val="500"/>
+              </a:spcBef>
+            </a:pPr>
+            <a:r>
+              <a:rPr sz="1500">
+                <a:solidFill>
+                  <a:srgbClr val="003DA5"/>
+                </a:solidFill>
+                <a:latin typeface="Arial"/>
+              </a:rPr>
+              <a:t>▪  </a:t>
+            </a:r>
+            <a:r>
+              <a:rPr sz="1700">
+                <a:solidFill>
+                  <a:srgbClr val="1A1A1A"/>
+                </a:solidFill>
+                <a:latin typeface="Arial"/>
+              </a:rPr>
+              <a:t>Das Marktpotenzial in einem selbstgewählten Zielsegment analysieren und adressierbare Neukunden-Opportunitäten schätzen</a:t>
+            </a:r>
+          </a:p>
+          <a:p>
+            <a:pPr>
+              <a:spcBef>
+                <a:spcPts val="500"/>
+              </a:spcBef>
+            </a:pPr>
+            <a:r>
+              <a:rPr sz="1500">
+                <a:solidFill>
+                  <a:srgbClr val="003DA5"/>
+                </a:solidFill>
+                <a:latin typeface="Arial"/>
+              </a:rPr>
+              <a:t>▪  </a:t>
+            </a:r>
+            <a:r>
+              <a:rPr sz="1700">
+                <a:solidFill>
+                  <a:srgbClr val="1A1A1A"/>
+                </a:solidFill>
+                <a:latin typeface="Arial"/>
+              </a:rPr>
+              <a:t>Die Wettbewerbsposition der eigenen Bank im Zielsegment anhand von Stärken, Schwächen und Differenzierungspotenzialen bewerten</a:t>
+            </a:r>
+          </a:p>
+          <a:p>
+            <a:pPr>
+              <a:spcBef>
+                <a:spcPts val="500"/>
+              </a:spcBef>
+            </a:pPr>
+            <a:r>
+              <a:rPr sz="1500">
+                <a:solidFill>
+                  <a:srgbClr val="003DA5"/>
+                </a:solidFill>
+                <a:latin typeface="Arial"/>
+              </a:rPr>
+              <a:t>▪  </a:t>
+            </a:r>
+            <a:r>
+              <a:rPr sz="1700">
+                <a:solidFill>
+                  <a:srgbClr val="1A1A1A"/>
+                </a:solidFill>
+                <a:latin typeface="Arial"/>
+              </a:rPr>
+              <a:t>Eine Marktbearbeitungsstrategie mit Zielkunden-Kriterien, Wertversprechen und Anspracheansatz entwickeln</a:t>
+            </a:r>
+          </a:p>
+          <a:p>
+            <a:pPr>
+              <a:spcBef>
+                <a:spcPts val="500"/>
+              </a:spcBef>
+            </a:pPr>
+            <a:r>
+              <a:rPr sz="1500">
+                <a:solidFill>
+                  <a:srgbClr val="003DA5"/>
+                </a:solidFill>
+                <a:latin typeface="Arial"/>
+              </a:rPr>
+              <a:t>▪  </a:t>
+            </a:r>
+            <a:r>
+              <a:rPr sz="1700">
+                <a:solidFill>
+                  <a:srgbClr val="1A1A1A"/>
+                </a:solidFill>
+                <a:latin typeface="Arial"/>
+              </a:rPr>
+              <a:t>Die Eignung verschiedener Neukundenansprache-Kanäle für das Zielsegment bewerten und die zwei effektivsten wählen</a:t>
+            </a:r>
+          </a:p>
+          <a:p>
+            <a:pPr>
+              <a:spcBef>
+                <a:spcPts val="500"/>
+              </a:spcBef>
+            </a:pPr>
+            <a:r>
+              <a:rPr sz="1500">
+                <a:solidFill>
+                  <a:srgbClr val="003DA5"/>
+                </a:solidFill>
+                <a:latin typeface="Arial"/>
+              </a:rPr>
+              <a:t>▪  </a:t>
+            </a:r>
+            <a:r>
+              <a:rPr sz="1700">
+                <a:solidFill>
+                  <a:srgbClr val="1A1A1A"/>
+                </a:solidFill>
+                <a:latin typeface="Arial"/>
+              </a:rPr>
+              <a:t>Einen strukturierten Jahresplan mit Zielgrößen, Maßnahmen und Meilensteinen erstellen</a:t>
+            </a:r>
+          </a:p>
+        </p:txBody>
+      </p:sp>
+    </p:spTree>
+  </p:cSld>
+  <p:clrMapOvr>
+    <a:masterClrMapping/>
+  </p:clrMapOvr>
+</p:sld>
+</file>
+
+<file path=ppt/slides/slide20.xml><?xml version="1.0" encoding="utf-8"?>
+<p:sld xmlns:a="http://schemas.openxmlformats.org/drawingml/2006/main" xmlns:p="http://schemas.openxmlformats.org/presentationml/2006/main" xmlns:r="http://schemas.openxmlformats.org/officeDocument/2006/relationships">
+  <p:cSld>
+    <p:bg>
+      <p:bgPr>
+        <a:solidFill>
+          <a:srgbClr val="FFFFFF"/>
+        </a:solidFill>
+        <a:effectLst/>
+      </p:bgPr>
+    </p:bg>
+    <p:spTree>
+      <p:nvGrpSpPr>
+        <p:cNvPr id="1" name=""/>
+        <p:cNvGrpSpPr/>
+        <p:nvPr/>
+      </p:nvGrpSpPr>
+      <p:grpSpPr/>
+      <p:sp>
+        <p:nvSpPr>
+          <p:cNvPr id="2" name="Rectangle 1"/>
+          <p:cNvSpPr/>
+          <p:nvPr/>
+        </p:nvSpPr>
+        <p:spPr>
+          <a:xfrm>
+            <a:off x="0" y="0"/>
+            <a:ext cx="73152" cy="6858000"/>
+          </a:xfrm>
+          <a:prstGeom prst="rect">
+            <a:avLst/>
+          </a:prstGeom>
+          <a:solidFill>
+            <a:srgbClr val="003DA5"/>
+          </a:solidFill>
+          <a:ln>
+            <a:noFill/>
+          </a:ln>
+        </p:spPr>
+        <p:style>
+          <a:lnRef idx="1">
+            <a:schemeClr val="accent1"/>
+          </a:lnRef>
+          <a:fillRef idx="3">
+            <a:schemeClr val="accent1"/>
+          </a:fillRef>
+          <a:effectRef idx="2">
+            <a:schemeClr val="accent1"/>
+          </a:effectRef>
+          <a:fontRef idx="minor">
+            <a:schemeClr val="lt1"/>
+          </a:fontRef>
+        </p:style>
+        <p:txBody>
+          <a:bodyPr rtlCol="0" anchor="ctr"/>
+          <a:lstStyle/>
+          <a:p>
+            <a:pPr algn="ctr"/>
+          </a:p>
+        </p:txBody>
+      </p:sp>
+      <p:sp>
+        <p:nvSpPr>
+          <p:cNvPr id="3" name="TextBox 2"/>
+          <p:cNvSpPr txBox="1"/>
+          <p:nvPr/>
+        </p:nvSpPr>
+        <p:spPr>
+          <a:xfrm>
+            <a:off x="228600" y="182880"/>
+            <a:ext cx="11430000" cy="320040"/>
+          </a:xfrm>
+          <a:prstGeom prst="rect">
+            <a:avLst/>
+          </a:prstGeom>
+          <a:noFill/>
+        </p:spPr>
+        <p:txBody>
+          <a:bodyPr wrap="square">
+            <a:spAutoFit/>
+          </a:bodyPr>
+          <a:lstStyle/>
+          <a:p>
+            <a:pPr algn="l"/>
+            <a:r>
+              <a:rPr sz="900" b="0" i="0">
+                <a:solidFill>
+                  <a:srgbClr val="556575"/>
+                </a:solidFill>
+                <a:latin typeface="Arial"/>
+              </a:rPr>
+              <a:t>M15 · 4.9 Arbeitsblätter</a:t>
+            </a:r>
+          </a:p>
+        </p:txBody>
+      </p:sp>
+      <p:sp>
+        <p:nvSpPr>
+          <p:cNvPr id="4" name="TextBox 3"/>
+          <p:cNvSpPr txBox="1"/>
+          <p:nvPr/>
+        </p:nvSpPr>
+        <p:spPr>
+          <a:xfrm>
+            <a:off x="365760" y="274320"/>
+            <a:ext cx="11430000" cy="777240"/>
+          </a:xfrm>
+          <a:prstGeom prst="rect">
+            <a:avLst/>
+          </a:prstGeom>
+          <a:noFill/>
+        </p:spPr>
+        <p:txBody>
+          <a:bodyPr wrap="square">
+            <a:spAutoFit/>
+          </a:bodyPr>
+          <a:lstStyle/>
+          <a:p>
+            <a:pPr algn="l"/>
+            <a:r>
+              <a:rPr sz="2200" b="1" i="0">
+                <a:solidFill>
+                  <a:srgbClr val="003DA5"/>
+                </a:solidFill>
+                <a:latin typeface="Arial"/>
+              </a:rPr>
+              <a:t>Arbeitsblatt A: Segmentpriorisierung – Scoring</a:t>
+            </a:r>
+          </a:p>
+        </p:txBody>
+      </p:sp>
+      <p:sp>
+        <p:nvSpPr>
+          <p:cNvPr id="5" name="Rectangle 4"/>
+          <p:cNvSpPr/>
+          <p:nvPr/>
+        </p:nvSpPr>
+        <p:spPr>
+          <a:xfrm>
+            <a:off x="365760" y="1005840"/>
+            <a:ext cx="11430000" cy="27432"/>
+          </a:xfrm>
+          <a:prstGeom prst="rect">
+            <a:avLst/>
+          </a:prstGeom>
+          <a:solidFill>
+            <a:srgbClr val="D1D5DB"/>
+          </a:solidFill>
+          <a:ln>
+            <a:noFill/>
+          </a:ln>
+        </p:spPr>
+        <p:style>
+          <a:lnRef idx="1">
+            <a:schemeClr val="accent1"/>
+          </a:lnRef>
+          <a:fillRef idx="3">
+            <a:schemeClr val="accent1"/>
+          </a:fillRef>
+          <a:effectRef idx="2">
+            <a:schemeClr val="accent1"/>
+          </a:effectRef>
+          <a:fontRef idx="minor">
+            <a:schemeClr val="lt1"/>
+          </a:fontRef>
+        </p:style>
+        <p:txBody>
+          <a:bodyPr rtlCol="0" anchor="ctr"/>
+          <a:lstStyle/>
+          <a:p>
+            <a:pPr algn="ctr"/>
+          </a:p>
+        </p:txBody>
+      </p:sp>
+      <p:graphicFrame>
+        <p:nvGraphicFramePr>
+          <p:cNvPr id="6" name="Table 5"/>
+          <p:cNvGraphicFramePr>
+            <a:graphicFrameLocks noGrp="1"/>
+          </p:cNvGraphicFramePr>
+          <p:nvPr/>
+        </p:nvGraphicFramePr>
+        <p:xfrm>
+          <a:off x="365760" y="1143000"/>
+          <a:ext cx="11430000" cy="2852928"/>
+        </p:xfrm>
+        <a:graphic>
+          <a:graphicData uri="http://schemas.openxmlformats.org/drawingml/2006/table">
+            <a:tbl>
+              <a:tblPr firstRow="1" bandRow="1">
+                <a:tableStyleId>{5C22544A-7EE6-4342-B048-85BDC9FD1C3A}</a:tableStyleId>
+              </a:tblPr>
+              <a:tblGrid>
+                <a:gridCol w="2286000"/>
+                <a:gridCol w="2286000"/>
+                <a:gridCol w="2286000"/>
+                <a:gridCol w="2286000"/>
+                <a:gridCol w="2286000"/>
+              </a:tblGrid>
+              <a:tr h="475488">
+                <a:tc>
+                  <a:txBody>
+                    <a:bodyPr wrap="square"/>
+                    <a:lstStyle/>
+                    <a:p>
+                      <a:r>
+                        <a:rPr sz="1100" b="1">
+                          <a:solidFill>
+                            <a:srgbClr val="FFFFFF"/>
+                          </a:solidFill>
+                          <a:latin typeface="Arial"/>
+                        </a:rPr>
+                        <a:t>Kriterium</a:t>
+                      </a:r>
+                    </a:p>
+                  </a:txBody>
+                  <a:tcPr>
+                    <a:solidFill>
+                      <a:srgbClr val="003DA5"/>
+                    </a:solidFill>
+                  </a:tcPr>
+                </a:tc>
+                <a:tc>
+                  <a:txBody>
+                    <a:bodyPr wrap="square"/>
+                    <a:lstStyle/>
+                    <a:p>
+                      <a:r>
+                        <a:rPr sz="1100" b="1">
+                          <a:solidFill>
+                            <a:srgbClr val="FFFFFF"/>
+                          </a:solidFill>
+                          <a:latin typeface="Arial"/>
+                        </a:rPr>
+                        <a:t>Gewichtung</a:t>
+                      </a:r>
+                    </a:p>
+                  </a:txBody>
+                  <a:tcPr>
+                    <a:solidFill>
+                      <a:srgbClr val="003DA5"/>
+                    </a:solidFill>
+                  </a:tcPr>
+                </a:tc>
+                <a:tc>
+                  <a:txBody>
+                    <a:bodyPr wrap="square"/>
+                    <a:lstStyle/>
+                    <a:p>
+                      <a:r>
+                        <a:rPr sz="1100" b="1">
+                          <a:solidFill>
+                            <a:srgbClr val="FFFFFF"/>
+                          </a:solidFill>
+                          <a:latin typeface="Arial"/>
+                        </a:rPr>
+                        <a:t>Segment 1: _____</a:t>
+                      </a:r>
+                    </a:p>
+                  </a:txBody>
+                  <a:tcPr>
+                    <a:solidFill>
+                      <a:srgbClr val="003DA5"/>
+                    </a:solidFill>
+                  </a:tcPr>
+                </a:tc>
+                <a:tc>
+                  <a:txBody>
+                    <a:bodyPr wrap="square"/>
+                    <a:lstStyle/>
+                    <a:p>
+                      <a:r>
+                        <a:rPr sz="1100" b="1">
+                          <a:solidFill>
+                            <a:srgbClr val="FFFFFF"/>
+                          </a:solidFill>
+                          <a:latin typeface="Arial"/>
+                        </a:rPr>
+                        <a:t>Segment 2: _____</a:t>
+                      </a:r>
+                    </a:p>
+                  </a:txBody>
+                  <a:tcPr>
+                    <a:solidFill>
+                      <a:srgbClr val="003DA5"/>
+                    </a:solidFill>
+                  </a:tcPr>
+                </a:tc>
+                <a:tc>
+                  <a:txBody>
+                    <a:bodyPr wrap="square"/>
+                    <a:lstStyle/>
+                    <a:p>
+                      <a:r>
+                        <a:rPr sz="1100" b="1">
+                          <a:solidFill>
+                            <a:srgbClr val="FFFFFF"/>
+                          </a:solidFill>
+                          <a:latin typeface="Arial"/>
+                        </a:rPr>
+                        <a:t>Segment 3: _____</a:t>
+                      </a:r>
+                    </a:p>
+                  </a:txBody>
+                  <a:tcPr>
+                    <a:solidFill>
+                      <a:srgbClr val="003DA5"/>
+                    </a:solidFill>
+                  </a:tcPr>
+                </a:tc>
+              </a:tr>
+              <a:tr h="475488">
+                <a:tc>
+                  <a:txBody>
+                    <a:bodyPr wrap="square"/>
+                    <a:lstStyle/>
+                    <a:p>
+                      <a:r>
+                        <a:rPr sz="1100" b="0">
+                          <a:solidFill>
+                            <a:srgbClr val="1A1A1A"/>
+                          </a:solidFill>
+                          <a:latin typeface="Arial"/>
+                        </a:rPr>
+                        <a:t>Marktgröße in Region</a:t>
+                      </a:r>
+                    </a:p>
+                  </a:txBody>
+                  <a:tcPr>
+                    <a:solidFill>
+                      <a:srgbClr val="FFFFFF"/>
+                    </a:solidFill>
+                  </a:tcPr>
+                </a:tc>
+                <a:tc>
+                  <a:txBody>
+                    <a:bodyPr wrap="square"/>
+                    <a:lstStyle/>
+                    <a:p>
+                      <a:r>
+                        <a:rPr sz="1100" b="0">
+                          <a:solidFill>
+                            <a:srgbClr val="1A1A1A"/>
+                          </a:solidFill>
+                          <a:latin typeface="Arial"/>
+                        </a:rPr>
+                        <a:t>25 %</a:t>
+                      </a:r>
+                    </a:p>
+                  </a:txBody>
+                  <a:tcPr>
+                    <a:solidFill>
+                      <a:srgbClr val="FFFFFF"/>
+                    </a:solidFill>
+                  </a:tcPr>
+                </a:tc>
+                <a:tc>
+                  <a:txBody>
+                    <a:bodyPr wrap="square"/>
+                    <a:lstStyle/>
+                    <a:p>
+                      <a:r>
+                        <a:rPr sz="1100" b="0">
+                          <a:solidFill>
+                            <a:srgbClr val="1A1A1A"/>
+                          </a:solidFill>
+                          <a:latin typeface="Arial"/>
+                        </a:rPr>
+                        <a:t/>
+                      </a:r>
+                    </a:p>
+                  </a:txBody>
+                  <a:tcPr>
+                    <a:solidFill>
+                      <a:srgbClr val="FFFFFF"/>
+                    </a:solidFill>
+                  </a:tcPr>
+                </a:tc>
+                <a:tc>
+                  <a:txBody>
+                    <a:bodyPr wrap="square"/>
+                    <a:lstStyle/>
+                    <a:p>
+                      <a:r>
+                        <a:rPr sz="1100" b="0">
+                          <a:solidFill>
+                            <a:srgbClr val="1A1A1A"/>
+                          </a:solidFill>
+                          <a:latin typeface="Arial"/>
+                        </a:rPr>
+                        <a:t/>
+                      </a:r>
+                    </a:p>
+                  </a:txBody>
+                  <a:tcPr>
+                    <a:solidFill>
+                      <a:srgbClr val="FFFFFF"/>
+                    </a:solidFill>
+                  </a:tcPr>
+                </a:tc>
+                <a:tc>
+                  <a:txBody>
+                    <a:bodyPr wrap="square"/>
+                    <a:lstStyle/>
+                    <a:p>
+                      <a:r>
+                        <a:rPr sz="1100" b="0">
+                          <a:solidFill>
+                            <a:srgbClr val="1A1A1A"/>
+                          </a:solidFill>
+                          <a:latin typeface="Arial"/>
+                        </a:rPr>
+                        <a:t/>
+                      </a:r>
+                    </a:p>
+                  </a:txBody>
+                  <a:tcPr>
+                    <a:solidFill>
+                      <a:srgbClr val="FFFFFF"/>
+                    </a:solidFill>
+                  </a:tcPr>
+                </a:tc>
+              </a:tr>
+              <a:tr h="475488">
+                <a:tc>
+                  <a:txBody>
+                    <a:bodyPr wrap="square"/>
+                    <a:lstStyle/>
+                    <a:p>
+                      <a:r>
+                        <a:rPr sz="1100" b="0">
+                          <a:solidFill>
+                            <a:srgbClr val="1A1A1A"/>
+                          </a:solidFill>
+                          <a:latin typeface="Arial"/>
+                        </a:rPr>
+                        <a:t>Ertragspotenzial (DB)</a:t>
+                      </a:r>
+                    </a:p>
+                  </a:txBody>
+                  <a:tcPr>
+                    <a:solidFill>
+                      <a:srgbClr val="F4F6FA"/>
+                    </a:solidFill>
+                  </a:tcPr>
+                </a:tc>
+                <a:tc>
+                  <a:txBody>
+                    <a:bodyPr wrap="square"/>
+                    <a:lstStyle/>
+                    <a:p>
+                      <a:r>
+                        <a:rPr sz="1100" b="0">
+                          <a:solidFill>
+                            <a:srgbClr val="1A1A1A"/>
+                          </a:solidFill>
+                          <a:latin typeface="Arial"/>
+                        </a:rPr>
+                        <a:t>30 %</a:t>
+                      </a:r>
+                    </a:p>
+                  </a:txBody>
+                  <a:tcPr>
+                    <a:solidFill>
+                      <a:srgbClr val="F4F6FA"/>
+                    </a:solidFill>
+                  </a:tcPr>
+                </a:tc>
+                <a:tc>
+                  <a:txBody>
+                    <a:bodyPr wrap="square"/>
+                    <a:lstStyle/>
+                    <a:p>
+                      <a:r>
+                        <a:rPr sz="1100" b="0">
+                          <a:solidFill>
+                            <a:srgbClr val="1A1A1A"/>
+                          </a:solidFill>
+                          <a:latin typeface="Arial"/>
+                        </a:rPr>
+                        <a:t/>
+                      </a:r>
+                    </a:p>
+                  </a:txBody>
+                  <a:tcPr>
+                    <a:solidFill>
+                      <a:srgbClr val="F4F6FA"/>
+                    </a:solidFill>
+                  </a:tcPr>
+                </a:tc>
+                <a:tc>
+                  <a:txBody>
+                    <a:bodyPr wrap="square"/>
+                    <a:lstStyle/>
+                    <a:p>
+                      <a:r>
+                        <a:rPr sz="1100" b="0">
+                          <a:solidFill>
+                            <a:srgbClr val="1A1A1A"/>
+                          </a:solidFill>
+                          <a:latin typeface="Arial"/>
+                        </a:rPr>
+                        <a:t/>
+                      </a:r>
+                    </a:p>
+                  </a:txBody>
+                  <a:tcPr>
+                    <a:solidFill>
+                      <a:srgbClr val="F4F6FA"/>
+                    </a:solidFill>
+                  </a:tcPr>
+                </a:tc>
+                <a:tc>
+                  <a:txBody>
+                    <a:bodyPr wrap="square"/>
+                    <a:lstStyle/>
+                    <a:p>
+                      <a:r>
+                        <a:rPr sz="1100" b="0">
+                          <a:solidFill>
+                            <a:srgbClr val="1A1A1A"/>
+                          </a:solidFill>
+                          <a:latin typeface="Arial"/>
+                        </a:rPr>
+                        <a:t/>
+                      </a:r>
+                    </a:p>
+                  </a:txBody>
+                  <a:tcPr>
+                    <a:solidFill>
+                      <a:srgbClr val="F4F6FA"/>
+                    </a:solidFill>
+                  </a:tcPr>
+                </a:tc>
+              </a:tr>
+              <a:tr h="475488">
+                <a:tc>
+                  <a:txBody>
+                    <a:bodyPr wrap="square"/>
+                    <a:lstStyle/>
+                    <a:p>
+                      <a:r>
+                        <a:rPr sz="1100" b="0">
+                          <a:solidFill>
+                            <a:srgbClr val="1A1A1A"/>
+                          </a:solidFill>
+                          <a:latin typeface="Arial"/>
+                        </a:rPr>
+                        <a:t>Eigene Stärke/Expertise</a:t>
+                      </a:r>
+                    </a:p>
+                  </a:txBody>
+                  <a:tcPr>
+                    <a:solidFill>
+                      <a:srgbClr val="FFFFFF"/>
+                    </a:solidFill>
+                  </a:tcPr>
+                </a:tc>
+                <a:tc>
+                  <a:txBody>
+                    <a:bodyPr wrap="square"/>
+                    <a:lstStyle/>
+                    <a:p>
+                      <a:r>
+                        <a:rPr sz="1100" b="0">
+                          <a:solidFill>
+                            <a:srgbClr val="1A1A1A"/>
+                          </a:solidFill>
+                          <a:latin typeface="Arial"/>
+                        </a:rPr>
+                        <a:t>25 %</a:t>
+                      </a:r>
+                    </a:p>
+                  </a:txBody>
+                  <a:tcPr>
+                    <a:solidFill>
+                      <a:srgbClr val="FFFFFF"/>
+                    </a:solidFill>
+                  </a:tcPr>
+                </a:tc>
+                <a:tc>
+                  <a:txBody>
+                    <a:bodyPr wrap="square"/>
+                    <a:lstStyle/>
+                    <a:p>
+                      <a:r>
+                        <a:rPr sz="1100" b="0">
+                          <a:solidFill>
+                            <a:srgbClr val="1A1A1A"/>
+                          </a:solidFill>
+                          <a:latin typeface="Arial"/>
+                        </a:rPr>
+                        <a:t/>
+                      </a:r>
+                    </a:p>
+                  </a:txBody>
+                  <a:tcPr>
+                    <a:solidFill>
+                      <a:srgbClr val="FFFFFF"/>
+                    </a:solidFill>
+                  </a:tcPr>
+                </a:tc>
+                <a:tc>
+                  <a:txBody>
+                    <a:bodyPr wrap="square"/>
+                    <a:lstStyle/>
+                    <a:p>
+                      <a:r>
+                        <a:rPr sz="1100" b="0">
+                          <a:solidFill>
+                            <a:srgbClr val="1A1A1A"/>
+                          </a:solidFill>
+                          <a:latin typeface="Arial"/>
+                        </a:rPr>
+                        <a:t/>
+                      </a:r>
+                    </a:p>
+                  </a:txBody>
+                  <a:tcPr>
+                    <a:solidFill>
+                      <a:srgbClr val="FFFFFF"/>
+                    </a:solidFill>
+                  </a:tcPr>
+                </a:tc>
+                <a:tc>
+                  <a:txBody>
+                    <a:bodyPr wrap="square"/>
+                    <a:lstStyle/>
+                    <a:p>
+                      <a:r>
+                        <a:rPr sz="1100" b="0">
+                          <a:solidFill>
+                            <a:srgbClr val="1A1A1A"/>
+                          </a:solidFill>
+                          <a:latin typeface="Arial"/>
+                        </a:rPr>
+                        <a:t/>
+                      </a:r>
+                    </a:p>
+                  </a:txBody>
+                  <a:tcPr>
+                    <a:solidFill>
+                      <a:srgbClr val="FFFFFF"/>
+                    </a:solidFill>
+                  </a:tcPr>
+                </a:tc>
+              </a:tr>
+              <a:tr h="475488">
+                <a:tc>
+                  <a:txBody>
+                    <a:bodyPr wrap="square"/>
+                    <a:lstStyle/>
+                    <a:p>
+                      <a:r>
+                        <a:rPr sz="1100" b="0">
+                          <a:solidFill>
+                            <a:srgbClr val="1A1A1A"/>
+                          </a:solidFill>
+                          <a:latin typeface="Arial"/>
+                        </a:rPr>
+                        <a:t>Wettbewerbsintensität (inv.)</a:t>
+                      </a:r>
+                    </a:p>
+                  </a:txBody>
+                  <a:tcPr>
+                    <a:solidFill>
+                      <a:srgbClr val="F4F6FA"/>
+                    </a:solidFill>
+                  </a:tcPr>
+                </a:tc>
+                <a:tc>
+                  <a:txBody>
+                    <a:bodyPr wrap="square"/>
+                    <a:lstStyle/>
+                    <a:p>
+                      <a:r>
+                        <a:rPr sz="1100" b="0">
+                          <a:solidFill>
+                            <a:srgbClr val="1A1A1A"/>
+                          </a:solidFill>
+                          <a:latin typeface="Arial"/>
+                        </a:rPr>
+                        <a:t>20 %</a:t>
+                      </a:r>
+                    </a:p>
+                  </a:txBody>
+                  <a:tcPr>
+                    <a:solidFill>
+                      <a:srgbClr val="F4F6FA"/>
+                    </a:solidFill>
+                  </a:tcPr>
+                </a:tc>
+                <a:tc>
+                  <a:txBody>
+                    <a:bodyPr wrap="square"/>
+                    <a:lstStyle/>
+                    <a:p>
+                      <a:r>
+                        <a:rPr sz="1100" b="0">
+                          <a:solidFill>
+                            <a:srgbClr val="1A1A1A"/>
+                          </a:solidFill>
+                          <a:latin typeface="Arial"/>
+                        </a:rPr>
+                        <a:t/>
+                      </a:r>
+                    </a:p>
+                  </a:txBody>
+                  <a:tcPr>
+                    <a:solidFill>
+                      <a:srgbClr val="F4F6FA"/>
+                    </a:solidFill>
+                  </a:tcPr>
+                </a:tc>
+                <a:tc>
+                  <a:txBody>
+                    <a:bodyPr wrap="square"/>
+                    <a:lstStyle/>
+                    <a:p>
+                      <a:r>
+                        <a:rPr sz="1100" b="0">
+                          <a:solidFill>
+                            <a:srgbClr val="1A1A1A"/>
+                          </a:solidFill>
+                          <a:latin typeface="Arial"/>
+                        </a:rPr>
+                        <a:t/>
+                      </a:r>
+                    </a:p>
+                  </a:txBody>
+                  <a:tcPr>
+                    <a:solidFill>
+                      <a:srgbClr val="F4F6FA"/>
+                    </a:solidFill>
+                  </a:tcPr>
+                </a:tc>
+                <a:tc>
+                  <a:txBody>
+                    <a:bodyPr wrap="square"/>
+                    <a:lstStyle/>
+                    <a:p>
+                      <a:r>
+                        <a:rPr sz="1100" b="0">
+                          <a:solidFill>
+                            <a:srgbClr val="1A1A1A"/>
+                          </a:solidFill>
+                          <a:latin typeface="Arial"/>
+                        </a:rPr>
+                        <a:t/>
+                      </a:r>
+                    </a:p>
+                  </a:txBody>
+                  <a:tcPr>
+                    <a:solidFill>
+                      <a:srgbClr val="F4F6FA"/>
+                    </a:solidFill>
+                  </a:tcPr>
+                </a:tc>
+              </a:tr>
+              <a:tr h="475488">
+                <a:tc>
+                  <a:txBody>
+                    <a:bodyPr wrap="square"/>
+                    <a:lstStyle/>
+                    <a:p>
+                      <a:r>
+                        <a:rPr sz="1100" b="0">
+                          <a:solidFill>
+                            <a:srgbClr val="1A1A1A"/>
+                          </a:solidFill>
+                          <a:latin typeface="Arial"/>
+                        </a:rPr>
+                        <a:t>Gesamtscore</a:t>
+                      </a:r>
+                    </a:p>
+                  </a:txBody>
+                  <a:tcPr>
+                    <a:solidFill>
+                      <a:srgbClr val="FFFFFF"/>
+                    </a:solidFill>
+                  </a:tcPr>
+                </a:tc>
+                <a:tc>
+                  <a:txBody>
+                    <a:bodyPr wrap="square"/>
+                    <a:lstStyle/>
+                    <a:p>
+                      <a:r>
+                        <a:rPr sz="1100" b="0">
+                          <a:solidFill>
+                            <a:srgbClr val="1A1A1A"/>
+                          </a:solidFill>
+                          <a:latin typeface="Arial"/>
+                        </a:rPr>
+                        <a:t/>
+                      </a:r>
+                    </a:p>
+                  </a:txBody>
+                  <a:tcPr>
+                    <a:solidFill>
+                      <a:srgbClr val="FFFFFF"/>
+                    </a:solidFill>
+                  </a:tcPr>
+                </a:tc>
+                <a:tc>
+                  <a:txBody>
+                    <a:bodyPr wrap="square"/>
+                    <a:lstStyle/>
+                    <a:p>
+                      <a:r>
+                        <a:rPr sz="1100" b="0">
+                          <a:solidFill>
+                            <a:srgbClr val="1A1A1A"/>
+                          </a:solidFill>
+                          <a:latin typeface="Arial"/>
+                        </a:rPr>
+                        <a:t/>
+                      </a:r>
+                    </a:p>
+                  </a:txBody>
+                  <a:tcPr>
+                    <a:solidFill>
+                      <a:srgbClr val="FFFFFF"/>
+                    </a:solidFill>
+                  </a:tcPr>
+                </a:tc>
+                <a:tc>
+                  <a:txBody>
+                    <a:bodyPr wrap="square"/>
+                    <a:lstStyle/>
+                    <a:p>
+                      <a:r>
+                        <a:rPr sz="1100" b="0">
+                          <a:solidFill>
+                            <a:srgbClr val="1A1A1A"/>
+                          </a:solidFill>
+                          <a:latin typeface="Arial"/>
+                        </a:rPr>
+                        <a:t/>
+                      </a:r>
+                    </a:p>
+                  </a:txBody>
+                  <a:tcPr>
+                    <a:solidFill>
+                      <a:srgbClr val="FFFFFF"/>
+                    </a:solidFill>
+                  </a:tcPr>
+                </a:tc>
+                <a:tc>
+                  <a:txBody>
+                    <a:bodyPr wrap="square"/>
+                    <a:lstStyle/>
+                    <a:p>
+                      <a:r>
+                        <a:rPr sz="1100" b="0">
+                          <a:solidFill>
+                            <a:srgbClr val="1A1A1A"/>
+                          </a:solidFill>
+                          <a:latin typeface="Arial"/>
+                        </a:rPr>
+                        <a:t/>
+                      </a:r>
+                    </a:p>
+                  </a:txBody>
+                  <a:tcPr>
+                    <a:solidFill>
+                      <a:srgbClr val="FFFFFF"/>
+                    </a:solidFill>
+                  </a:tcPr>
+                </a:tc>
+              </a:tr>
+            </a:tbl>
+          </a:graphicData>
+        </a:graphic>
+      </p:graphicFrame>
+    </p:spTree>
+  </p:cSld>
+  <p:clrMapOvr>
+    <a:masterClrMapping/>
+  </p:clrMapOvr>
+</p:sld>
+</file>
+
+<file path=ppt/slides/slide21.xml><?xml version="1.0" encoding="utf-8"?>
 <p:sld xmlns:a="http://schemas.openxmlformats.org/drawingml/2006/main" xmlns:p="http://schemas.openxmlformats.org/presentationml/2006/main" xmlns:r="http://schemas.openxmlformats.org/officeDocument/2006/relationships">
   <p:cSld>
     <p:bg>
@@ -3934,8 +7852,8 @@
         </p:nvSpPr>
         <p:spPr>
           <a:xfrm>
-            <a:off x="365760" y="2286000"/>
-            <a:ext cx="11430000" cy="1828800"/>
+            <a:off x="365760" y="2011680"/>
+            <a:ext cx="11430000" cy="2011680"/>
           </a:xfrm>
           <a:prstGeom prst="rect">
             <a:avLst/>
@@ -3950,13 +7868,13 @@
           <a:p>
             <a:pPr algn="l"/>
             <a:r>
-              <a:rPr sz="3600" b="1">
+              <a:rPr sz="3600" b="1" i="0">
                 <a:solidFill>
                   <a:srgbClr val="FFFFFF"/>
                 </a:solidFill>
                 <a:latin typeface="Arial"/>
               </a:rPr>
-              <a:t>Praxismaterialien</a:t>
+              <a:t>Arbeitsblatt B: Marktbearbeitungs-Jahresplan</a:t>
             </a:r>
           </a:p>
         </p:txBody>
@@ -3969,7 +7887,778 @@
 </p:sld>
 </file>
 
-<file path=ppt/slides/slide16.xml><?xml version="1.0" encoding="utf-8"?>
+<file path=ppt/slides/slide22.xml><?xml version="1.0" encoding="utf-8"?>
+<p:sld xmlns:a="http://schemas.openxmlformats.org/drawingml/2006/main" xmlns:p="http://schemas.openxmlformats.org/presentationml/2006/main" xmlns:r="http://schemas.openxmlformats.org/officeDocument/2006/relationships">
+  <p:cSld>
+    <p:bg>
+      <p:bgPr>
+        <a:solidFill>
+          <a:srgbClr val="FFFFFF"/>
+        </a:solidFill>
+        <a:effectLst/>
+      </p:bgPr>
+    </p:bg>
+    <p:spTree>
+      <p:nvGrpSpPr>
+        <p:cNvPr id="1" name=""/>
+        <p:cNvGrpSpPr/>
+        <p:nvPr/>
+      </p:nvGrpSpPr>
+      <p:grpSpPr/>
+      <p:sp>
+        <p:nvSpPr>
+          <p:cNvPr id="2" name="Rectangle 1"/>
+          <p:cNvSpPr/>
+          <p:nvPr/>
+        </p:nvSpPr>
+        <p:spPr>
+          <a:xfrm>
+            <a:off x="0" y="0"/>
+            <a:ext cx="73152" cy="6858000"/>
+          </a:xfrm>
+          <a:prstGeom prst="rect">
+            <a:avLst/>
+          </a:prstGeom>
+          <a:solidFill>
+            <a:srgbClr val="003DA5"/>
+          </a:solidFill>
+          <a:ln>
+            <a:noFill/>
+          </a:ln>
+        </p:spPr>
+        <p:style>
+          <a:lnRef idx="1">
+            <a:schemeClr val="accent1"/>
+          </a:lnRef>
+          <a:fillRef idx="3">
+            <a:schemeClr val="accent1"/>
+          </a:fillRef>
+          <a:effectRef idx="2">
+            <a:schemeClr val="accent1"/>
+          </a:effectRef>
+          <a:fontRef idx="minor">
+            <a:schemeClr val="lt1"/>
+          </a:fontRef>
+        </p:style>
+        <p:txBody>
+          <a:bodyPr rtlCol="0" anchor="ctr"/>
+          <a:lstStyle/>
+          <a:p>
+            <a:pPr algn="ctr"/>
+          </a:p>
+        </p:txBody>
+      </p:sp>
+      <p:sp>
+        <p:nvSpPr>
+          <p:cNvPr id="3" name="TextBox 2"/>
+          <p:cNvSpPr txBox="1"/>
+          <p:nvPr/>
+        </p:nvSpPr>
+        <p:spPr>
+          <a:xfrm>
+            <a:off x="228600" y="182880"/>
+            <a:ext cx="11430000" cy="320040"/>
+          </a:xfrm>
+          <a:prstGeom prst="rect">
+            <a:avLst/>
+          </a:prstGeom>
+          <a:noFill/>
+        </p:spPr>
+        <p:txBody>
+          <a:bodyPr wrap="square">
+            <a:spAutoFit/>
+          </a:bodyPr>
+          <a:lstStyle/>
+          <a:p>
+            <a:pPr algn="l"/>
+            <a:r>
+              <a:rPr sz="900" b="0" i="0">
+                <a:solidFill>
+                  <a:srgbClr val="556575"/>
+                </a:solidFill>
+                <a:latin typeface="Arial"/>
+              </a:rPr>
+              <a:t>M15 · 4.9 Arbeitsblätter</a:t>
+            </a:r>
+          </a:p>
+        </p:txBody>
+      </p:sp>
+      <p:sp>
+        <p:nvSpPr>
+          <p:cNvPr id="4" name="TextBox 3"/>
+          <p:cNvSpPr txBox="1"/>
+          <p:nvPr/>
+        </p:nvSpPr>
+        <p:spPr>
+          <a:xfrm>
+            <a:off x="365760" y="274320"/>
+            <a:ext cx="11430000" cy="777240"/>
+          </a:xfrm>
+          <a:prstGeom prst="rect">
+            <a:avLst/>
+          </a:prstGeom>
+          <a:noFill/>
+        </p:spPr>
+        <p:txBody>
+          <a:bodyPr wrap="square">
+            <a:spAutoFit/>
+          </a:bodyPr>
+          <a:lstStyle/>
+          <a:p>
+            <a:pPr algn="l"/>
+            <a:r>
+              <a:rPr sz="2200" b="1" i="0">
+                <a:solidFill>
+                  <a:srgbClr val="003DA5"/>
+                </a:solidFill>
+                <a:latin typeface="Arial"/>
+              </a:rPr>
+              <a:t>Arbeitsblatt B: Marktbearbeitungs-Jahresplan</a:t>
+            </a:r>
+          </a:p>
+        </p:txBody>
+      </p:sp>
+      <p:sp>
+        <p:nvSpPr>
+          <p:cNvPr id="5" name="Rectangle 4"/>
+          <p:cNvSpPr/>
+          <p:nvPr/>
+        </p:nvSpPr>
+        <p:spPr>
+          <a:xfrm>
+            <a:off x="365760" y="1005840"/>
+            <a:ext cx="11430000" cy="27432"/>
+          </a:xfrm>
+          <a:prstGeom prst="rect">
+            <a:avLst/>
+          </a:prstGeom>
+          <a:solidFill>
+            <a:srgbClr val="D1D5DB"/>
+          </a:solidFill>
+          <a:ln>
+            <a:noFill/>
+          </a:ln>
+        </p:spPr>
+        <p:style>
+          <a:lnRef idx="1">
+            <a:schemeClr val="accent1"/>
+          </a:lnRef>
+          <a:fillRef idx="3">
+            <a:schemeClr val="accent1"/>
+          </a:fillRef>
+          <a:effectRef idx="2">
+            <a:schemeClr val="accent1"/>
+          </a:effectRef>
+          <a:fontRef idx="minor">
+            <a:schemeClr val="lt1"/>
+          </a:fontRef>
+        </p:style>
+        <p:txBody>
+          <a:bodyPr rtlCol="0" anchor="ctr"/>
+          <a:lstStyle/>
+          <a:p>
+            <a:pPr algn="ctr"/>
+          </a:p>
+        </p:txBody>
+      </p:sp>
+      <p:graphicFrame>
+        <p:nvGraphicFramePr>
+          <p:cNvPr id="6" name="Table 5"/>
+          <p:cNvGraphicFramePr>
+            <a:graphicFrameLocks noGrp="1"/>
+          </p:cNvGraphicFramePr>
+          <p:nvPr/>
+        </p:nvGraphicFramePr>
+        <p:xfrm>
+          <a:off x="365760" y="1143000"/>
+          <a:ext cx="11430000" cy="2377440"/>
+        </p:xfrm>
+        <a:graphic>
+          <a:graphicData uri="http://schemas.openxmlformats.org/drawingml/2006/table">
+            <a:tbl>
+              <a:tblPr firstRow="1" bandRow="1">
+                <a:tableStyleId>{5C22544A-7EE6-4342-B048-85BDC9FD1C3A}</a:tableStyleId>
+              </a:tblPr>
+              <a:tblGrid>
+                <a:gridCol w="2286000"/>
+                <a:gridCol w="2286000"/>
+                <a:gridCol w="2286000"/>
+                <a:gridCol w="2286000"/>
+                <a:gridCol w="2286000"/>
+              </a:tblGrid>
+              <a:tr h="475488">
+                <a:tc>
+                  <a:txBody>
+                    <a:bodyPr wrap="square"/>
+                    <a:lstStyle/>
+                    <a:p>
+                      <a:r>
+                        <a:rPr sz="1100" b="1">
+                          <a:solidFill>
+                            <a:srgbClr val="FFFFFF"/>
+                          </a:solidFill>
+                          <a:latin typeface="Arial"/>
+                        </a:rPr>
+                        <a:t>Quartal</a:t>
+                      </a:r>
+                    </a:p>
+                  </a:txBody>
+                  <a:tcPr>
+                    <a:solidFill>
+                      <a:srgbClr val="003DA5"/>
+                    </a:solidFill>
+                  </a:tcPr>
+                </a:tc>
+                <a:tc>
+                  <a:txBody>
+                    <a:bodyPr wrap="square"/>
+                    <a:lstStyle/>
+                    <a:p>
+                      <a:r>
+                        <a:rPr sz="1100" b="1">
+                          <a:solidFill>
+                            <a:srgbClr val="FFFFFF"/>
+                          </a:solidFill>
+                          <a:latin typeface="Arial"/>
+                        </a:rPr>
+                        <a:t>Maßnahme</a:t>
+                      </a:r>
+                    </a:p>
+                  </a:txBody>
+                  <a:tcPr>
+                    <a:solidFill>
+                      <a:srgbClr val="003DA5"/>
+                    </a:solidFill>
+                  </a:tcPr>
+                </a:tc>
+                <a:tc>
+                  <a:txBody>
+                    <a:bodyPr wrap="square"/>
+                    <a:lstStyle/>
+                    <a:p>
+                      <a:r>
+                        <a:rPr sz="1100" b="1">
+                          <a:solidFill>
+                            <a:srgbClr val="FFFFFF"/>
+                          </a:solidFill>
+                          <a:latin typeface="Arial"/>
+                        </a:rPr>
+                        <a:t>Kanal</a:t>
+                      </a:r>
+                    </a:p>
+                  </a:txBody>
+                  <a:tcPr>
+                    <a:solidFill>
+                      <a:srgbClr val="003DA5"/>
+                    </a:solidFill>
+                  </a:tcPr>
+                </a:tc>
+                <a:tc>
+                  <a:txBody>
+                    <a:bodyPr wrap="square"/>
+                    <a:lstStyle/>
+                    <a:p>
+                      <a:r>
+                        <a:rPr sz="1100" b="1">
+                          <a:solidFill>
+                            <a:srgbClr val="FFFFFF"/>
+                          </a:solidFill>
+                          <a:latin typeface="Arial"/>
+                        </a:rPr>
+                        <a:t>Ziel</a:t>
+                      </a:r>
+                    </a:p>
+                  </a:txBody>
+                  <a:tcPr>
+                    <a:solidFill>
+                      <a:srgbClr val="003DA5"/>
+                    </a:solidFill>
+                  </a:tcPr>
+                </a:tc>
+                <a:tc>
+                  <a:txBody>
+                    <a:bodyPr wrap="square"/>
+                    <a:lstStyle/>
+                    <a:p>
+                      <a:r>
+                        <a:rPr sz="1100" b="1">
+                          <a:solidFill>
+                            <a:srgbClr val="FFFFFF"/>
+                          </a:solidFill>
+                          <a:latin typeface="Arial"/>
+                        </a:rPr>
+                        <a:t>Messgröße</a:t>
+                      </a:r>
+                    </a:p>
+                  </a:txBody>
+                  <a:tcPr>
+                    <a:solidFill>
+                      <a:srgbClr val="003DA5"/>
+                    </a:solidFill>
+                  </a:tcPr>
+                </a:tc>
+              </a:tr>
+              <a:tr h="475488">
+                <a:tc>
+                  <a:txBody>
+                    <a:bodyPr wrap="square"/>
+                    <a:lstStyle/>
+                    <a:p>
+                      <a:r>
+                        <a:rPr sz="1100" b="0">
+                          <a:solidFill>
+                            <a:srgbClr val="1A1A1A"/>
+                          </a:solidFill>
+                          <a:latin typeface="Arial"/>
+                        </a:rPr>
+                        <a:t>Q1</a:t>
+                      </a:r>
+                    </a:p>
+                  </a:txBody>
+                  <a:tcPr>
+                    <a:solidFill>
+                      <a:srgbClr val="FFFFFF"/>
+                    </a:solidFill>
+                  </a:tcPr>
+                </a:tc>
+                <a:tc>
+                  <a:txBody>
+                    <a:bodyPr wrap="square"/>
+                    <a:lstStyle/>
+                    <a:p>
+                      <a:r>
+                        <a:rPr sz="1100" b="0">
+                          <a:solidFill>
+                            <a:srgbClr val="1A1A1A"/>
+                          </a:solidFill>
+                          <a:latin typeface="Arial"/>
+                        </a:rPr>
+                        <a:t/>
+                      </a:r>
+                    </a:p>
+                  </a:txBody>
+                  <a:tcPr>
+                    <a:solidFill>
+                      <a:srgbClr val="FFFFFF"/>
+                    </a:solidFill>
+                  </a:tcPr>
+                </a:tc>
+                <a:tc>
+                  <a:txBody>
+                    <a:bodyPr wrap="square"/>
+                    <a:lstStyle/>
+                    <a:p>
+                      <a:r>
+                        <a:rPr sz="1100" b="0">
+                          <a:solidFill>
+                            <a:srgbClr val="1A1A1A"/>
+                          </a:solidFill>
+                          <a:latin typeface="Arial"/>
+                        </a:rPr>
+                        <a:t/>
+                      </a:r>
+                    </a:p>
+                  </a:txBody>
+                  <a:tcPr>
+                    <a:solidFill>
+                      <a:srgbClr val="FFFFFF"/>
+                    </a:solidFill>
+                  </a:tcPr>
+                </a:tc>
+                <a:tc>
+                  <a:txBody>
+                    <a:bodyPr wrap="square"/>
+                    <a:lstStyle/>
+                    <a:p>
+                      <a:r>
+                        <a:rPr sz="1100" b="0">
+                          <a:solidFill>
+                            <a:srgbClr val="1A1A1A"/>
+                          </a:solidFill>
+                          <a:latin typeface="Arial"/>
+                        </a:rPr>
+                        <a:t/>
+                      </a:r>
+                    </a:p>
+                  </a:txBody>
+                  <a:tcPr>
+                    <a:solidFill>
+                      <a:srgbClr val="FFFFFF"/>
+                    </a:solidFill>
+                  </a:tcPr>
+                </a:tc>
+                <a:tc>
+                  <a:txBody>
+                    <a:bodyPr wrap="square"/>
+                    <a:lstStyle/>
+                    <a:p>
+                      <a:r>
+                        <a:rPr sz="1100" b="0">
+                          <a:solidFill>
+                            <a:srgbClr val="1A1A1A"/>
+                          </a:solidFill>
+                          <a:latin typeface="Arial"/>
+                        </a:rPr>
+                        <a:t/>
+                      </a:r>
+                    </a:p>
+                  </a:txBody>
+                  <a:tcPr>
+                    <a:solidFill>
+                      <a:srgbClr val="FFFFFF"/>
+                    </a:solidFill>
+                  </a:tcPr>
+                </a:tc>
+              </a:tr>
+              <a:tr h="475488">
+                <a:tc>
+                  <a:txBody>
+                    <a:bodyPr wrap="square"/>
+                    <a:lstStyle/>
+                    <a:p>
+                      <a:r>
+                        <a:rPr sz="1100" b="0">
+                          <a:solidFill>
+                            <a:srgbClr val="1A1A1A"/>
+                          </a:solidFill>
+                          <a:latin typeface="Arial"/>
+                        </a:rPr>
+                        <a:t>Q2</a:t>
+                      </a:r>
+                    </a:p>
+                  </a:txBody>
+                  <a:tcPr>
+                    <a:solidFill>
+                      <a:srgbClr val="F4F6FA"/>
+                    </a:solidFill>
+                  </a:tcPr>
+                </a:tc>
+                <a:tc>
+                  <a:txBody>
+                    <a:bodyPr wrap="square"/>
+                    <a:lstStyle/>
+                    <a:p>
+                      <a:r>
+                        <a:rPr sz="1100" b="0">
+                          <a:solidFill>
+                            <a:srgbClr val="1A1A1A"/>
+                          </a:solidFill>
+                          <a:latin typeface="Arial"/>
+                        </a:rPr>
+                        <a:t/>
+                      </a:r>
+                    </a:p>
+                  </a:txBody>
+                  <a:tcPr>
+                    <a:solidFill>
+                      <a:srgbClr val="F4F6FA"/>
+                    </a:solidFill>
+                  </a:tcPr>
+                </a:tc>
+                <a:tc>
+                  <a:txBody>
+                    <a:bodyPr wrap="square"/>
+                    <a:lstStyle/>
+                    <a:p>
+                      <a:r>
+                        <a:rPr sz="1100" b="0">
+                          <a:solidFill>
+                            <a:srgbClr val="1A1A1A"/>
+                          </a:solidFill>
+                          <a:latin typeface="Arial"/>
+                        </a:rPr>
+                        <a:t/>
+                      </a:r>
+                    </a:p>
+                  </a:txBody>
+                  <a:tcPr>
+                    <a:solidFill>
+                      <a:srgbClr val="F4F6FA"/>
+                    </a:solidFill>
+                  </a:tcPr>
+                </a:tc>
+                <a:tc>
+                  <a:txBody>
+                    <a:bodyPr wrap="square"/>
+                    <a:lstStyle/>
+                    <a:p>
+                      <a:r>
+                        <a:rPr sz="1100" b="0">
+                          <a:solidFill>
+                            <a:srgbClr val="1A1A1A"/>
+                          </a:solidFill>
+                          <a:latin typeface="Arial"/>
+                        </a:rPr>
+                        <a:t/>
+                      </a:r>
+                    </a:p>
+                  </a:txBody>
+                  <a:tcPr>
+                    <a:solidFill>
+                      <a:srgbClr val="F4F6FA"/>
+                    </a:solidFill>
+                  </a:tcPr>
+                </a:tc>
+                <a:tc>
+                  <a:txBody>
+                    <a:bodyPr wrap="square"/>
+                    <a:lstStyle/>
+                    <a:p>
+                      <a:r>
+                        <a:rPr sz="1100" b="0">
+                          <a:solidFill>
+                            <a:srgbClr val="1A1A1A"/>
+                          </a:solidFill>
+                          <a:latin typeface="Arial"/>
+                        </a:rPr>
+                        <a:t/>
+                      </a:r>
+                    </a:p>
+                  </a:txBody>
+                  <a:tcPr>
+                    <a:solidFill>
+                      <a:srgbClr val="F4F6FA"/>
+                    </a:solidFill>
+                  </a:tcPr>
+                </a:tc>
+              </a:tr>
+              <a:tr h="475488">
+                <a:tc>
+                  <a:txBody>
+                    <a:bodyPr wrap="square"/>
+                    <a:lstStyle/>
+                    <a:p>
+                      <a:r>
+                        <a:rPr sz="1100" b="0">
+                          <a:solidFill>
+                            <a:srgbClr val="1A1A1A"/>
+                          </a:solidFill>
+                          <a:latin typeface="Arial"/>
+                        </a:rPr>
+                        <a:t>Q3</a:t>
+                      </a:r>
+                    </a:p>
+                  </a:txBody>
+                  <a:tcPr>
+                    <a:solidFill>
+                      <a:srgbClr val="FFFFFF"/>
+                    </a:solidFill>
+                  </a:tcPr>
+                </a:tc>
+                <a:tc>
+                  <a:txBody>
+                    <a:bodyPr wrap="square"/>
+                    <a:lstStyle/>
+                    <a:p>
+                      <a:r>
+                        <a:rPr sz="1100" b="0">
+                          <a:solidFill>
+                            <a:srgbClr val="1A1A1A"/>
+                          </a:solidFill>
+                          <a:latin typeface="Arial"/>
+                        </a:rPr>
+                        <a:t/>
+                      </a:r>
+                    </a:p>
+                  </a:txBody>
+                  <a:tcPr>
+                    <a:solidFill>
+                      <a:srgbClr val="FFFFFF"/>
+                    </a:solidFill>
+                  </a:tcPr>
+                </a:tc>
+                <a:tc>
+                  <a:txBody>
+                    <a:bodyPr wrap="square"/>
+                    <a:lstStyle/>
+                    <a:p>
+                      <a:r>
+                        <a:rPr sz="1100" b="0">
+                          <a:solidFill>
+                            <a:srgbClr val="1A1A1A"/>
+                          </a:solidFill>
+                          <a:latin typeface="Arial"/>
+                        </a:rPr>
+                        <a:t/>
+                      </a:r>
+                    </a:p>
+                  </a:txBody>
+                  <a:tcPr>
+                    <a:solidFill>
+                      <a:srgbClr val="FFFFFF"/>
+                    </a:solidFill>
+                  </a:tcPr>
+                </a:tc>
+                <a:tc>
+                  <a:txBody>
+                    <a:bodyPr wrap="square"/>
+                    <a:lstStyle/>
+                    <a:p>
+                      <a:r>
+                        <a:rPr sz="1100" b="0">
+                          <a:solidFill>
+                            <a:srgbClr val="1A1A1A"/>
+                          </a:solidFill>
+                          <a:latin typeface="Arial"/>
+                        </a:rPr>
+                        <a:t/>
+                      </a:r>
+                    </a:p>
+                  </a:txBody>
+                  <a:tcPr>
+                    <a:solidFill>
+                      <a:srgbClr val="FFFFFF"/>
+                    </a:solidFill>
+                  </a:tcPr>
+                </a:tc>
+                <a:tc>
+                  <a:txBody>
+                    <a:bodyPr wrap="square"/>
+                    <a:lstStyle/>
+                    <a:p>
+                      <a:r>
+                        <a:rPr sz="1100" b="0">
+                          <a:solidFill>
+                            <a:srgbClr val="1A1A1A"/>
+                          </a:solidFill>
+                          <a:latin typeface="Arial"/>
+                        </a:rPr>
+                        <a:t/>
+                      </a:r>
+                    </a:p>
+                  </a:txBody>
+                  <a:tcPr>
+                    <a:solidFill>
+                      <a:srgbClr val="FFFFFF"/>
+                    </a:solidFill>
+                  </a:tcPr>
+                </a:tc>
+              </a:tr>
+              <a:tr h="475488">
+                <a:tc>
+                  <a:txBody>
+                    <a:bodyPr wrap="square"/>
+                    <a:lstStyle/>
+                    <a:p>
+                      <a:r>
+                        <a:rPr sz="1100" b="0">
+                          <a:solidFill>
+                            <a:srgbClr val="1A1A1A"/>
+                          </a:solidFill>
+                          <a:latin typeface="Arial"/>
+                        </a:rPr>
+                        <a:t>Q4</a:t>
+                      </a:r>
+                    </a:p>
+                  </a:txBody>
+                  <a:tcPr>
+                    <a:solidFill>
+                      <a:srgbClr val="F4F6FA"/>
+                    </a:solidFill>
+                  </a:tcPr>
+                </a:tc>
+                <a:tc>
+                  <a:txBody>
+                    <a:bodyPr wrap="square"/>
+                    <a:lstStyle/>
+                    <a:p>
+                      <a:r>
+                        <a:rPr sz="1100" b="0">
+                          <a:solidFill>
+                            <a:srgbClr val="1A1A1A"/>
+                          </a:solidFill>
+                          <a:latin typeface="Arial"/>
+                        </a:rPr>
+                        <a:t/>
+                      </a:r>
+                    </a:p>
+                  </a:txBody>
+                  <a:tcPr>
+                    <a:solidFill>
+                      <a:srgbClr val="F4F6FA"/>
+                    </a:solidFill>
+                  </a:tcPr>
+                </a:tc>
+                <a:tc>
+                  <a:txBody>
+                    <a:bodyPr wrap="square"/>
+                    <a:lstStyle/>
+                    <a:p>
+                      <a:r>
+                        <a:rPr sz="1100" b="0">
+                          <a:solidFill>
+                            <a:srgbClr val="1A1A1A"/>
+                          </a:solidFill>
+                          <a:latin typeface="Arial"/>
+                        </a:rPr>
+                        <a:t/>
+                      </a:r>
+                    </a:p>
+                  </a:txBody>
+                  <a:tcPr>
+                    <a:solidFill>
+                      <a:srgbClr val="F4F6FA"/>
+                    </a:solidFill>
+                  </a:tcPr>
+                </a:tc>
+                <a:tc>
+                  <a:txBody>
+                    <a:bodyPr wrap="square"/>
+                    <a:lstStyle/>
+                    <a:p>
+                      <a:r>
+                        <a:rPr sz="1100" b="0">
+                          <a:solidFill>
+                            <a:srgbClr val="1A1A1A"/>
+                          </a:solidFill>
+                          <a:latin typeface="Arial"/>
+                        </a:rPr>
+                        <a:t/>
+                      </a:r>
+                    </a:p>
+                  </a:txBody>
+                  <a:tcPr>
+                    <a:solidFill>
+                      <a:srgbClr val="F4F6FA"/>
+                    </a:solidFill>
+                  </a:tcPr>
+                </a:tc>
+                <a:tc>
+                  <a:txBody>
+                    <a:bodyPr wrap="square"/>
+                    <a:lstStyle/>
+                    <a:p>
+                      <a:r>
+                        <a:rPr sz="1100" b="0">
+                          <a:solidFill>
+                            <a:srgbClr val="1A1A1A"/>
+                          </a:solidFill>
+                          <a:latin typeface="Arial"/>
+                        </a:rPr>
+                        <a:t/>
+                      </a:r>
+                    </a:p>
+                  </a:txBody>
+                  <a:tcPr>
+                    <a:solidFill>
+                      <a:srgbClr val="F4F6FA"/>
+                    </a:solidFill>
+                  </a:tcPr>
+                </a:tc>
+              </a:tr>
+            </a:tbl>
+          </a:graphicData>
+        </a:graphic>
+      </p:graphicFrame>
+    </p:spTree>
+  </p:cSld>
+  <p:clrMapOvr>
+    <a:masterClrMapping/>
+  </p:clrMapOvr>
+</p:sld>
+</file>
+
+<file path=ppt/slides/slide23.xml><?xml version="1.0" encoding="utf-8"?>
 <p:sld xmlns:a="http://schemas.openxmlformats.org/drawingml/2006/main" xmlns:p="http://schemas.openxmlformats.org/presentationml/2006/main" xmlns:r="http://schemas.openxmlformats.org/officeDocument/2006/relationships">
   <p:cSld>
     <p:bg>
@@ -4038,8 +8727,8 @@
         </p:nvSpPr>
         <p:spPr>
           <a:xfrm>
-            <a:off x="365760" y="365760"/>
-            <a:ext cx="5486400" cy="365760"/>
+            <a:off x="365760" y="347472"/>
+            <a:ext cx="7315200" cy="384048"/>
           </a:xfrm>
           <a:prstGeom prst="rect">
             <a:avLst/>
@@ -4054,62 +8743,27 @@
           <a:p>
             <a:pPr algn="l"/>
             <a:r>
-              <a:rPr sz="1000" b="1">
+              <a:rPr sz="900" b="1" i="0">
                 <a:solidFill>
                   <a:srgbClr val="CCD6F0"/>
                 </a:solidFill>
                 <a:latin typeface="Arial"/>
               </a:rPr>
-              <a:t>PRAXISTRANSFER</a:t>
-            </a:r>
-          </a:p>
-        </p:txBody>
-      </p:sp>
-      <p:sp>
-        <p:nvSpPr>
-          <p:cNvPr id="4" name="TextBox 3"/>
-          <p:cNvSpPr txBox="1"/>
+              <a:t>PRAXISTRANSFER &amp; NÄCHSTE SCHRITTE</a:t>
+            </a:r>
+          </a:p>
+        </p:txBody>
+      </p:sp>
+      <p:sp>
+        <p:nvSpPr>
+          <p:cNvPr id="4" name="Rectangle 3"/>
+          <p:cNvSpPr/>
           <p:nvPr/>
         </p:nvSpPr>
         <p:spPr>
           <a:xfrm>
-            <a:off x="365760" y="640080"/>
-            <a:ext cx="9144000" cy="914400"/>
-          </a:xfrm>
-          <a:prstGeom prst="rect">
-            <a:avLst/>
-          </a:prstGeom>
-          <a:noFill/>
-        </p:spPr>
-        <p:txBody>
-          <a:bodyPr wrap="square">
-            <a:spAutoFit/>
-          </a:bodyPr>
-          <a:lstStyle/>
-          <a:p>
-            <a:pPr algn="l"/>
-            <a:r>
-              <a:rPr sz="2800" b="1">
-                <a:solidFill>
-                  <a:srgbClr val="FFFFFF"/>
-                </a:solidFill>
-                <a:latin typeface="Arial"/>
-              </a:rPr>
-              <a:t>Was nehmen Sie mit?</a:t>
-            </a:r>
-          </a:p>
-        </p:txBody>
-      </p:sp>
-      <p:sp>
-        <p:nvSpPr>
-          <p:cNvPr id="5" name="Rectangle 4"/>
-          <p:cNvSpPr/>
-          <p:nvPr/>
-        </p:nvSpPr>
-        <p:spPr>
-          <a:xfrm>
-            <a:off x="365760" y="1463040"/>
-            <a:ext cx="7315200" cy="27432"/>
+            <a:off x="365760" y="804672"/>
+            <a:ext cx="8229600" cy="22860"/>
           </a:xfrm>
           <a:prstGeom prst="rect">
             <a:avLst/>
@@ -4145,13 +8799,48 @@
       </p:sp>
       <p:sp>
         <p:nvSpPr>
+          <p:cNvPr id="5" name="TextBox 4"/>
+          <p:cNvSpPr txBox="1"/>
+          <p:nvPr/>
+        </p:nvSpPr>
+        <p:spPr>
+          <a:xfrm>
+            <a:off x="365760" y="960120"/>
+            <a:ext cx="9144000" cy="914400"/>
+          </a:xfrm>
+          <a:prstGeom prst="rect">
+            <a:avLst/>
+          </a:prstGeom>
+          <a:noFill/>
+        </p:spPr>
+        <p:txBody>
+          <a:bodyPr wrap="square">
+            <a:spAutoFit/>
+          </a:bodyPr>
+          <a:lstStyle/>
+          <a:p>
+            <a:pPr algn="l"/>
+            <a:r>
+              <a:rPr sz="3000" b="1" i="0">
+                <a:solidFill>
+                  <a:srgbClr val="FFFFFF"/>
+                </a:solidFill>
+                <a:latin typeface="Arial"/>
+              </a:rPr>
+              <a:t>Was nehmen Sie mit?</a:t>
+            </a:r>
+          </a:p>
+        </p:txBody>
+      </p:sp>
+      <p:sp>
+        <p:nvSpPr>
           <p:cNvPr id="6" name="TextBox 5"/>
           <p:cNvSpPr txBox="1"/>
           <p:nvPr/>
         </p:nvSpPr>
         <p:spPr>
           <a:xfrm>
-            <a:off x="365760" y="1645920"/>
+            <a:off x="365760" y="2103120"/>
             <a:ext cx="11430000" cy="4114800"/>
           </a:xfrm>
           <a:prstGeom prst="rect">
@@ -4167,7 +8856,7 @@
           <a:p>
             <a:pPr>
               <a:spcBef>
-                <a:spcPts val="400"/>
+                <a:spcPts val="500"/>
               </a:spcBef>
             </a:pPr>
             <a:r>
@@ -4192,7 +8881,7 @@
           <a:p>
             <a:pPr>
               <a:spcBef>
-                <a:spcPts val="400"/>
+                <a:spcPts val="500"/>
               </a:spcBef>
             </a:pPr>
             <a:r>
@@ -4211,7 +8900,32 @@
                 </a:solidFill>
                 <a:latin typeface="Arial"/>
               </a:rPr>
-              <a:t>Selbstcheck nach 4 Wochen: Was hat sich verändert?</a:t>
+              <a:t>Selbstcheck nach 4 Wochen: Bewerten Sie Ihre Fortschritte ehrlich.</a:t>
+            </a:r>
+          </a:p>
+          <a:p>
+            <a:pPr>
+              <a:spcBef>
+                <a:spcPts val="500"/>
+              </a:spcBef>
+            </a:pPr>
+            <a:r>
+              <a:rPr sz="1600">
+                <a:solidFill>
+                  <a:srgbClr val="E05B00"/>
+                </a:solidFill>
+                <a:latin typeface="Arial"/>
+              </a:rPr>
+              <a:t>▪  </a:t>
+            </a:r>
+            <a:r>
+              <a:rPr sz="1800">
+                <a:solidFill>
+                  <a:srgbClr val="FFFFFF"/>
+                </a:solidFill>
+                <a:latin typeface="Arial"/>
+              </a:rPr>
+              <a:t>Nächste Module: M16</a:t>
             </a:r>
           </a:p>
         </p:txBody>
@@ -4240,9 +8954,9 @@
           <a:p>
             <a:pPr algn="l"/>
             <a:r>
-              <a:rPr sz="900" b="0">
+              <a:rPr sz="900" b="0" i="0">
                 <a:solidFill>
-                  <a:srgbClr val="99AACC"/>
+                  <a:srgbClr val="889ACC"/>
                 </a:solidFill>
                 <a:latin typeface="Arial"/>
               </a:rPr>
@@ -4259,13 +8973,117 @@
 </p:sld>
 </file>
 
-<file path=ppt/slides/slide2.xml><?xml version="1.0" encoding="utf-8"?>
+<file path=ppt/slides/slide3.xml><?xml version="1.0" encoding="utf-8"?>
 <p:sld xmlns:a="http://schemas.openxmlformats.org/drawingml/2006/main" xmlns:p="http://schemas.openxmlformats.org/presentationml/2006/main" xmlns:r="http://schemas.openxmlformats.org/officeDocument/2006/relationships">
   <p:cSld>
     <p:bg>
       <p:bgPr>
         <a:solidFill>
-          <a:srgbClr val="F5F7FA"/>
+          <a:srgbClr val="1A1A1A"/>
+        </a:solidFill>
+        <a:effectLst/>
+      </p:bgPr>
+    </p:bg>
+    <p:spTree>
+      <p:nvGrpSpPr>
+        <p:cNvPr id="1" name=""/>
+        <p:cNvGrpSpPr/>
+        <p:nvPr/>
+      </p:nvGrpSpPr>
+      <p:grpSpPr/>
+      <p:sp>
+        <p:nvSpPr>
+          <p:cNvPr id="2" name="Rectangle 1"/>
+          <p:cNvSpPr/>
+          <p:nvPr/>
+        </p:nvSpPr>
+        <p:spPr>
+          <a:xfrm>
+            <a:off x="0" y="0"/>
+            <a:ext cx="73152" cy="6858000"/>
+          </a:xfrm>
+          <a:prstGeom prst="rect">
+            <a:avLst/>
+          </a:prstGeom>
+          <a:solidFill>
+            <a:srgbClr val="E05B00"/>
+          </a:solidFill>
+          <a:ln>
+            <a:noFill/>
+          </a:ln>
+        </p:spPr>
+        <p:style>
+          <a:lnRef idx="1">
+            <a:schemeClr val="accent1"/>
+          </a:lnRef>
+          <a:fillRef idx="3">
+            <a:schemeClr val="accent1"/>
+          </a:fillRef>
+          <a:effectRef idx="2">
+            <a:schemeClr val="accent1"/>
+          </a:effectRef>
+          <a:fontRef idx="minor">
+            <a:schemeClr val="lt1"/>
+          </a:fontRef>
+        </p:style>
+        <p:txBody>
+          <a:bodyPr rtlCol="0" anchor="ctr"/>
+          <a:lstStyle/>
+          <a:p>
+            <a:pPr algn="ctr"/>
+          </a:p>
+        </p:txBody>
+      </p:sp>
+      <p:sp>
+        <p:nvSpPr>
+          <p:cNvPr id="3" name="TextBox 2"/>
+          <p:cNvSpPr txBox="1"/>
+          <p:nvPr/>
+        </p:nvSpPr>
+        <p:spPr>
+          <a:xfrm>
+            <a:off x="365760" y="2011680"/>
+            <a:ext cx="11430000" cy="2011680"/>
+          </a:xfrm>
+          <a:prstGeom prst="rect">
+            <a:avLst/>
+          </a:prstGeom>
+          <a:noFill/>
+        </p:spPr>
+        <p:txBody>
+          <a:bodyPr wrap="square">
+            <a:spAutoFit/>
+          </a:bodyPr>
+          <a:lstStyle/>
+          <a:p>
+            <a:pPr algn="l"/>
+            <a:r>
+              <a:rPr sz="3600" b="1" i="0">
+                <a:solidFill>
+                  <a:srgbClr val="FFFFFF"/>
+                </a:solidFill>
+                <a:latin typeface="Arial"/>
+              </a:rPr>
+              <a:t>Vom reaktiven zum strategischen Vertrieb</a:t>
+            </a:r>
+          </a:p>
+        </p:txBody>
+      </p:sp>
+    </p:spTree>
+  </p:cSld>
+  <p:clrMapOvr>
+    <a:masterClrMapping/>
+  </p:clrMapOvr>
+</p:sld>
+</file>
+
+<file path=ppt/slides/slide4.xml><?xml version="1.0" encoding="utf-8"?>
+<p:sld xmlns:a="http://schemas.openxmlformats.org/drawingml/2006/main" xmlns:p="http://schemas.openxmlformats.org/presentationml/2006/main" xmlns:r="http://schemas.openxmlformats.org/officeDocument/2006/relationships">
+  <p:cSld>
+    <p:bg>
+      <p:bgPr>
+        <a:solidFill>
+          <a:srgbClr val="FFFFFF"/>
         </a:solidFill>
         <a:effectLst/>
       </p:bgPr>
@@ -4322,20 +9140,90 @@
       </p:sp>
       <p:sp>
         <p:nvSpPr>
-          <p:cNvPr id="3" name="Rectangle 2"/>
+          <p:cNvPr id="3" name="TextBox 2"/>
+          <p:cNvSpPr txBox="1"/>
+          <p:nvPr/>
+        </p:nvSpPr>
+        <p:spPr>
+          <a:xfrm>
+            <a:off x="228600" y="182880"/>
+            <a:ext cx="11430000" cy="320040"/>
+          </a:xfrm>
+          <a:prstGeom prst="rect">
+            <a:avLst/>
+          </a:prstGeom>
+          <a:noFill/>
+        </p:spPr>
+        <p:txBody>
+          <a:bodyPr wrap="square">
+            <a:spAutoFit/>
+          </a:bodyPr>
+          <a:lstStyle/>
+          <a:p>
+            <a:pPr algn="l"/>
+            <a:r>
+              <a:rPr sz="900" b="0" i="0">
+                <a:solidFill>
+                  <a:srgbClr val="556575"/>
+                </a:solidFill>
+                <a:latin typeface="Arial"/>
+              </a:rPr>
+              <a:t>M15 · Modulinhalte</a:t>
+            </a:r>
+          </a:p>
+        </p:txBody>
+      </p:sp>
+      <p:sp>
+        <p:nvSpPr>
+          <p:cNvPr id="4" name="TextBox 3"/>
+          <p:cNvSpPr txBox="1"/>
+          <p:nvPr/>
+        </p:nvSpPr>
+        <p:spPr>
+          <a:xfrm>
+            <a:off x="365760" y="274320"/>
+            <a:ext cx="11430000" cy="777240"/>
+          </a:xfrm>
+          <a:prstGeom prst="rect">
+            <a:avLst/>
+          </a:prstGeom>
+          <a:noFill/>
+        </p:spPr>
+        <p:txBody>
+          <a:bodyPr wrap="square">
+            <a:spAutoFit/>
+          </a:bodyPr>
+          <a:lstStyle/>
+          <a:p>
+            <a:pPr algn="l"/>
+            <a:r>
+              <a:rPr sz="2200" b="1" i="0">
+                <a:solidFill>
+                  <a:srgbClr val="003DA5"/>
+                </a:solidFill>
+                <a:latin typeface="Arial"/>
+              </a:rPr>
+              <a:t>Vom reaktiven zum strategischen Vertrieb</a:t>
+            </a:r>
+          </a:p>
+        </p:txBody>
+      </p:sp>
+      <p:sp>
+        <p:nvSpPr>
+          <p:cNvPr id="5" name="Rectangle 4"/>
           <p:cNvSpPr/>
           <p:nvPr/>
         </p:nvSpPr>
         <p:spPr>
           <a:xfrm>
-            <a:off x="365760" y="868680"/>
-            <a:ext cx="7315200" cy="27432"/>
+            <a:off x="365760" y="1005840"/>
+            <a:ext cx="11430000" cy="27432"/>
           </a:xfrm>
           <a:prstGeom prst="rect">
             <a:avLst/>
           </a:prstGeom>
           <a:solidFill>
-            <a:srgbClr val="E5E7EB"/>
+            <a:srgbClr val="D1D5DB"/>
           </a:solidFill>
           <a:ln>
             <a:noFill/>
@@ -4365,14 +9253,14 @@
       </p:sp>
       <p:sp>
         <p:nvSpPr>
-          <p:cNvPr id="4" name="TextBox 3"/>
+          <p:cNvPr id="6" name="TextBox 5"/>
           <p:cNvSpPr txBox="1"/>
           <p:nvPr/>
         </p:nvSpPr>
         <p:spPr>
           <a:xfrm>
-            <a:off x="365760" y="320040"/>
-            <a:ext cx="3657600" cy="365760"/>
+            <a:off x="365760" y="1143000"/>
+            <a:ext cx="11430000" cy="5212080"/>
           </a:xfrm>
           <a:prstGeom prst="rect">
             <a:avLst/>
@@ -4385,83 +9273,13 @@
           </a:bodyPr>
           <a:lstStyle/>
           <a:p>
-            <a:pPr algn="l"/>
-            <a:r>
-              <a:rPr sz="1000" b="1">
-                <a:solidFill>
-                  <a:srgbClr val="003DA5"/>
-                </a:solidFill>
-                <a:latin typeface="Arial"/>
-              </a:rPr>
-              <a:t>LERNZIELE</a:t>
-            </a:r>
-          </a:p>
-        </p:txBody>
-      </p:sp>
-      <p:sp>
-        <p:nvSpPr>
-          <p:cNvPr id="5" name="TextBox 4"/>
-          <p:cNvSpPr txBox="1"/>
-          <p:nvPr/>
-        </p:nvSpPr>
-        <p:spPr>
-          <a:xfrm>
-            <a:off x="365760" y="502920"/>
-            <a:ext cx="9144000" cy="548640"/>
-          </a:xfrm>
-          <a:prstGeom prst="rect">
-            <a:avLst/>
-          </a:prstGeom>
-          <a:noFill/>
-        </p:spPr>
-        <p:txBody>
-          <a:bodyPr wrap="square">
-            <a:spAutoFit/>
-          </a:bodyPr>
-          <a:lstStyle/>
-          <a:p>
-            <a:pPr algn="l"/>
-            <a:r>
-              <a:rPr sz="2200" b="1">
-                <a:solidFill>
-                  <a:srgbClr val="1A1A1A"/>
-                </a:solidFill>
-                <a:latin typeface="Arial"/>
-              </a:rPr>
-              <a:t>Was Sie nach diesem Modul können.</a:t>
-            </a:r>
-          </a:p>
-        </p:txBody>
-      </p:sp>
-      <p:sp>
-        <p:nvSpPr>
-          <p:cNvPr id="6" name="TextBox 5"/>
-          <p:cNvSpPr txBox="1"/>
-          <p:nvPr/>
-        </p:nvSpPr>
-        <p:spPr>
-          <a:xfrm>
-            <a:off x="365760" y="1188720"/>
-            <a:ext cx="11430000" cy="5303520"/>
-          </a:xfrm>
-          <a:prstGeom prst="rect">
-            <a:avLst/>
-          </a:prstGeom>
-          <a:noFill/>
-        </p:spPr>
-        <p:txBody>
-          <a:bodyPr wrap="square">
-            <a:spAutoFit/>
-          </a:bodyPr>
-          <a:lstStyle/>
-          <a:p>
             <a:pPr>
               <a:spcBef>
-                <a:spcPts val="400"/>
+                <a:spcPts val="500"/>
               </a:spcBef>
             </a:pPr>
             <a:r>
-              <a:rPr sz="1400">
+              <a:rPr sz="1500">
                 <a:solidFill>
                   <a:srgbClr val="003DA5"/>
                 </a:solidFill>
@@ -4470,23 +9288,32 @@
               <a:t>▪  </a:t>
             </a:r>
             <a:r>
-              <a:rPr sz="1600">
+              <a:rPr sz="1700" b="1">
+                <a:solidFill>
+                  <a:srgbClr val="003DA5"/>
+                </a:solidFill>
+                <a:latin typeface="Arial"/>
+              </a:rPr>
+              <a:t>explizite, schriftlich dokumentierte: </a:t>
+            </a:r>
+            <a:r>
+              <a:rPr sz="1700">
                 <a:solidFill>
                   <a:srgbClr val="1A1A1A"/>
                 </a:solidFill>
                 <a:latin typeface="Arial"/>
               </a:rPr>
-              <a:t>Das Marktpotenzial in einem selbstgewählten Zielsegment analysieren und adressierbare Neukunden-Opportunitäten schätzen</a:t>
+              <a:t>Strategie für ihr Zielsegment. Viele weitere arbeiten implizit strategisch – z. B. durch fokussierte Maßnahmenpläne in Vertriebsplanungsgesprächen – ohne dies formell als…</a:t>
             </a:r>
           </a:p>
           <a:p>
             <a:pPr>
               <a:spcBef>
-                <a:spcPts val="400"/>
+                <a:spcPts val="500"/>
               </a:spcBef>
             </a:pPr>
             <a:r>
-              <a:rPr sz="1400">
+              <a:rPr sz="1500">
                 <a:solidFill>
                   <a:srgbClr val="003DA5"/>
                 </a:solidFill>
@@ -4495,23 +9322,32 @@
               <a:t>▪  </a:t>
             </a:r>
             <a:r>
-              <a:rPr sz="1600">
+              <a:rPr sz="1700" b="1">
+                <a:solidFill>
+                  <a:srgbClr val="003DA5"/>
+                </a:solidFill>
+                <a:latin typeface="Arial"/>
+              </a:rPr>
+              <a:t>Marktbearbeitungsstrategie: </a:t>
+            </a:r>
+            <a:r>
+              <a:rPr sz="1700">
                 <a:solidFill>
                   <a:srgbClr val="1A1A1A"/>
                 </a:solidFill>
                 <a:latin typeface="Arial"/>
               </a:rPr>
-              <a:t>Die Wettbewerbsposition der eigenen Bank im Zielsegment anhand von Stärken, Schwächen und Differenzierungspotenzialen bewerten</a:t>
+              <a:t>beantwortet vier Fragen:</a:t>
             </a:r>
           </a:p>
           <a:p>
             <a:pPr>
               <a:spcBef>
-                <a:spcPts val="400"/>
+                <a:spcPts val="500"/>
               </a:spcBef>
             </a:pPr>
             <a:r>
-              <a:rPr sz="1400">
+              <a:rPr sz="1500">
                 <a:solidFill>
                   <a:srgbClr val="003DA5"/>
                 </a:solidFill>
@@ -4520,23 +9356,32 @@
               <a:t>▪  </a:t>
             </a:r>
             <a:r>
-              <a:rPr sz="1600">
+              <a:rPr sz="1700" b="1">
+                <a:solidFill>
+                  <a:srgbClr val="003DA5"/>
+                </a:solidFill>
+                <a:latin typeface="Arial"/>
+              </a:rPr>
+              <a:t>Wen?: </a:t>
+            </a:r>
+            <a:r>
+              <a:rPr sz="1700">
                 <a:solidFill>
                   <a:srgbClr val="1A1A1A"/>
                 </a:solidFill>
                 <a:latin typeface="Arial"/>
               </a:rPr>
-              <a:t>Eine Marktbearbeitungsstrategie mit Zielkunden-Kriterien, Wertversprechen und Anspracheansatz entwickeln</a:t>
+              <a:t>– Welches Kundensegment bearbeite ich mit Priorität? 2.</a:t>
             </a:r>
           </a:p>
           <a:p>
             <a:pPr>
               <a:spcBef>
-                <a:spcPts val="400"/>
+                <a:spcPts val="500"/>
               </a:spcBef>
             </a:pPr>
             <a:r>
-              <a:rPr sz="1400">
+              <a:rPr sz="1500">
                 <a:solidFill>
                   <a:srgbClr val="003DA5"/>
                 </a:solidFill>
@@ -4545,23 +9390,32 @@
               <a:t>▪  </a:t>
             </a:r>
             <a:r>
-              <a:rPr sz="1600">
+              <a:rPr sz="1700" b="1">
+                <a:solidFill>
+                  <a:srgbClr val="003DA5"/>
+                </a:solidFill>
+                <a:latin typeface="Arial"/>
+              </a:rPr>
+              <a:t>Womit?: </a:t>
+            </a:r>
+            <a:r>
+              <a:rPr sz="1700">
                 <a:solidFill>
                   <a:srgbClr val="1A1A1A"/>
                 </a:solidFill>
                 <a:latin typeface="Arial"/>
               </a:rPr>
-              <a:t>Die Eignung verschiedener Neukundenansprache-Kanäle für das Zielsegment bewerten und die zwei effektivsten wählen</a:t>
+              <a:t>– Was ist mein Wertversprechen für dieses Segment? 3.</a:t>
             </a:r>
           </a:p>
           <a:p>
             <a:pPr>
               <a:spcBef>
-                <a:spcPts val="400"/>
+                <a:spcPts val="500"/>
               </a:spcBef>
             </a:pPr>
             <a:r>
-              <a:rPr sz="1400">
+              <a:rPr sz="1500">
                 <a:solidFill>
                   <a:srgbClr val="003DA5"/>
                 </a:solidFill>
@@ -4570,13 +9424,56 @@
               <a:t>▪  </a:t>
             </a:r>
             <a:r>
-              <a:rPr sz="1600">
+              <a:rPr sz="1700" b="1">
+                <a:solidFill>
+                  <a:srgbClr val="003DA5"/>
+                </a:solidFill>
+                <a:latin typeface="Arial"/>
+              </a:rPr>
+              <a:t>Wie?: </a:t>
+            </a:r>
+            <a:r>
+              <a:rPr sz="1700">
                 <a:solidFill>
                   <a:srgbClr val="1A1A1A"/>
                 </a:solidFill>
                 <a:latin typeface="Arial"/>
               </a:rPr>
-              <a:t>Einen strukturierten Jahresplan mit Zielgrößen, Maßnahmen und Meilensteinen erstellen</a:t>
+              <a:t>– Über welche Kanäle und Maßnahmen erreiche ich diese Kunden? 4.</a:t>
+            </a:r>
+          </a:p>
+          <a:p>
+            <a:pPr>
+              <a:spcBef>
+                <a:spcPts val="500"/>
+              </a:spcBef>
+            </a:pPr>
+            <a:r>
+              <a:rPr sz="1500">
+                <a:solidFill>
+                  <a:srgbClr val="003DA5"/>
+                </a:solidFill>
+                <a:latin typeface="Arial"/>
+              </a:rPr>
+              <a:t>▪  </a:t>
+            </a:r>
+            <a:r>
+              <a:rPr sz="1700" b="1">
+                <a:solidFill>
+                  <a:srgbClr val="003DA5"/>
+                </a:solidFill>
+                <a:latin typeface="Arial"/>
+              </a:rPr>
+              <a:t>Wann?: </a:t>
+            </a:r>
+            <a:r>
+              <a:rPr sz="1700">
+                <a:solidFill>
+                  <a:srgbClr val="1A1A1A"/>
+                </a:solidFill>
+                <a:latin typeface="Arial"/>
+              </a:rPr>
+              <a:t>– Welche Meilensteine und Zielgrößen setze ich uns?</a:t>
             </a:r>
           </a:p>
         </p:txBody>
@@ -4589,7 +9486,7 @@
 </p:sld>
 </file>
 
-<file path=ppt/slides/slide3.xml><?xml version="1.0" encoding="utf-8"?>
+<file path=ppt/slides/slide5.xml><?xml version="1.0" encoding="utf-8"?>
 <p:sld xmlns:a="http://schemas.openxmlformats.org/drawingml/2006/main" xmlns:p="http://schemas.openxmlformats.org/presentationml/2006/main" xmlns:r="http://schemas.openxmlformats.org/officeDocument/2006/relationships">
   <p:cSld>
     <p:bg>
@@ -4658,8 +9555,8 @@
         </p:nvSpPr>
         <p:spPr>
           <a:xfrm>
-            <a:off x="365760" y="2286000"/>
-            <a:ext cx="11430000" cy="1828800"/>
+            <a:off x="365760" y="2011680"/>
+            <a:ext cx="11430000" cy="2011680"/>
           </a:xfrm>
           <a:prstGeom prst="rect">
             <a:avLst/>
@@ -4674,13 +9571,13 @@
           <a:p>
             <a:pPr algn="l"/>
             <a:r>
-              <a:rPr sz="3600" b="1">
+              <a:rPr sz="3600" b="1" i="0">
                 <a:solidFill>
                   <a:srgbClr val="FFFFFF"/>
                 </a:solidFill>
                 <a:latin typeface="Arial"/>
               </a:rPr>
-              <a:t>Vom reaktiven zum strategischen Vertrieb</a:t>
+              <a:t>Segmentierungskriterien</a:t>
             </a:r>
           </a:p>
         </p:txBody>
@@ -4693,7 +9590,537 @@
 </p:sld>
 </file>
 
-<file path=ppt/slides/slide4.xml><?xml version="1.0" encoding="utf-8"?>
+<file path=ppt/slides/slide6.xml><?xml version="1.0" encoding="utf-8"?>
+<p:sld xmlns:a="http://schemas.openxmlformats.org/drawingml/2006/main" xmlns:p="http://schemas.openxmlformats.org/presentationml/2006/main" xmlns:r="http://schemas.openxmlformats.org/officeDocument/2006/relationships">
+  <p:cSld>
+    <p:bg>
+      <p:bgPr>
+        <a:solidFill>
+          <a:srgbClr val="FFFFFF"/>
+        </a:solidFill>
+        <a:effectLst/>
+      </p:bgPr>
+    </p:bg>
+    <p:spTree>
+      <p:nvGrpSpPr>
+        <p:cNvPr id="1" name=""/>
+        <p:cNvGrpSpPr/>
+        <p:nvPr/>
+      </p:nvGrpSpPr>
+      <p:grpSpPr/>
+      <p:sp>
+        <p:nvSpPr>
+          <p:cNvPr id="2" name="Rectangle 1"/>
+          <p:cNvSpPr/>
+          <p:nvPr/>
+        </p:nvSpPr>
+        <p:spPr>
+          <a:xfrm>
+            <a:off x="0" y="0"/>
+            <a:ext cx="73152" cy="6858000"/>
+          </a:xfrm>
+          <a:prstGeom prst="rect">
+            <a:avLst/>
+          </a:prstGeom>
+          <a:solidFill>
+            <a:srgbClr val="003DA5"/>
+          </a:solidFill>
+          <a:ln>
+            <a:noFill/>
+          </a:ln>
+        </p:spPr>
+        <p:style>
+          <a:lnRef idx="1">
+            <a:schemeClr val="accent1"/>
+          </a:lnRef>
+          <a:fillRef idx="3">
+            <a:schemeClr val="accent1"/>
+          </a:fillRef>
+          <a:effectRef idx="2">
+            <a:schemeClr val="accent1"/>
+          </a:effectRef>
+          <a:fontRef idx="minor">
+            <a:schemeClr val="lt1"/>
+          </a:fontRef>
+        </p:style>
+        <p:txBody>
+          <a:bodyPr rtlCol="0" anchor="ctr"/>
+          <a:lstStyle/>
+          <a:p>
+            <a:pPr algn="ctr"/>
+          </a:p>
+        </p:txBody>
+      </p:sp>
+      <p:sp>
+        <p:nvSpPr>
+          <p:cNvPr id="3" name="TextBox 2"/>
+          <p:cNvSpPr txBox="1"/>
+          <p:nvPr/>
+        </p:nvSpPr>
+        <p:spPr>
+          <a:xfrm>
+            <a:off x="228600" y="182880"/>
+            <a:ext cx="11430000" cy="320040"/>
+          </a:xfrm>
+          <a:prstGeom prst="rect">
+            <a:avLst/>
+          </a:prstGeom>
+          <a:noFill/>
+        </p:spPr>
+        <p:txBody>
+          <a:bodyPr wrap="square">
+            <a:spAutoFit/>
+          </a:bodyPr>
+          <a:lstStyle/>
+          <a:p>
+            <a:pPr algn="l"/>
+            <a:r>
+              <a:rPr sz="900" b="0" i="0">
+                <a:solidFill>
+                  <a:srgbClr val="556575"/>
+                </a:solidFill>
+                <a:latin typeface="Arial"/>
+              </a:rPr>
+              <a:t>M15 · 4.2 Marktsegmentierung im Firmenkundengeschäft</a:t>
+            </a:r>
+          </a:p>
+        </p:txBody>
+      </p:sp>
+      <p:sp>
+        <p:nvSpPr>
+          <p:cNvPr id="4" name="TextBox 3"/>
+          <p:cNvSpPr txBox="1"/>
+          <p:nvPr/>
+        </p:nvSpPr>
+        <p:spPr>
+          <a:xfrm>
+            <a:off x="365760" y="274320"/>
+            <a:ext cx="11430000" cy="777240"/>
+          </a:xfrm>
+          <a:prstGeom prst="rect">
+            <a:avLst/>
+          </a:prstGeom>
+          <a:noFill/>
+        </p:spPr>
+        <p:txBody>
+          <a:bodyPr wrap="square">
+            <a:spAutoFit/>
+          </a:bodyPr>
+          <a:lstStyle/>
+          <a:p>
+            <a:pPr algn="l"/>
+            <a:r>
+              <a:rPr sz="2200" b="1" i="0">
+                <a:solidFill>
+                  <a:srgbClr val="003DA5"/>
+                </a:solidFill>
+                <a:latin typeface="Arial"/>
+              </a:rPr>
+              <a:t>Segmentierungskriterien</a:t>
+            </a:r>
+          </a:p>
+        </p:txBody>
+      </p:sp>
+      <p:sp>
+        <p:nvSpPr>
+          <p:cNvPr id="5" name="Rectangle 4"/>
+          <p:cNvSpPr/>
+          <p:nvPr/>
+        </p:nvSpPr>
+        <p:spPr>
+          <a:xfrm>
+            <a:off x="365760" y="1005840"/>
+            <a:ext cx="11430000" cy="27432"/>
+          </a:xfrm>
+          <a:prstGeom prst="rect">
+            <a:avLst/>
+          </a:prstGeom>
+          <a:solidFill>
+            <a:srgbClr val="D1D5DB"/>
+          </a:solidFill>
+          <a:ln>
+            <a:noFill/>
+          </a:ln>
+        </p:spPr>
+        <p:style>
+          <a:lnRef idx="1">
+            <a:schemeClr val="accent1"/>
+          </a:lnRef>
+          <a:fillRef idx="3">
+            <a:schemeClr val="accent1"/>
+          </a:fillRef>
+          <a:effectRef idx="2">
+            <a:schemeClr val="accent1"/>
+          </a:effectRef>
+          <a:fontRef idx="minor">
+            <a:schemeClr val="lt1"/>
+          </a:fontRef>
+        </p:style>
+        <p:txBody>
+          <a:bodyPr rtlCol="0" anchor="ctr"/>
+          <a:lstStyle/>
+          <a:p>
+            <a:pPr algn="ctr"/>
+          </a:p>
+        </p:txBody>
+      </p:sp>
+      <p:graphicFrame>
+        <p:nvGraphicFramePr>
+          <p:cNvPr id="6" name="Table 5"/>
+          <p:cNvGraphicFramePr>
+            <a:graphicFrameLocks noGrp="1"/>
+          </p:cNvGraphicFramePr>
+          <p:nvPr/>
+        </p:nvGraphicFramePr>
+        <p:xfrm>
+          <a:off x="365760" y="1143000"/>
+          <a:ext cx="11430000" cy="3328416"/>
+        </p:xfrm>
+        <a:graphic>
+          <a:graphicData uri="http://schemas.openxmlformats.org/drawingml/2006/table">
+            <a:tbl>
+              <a:tblPr firstRow="1" bandRow="1">
+                <a:tableStyleId>{5C22544A-7EE6-4342-B048-85BDC9FD1C3A}</a:tableStyleId>
+              </a:tblPr>
+              <a:tblGrid>
+                <a:gridCol w="5715000"/>
+                <a:gridCol w="5715000"/>
+              </a:tblGrid>
+              <a:tr h="475488">
+                <a:tc>
+                  <a:txBody>
+                    <a:bodyPr wrap="square"/>
+                    <a:lstStyle/>
+                    <a:p>
+                      <a:r>
+                        <a:rPr sz="1100" b="1">
+                          <a:solidFill>
+                            <a:srgbClr val="FFFFFF"/>
+                          </a:solidFill>
+                          <a:latin typeface="Arial"/>
+                        </a:rPr>
+                        <a:t>Kriterium</a:t>
+                      </a:r>
+                    </a:p>
+                  </a:txBody>
+                  <a:tcPr>
+                    <a:solidFill>
+                      <a:srgbClr val="003DA5"/>
+                    </a:solidFill>
+                  </a:tcPr>
+                </a:tc>
+                <a:tc>
+                  <a:txBody>
+                    <a:bodyPr wrap="square"/>
+                    <a:lstStyle/>
+                    <a:p>
+                      <a:r>
+                        <a:rPr sz="1100" b="1">
+                          <a:solidFill>
+                            <a:srgbClr val="FFFFFF"/>
+                          </a:solidFill>
+                          <a:latin typeface="Arial"/>
+                        </a:rPr>
+                        <a:t>Ausprägung (Beispiele)</a:t>
+                      </a:r>
+                    </a:p>
+                  </a:txBody>
+                  <a:tcPr>
+                    <a:solidFill>
+                      <a:srgbClr val="003DA5"/>
+                    </a:solidFill>
+                  </a:tcPr>
+                </a:tc>
+              </a:tr>
+              <a:tr h="475488">
+                <a:tc>
+                  <a:txBody>
+                    <a:bodyPr wrap="square"/>
+                    <a:lstStyle/>
+                    <a:p>
+                      <a:r>
+                        <a:rPr sz="1100" b="0">
+                          <a:solidFill>
+                            <a:srgbClr val="1A1A1A"/>
+                          </a:solidFill>
+                          <a:latin typeface="Arial"/>
+                        </a:rPr>
+                        <a:t>Umsatzgröße</a:t>
+                      </a:r>
+                    </a:p>
+                  </a:txBody>
+                  <a:tcPr>
+                    <a:solidFill>
+                      <a:srgbClr val="FFFFFF"/>
+                    </a:solidFill>
+                  </a:tcPr>
+                </a:tc>
+                <a:tc>
+                  <a:txBody>
+                    <a:bodyPr wrap="square"/>
+                    <a:lstStyle/>
+                    <a:p>
+                      <a:r>
+                        <a:rPr sz="1100" b="0">
+                          <a:solidFill>
+                            <a:srgbClr val="1A1A1A"/>
+                          </a:solidFill>
+                          <a:latin typeface="Arial"/>
+                        </a:rPr>
+                        <a:t>Micro (&lt; 500k), Klein (500k–2M), Mittel (2–10M), Groß (&gt; 10M) (Richtwerte – Ihre Bank hat ggf. eigene BVR-konforme Größenklassen; bitte mit Ihrer Vertriebssteuerung abgleichen)</a:t>
+                      </a:r>
+                    </a:p>
+                  </a:txBody>
+                  <a:tcPr>
+                    <a:solidFill>
+                      <a:srgbClr val="FFFFFF"/>
+                    </a:solidFill>
+                  </a:tcPr>
+                </a:tc>
+              </a:tr>
+              <a:tr h="475488">
+                <a:tc>
+                  <a:txBody>
+                    <a:bodyPr wrap="square"/>
+                    <a:lstStyle/>
+                    <a:p>
+                      <a:r>
+                        <a:rPr sz="1100" b="0">
+                          <a:solidFill>
+                            <a:srgbClr val="1A1A1A"/>
+                          </a:solidFill>
+                          <a:latin typeface="Arial"/>
+                        </a:rPr>
+                        <a:t>Branche</a:t>
+                      </a:r>
+                    </a:p>
+                  </a:txBody>
+                  <a:tcPr>
+                    <a:solidFill>
+                      <a:srgbClr val="F4F6FA"/>
+                    </a:solidFill>
+                  </a:tcPr>
+                </a:tc>
+                <a:tc>
+                  <a:txBody>
+                    <a:bodyPr wrap="square"/>
+                    <a:lstStyle/>
+                    <a:p>
+                      <a:r>
+                        <a:rPr sz="1100" b="0">
+                          <a:solidFill>
+                            <a:srgbClr val="1A1A1A"/>
+                          </a:solidFill>
+                          <a:latin typeface="Arial"/>
+                        </a:rPr>
+                        <a:t>Verarbeitendes Gewerbe, Bau/Handwerk, Landwirtschaft, Handel, Dienstleistung, Heilberufe</a:t>
+                      </a:r>
+                    </a:p>
+                  </a:txBody>
+                  <a:tcPr>
+                    <a:solidFill>
+                      <a:srgbClr val="F4F6FA"/>
+                    </a:solidFill>
+                  </a:tcPr>
+                </a:tc>
+              </a:tr>
+              <a:tr h="475488">
+                <a:tc>
+                  <a:txBody>
+                    <a:bodyPr wrap="square"/>
+                    <a:lstStyle/>
+                    <a:p>
+                      <a:r>
+                        <a:rPr sz="1100" b="0">
+                          <a:solidFill>
+                            <a:srgbClr val="1A1A1A"/>
+                          </a:solidFill>
+                          <a:latin typeface="Arial"/>
+                        </a:rPr>
+                        <a:t>Region</a:t>
+                      </a:r>
+                    </a:p>
+                  </a:txBody>
+                  <a:tcPr>
+                    <a:solidFill>
+                      <a:srgbClr val="FFFFFF"/>
+                    </a:solidFill>
+                  </a:tcPr>
+                </a:tc>
+                <a:tc>
+                  <a:txBody>
+                    <a:bodyPr wrap="square"/>
+                    <a:lstStyle/>
+                    <a:p>
+                      <a:r>
+                        <a:rPr sz="1100" b="0">
+                          <a:solidFill>
+                            <a:srgbClr val="1A1A1A"/>
+                          </a:solidFill>
+                          <a:latin typeface="Arial"/>
+                        </a:rPr>
+                        <a:t>Kerngeschäftsgebiet, Randzone, Nachbarregion Wettbewerb</a:t>
+                      </a:r>
+                    </a:p>
+                  </a:txBody>
+                  <a:tcPr>
+                    <a:solidFill>
+                      <a:srgbClr val="FFFFFF"/>
+                    </a:solidFill>
+                  </a:tcPr>
+                </a:tc>
+              </a:tr>
+              <a:tr h="475488">
+                <a:tc>
+                  <a:txBody>
+                    <a:bodyPr wrap="square"/>
+                    <a:lstStyle/>
+                    <a:p>
+                      <a:r>
+                        <a:rPr sz="1100" b="0">
+                          <a:solidFill>
+                            <a:srgbClr val="1A1A1A"/>
+                          </a:solidFill>
+                          <a:latin typeface="Arial"/>
+                        </a:rPr>
+                        <a:t>Lebenszyklus</a:t>
+                      </a:r>
+                    </a:p>
+                  </a:txBody>
+                  <a:tcPr>
+                    <a:solidFill>
+                      <a:srgbClr val="F4F6FA"/>
+                    </a:solidFill>
+                  </a:tcPr>
+                </a:tc>
+                <a:tc>
+                  <a:txBody>
+                    <a:bodyPr wrap="square"/>
+                    <a:lstStyle/>
+                    <a:p>
+                      <a:r>
+                        <a:rPr sz="1100" b="0">
+                          <a:solidFill>
+                            <a:srgbClr val="1A1A1A"/>
+                          </a:solidFill>
+                          <a:latin typeface="Arial"/>
+                        </a:rPr>
+                        <a:t>Gründer, Wachstum, Konsolidierung, Nachfolge</a:t>
+                      </a:r>
+                    </a:p>
+                  </a:txBody>
+                  <a:tcPr>
+                    <a:solidFill>
+                      <a:srgbClr val="F4F6FA"/>
+                    </a:solidFill>
+                  </a:tcPr>
+                </a:tc>
+              </a:tr>
+              <a:tr h="475488">
+                <a:tc>
+                  <a:txBody>
+                    <a:bodyPr wrap="square"/>
+                    <a:lstStyle/>
+                    <a:p>
+                      <a:r>
+                        <a:rPr sz="1100" b="0">
+                          <a:solidFill>
+                            <a:srgbClr val="1A1A1A"/>
+                          </a:solidFill>
+                          <a:latin typeface="Arial"/>
+                        </a:rPr>
+                        <a:t>Bankbeziehung</a:t>
+                      </a:r>
+                    </a:p>
+                  </a:txBody>
+                  <a:tcPr>
+                    <a:solidFill>
+                      <a:srgbClr val="FFFFFF"/>
+                    </a:solidFill>
+                  </a:tcPr>
+                </a:tc>
+                <a:tc>
+                  <a:txBody>
+                    <a:bodyPr wrap="square"/>
+                    <a:lstStyle/>
+                    <a:p>
+                      <a:r>
+                        <a:rPr sz="1100" b="0">
+                          <a:solidFill>
+                            <a:srgbClr val="1A1A1A"/>
+                          </a:solidFill>
+                          <a:latin typeface="Arial"/>
+                        </a:rPr>
+                        <a:t>Hauptbankverbindung (uns), Nebenbankverbindung, Neukunde</a:t>
+                      </a:r>
+                    </a:p>
+                  </a:txBody>
+                  <a:tcPr>
+                    <a:solidFill>
+                      <a:srgbClr val="FFFFFF"/>
+                    </a:solidFill>
+                  </a:tcPr>
+                </a:tc>
+              </a:tr>
+              <a:tr h="475488">
+                <a:tc>
+                  <a:txBody>
+                    <a:bodyPr wrap="square"/>
+                    <a:lstStyle/>
+                    <a:p>
+                      <a:r>
+                        <a:rPr sz="1100" b="0">
+                          <a:solidFill>
+                            <a:srgbClr val="1A1A1A"/>
+                          </a:solidFill>
+                          <a:latin typeface="Arial"/>
+                        </a:rPr>
+                        <a:t>Strategisches Profil</a:t>
+                      </a:r>
+                    </a:p>
+                  </a:txBody>
+                  <a:tcPr>
+                    <a:solidFill>
+                      <a:srgbClr val="F4F6FA"/>
+                    </a:solidFill>
+                  </a:tcPr>
+                </a:tc>
+                <a:tc>
+                  <a:txBody>
+                    <a:bodyPr wrap="square"/>
+                    <a:lstStyle/>
+                    <a:p>
+                      <a:r>
+                        <a:rPr sz="1100" b="0">
+                          <a:solidFill>
+                            <a:srgbClr val="1A1A1A"/>
+                          </a:solidFill>
+                          <a:latin typeface="Arial"/>
+                        </a:rPr>
+                        <a:t>Kapitalbedarf hoch, Investitionsbereitschaft hoch, Verbundpotenzial hoch</a:t>
+                      </a:r>
+                    </a:p>
+                  </a:txBody>
+                  <a:tcPr>
+                    <a:solidFill>
+                      <a:srgbClr val="F4F6FA"/>
+                    </a:solidFill>
+                  </a:tcPr>
+                </a:tc>
+              </a:tr>
+            </a:tbl>
+          </a:graphicData>
+        </a:graphic>
+      </p:graphicFrame>
+    </p:spTree>
+  </p:cSld>
+  <p:clrMapOvr>
+    <a:masterClrMapping/>
+  </p:clrMapOvr>
+</p:sld>
+</file>
+
+<file path=ppt/slides/slide7.xml><?xml version="1.0" encoding="utf-8"?>
 <p:sld xmlns:a="http://schemas.openxmlformats.org/drawingml/2006/main" xmlns:p="http://schemas.openxmlformats.org/presentationml/2006/main" xmlns:r="http://schemas.openxmlformats.org/officeDocument/2006/relationships">
   <p:cSld>
     <p:bg>
@@ -4762,8 +10189,8 @@
         </p:nvSpPr>
         <p:spPr>
           <a:xfrm>
-            <a:off x="365760" y="2286000"/>
-            <a:ext cx="11430000" cy="1828800"/>
+            <a:off x="365760" y="2011680"/>
+            <a:ext cx="11430000" cy="2011680"/>
           </a:xfrm>
           <a:prstGeom prst="rect">
             <a:avLst/>
@@ -4778,13 +10205,13 @@
           <a:p>
             <a:pPr algn="l"/>
             <a:r>
-              <a:rPr sz="3600" b="1">
+              <a:rPr sz="3600" b="1" i="0">
                 <a:solidFill>
                   <a:srgbClr val="FFFFFF"/>
                 </a:solidFill>
                 <a:latin typeface="Arial"/>
               </a:rPr>
-              <a:t>Segmentierungskriterien</a:t>
+              <a:t>Das Scoring-Modell zur Segmentpriorisierung</a:t>
             </a:r>
           </a:p>
         </p:txBody>
@@ -4797,7 +10224,890 @@
 </p:sld>
 </file>
 
-<file path=ppt/slides/slide5.xml><?xml version="1.0" encoding="utf-8"?>
+<file path=ppt/slides/slide8.xml><?xml version="1.0" encoding="utf-8"?>
+<p:sld xmlns:a="http://schemas.openxmlformats.org/drawingml/2006/main" xmlns:p="http://schemas.openxmlformats.org/presentationml/2006/main" xmlns:r="http://schemas.openxmlformats.org/officeDocument/2006/relationships">
+  <p:cSld>
+    <p:bg>
+      <p:bgPr>
+        <a:solidFill>
+          <a:srgbClr val="FFFFFF"/>
+        </a:solidFill>
+        <a:effectLst/>
+      </p:bgPr>
+    </p:bg>
+    <p:spTree>
+      <p:nvGrpSpPr>
+        <p:cNvPr id="1" name=""/>
+        <p:cNvGrpSpPr/>
+        <p:nvPr/>
+      </p:nvGrpSpPr>
+      <p:grpSpPr/>
+      <p:sp>
+        <p:nvSpPr>
+          <p:cNvPr id="2" name="Rectangle 1"/>
+          <p:cNvSpPr/>
+          <p:nvPr/>
+        </p:nvSpPr>
+        <p:spPr>
+          <a:xfrm>
+            <a:off x="0" y="0"/>
+            <a:ext cx="73152" cy="6858000"/>
+          </a:xfrm>
+          <a:prstGeom prst="rect">
+            <a:avLst/>
+          </a:prstGeom>
+          <a:solidFill>
+            <a:srgbClr val="003DA5"/>
+          </a:solidFill>
+          <a:ln>
+            <a:noFill/>
+          </a:ln>
+        </p:spPr>
+        <p:style>
+          <a:lnRef idx="1">
+            <a:schemeClr val="accent1"/>
+          </a:lnRef>
+          <a:fillRef idx="3">
+            <a:schemeClr val="accent1"/>
+          </a:fillRef>
+          <a:effectRef idx="2">
+            <a:schemeClr val="accent1"/>
+          </a:effectRef>
+          <a:fontRef idx="minor">
+            <a:schemeClr val="lt1"/>
+          </a:fontRef>
+        </p:style>
+        <p:txBody>
+          <a:bodyPr rtlCol="0" anchor="ctr"/>
+          <a:lstStyle/>
+          <a:p>
+            <a:pPr algn="ctr"/>
+          </a:p>
+        </p:txBody>
+      </p:sp>
+      <p:sp>
+        <p:nvSpPr>
+          <p:cNvPr id="3" name="TextBox 2"/>
+          <p:cNvSpPr txBox="1"/>
+          <p:nvPr/>
+        </p:nvSpPr>
+        <p:spPr>
+          <a:xfrm>
+            <a:off x="228600" y="182880"/>
+            <a:ext cx="11430000" cy="320040"/>
+          </a:xfrm>
+          <a:prstGeom prst="rect">
+            <a:avLst/>
+          </a:prstGeom>
+          <a:noFill/>
+        </p:spPr>
+        <p:txBody>
+          <a:bodyPr wrap="square">
+            <a:spAutoFit/>
+          </a:bodyPr>
+          <a:lstStyle/>
+          <a:p>
+            <a:pPr algn="l"/>
+            <a:r>
+              <a:rPr sz="900" b="0" i="0">
+                <a:solidFill>
+                  <a:srgbClr val="556575"/>
+                </a:solidFill>
+                <a:latin typeface="Arial"/>
+              </a:rPr>
+              <a:t>M15 · 4.2 Marktsegmentierung im Firmenkundengeschäft</a:t>
+            </a:r>
+          </a:p>
+        </p:txBody>
+      </p:sp>
+      <p:sp>
+        <p:nvSpPr>
+          <p:cNvPr id="4" name="TextBox 3"/>
+          <p:cNvSpPr txBox="1"/>
+          <p:nvPr/>
+        </p:nvSpPr>
+        <p:spPr>
+          <a:xfrm>
+            <a:off x="365760" y="274320"/>
+            <a:ext cx="11430000" cy="777240"/>
+          </a:xfrm>
+          <a:prstGeom prst="rect">
+            <a:avLst/>
+          </a:prstGeom>
+          <a:noFill/>
+        </p:spPr>
+        <p:txBody>
+          <a:bodyPr wrap="square">
+            <a:spAutoFit/>
+          </a:bodyPr>
+          <a:lstStyle/>
+          <a:p>
+            <a:pPr algn="l"/>
+            <a:r>
+              <a:rPr sz="2200" b="1" i="0">
+                <a:solidFill>
+                  <a:srgbClr val="003DA5"/>
+                </a:solidFill>
+                <a:latin typeface="Arial"/>
+              </a:rPr>
+              <a:t>Das Scoring-Modell zur Segmentpriorisierung</a:t>
+            </a:r>
+          </a:p>
+        </p:txBody>
+      </p:sp>
+      <p:sp>
+        <p:nvSpPr>
+          <p:cNvPr id="5" name="Rectangle 4"/>
+          <p:cNvSpPr/>
+          <p:nvPr/>
+        </p:nvSpPr>
+        <p:spPr>
+          <a:xfrm>
+            <a:off x="365760" y="1005840"/>
+            <a:ext cx="11430000" cy="27432"/>
+          </a:xfrm>
+          <a:prstGeom prst="rect">
+            <a:avLst/>
+          </a:prstGeom>
+          <a:solidFill>
+            <a:srgbClr val="D1D5DB"/>
+          </a:solidFill>
+          <a:ln>
+            <a:noFill/>
+          </a:ln>
+        </p:spPr>
+        <p:style>
+          <a:lnRef idx="1">
+            <a:schemeClr val="accent1"/>
+          </a:lnRef>
+          <a:fillRef idx="3">
+            <a:schemeClr val="accent1"/>
+          </a:fillRef>
+          <a:effectRef idx="2">
+            <a:schemeClr val="accent1"/>
+          </a:effectRef>
+          <a:fontRef idx="minor">
+            <a:schemeClr val="lt1"/>
+          </a:fontRef>
+        </p:style>
+        <p:txBody>
+          <a:bodyPr rtlCol="0" anchor="ctr"/>
+          <a:lstStyle/>
+          <a:p>
+            <a:pPr algn="ctr"/>
+          </a:p>
+        </p:txBody>
+      </p:sp>
+      <p:graphicFrame>
+        <p:nvGraphicFramePr>
+          <p:cNvPr id="6" name="Table 5"/>
+          <p:cNvGraphicFramePr>
+            <a:graphicFrameLocks noGrp="1"/>
+          </p:cNvGraphicFramePr>
+          <p:nvPr/>
+        </p:nvGraphicFramePr>
+        <p:xfrm>
+          <a:off x="365760" y="1143000"/>
+          <a:ext cx="11430000" cy="2852928"/>
+        </p:xfrm>
+        <a:graphic>
+          <a:graphicData uri="http://schemas.openxmlformats.org/drawingml/2006/table">
+            <a:tbl>
+              <a:tblPr firstRow="1" bandRow="1">
+                <a:tableStyleId>{5C22544A-7EE6-4342-B048-85BDC9FD1C3A}</a:tableStyleId>
+              </a:tblPr>
+              <a:tblGrid>
+                <a:gridCol w="2286000"/>
+                <a:gridCol w="2286000"/>
+                <a:gridCol w="2286000"/>
+                <a:gridCol w="2286000"/>
+                <a:gridCol w="2286000"/>
+              </a:tblGrid>
+              <a:tr h="475488">
+                <a:tc>
+                  <a:txBody>
+                    <a:bodyPr wrap="square"/>
+                    <a:lstStyle/>
+                    <a:p>
+                      <a:r>
+                        <a:rPr sz="1100" b="1">
+                          <a:solidFill>
+                            <a:srgbClr val="FFFFFF"/>
+                          </a:solidFill>
+                          <a:latin typeface="Arial"/>
+                        </a:rPr>
+                        <a:t>Kriterium</a:t>
+                      </a:r>
+                    </a:p>
+                  </a:txBody>
+                  <a:tcPr>
+                    <a:solidFill>
+                      <a:srgbClr val="003DA5"/>
+                    </a:solidFill>
+                  </a:tcPr>
+                </a:tc>
+                <a:tc>
+                  <a:txBody>
+                    <a:bodyPr wrap="square"/>
+                    <a:lstStyle/>
+                    <a:p>
+                      <a:r>
+                        <a:rPr sz="1100" b="1">
+                          <a:solidFill>
+                            <a:srgbClr val="FFFFFF"/>
+                          </a:solidFill>
+                          <a:latin typeface="Arial"/>
+                        </a:rPr>
+                        <a:t>Gewichtung</a:t>
+                      </a:r>
+                    </a:p>
+                  </a:txBody>
+                  <a:tcPr>
+                    <a:solidFill>
+                      <a:srgbClr val="003DA5"/>
+                    </a:solidFill>
+                  </a:tcPr>
+                </a:tc>
+                <a:tc>
+                  <a:txBody>
+                    <a:bodyPr wrap="square"/>
+                    <a:lstStyle/>
+                    <a:p>
+                      <a:r>
+                        <a:rPr sz="1100" b="1">
+                          <a:solidFill>
+                            <a:srgbClr val="FFFFFF"/>
+                          </a:solidFill>
+                          <a:latin typeface="Arial"/>
+                        </a:rPr>
+                        <a:t>Segment A</a:t>
+                      </a:r>
+                    </a:p>
+                  </a:txBody>
+                  <a:tcPr>
+                    <a:solidFill>
+                      <a:srgbClr val="003DA5"/>
+                    </a:solidFill>
+                  </a:tcPr>
+                </a:tc>
+                <a:tc>
+                  <a:txBody>
+                    <a:bodyPr wrap="square"/>
+                    <a:lstStyle/>
+                    <a:p>
+                      <a:r>
+                        <a:rPr sz="1100" b="1">
+                          <a:solidFill>
+                            <a:srgbClr val="FFFFFF"/>
+                          </a:solidFill>
+                          <a:latin typeface="Arial"/>
+                        </a:rPr>
+                        <a:t>Segment B</a:t>
+                      </a:r>
+                    </a:p>
+                  </a:txBody>
+                  <a:tcPr>
+                    <a:solidFill>
+                      <a:srgbClr val="003DA5"/>
+                    </a:solidFill>
+                  </a:tcPr>
+                </a:tc>
+                <a:tc>
+                  <a:txBody>
+                    <a:bodyPr wrap="square"/>
+                    <a:lstStyle/>
+                    <a:p>
+                      <a:r>
+                        <a:rPr sz="1100" b="1">
+                          <a:solidFill>
+                            <a:srgbClr val="FFFFFF"/>
+                          </a:solidFill>
+                          <a:latin typeface="Arial"/>
+                        </a:rPr>
+                        <a:t>Segment C</a:t>
+                      </a:r>
+                    </a:p>
+                  </a:txBody>
+                  <a:tcPr>
+                    <a:solidFill>
+                      <a:srgbClr val="003DA5"/>
+                    </a:solidFill>
+                  </a:tcPr>
+                </a:tc>
+              </a:tr>
+              <a:tr h="475488">
+                <a:tc>
+                  <a:txBody>
+                    <a:bodyPr wrap="square"/>
+                    <a:lstStyle/>
+                    <a:p>
+                      <a:r>
+                        <a:rPr sz="1100" b="0">
+                          <a:solidFill>
+                            <a:srgbClr val="1A1A1A"/>
+                          </a:solidFill>
+                          <a:latin typeface="Arial"/>
+                        </a:rPr>
+                        <a:t>Marktgröße (Anzahl Unternehmen in Region)</a:t>
+                      </a:r>
+                    </a:p>
+                  </a:txBody>
+                  <a:tcPr>
+                    <a:solidFill>
+                      <a:srgbClr val="FFFFFF"/>
+                    </a:solidFill>
+                  </a:tcPr>
+                </a:tc>
+                <a:tc>
+                  <a:txBody>
+                    <a:bodyPr wrap="square"/>
+                    <a:lstStyle/>
+                    <a:p>
+                      <a:r>
+                        <a:rPr sz="1100" b="0">
+                          <a:solidFill>
+                            <a:srgbClr val="1A1A1A"/>
+                          </a:solidFill>
+                          <a:latin typeface="Arial"/>
+                        </a:rPr>
+                        <a:t>25 %</a:t>
+                      </a:r>
+                    </a:p>
+                  </a:txBody>
+                  <a:tcPr>
+                    <a:solidFill>
+                      <a:srgbClr val="FFFFFF"/>
+                    </a:solidFill>
+                  </a:tcPr>
+                </a:tc>
+                <a:tc>
+                  <a:txBody>
+                    <a:bodyPr wrap="square"/>
+                    <a:lstStyle/>
+                    <a:p>
+                      <a:r>
+                        <a:rPr sz="1100" b="0">
+                          <a:solidFill>
+                            <a:srgbClr val="1A1A1A"/>
+                          </a:solidFill>
+                          <a:latin typeface="Arial"/>
+                        </a:rPr>
+                        <a:t/>
+                      </a:r>
+                    </a:p>
+                  </a:txBody>
+                  <a:tcPr>
+                    <a:solidFill>
+                      <a:srgbClr val="FFFFFF"/>
+                    </a:solidFill>
+                  </a:tcPr>
+                </a:tc>
+                <a:tc>
+                  <a:txBody>
+                    <a:bodyPr wrap="square"/>
+                    <a:lstStyle/>
+                    <a:p>
+                      <a:r>
+                        <a:rPr sz="1100" b="0">
+                          <a:solidFill>
+                            <a:srgbClr val="1A1A1A"/>
+                          </a:solidFill>
+                          <a:latin typeface="Arial"/>
+                        </a:rPr>
+                        <a:t/>
+                      </a:r>
+                    </a:p>
+                  </a:txBody>
+                  <a:tcPr>
+                    <a:solidFill>
+                      <a:srgbClr val="FFFFFF"/>
+                    </a:solidFill>
+                  </a:tcPr>
+                </a:tc>
+                <a:tc>
+                  <a:txBody>
+                    <a:bodyPr wrap="square"/>
+                    <a:lstStyle/>
+                    <a:p>
+                      <a:r>
+                        <a:rPr sz="1100" b="0">
+                          <a:solidFill>
+                            <a:srgbClr val="1A1A1A"/>
+                          </a:solidFill>
+                          <a:latin typeface="Arial"/>
+                        </a:rPr>
+                        <a:t/>
+                      </a:r>
+                    </a:p>
+                  </a:txBody>
+                  <a:tcPr>
+                    <a:solidFill>
+                      <a:srgbClr val="FFFFFF"/>
+                    </a:solidFill>
+                  </a:tcPr>
+                </a:tc>
+              </a:tr>
+              <a:tr h="475488">
+                <a:tc>
+                  <a:txBody>
+                    <a:bodyPr wrap="square"/>
+                    <a:lstStyle/>
+                    <a:p>
+                      <a:r>
+                        <a:rPr sz="1100" b="0">
+                          <a:solidFill>
+                            <a:srgbClr val="1A1A1A"/>
+                          </a:solidFill>
+                          <a:latin typeface="Arial"/>
+                        </a:rPr>
+                        <a:t>Durchschnittlicher Ertragspotenzial (DB)</a:t>
+                      </a:r>
+                    </a:p>
+                  </a:txBody>
+                  <a:tcPr>
+                    <a:solidFill>
+                      <a:srgbClr val="F4F6FA"/>
+                    </a:solidFill>
+                  </a:tcPr>
+                </a:tc>
+                <a:tc>
+                  <a:txBody>
+                    <a:bodyPr wrap="square"/>
+                    <a:lstStyle/>
+                    <a:p>
+                      <a:r>
+                        <a:rPr sz="1100" b="0">
+                          <a:solidFill>
+                            <a:srgbClr val="1A1A1A"/>
+                          </a:solidFill>
+                          <a:latin typeface="Arial"/>
+                        </a:rPr>
+                        <a:t>30 %</a:t>
+                      </a:r>
+                    </a:p>
+                  </a:txBody>
+                  <a:tcPr>
+                    <a:solidFill>
+                      <a:srgbClr val="F4F6FA"/>
+                    </a:solidFill>
+                  </a:tcPr>
+                </a:tc>
+                <a:tc>
+                  <a:txBody>
+                    <a:bodyPr wrap="square"/>
+                    <a:lstStyle/>
+                    <a:p>
+                      <a:r>
+                        <a:rPr sz="1100" b="0">
+                          <a:solidFill>
+                            <a:srgbClr val="1A1A1A"/>
+                          </a:solidFill>
+                          <a:latin typeface="Arial"/>
+                        </a:rPr>
+                        <a:t/>
+                      </a:r>
+                    </a:p>
+                  </a:txBody>
+                  <a:tcPr>
+                    <a:solidFill>
+                      <a:srgbClr val="F4F6FA"/>
+                    </a:solidFill>
+                  </a:tcPr>
+                </a:tc>
+                <a:tc>
+                  <a:txBody>
+                    <a:bodyPr wrap="square"/>
+                    <a:lstStyle/>
+                    <a:p>
+                      <a:r>
+                        <a:rPr sz="1100" b="0">
+                          <a:solidFill>
+                            <a:srgbClr val="1A1A1A"/>
+                          </a:solidFill>
+                          <a:latin typeface="Arial"/>
+                        </a:rPr>
+                        <a:t/>
+                      </a:r>
+                    </a:p>
+                  </a:txBody>
+                  <a:tcPr>
+                    <a:solidFill>
+                      <a:srgbClr val="F4F6FA"/>
+                    </a:solidFill>
+                  </a:tcPr>
+                </a:tc>
+                <a:tc>
+                  <a:txBody>
+                    <a:bodyPr wrap="square"/>
+                    <a:lstStyle/>
+                    <a:p>
+                      <a:r>
+                        <a:rPr sz="1100" b="0">
+                          <a:solidFill>
+                            <a:srgbClr val="1A1A1A"/>
+                          </a:solidFill>
+                          <a:latin typeface="Arial"/>
+                        </a:rPr>
+                        <a:t/>
+                      </a:r>
+                    </a:p>
+                  </a:txBody>
+                  <a:tcPr>
+                    <a:solidFill>
+                      <a:srgbClr val="F4F6FA"/>
+                    </a:solidFill>
+                  </a:tcPr>
+                </a:tc>
+              </a:tr>
+              <a:tr h="475488">
+                <a:tc>
+                  <a:txBody>
+                    <a:bodyPr wrap="square"/>
+                    <a:lstStyle/>
+                    <a:p>
+                      <a:r>
+                        <a:rPr sz="1100" b="0">
+                          <a:solidFill>
+                            <a:srgbClr val="1A1A1A"/>
+                          </a:solidFill>
+                          <a:latin typeface="Arial"/>
+                        </a:rPr>
+                        <a:t>Eigene Expertise/Stärke in diesem Segment</a:t>
+                      </a:r>
+                    </a:p>
+                  </a:txBody>
+                  <a:tcPr>
+                    <a:solidFill>
+                      <a:srgbClr val="FFFFFF"/>
+                    </a:solidFill>
+                  </a:tcPr>
+                </a:tc>
+                <a:tc>
+                  <a:txBody>
+                    <a:bodyPr wrap="square"/>
+                    <a:lstStyle/>
+                    <a:p>
+                      <a:r>
+                        <a:rPr sz="1100" b="0">
+                          <a:solidFill>
+                            <a:srgbClr val="1A1A1A"/>
+                          </a:solidFill>
+                          <a:latin typeface="Arial"/>
+                        </a:rPr>
+                        <a:t>25 %</a:t>
+                      </a:r>
+                    </a:p>
+                  </a:txBody>
+                  <a:tcPr>
+                    <a:solidFill>
+                      <a:srgbClr val="FFFFFF"/>
+                    </a:solidFill>
+                  </a:tcPr>
+                </a:tc>
+                <a:tc>
+                  <a:txBody>
+                    <a:bodyPr wrap="square"/>
+                    <a:lstStyle/>
+                    <a:p>
+                      <a:r>
+                        <a:rPr sz="1100" b="0">
+                          <a:solidFill>
+                            <a:srgbClr val="1A1A1A"/>
+                          </a:solidFill>
+                          <a:latin typeface="Arial"/>
+                        </a:rPr>
+                        <a:t/>
+                      </a:r>
+                    </a:p>
+                  </a:txBody>
+                  <a:tcPr>
+                    <a:solidFill>
+                      <a:srgbClr val="FFFFFF"/>
+                    </a:solidFill>
+                  </a:tcPr>
+                </a:tc>
+                <a:tc>
+                  <a:txBody>
+                    <a:bodyPr wrap="square"/>
+                    <a:lstStyle/>
+                    <a:p>
+                      <a:r>
+                        <a:rPr sz="1100" b="0">
+                          <a:solidFill>
+                            <a:srgbClr val="1A1A1A"/>
+                          </a:solidFill>
+                          <a:latin typeface="Arial"/>
+                        </a:rPr>
+                        <a:t/>
+                      </a:r>
+                    </a:p>
+                  </a:txBody>
+                  <a:tcPr>
+                    <a:solidFill>
+                      <a:srgbClr val="FFFFFF"/>
+                    </a:solidFill>
+                  </a:tcPr>
+                </a:tc>
+                <a:tc>
+                  <a:txBody>
+                    <a:bodyPr wrap="square"/>
+                    <a:lstStyle/>
+                    <a:p>
+                      <a:r>
+                        <a:rPr sz="1100" b="0">
+                          <a:solidFill>
+                            <a:srgbClr val="1A1A1A"/>
+                          </a:solidFill>
+                          <a:latin typeface="Arial"/>
+                        </a:rPr>
+                        <a:t/>
+                      </a:r>
+                    </a:p>
+                  </a:txBody>
+                  <a:tcPr>
+                    <a:solidFill>
+                      <a:srgbClr val="FFFFFF"/>
+                    </a:solidFill>
+                  </a:tcPr>
+                </a:tc>
+              </a:tr>
+              <a:tr h="475488">
+                <a:tc>
+                  <a:txBody>
+                    <a:bodyPr wrap="square"/>
+                    <a:lstStyle/>
+                    <a:p>
+                      <a:r>
+                        <a:rPr sz="1100" b="0">
+                          <a:solidFill>
+                            <a:srgbClr val="1A1A1A"/>
+                          </a:solidFill>
+                          <a:latin typeface="Arial"/>
+                        </a:rPr>
+                        <a:t>Wettbewerbsintensität (gering = gut)</a:t>
+                      </a:r>
+                    </a:p>
+                  </a:txBody>
+                  <a:tcPr>
+                    <a:solidFill>
+                      <a:srgbClr val="F4F6FA"/>
+                    </a:solidFill>
+                  </a:tcPr>
+                </a:tc>
+                <a:tc>
+                  <a:txBody>
+                    <a:bodyPr wrap="square"/>
+                    <a:lstStyle/>
+                    <a:p>
+                      <a:r>
+                        <a:rPr sz="1100" b="0">
+                          <a:solidFill>
+                            <a:srgbClr val="1A1A1A"/>
+                          </a:solidFill>
+                          <a:latin typeface="Arial"/>
+                        </a:rPr>
+                        <a:t>20 %</a:t>
+                      </a:r>
+                    </a:p>
+                  </a:txBody>
+                  <a:tcPr>
+                    <a:solidFill>
+                      <a:srgbClr val="F4F6FA"/>
+                    </a:solidFill>
+                  </a:tcPr>
+                </a:tc>
+                <a:tc>
+                  <a:txBody>
+                    <a:bodyPr wrap="square"/>
+                    <a:lstStyle/>
+                    <a:p>
+                      <a:r>
+                        <a:rPr sz="1100" b="0">
+                          <a:solidFill>
+                            <a:srgbClr val="1A1A1A"/>
+                          </a:solidFill>
+                          <a:latin typeface="Arial"/>
+                        </a:rPr>
+                        <a:t/>
+                      </a:r>
+                    </a:p>
+                  </a:txBody>
+                  <a:tcPr>
+                    <a:solidFill>
+                      <a:srgbClr val="F4F6FA"/>
+                    </a:solidFill>
+                  </a:tcPr>
+                </a:tc>
+                <a:tc>
+                  <a:txBody>
+                    <a:bodyPr wrap="square"/>
+                    <a:lstStyle/>
+                    <a:p>
+                      <a:r>
+                        <a:rPr sz="1100" b="0">
+                          <a:solidFill>
+                            <a:srgbClr val="1A1A1A"/>
+                          </a:solidFill>
+                          <a:latin typeface="Arial"/>
+                        </a:rPr>
+                        <a:t/>
+                      </a:r>
+                    </a:p>
+                  </a:txBody>
+                  <a:tcPr>
+                    <a:solidFill>
+                      <a:srgbClr val="F4F6FA"/>
+                    </a:solidFill>
+                  </a:tcPr>
+                </a:tc>
+                <a:tc>
+                  <a:txBody>
+                    <a:bodyPr wrap="square"/>
+                    <a:lstStyle/>
+                    <a:p>
+                      <a:r>
+                        <a:rPr sz="1100" b="0">
+                          <a:solidFill>
+                            <a:srgbClr val="1A1A1A"/>
+                          </a:solidFill>
+                          <a:latin typeface="Arial"/>
+                        </a:rPr>
+                        <a:t/>
+                      </a:r>
+                    </a:p>
+                  </a:txBody>
+                  <a:tcPr>
+                    <a:solidFill>
+                      <a:srgbClr val="F4F6FA"/>
+                    </a:solidFill>
+                  </a:tcPr>
+                </a:tc>
+              </a:tr>
+              <a:tr h="475488">
+                <a:tc>
+                  <a:txBody>
+                    <a:bodyPr wrap="square"/>
+                    <a:lstStyle/>
+                    <a:p>
+                      <a:r>
+                        <a:rPr sz="1100" b="0">
+                          <a:solidFill>
+                            <a:srgbClr val="1A1A1A"/>
+                          </a:solidFill>
+                          <a:latin typeface="Arial"/>
+                        </a:rPr>
+                        <a:t>Gesamtscore</a:t>
+                      </a:r>
+                    </a:p>
+                  </a:txBody>
+                  <a:tcPr>
+                    <a:solidFill>
+                      <a:srgbClr val="FFFFFF"/>
+                    </a:solidFill>
+                  </a:tcPr>
+                </a:tc>
+                <a:tc>
+                  <a:txBody>
+                    <a:bodyPr wrap="square"/>
+                    <a:lstStyle/>
+                    <a:p>
+                      <a:r>
+                        <a:rPr sz="1100" b="0">
+                          <a:solidFill>
+                            <a:srgbClr val="1A1A1A"/>
+                          </a:solidFill>
+                          <a:latin typeface="Arial"/>
+                        </a:rPr>
+                        <a:t>100 %</a:t>
+                      </a:r>
+                    </a:p>
+                  </a:txBody>
+                  <a:tcPr>
+                    <a:solidFill>
+                      <a:srgbClr val="FFFFFF"/>
+                    </a:solidFill>
+                  </a:tcPr>
+                </a:tc>
+                <a:tc>
+                  <a:txBody>
+                    <a:bodyPr wrap="square"/>
+                    <a:lstStyle/>
+                    <a:p>
+                      <a:r>
+                        <a:rPr sz="1100" b="0">
+                          <a:solidFill>
+                            <a:srgbClr val="1A1A1A"/>
+                          </a:solidFill>
+                          <a:latin typeface="Arial"/>
+                        </a:rPr>
+                        <a:t/>
+                      </a:r>
+                    </a:p>
+                  </a:txBody>
+                  <a:tcPr>
+                    <a:solidFill>
+                      <a:srgbClr val="FFFFFF"/>
+                    </a:solidFill>
+                  </a:tcPr>
+                </a:tc>
+                <a:tc>
+                  <a:txBody>
+                    <a:bodyPr wrap="square"/>
+                    <a:lstStyle/>
+                    <a:p>
+                      <a:r>
+                        <a:rPr sz="1100" b="0">
+                          <a:solidFill>
+                            <a:srgbClr val="1A1A1A"/>
+                          </a:solidFill>
+                          <a:latin typeface="Arial"/>
+                        </a:rPr>
+                        <a:t/>
+                      </a:r>
+                    </a:p>
+                  </a:txBody>
+                  <a:tcPr>
+                    <a:solidFill>
+                      <a:srgbClr val="FFFFFF"/>
+                    </a:solidFill>
+                  </a:tcPr>
+                </a:tc>
+                <a:tc>
+                  <a:txBody>
+                    <a:bodyPr wrap="square"/>
+                    <a:lstStyle/>
+                    <a:p>
+                      <a:r>
+                        <a:rPr sz="1100" b="0">
+                          <a:solidFill>
+                            <a:srgbClr val="1A1A1A"/>
+                          </a:solidFill>
+                          <a:latin typeface="Arial"/>
+                        </a:rPr>
+                        <a:t/>
+                      </a:r>
+                    </a:p>
+                  </a:txBody>
+                  <a:tcPr>
+                    <a:solidFill>
+                      <a:srgbClr val="FFFFFF"/>
+                    </a:solidFill>
+                  </a:tcPr>
+                </a:tc>
+              </a:tr>
+            </a:tbl>
+          </a:graphicData>
+        </a:graphic>
+      </p:graphicFrame>
+    </p:spTree>
+  </p:cSld>
+  <p:clrMapOvr>
+    <a:masterClrMapping/>
+  </p:clrMapOvr>
+</p:sld>
+</file>
+
+<file path=ppt/slides/slide9.xml><?xml version="1.0" encoding="utf-8"?>
 <p:sld xmlns:a="http://schemas.openxmlformats.org/drawingml/2006/main" xmlns:p="http://schemas.openxmlformats.org/presentationml/2006/main" xmlns:r="http://schemas.openxmlformats.org/officeDocument/2006/relationships">
   <p:cSld>
     <p:bg>
@@ -4866,8 +11176,8 @@
         </p:nvSpPr>
         <p:spPr>
           <a:xfrm>
-            <a:off x="365760" y="2286000"/>
-            <a:ext cx="11430000" cy="1828800"/>
+            <a:off x="365760" y="2011680"/>
+            <a:ext cx="11430000" cy="2011680"/>
           </a:xfrm>
           <a:prstGeom prst="rect">
             <a:avLst/>
@@ -4882,429 +11192,13 @@
           <a:p>
             <a:pPr algn="l"/>
             <a:r>
-              <a:rPr sz="3600" b="1">
-                <a:solidFill>
-                  <a:srgbClr val="FFFFFF"/>
-                </a:solidFill>
-                <a:latin typeface="Arial"/>
-              </a:rPr>
-              <a:t>Das Scoring-Modell zur Segmentpriorisierung</a:t>
-            </a:r>
-          </a:p>
-        </p:txBody>
-      </p:sp>
-    </p:spTree>
-  </p:cSld>
-  <p:clrMapOvr>
-    <a:masterClrMapping/>
-  </p:clrMapOvr>
-</p:sld>
-</file>
-
-<file path=ppt/slides/slide6.xml><?xml version="1.0" encoding="utf-8"?>
-<p:sld xmlns:a="http://schemas.openxmlformats.org/drawingml/2006/main" xmlns:p="http://schemas.openxmlformats.org/presentationml/2006/main" xmlns:r="http://schemas.openxmlformats.org/officeDocument/2006/relationships">
-  <p:cSld>
-    <p:bg>
-      <p:bgPr>
-        <a:solidFill>
-          <a:srgbClr val="1A1A1A"/>
-        </a:solidFill>
-        <a:effectLst/>
-      </p:bgPr>
-    </p:bg>
-    <p:spTree>
-      <p:nvGrpSpPr>
-        <p:cNvPr id="1" name=""/>
-        <p:cNvGrpSpPr/>
-        <p:nvPr/>
-      </p:nvGrpSpPr>
-      <p:grpSpPr/>
-      <p:sp>
-        <p:nvSpPr>
-          <p:cNvPr id="2" name="Rectangle 1"/>
-          <p:cNvSpPr/>
-          <p:nvPr/>
-        </p:nvSpPr>
-        <p:spPr>
-          <a:xfrm>
-            <a:off x="0" y="0"/>
-            <a:ext cx="73152" cy="6858000"/>
-          </a:xfrm>
-          <a:prstGeom prst="rect">
-            <a:avLst/>
-          </a:prstGeom>
-          <a:solidFill>
-            <a:srgbClr val="E05B00"/>
-          </a:solidFill>
-          <a:ln>
-            <a:noFill/>
-          </a:ln>
-        </p:spPr>
-        <p:style>
-          <a:lnRef idx="1">
-            <a:schemeClr val="accent1"/>
-          </a:lnRef>
-          <a:fillRef idx="3">
-            <a:schemeClr val="accent1"/>
-          </a:fillRef>
-          <a:effectRef idx="2">
-            <a:schemeClr val="accent1"/>
-          </a:effectRef>
-          <a:fontRef idx="minor">
-            <a:schemeClr val="lt1"/>
-          </a:fontRef>
-        </p:style>
-        <p:txBody>
-          <a:bodyPr rtlCol="0" anchor="ctr"/>
-          <a:lstStyle/>
-          <a:p>
-            <a:pPr algn="ctr"/>
-          </a:p>
-        </p:txBody>
-      </p:sp>
-      <p:sp>
-        <p:nvSpPr>
-          <p:cNvPr id="3" name="TextBox 2"/>
-          <p:cNvSpPr txBox="1"/>
-          <p:nvPr/>
-        </p:nvSpPr>
-        <p:spPr>
-          <a:xfrm>
-            <a:off x="365760" y="2286000"/>
-            <a:ext cx="11430000" cy="1828800"/>
-          </a:xfrm>
-          <a:prstGeom prst="rect">
-            <a:avLst/>
-          </a:prstGeom>
-          <a:noFill/>
-        </p:spPr>
-        <p:txBody>
-          <a:bodyPr wrap="square">
-            <a:spAutoFit/>
-          </a:bodyPr>
-          <a:lstStyle/>
-          <a:p>
-            <a:pPr algn="l"/>
-            <a:r>
-              <a:rPr sz="3600" b="1">
+              <a:rPr sz="3600" b="1" i="0">
                 <a:solidFill>
                   <a:srgbClr val="FFFFFF"/>
                 </a:solidFill>
                 <a:latin typeface="Arial"/>
               </a:rPr>
               <a:t>Wie groß ist mein adressierbarer Markt?</a:t>
-            </a:r>
-          </a:p>
-        </p:txBody>
-      </p:sp>
-    </p:spTree>
-  </p:cSld>
-  <p:clrMapOvr>
-    <a:masterClrMapping/>
-  </p:clrMapOvr>
-</p:sld>
-</file>
-
-<file path=ppt/slides/slide7.xml><?xml version="1.0" encoding="utf-8"?>
-<p:sld xmlns:a="http://schemas.openxmlformats.org/drawingml/2006/main" xmlns:p="http://schemas.openxmlformats.org/presentationml/2006/main" xmlns:r="http://schemas.openxmlformats.org/officeDocument/2006/relationships">
-  <p:cSld>
-    <p:bg>
-      <p:bgPr>
-        <a:solidFill>
-          <a:srgbClr val="1A1A1A"/>
-        </a:solidFill>
-        <a:effectLst/>
-      </p:bgPr>
-    </p:bg>
-    <p:spTree>
-      <p:nvGrpSpPr>
-        <p:cNvPr id="1" name=""/>
-        <p:cNvGrpSpPr/>
-        <p:nvPr/>
-      </p:nvGrpSpPr>
-      <p:grpSpPr/>
-      <p:sp>
-        <p:nvSpPr>
-          <p:cNvPr id="2" name="Rectangle 1"/>
-          <p:cNvSpPr/>
-          <p:nvPr/>
-        </p:nvSpPr>
-        <p:spPr>
-          <a:xfrm>
-            <a:off x="0" y="0"/>
-            <a:ext cx="73152" cy="6858000"/>
-          </a:xfrm>
-          <a:prstGeom prst="rect">
-            <a:avLst/>
-          </a:prstGeom>
-          <a:solidFill>
-            <a:srgbClr val="E05B00"/>
-          </a:solidFill>
-          <a:ln>
-            <a:noFill/>
-          </a:ln>
-        </p:spPr>
-        <p:style>
-          <a:lnRef idx="1">
-            <a:schemeClr val="accent1"/>
-          </a:lnRef>
-          <a:fillRef idx="3">
-            <a:schemeClr val="accent1"/>
-          </a:fillRef>
-          <a:effectRef idx="2">
-            <a:schemeClr val="accent1"/>
-          </a:effectRef>
-          <a:fontRef idx="minor">
-            <a:schemeClr val="lt1"/>
-          </a:fontRef>
-        </p:style>
-        <p:txBody>
-          <a:bodyPr rtlCol="0" anchor="ctr"/>
-          <a:lstStyle/>
-          <a:p>
-            <a:pPr algn="ctr"/>
-          </a:p>
-        </p:txBody>
-      </p:sp>
-      <p:sp>
-        <p:nvSpPr>
-          <p:cNvPr id="3" name="TextBox 2"/>
-          <p:cNvSpPr txBox="1"/>
-          <p:nvPr/>
-        </p:nvSpPr>
-        <p:spPr>
-          <a:xfrm>
-            <a:off x="365760" y="2286000"/>
-            <a:ext cx="11430000" cy="1828800"/>
-          </a:xfrm>
-          <a:prstGeom prst="rect">
-            <a:avLst/>
-          </a:prstGeom>
-          <a:noFill/>
-        </p:spPr>
-        <p:txBody>
-          <a:bodyPr wrap="square">
-            <a:spAutoFit/>
-          </a:bodyPr>
-          <a:lstStyle/>
-          <a:p>
-            <a:pPr algn="l"/>
-            <a:r>
-              <a:rPr sz="3600" b="1">
-                <a:solidFill>
-                  <a:srgbClr val="FFFFFF"/>
-                </a:solidFill>
-                <a:latin typeface="Arial"/>
-              </a:rPr>
-              <a:t>SWOT im Firmenkundensegment</a:t>
-            </a:r>
-          </a:p>
-        </p:txBody>
-      </p:sp>
-    </p:spTree>
-  </p:cSld>
-  <p:clrMapOvr>
-    <a:masterClrMapping/>
-  </p:clrMapOvr>
-</p:sld>
-</file>
-
-<file path=ppt/slides/slide8.xml><?xml version="1.0" encoding="utf-8"?>
-<p:sld xmlns:a="http://schemas.openxmlformats.org/drawingml/2006/main" xmlns:p="http://schemas.openxmlformats.org/presentationml/2006/main" xmlns:r="http://schemas.openxmlformats.org/officeDocument/2006/relationships">
-  <p:cSld>
-    <p:bg>
-      <p:bgPr>
-        <a:solidFill>
-          <a:srgbClr val="1A1A1A"/>
-        </a:solidFill>
-        <a:effectLst/>
-      </p:bgPr>
-    </p:bg>
-    <p:spTree>
-      <p:nvGrpSpPr>
-        <p:cNvPr id="1" name=""/>
-        <p:cNvGrpSpPr/>
-        <p:nvPr/>
-      </p:nvGrpSpPr>
-      <p:grpSpPr/>
-      <p:sp>
-        <p:nvSpPr>
-          <p:cNvPr id="2" name="Rectangle 1"/>
-          <p:cNvSpPr/>
-          <p:nvPr/>
-        </p:nvSpPr>
-        <p:spPr>
-          <a:xfrm>
-            <a:off x="0" y="0"/>
-            <a:ext cx="73152" cy="6858000"/>
-          </a:xfrm>
-          <a:prstGeom prst="rect">
-            <a:avLst/>
-          </a:prstGeom>
-          <a:solidFill>
-            <a:srgbClr val="E05B00"/>
-          </a:solidFill>
-          <a:ln>
-            <a:noFill/>
-          </a:ln>
-        </p:spPr>
-        <p:style>
-          <a:lnRef idx="1">
-            <a:schemeClr val="accent1"/>
-          </a:lnRef>
-          <a:fillRef idx="3">
-            <a:schemeClr val="accent1"/>
-          </a:fillRef>
-          <a:effectRef idx="2">
-            <a:schemeClr val="accent1"/>
-          </a:effectRef>
-          <a:fontRef idx="minor">
-            <a:schemeClr val="lt1"/>
-          </a:fontRef>
-        </p:style>
-        <p:txBody>
-          <a:bodyPr rtlCol="0" anchor="ctr"/>
-          <a:lstStyle/>
-          <a:p>
-            <a:pPr algn="ctr"/>
-          </a:p>
-        </p:txBody>
-      </p:sp>
-      <p:sp>
-        <p:nvSpPr>
-          <p:cNvPr id="3" name="TextBox 2"/>
-          <p:cNvSpPr txBox="1"/>
-          <p:nvPr/>
-        </p:nvSpPr>
-        <p:spPr>
-          <a:xfrm>
-            <a:off x="365760" y="2286000"/>
-            <a:ext cx="11430000" cy="1828800"/>
-          </a:xfrm>
-          <a:prstGeom prst="rect">
-            <a:avLst/>
-          </a:prstGeom>
-          <a:noFill/>
-        </p:spPr>
-        <p:txBody>
-          <a:bodyPr wrap="square">
-            <a:spAutoFit/>
-          </a:bodyPr>
-          <a:lstStyle/>
-          <a:p>
-            <a:pPr algn="l"/>
-            <a:r>
-              <a:rPr sz="3600" b="1">
-                <a:solidFill>
-                  <a:srgbClr val="FFFFFF"/>
-                </a:solidFill>
-                <a:latin typeface="Arial"/>
-              </a:rPr>
-              <a:t>Wertversprechen formulieren</a:t>
-            </a:r>
-          </a:p>
-        </p:txBody>
-      </p:sp>
-    </p:spTree>
-  </p:cSld>
-  <p:clrMapOvr>
-    <a:masterClrMapping/>
-  </p:clrMapOvr>
-</p:sld>
-</file>
-
-<file path=ppt/slides/slide9.xml><?xml version="1.0" encoding="utf-8"?>
-<p:sld xmlns:a="http://schemas.openxmlformats.org/drawingml/2006/main" xmlns:p="http://schemas.openxmlformats.org/presentationml/2006/main" xmlns:r="http://schemas.openxmlformats.org/officeDocument/2006/relationships">
-  <p:cSld>
-    <p:bg>
-      <p:bgPr>
-        <a:solidFill>
-          <a:srgbClr val="1A1A1A"/>
-        </a:solidFill>
-        <a:effectLst/>
-      </p:bgPr>
-    </p:bg>
-    <p:spTree>
-      <p:nvGrpSpPr>
-        <p:cNvPr id="1" name=""/>
-        <p:cNvGrpSpPr/>
-        <p:nvPr/>
-      </p:nvGrpSpPr>
-      <p:grpSpPr/>
-      <p:sp>
-        <p:nvSpPr>
-          <p:cNvPr id="2" name="Rectangle 1"/>
-          <p:cNvSpPr/>
-          <p:nvPr/>
-        </p:nvSpPr>
-        <p:spPr>
-          <a:xfrm>
-            <a:off x="0" y="0"/>
-            <a:ext cx="73152" cy="6858000"/>
-          </a:xfrm>
-          <a:prstGeom prst="rect">
-            <a:avLst/>
-          </a:prstGeom>
-          <a:solidFill>
-            <a:srgbClr val="E05B00"/>
-          </a:solidFill>
-          <a:ln>
-            <a:noFill/>
-          </a:ln>
-        </p:spPr>
-        <p:style>
-          <a:lnRef idx="1">
-            <a:schemeClr val="accent1"/>
-          </a:lnRef>
-          <a:fillRef idx="3">
-            <a:schemeClr val="accent1"/>
-          </a:fillRef>
-          <a:effectRef idx="2">
-            <a:schemeClr val="accent1"/>
-          </a:effectRef>
-          <a:fontRef idx="minor">
-            <a:schemeClr val="lt1"/>
-          </a:fontRef>
-        </p:style>
-        <p:txBody>
-          <a:bodyPr rtlCol="0" anchor="ctr"/>
-          <a:lstStyle/>
-          <a:p>
-            <a:pPr algn="ctr"/>
-          </a:p>
-        </p:txBody>
-      </p:sp>
-      <p:sp>
-        <p:nvSpPr>
-          <p:cNvPr id="3" name="TextBox 2"/>
-          <p:cNvSpPr txBox="1"/>
-          <p:nvPr/>
-        </p:nvSpPr>
-        <p:spPr>
-          <a:xfrm>
-            <a:off x="365760" y="2286000"/>
-            <a:ext cx="11430000" cy="1828800"/>
-          </a:xfrm>
-          <a:prstGeom prst="rect">
-            <a:avLst/>
-          </a:prstGeom>
-          <a:noFill/>
-        </p:spPr>
-        <p:txBody>
-          <a:bodyPr wrap="square">
-            <a:spAutoFit/>
-          </a:bodyPr>
-          <a:lstStyle/>
-          <a:p>
-            <a:pPr algn="l"/>
-            <a:r>
-              <a:rPr sz="3600" b="1">
-                <a:solidFill>
-                  <a:srgbClr val="FFFFFF"/>
-                </a:solidFill>
-                <a:latin typeface="Arial"/>
-              </a:rPr>
-              <a:t>Welche Kanäle funktionieren wirklich?</a:t>
             </a:r>
           </a:p>
         </p:txBody>

--- a/public/downloads/praesentation/M15.pptx
+++ b/public/downloads/praesentation/M15.pptx
@@ -3463,7 +3463,7 @@
     <p:bg>
       <p:bgPr>
         <a:solidFill>
-          <a:srgbClr val="191D2E"/>
+          <a:srgbClr val="1F2B56"/>
         </a:solidFill>
         <a:effectLst/>
       </p:bgPr>
@@ -3971,7 +3971,7 @@
                   </a:txBody>
                   <a:tcPr>
                     <a:solidFill>
-                      <a:srgbClr val="191D2E"/>
+                      <a:srgbClr val="1F2B56"/>
                     </a:solidFill>
                   </a:tcPr>
                 </a:tc>
@@ -3993,7 +3993,7 @@
                   </a:txBody>
                   <a:tcPr>
                     <a:solidFill>
-                      <a:srgbClr val="191D2E"/>
+                      <a:srgbClr val="1F2B56"/>
                     </a:solidFill>
                   </a:tcPr>
                 </a:tc>
@@ -4015,7 +4015,7 @@
                   </a:txBody>
                   <a:tcPr>
                     <a:solidFill>
-                      <a:srgbClr val="191D2E"/>
+                      <a:srgbClr val="1F2B56"/>
                     </a:solidFill>
                   </a:tcPr>
                 </a:tc>
@@ -4765,7 +4765,7 @@
     <p:bg>
       <p:bgPr>
         <a:solidFill>
-          <a:srgbClr val="191D2E"/>
+          <a:srgbClr val="1F2B56"/>
         </a:solidFill>
         <a:effectLst/>
       </p:bgPr>
@@ -5275,7 +5275,7 @@
                   </a:txBody>
                   <a:tcPr>
                     <a:solidFill>
-                      <a:srgbClr val="191D2E"/>
+                      <a:srgbClr val="1F2B56"/>
                     </a:solidFill>
                   </a:tcPr>
                 </a:tc>
@@ -5297,7 +5297,7 @@
                   </a:txBody>
                   <a:tcPr>
                     <a:solidFill>
-                      <a:srgbClr val="191D2E"/>
+                      <a:srgbClr val="1F2B56"/>
                     </a:solidFill>
                   </a:tcPr>
                 </a:tc>
@@ -5319,7 +5319,7 @@
                   </a:txBody>
                   <a:tcPr>
                     <a:solidFill>
-                      <a:srgbClr val="191D2E"/>
+                      <a:srgbClr val="1F2B56"/>
                     </a:solidFill>
                   </a:tcPr>
                 </a:tc>
@@ -5341,7 +5341,7 @@
                   </a:txBody>
                   <a:tcPr>
                     <a:solidFill>
-                      <a:srgbClr val="191D2E"/>
+                      <a:srgbClr val="1F2B56"/>
                     </a:solidFill>
                   </a:tcPr>
                 </a:tc>
@@ -5363,7 +5363,7 @@
                   </a:txBody>
                   <a:tcPr>
                     <a:solidFill>
-                      <a:srgbClr val="191D2E"/>
+                      <a:srgbClr val="1F2B56"/>
                     </a:solidFill>
                   </a:tcPr>
                 </a:tc>
@@ -6648,7 +6648,7 @@
     <p:bg>
       <p:bgPr>
         <a:solidFill>
-          <a:srgbClr val="191D2E"/>
+          <a:srgbClr val="1F2B56"/>
         </a:solidFill>
         <a:effectLst/>
       </p:bgPr>
@@ -6849,7 +6849,7 @@
     <p:bg>
       <p:bgPr>
         <a:solidFill>
-          <a:srgbClr val="191D2E"/>
+          <a:srgbClr val="1F2B56"/>
         </a:solidFill>
         <a:effectLst/>
       </p:bgPr>
@@ -7050,7 +7050,7 @@
     <p:bg>
       <p:bgPr>
         <a:solidFill>
-          <a:srgbClr val="191D2E"/>
+          <a:srgbClr val="1F2B56"/>
         </a:solidFill>
         <a:effectLst/>
       </p:bgPr>
@@ -7560,7 +7560,7 @@
                   </a:txBody>
                   <a:tcPr>
                     <a:solidFill>
-                      <a:srgbClr val="191D2E"/>
+                      <a:srgbClr val="1F2B56"/>
                     </a:solidFill>
                   </a:tcPr>
                 </a:tc>
@@ -7582,7 +7582,7 @@
                   </a:txBody>
                   <a:tcPr>
                     <a:solidFill>
-                      <a:srgbClr val="191D2E"/>
+                      <a:srgbClr val="1F2B56"/>
                     </a:solidFill>
                   </a:tcPr>
                 </a:tc>
@@ -7604,7 +7604,7 @@
                   </a:txBody>
                   <a:tcPr>
                     <a:solidFill>
-                      <a:srgbClr val="191D2E"/>
+                      <a:srgbClr val="1F2B56"/>
                     </a:solidFill>
                   </a:tcPr>
                 </a:tc>
@@ -7626,7 +7626,7 @@
                   </a:txBody>
                   <a:tcPr>
                     <a:solidFill>
-                      <a:srgbClr val="191D2E"/>
+                      <a:srgbClr val="1F2B56"/>
                     </a:solidFill>
                   </a:tcPr>
                 </a:tc>
@@ -7648,7 +7648,7 @@
                   </a:txBody>
                   <a:tcPr>
                     <a:solidFill>
-                      <a:srgbClr val="191D2E"/>
+                      <a:srgbClr val="1F2B56"/>
                     </a:solidFill>
                   </a:tcPr>
                 </a:tc>
@@ -8477,29 +8477,29 @@
         </p:nvSpPr>
         <p:spPr>
           <a:xfrm>
-            <a:off x="4064000" y="927100"/>
-            <a:ext cx="508000" cy="647700"/>
-          </a:xfrm>
-          <a:prstGeom prst="rect">
-            <a:avLst/>
-          </a:prstGeom>
-          <a:noFill/>
-        </p:spPr>
-        <p:txBody>
-          <a:bodyPr wrap="square">
+            <a:off x="4064000" y="939799"/>
+            <a:ext cx="762000" cy="647700"/>
+          </a:xfrm>
+          <a:prstGeom prst="rect">
+            <a:avLst/>
+          </a:prstGeom>
+          <a:noFill/>
+        </p:spPr>
+        <p:txBody>
+          <a:bodyPr wrap="none">
             <a:normAutofit/>
           </a:bodyPr>
           <a:lstStyle/>
           <a:p>
             <a:pPr algn="l"/>
             <a:r>
-              <a:rPr sz="2600" b="0" i="1">
+              <a:rPr sz="2400" b="0" i="1">
                 <a:solidFill>
                   <a:srgbClr val="1F2B56"/>
                 </a:solidFill>
                 <a:latin typeface="Georgia"/>
               </a:rPr>
-              <a:t>I.</a:t>
+              <a:t>I</a:t>
             </a:r>
           </a:p>
         </p:txBody>
@@ -8512,8 +8512,8 @@
         </p:nvSpPr>
         <p:spPr>
           <a:xfrm>
-            <a:off x="4699000" y="952500"/>
-            <a:ext cx="6858000" cy="622300"/>
+            <a:off x="4953000" y="952500"/>
+            <a:ext cx="6629400" cy="635000"/>
           </a:xfrm>
           <a:prstGeom prst="rect">
             <a:avLst/>
@@ -8547,7 +8547,7 @@
         </p:nvSpPr>
         <p:spPr>
           <a:xfrm>
-            <a:off x="4064000" y="1574800"/>
+            <a:off x="4064000" y="1587500"/>
             <a:ext cx="7518399" cy="6350"/>
           </a:xfrm>
           <a:prstGeom prst="rect">
@@ -8590,29 +8590,29 @@
         </p:nvSpPr>
         <p:spPr>
           <a:xfrm>
-            <a:off x="4064000" y="1612900"/>
-            <a:ext cx="508000" cy="647700"/>
-          </a:xfrm>
-          <a:prstGeom prst="rect">
-            <a:avLst/>
-          </a:prstGeom>
-          <a:noFill/>
-        </p:spPr>
-        <p:txBody>
-          <a:bodyPr wrap="square">
+            <a:off x="4064000" y="1638300"/>
+            <a:ext cx="762000" cy="647700"/>
+          </a:xfrm>
+          <a:prstGeom prst="rect">
+            <a:avLst/>
+          </a:prstGeom>
+          <a:noFill/>
+        </p:spPr>
+        <p:txBody>
+          <a:bodyPr wrap="none">
             <a:normAutofit/>
           </a:bodyPr>
           <a:lstStyle/>
           <a:p>
             <a:pPr algn="l"/>
             <a:r>
-              <a:rPr sz="2600" b="0" i="1">
+              <a:rPr sz="2400" b="0" i="1">
                 <a:solidFill>
                   <a:srgbClr val="1F2B56"/>
                 </a:solidFill>
                 <a:latin typeface="Georgia"/>
               </a:rPr>
-              <a:t>II.</a:t>
+              <a:t>II</a:t>
             </a:r>
           </a:p>
         </p:txBody>
@@ -8625,8 +8625,8 @@
         </p:nvSpPr>
         <p:spPr>
           <a:xfrm>
-            <a:off x="4699000" y="1638300"/>
-            <a:ext cx="6858000" cy="622300"/>
+            <a:off x="4953000" y="1651000"/>
+            <a:ext cx="6629400" cy="635000"/>
           </a:xfrm>
           <a:prstGeom prst="rect">
             <a:avLst/>
@@ -8660,7 +8660,7 @@
         </p:nvSpPr>
         <p:spPr>
           <a:xfrm>
-            <a:off x="4064000" y="2260600"/>
+            <a:off x="4064000" y="2286000"/>
             <a:ext cx="7518399" cy="6350"/>
           </a:xfrm>
           <a:prstGeom prst="rect">
@@ -8703,29 +8703,29 @@
         </p:nvSpPr>
         <p:spPr>
           <a:xfrm>
-            <a:off x="4064000" y="2298700"/>
-            <a:ext cx="508000" cy="647700"/>
-          </a:xfrm>
-          <a:prstGeom prst="rect">
-            <a:avLst/>
-          </a:prstGeom>
-          <a:noFill/>
-        </p:spPr>
-        <p:txBody>
-          <a:bodyPr wrap="square">
+            <a:off x="4064000" y="2336800"/>
+            <a:ext cx="762000" cy="647700"/>
+          </a:xfrm>
+          <a:prstGeom prst="rect">
+            <a:avLst/>
+          </a:prstGeom>
+          <a:noFill/>
+        </p:spPr>
+        <p:txBody>
+          <a:bodyPr wrap="none">
             <a:normAutofit/>
           </a:bodyPr>
           <a:lstStyle/>
           <a:p>
             <a:pPr algn="l"/>
             <a:r>
-              <a:rPr sz="2600" b="0" i="1">
+              <a:rPr sz="2400" b="0" i="1">
                 <a:solidFill>
                   <a:srgbClr val="1F2B56"/>
                 </a:solidFill>
                 <a:latin typeface="Georgia"/>
               </a:rPr>
-              <a:t>III.</a:t>
+              <a:t>III</a:t>
             </a:r>
           </a:p>
         </p:txBody>
@@ -8738,8 +8738,8 @@
         </p:nvSpPr>
         <p:spPr>
           <a:xfrm>
-            <a:off x="4699000" y="2324100"/>
-            <a:ext cx="6858000" cy="622300"/>
+            <a:off x="4953000" y="2349500"/>
+            <a:ext cx="6629400" cy="635000"/>
           </a:xfrm>
           <a:prstGeom prst="rect">
             <a:avLst/>
@@ -8773,7 +8773,7 @@
         </p:nvSpPr>
         <p:spPr>
           <a:xfrm>
-            <a:off x="4064000" y="2946400"/>
+            <a:off x="4064000" y="2984500"/>
             <a:ext cx="7518399" cy="6350"/>
           </a:xfrm>
           <a:prstGeom prst="rect">
@@ -8816,29 +8816,29 @@
         </p:nvSpPr>
         <p:spPr>
           <a:xfrm>
-            <a:off x="4064000" y="2984500"/>
-            <a:ext cx="508000" cy="647700"/>
-          </a:xfrm>
-          <a:prstGeom prst="rect">
-            <a:avLst/>
-          </a:prstGeom>
-          <a:noFill/>
-        </p:spPr>
-        <p:txBody>
-          <a:bodyPr wrap="square">
+            <a:off x="4064000" y="3035300"/>
+            <a:ext cx="762000" cy="647700"/>
+          </a:xfrm>
+          <a:prstGeom prst="rect">
+            <a:avLst/>
+          </a:prstGeom>
+          <a:noFill/>
+        </p:spPr>
+        <p:txBody>
+          <a:bodyPr wrap="none">
             <a:normAutofit/>
           </a:bodyPr>
           <a:lstStyle/>
           <a:p>
             <a:pPr algn="l"/>
             <a:r>
-              <a:rPr sz="2600" b="0" i="1">
+              <a:rPr sz="2400" b="0" i="1">
                 <a:solidFill>
                   <a:srgbClr val="1F2B56"/>
                 </a:solidFill>
                 <a:latin typeface="Georgia"/>
               </a:rPr>
-              <a:t>IV.</a:t>
+              <a:t>IV</a:t>
             </a:r>
           </a:p>
         </p:txBody>
@@ -8851,8 +8851,8 @@
         </p:nvSpPr>
         <p:spPr>
           <a:xfrm>
-            <a:off x="4699000" y="3009900"/>
-            <a:ext cx="6858000" cy="622300"/>
+            <a:off x="4953000" y="3048000"/>
+            <a:ext cx="6629400" cy="635000"/>
           </a:xfrm>
           <a:prstGeom prst="rect">
             <a:avLst/>
@@ -8886,7 +8886,7 @@
         </p:nvSpPr>
         <p:spPr>
           <a:xfrm>
-            <a:off x="4064000" y="3632200"/>
+            <a:off x="4064000" y="3683000"/>
             <a:ext cx="7518399" cy="6350"/>
           </a:xfrm>
           <a:prstGeom prst="rect">
@@ -8929,29 +8929,29 @@
         </p:nvSpPr>
         <p:spPr>
           <a:xfrm>
-            <a:off x="4064000" y="3670300"/>
-            <a:ext cx="508000" cy="647700"/>
-          </a:xfrm>
-          <a:prstGeom prst="rect">
-            <a:avLst/>
-          </a:prstGeom>
-          <a:noFill/>
-        </p:spPr>
-        <p:txBody>
-          <a:bodyPr wrap="square">
+            <a:off x="4064000" y="3733799"/>
+            <a:ext cx="762000" cy="647700"/>
+          </a:xfrm>
+          <a:prstGeom prst="rect">
+            <a:avLst/>
+          </a:prstGeom>
+          <a:noFill/>
+        </p:spPr>
+        <p:txBody>
+          <a:bodyPr wrap="none">
             <a:normAutofit/>
           </a:bodyPr>
           <a:lstStyle/>
           <a:p>
             <a:pPr algn="l"/>
             <a:r>
-              <a:rPr sz="2600" b="0" i="1">
+              <a:rPr sz="2400" b="0" i="1">
                 <a:solidFill>
                   <a:srgbClr val="1F2B56"/>
                 </a:solidFill>
                 <a:latin typeface="Georgia"/>
               </a:rPr>
-              <a:t>V.</a:t>
+              <a:t>V</a:t>
             </a:r>
           </a:p>
         </p:txBody>
@@ -8964,8 +8964,8 @@
         </p:nvSpPr>
         <p:spPr>
           <a:xfrm>
-            <a:off x="4699000" y="3695700"/>
-            <a:ext cx="6858000" cy="622300"/>
+            <a:off x="4953000" y="3746500"/>
+            <a:ext cx="6629400" cy="635000"/>
           </a:xfrm>
           <a:prstGeom prst="rect">
             <a:avLst/>
@@ -9279,7 +9279,7 @@
                   </a:txBody>
                   <a:tcPr>
                     <a:solidFill>
-                      <a:srgbClr val="191D2E"/>
+                      <a:srgbClr val="1F2B56"/>
                     </a:solidFill>
                   </a:tcPr>
                 </a:tc>
@@ -9301,7 +9301,7 @@
                   </a:txBody>
                   <a:tcPr>
                     <a:solidFill>
-                      <a:srgbClr val="191D2E"/>
+                      <a:srgbClr val="1F2B56"/>
                     </a:solidFill>
                   </a:tcPr>
                 </a:tc>
@@ -9323,7 +9323,7 @@
                   </a:txBody>
                   <a:tcPr>
                     <a:solidFill>
-                      <a:srgbClr val="191D2E"/>
+                      <a:srgbClr val="1F2B56"/>
                     </a:solidFill>
                   </a:tcPr>
                 </a:tc>
@@ -9345,7 +9345,7 @@
                   </a:txBody>
                   <a:tcPr>
                     <a:solidFill>
-                      <a:srgbClr val="191D2E"/>
+                      <a:srgbClr val="1F2B56"/>
                     </a:solidFill>
                   </a:tcPr>
                 </a:tc>
@@ -9367,7 +9367,7 @@
                   </a:txBody>
                   <a:tcPr>
                     <a:solidFill>
-                      <a:srgbClr val="191D2E"/>
+                      <a:srgbClr val="1F2B56"/>
                     </a:solidFill>
                   </a:tcPr>
                 </a:tc>
@@ -9838,7 +9838,7 @@
     <p:bg>
       <p:bgPr>
         <a:solidFill>
-          <a:srgbClr val="191D2E"/>
+          <a:srgbClr val="1F2B56"/>
         </a:solidFill>
         <a:effectLst/>
       </p:bgPr>
@@ -10039,7 +10039,7 @@
     <p:bg>
       <p:bgPr>
         <a:solidFill>
-          <a:srgbClr val="191D2E"/>
+          <a:srgbClr val="1F2B56"/>
         </a:solidFill>
         <a:effectLst/>
       </p:bgPr>
@@ -10240,7 +10240,7 @@
     <p:bg>
       <p:bgPr>
         <a:solidFill>
-          <a:srgbClr val="191D2E"/>
+          <a:srgbClr val="1F2B56"/>
         </a:solidFill>
         <a:effectLst/>
       </p:bgPr>
@@ -11910,7 +11910,7 @@
     <p:bg>
       <p:bgPr>
         <a:solidFill>
-          <a:srgbClr val="191D2E"/>
+          <a:srgbClr val="1F2B56"/>
         </a:solidFill>
         <a:effectLst/>
       </p:bgPr>
@@ -12111,7 +12111,7 @@
     <p:bg>
       <p:bgPr>
         <a:solidFill>
-          <a:srgbClr val="191D2E"/>
+          <a:srgbClr val="1F2B56"/>
         </a:solidFill>
         <a:effectLst/>
       </p:bgPr>
@@ -12312,7 +12312,7 @@
     <p:bg>
       <p:bgPr>
         <a:solidFill>
-          <a:srgbClr val="191D2E"/>
+          <a:srgbClr val="1F2B56"/>
         </a:solidFill>
         <a:effectLst/>
       </p:bgPr>
@@ -12513,7 +12513,7 @@
     <p:bg>
       <p:bgPr>
         <a:solidFill>
-          <a:srgbClr val="191D2E"/>
+          <a:srgbClr val="1F2B56"/>
         </a:solidFill>
         <a:effectLst/>
       </p:bgPr>
@@ -12749,7 +12749,7 @@
     <p:bg>
       <p:bgPr>
         <a:solidFill>
-          <a:srgbClr val="191D2E"/>
+          <a:srgbClr val="1F2B56"/>
         </a:solidFill>
         <a:effectLst/>
       </p:bgPr>
@@ -14117,7 +14117,7 @@
     <p:bg>
       <p:bgPr>
         <a:solidFill>
-          <a:srgbClr val="191D2E"/>
+          <a:srgbClr val="1F2B56"/>
         </a:solidFill>
         <a:effectLst/>
       </p:bgPr>
@@ -14624,7 +14624,7 @@
                   </a:txBody>
                   <a:tcPr>
                     <a:solidFill>
-                      <a:srgbClr val="191D2E"/>
+                      <a:srgbClr val="1F2B56"/>
                     </a:solidFill>
                   </a:tcPr>
                 </a:tc>
@@ -14646,7 +14646,7 @@
                   </a:txBody>
                   <a:tcPr>
                     <a:solidFill>
-                      <a:srgbClr val="191D2E"/>
+                      <a:srgbClr val="1F2B56"/>
                     </a:solidFill>
                   </a:tcPr>
                 </a:tc>
@@ -15219,7 +15219,7 @@
                   </a:txBody>
                   <a:tcPr>
                     <a:solidFill>
-                      <a:srgbClr val="191D2E"/>
+                      <a:srgbClr val="1F2B56"/>
                     </a:solidFill>
                   </a:tcPr>
                 </a:tc>
@@ -15241,7 +15241,7 @@
                   </a:txBody>
                   <a:tcPr>
                     <a:solidFill>
-                      <a:srgbClr val="191D2E"/>
+                      <a:srgbClr val="1F2B56"/>
                     </a:solidFill>
                   </a:tcPr>
                 </a:tc>
@@ -15263,7 +15263,7 @@
                   </a:txBody>
                   <a:tcPr>
                     <a:solidFill>
-                      <a:srgbClr val="191D2E"/>
+                      <a:srgbClr val="1F2B56"/>
                     </a:solidFill>
                   </a:tcPr>
                 </a:tc>
@@ -15285,7 +15285,7 @@
                   </a:txBody>
                   <a:tcPr>
                     <a:solidFill>
-                      <a:srgbClr val="191D2E"/>
+                      <a:srgbClr val="1F2B56"/>
                     </a:solidFill>
                   </a:tcPr>
                 </a:tc>
@@ -15307,7 +15307,7 @@
                   </a:txBody>
                   <a:tcPr>
                     <a:solidFill>
-                      <a:srgbClr val="191D2E"/>
+                      <a:srgbClr val="1F2B56"/>
                     </a:solidFill>
                   </a:tcPr>
                 </a:tc>
@@ -15890,7 +15890,7 @@
     <p:bg>
       <p:bgPr>
         <a:solidFill>
-          <a:srgbClr val="191D2E"/>
+          <a:srgbClr val="1F2B56"/>
         </a:solidFill>
         <a:effectLst/>
       </p:bgPr>
@@ -16397,7 +16397,7 @@
                   </a:txBody>
                   <a:tcPr>
                     <a:solidFill>
-                      <a:srgbClr val="191D2E"/>
+                      <a:srgbClr val="1F2B56"/>
                     </a:solidFill>
                   </a:tcPr>
                 </a:tc>
@@ -16419,7 +16419,7 @@
                   </a:txBody>
                   <a:tcPr>
                     <a:solidFill>
-                      <a:srgbClr val="191D2E"/>
+                      <a:srgbClr val="1F2B56"/>
                     </a:solidFill>
                   </a:tcPr>
                 </a:tc>

--- a/public/downloads/praesentation/M15.pptx
+++ b/public/downloads/praesentation/M15.pptx
@@ -16,8 +16,10 @@
     <p:sldId id="264" r:id="rId15"/>
     <p:sldId id="265" r:id="rId16"/>
     <p:sldId id="266" r:id="rId17"/>
+    <p:sldId id="267" r:id="rId18"/>
+    <p:sldId id="268" r:id="rId19"/>
   </p:sldIdLst>
-  <p:sldSz cx="12191695" cy="6858000" type="screen4x3"/>
+  <p:sldSz cx="12188952" cy="6858000" type="screen4x3"/>
   <p:notesSz cx="6858000" cy="9144000"/>
   <p:defaultTextStyle>
     <a:defPPr>
@@ -3091,14 +3093,6 @@
 <file path=ppt/slides/slide1.xml><?xml version="1.0" encoding="utf-8"?>
 <p:sld xmlns:a="http://schemas.openxmlformats.org/drawingml/2006/main" xmlns:p="http://schemas.openxmlformats.org/presentationml/2006/main" xmlns:r="http://schemas.openxmlformats.org/officeDocument/2006/relationships">
   <p:cSld>
-    <p:bg>
-      <p:bgPr>
-        <a:solidFill>
-          <a:srgbClr val="F8F8FA"/>
-        </a:solidFill>
-        <a:effectLst/>
-      </p:bgPr>
-    </p:bg>
     <p:spTree>
       <p:nvGrpSpPr>
         <p:cNvPr id="1" name=""/>
@@ -3108,125 +3102,20 @@
       <p:grpSpPr/>
       <p:sp>
         <p:nvSpPr>
-          <p:cNvPr id="2" name="TextBox 1"/>
-          <p:cNvSpPr txBox="1"/>
-          <p:nvPr/>
-        </p:nvSpPr>
-        <p:spPr>
-          <a:xfrm>
-            <a:off x="609600" y="304800"/>
-            <a:ext cx="3175000" cy="279400"/>
-          </a:xfrm>
-          <a:prstGeom prst="rect">
-            <a:avLst/>
-          </a:prstGeom>
-          <a:noFill/>
-        </p:spPr>
-        <p:txBody>
-          <a:bodyPr wrap="square">
-            <a:normAutofit/>
-          </a:bodyPr>
-          <a:lstStyle/>
-          <a:p>
-            <a:pPr algn="l"/>
-            <a:r>
-              <a:rPr sz="1000" b="1" i="0">
-                <a:solidFill>
-                  <a:srgbClr val="191D2E"/>
-                </a:solidFill>
-                <a:latin typeface="Arial"/>
-              </a:rPr>
-              <a:t>FKB  Campus</a:t>
-            </a:r>
-          </a:p>
-        </p:txBody>
-      </p:sp>
-      <p:sp>
-        <p:nvSpPr>
-          <p:cNvPr id="3" name="TextBox 2"/>
-          <p:cNvSpPr txBox="1"/>
-          <p:nvPr/>
-        </p:nvSpPr>
-        <p:spPr>
-          <a:xfrm>
-            <a:off x="609600" y="304800"/>
-            <a:ext cx="10972800" cy="279400"/>
-          </a:xfrm>
-          <a:prstGeom prst="rect">
-            <a:avLst/>
-          </a:prstGeom>
-          <a:noFill/>
-        </p:spPr>
-        <p:txBody>
-          <a:bodyPr wrap="square">
-            <a:normAutofit/>
-          </a:bodyPr>
-          <a:lstStyle/>
-          <a:p>
-            <a:pPr algn="r"/>
-            <a:r>
-              <a:rPr sz="900" b="0" i="0">
-                <a:solidFill>
-                  <a:srgbClr val="7B7FA0"/>
-                </a:solidFill>
-                <a:latin typeface="Courier New"/>
-              </a:rPr>
-              <a:t>M15  ·  v0.4</a:t>
-            </a:r>
-          </a:p>
-        </p:txBody>
-      </p:sp>
-      <p:sp>
-        <p:nvSpPr>
-          <p:cNvPr id="4" name="TextBox 3"/>
-          <p:cNvSpPr txBox="1"/>
-          <p:nvPr/>
-        </p:nvSpPr>
-        <p:spPr>
-          <a:xfrm>
-            <a:off x="609600" y="2794000"/>
-            <a:ext cx="10972800" cy="2032000"/>
-          </a:xfrm>
-          <a:prstGeom prst="rect">
-            <a:avLst/>
-          </a:prstGeom>
-          <a:noFill/>
-        </p:spPr>
-        <p:txBody>
-          <a:bodyPr wrap="square">
-            <a:normAutofit/>
-          </a:bodyPr>
-          <a:lstStyle/>
-          <a:p>
-            <a:pPr algn="l"/>
-            <a:r>
-              <a:rPr sz="6000" b="0" i="0">
-                <a:solidFill>
-                  <a:srgbClr val="191D2E"/>
-                </a:solidFill>
-                <a:latin typeface="Georgia"/>
-              </a:rPr>
-              <a:t>Marktbearbeitungsstrategie</a:t>
-            </a:r>
-          </a:p>
-        </p:txBody>
-      </p:sp>
-      <p:sp>
-        <p:nvSpPr>
-          <p:cNvPr id="5" name="Rectangle 4"/>
+          <p:cNvPr id="2" name="Rectangle 1"/>
           <p:cNvSpPr/>
           <p:nvPr/>
         </p:nvSpPr>
         <p:spPr>
           <a:xfrm>
-            <a:off x="609600" y="4889500"/>
-            <a:ext cx="10972800" cy="6350"/>
+            <a:off x="0" y="0"/>
+            <a:ext cx="12188952" cy="6858000"/>
           </a:xfrm>
           <a:prstGeom prst="rect">
             <a:avLst/>
           </a:prstGeom>
           <a:solidFill>
-            <a:srgbClr val="191D2E"/>
+            <a:srgbClr val="1F2C56"/>
           </a:solidFill>
           <a:ln>
             <a:noFill/>
@@ -3256,14 +3145,57 @@
       </p:sp>
       <p:sp>
         <p:nvSpPr>
-          <p:cNvPr id="6" name="TextBox 5"/>
+          <p:cNvPr id="3" name="Rectangle 2"/>
+          <p:cNvSpPr/>
+          <p:nvPr/>
+        </p:nvSpPr>
+        <p:spPr>
+          <a:xfrm>
+            <a:off x="0" y="0"/>
+            <a:ext cx="12188952" cy="54864"/>
+          </a:xfrm>
+          <a:prstGeom prst="rect">
+            <a:avLst/>
+          </a:prstGeom>
+          <a:solidFill>
+            <a:srgbClr val="D9C089"/>
+          </a:solidFill>
+          <a:ln>
+            <a:noFill/>
+          </a:ln>
+        </p:spPr>
+        <p:style>
+          <a:lnRef idx="1">
+            <a:schemeClr val="accent1"/>
+          </a:lnRef>
+          <a:fillRef idx="3">
+            <a:schemeClr val="accent1"/>
+          </a:fillRef>
+          <a:effectRef idx="2">
+            <a:schemeClr val="accent1"/>
+          </a:effectRef>
+          <a:fontRef idx="minor">
+            <a:schemeClr val="lt1"/>
+          </a:fontRef>
+        </p:style>
+        <p:txBody>
+          <a:bodyPr rtlCol="0" anchor="ctr"/>
+          <a:lstStyle/>
+          <a:p>
+            <a:pPr algn="ctr"/>
+          </a:p>
+        </p:txBody>
+      </p:sp>
+      <p:sp>
+        <p:nvSpPr>
+          <p:cNvPr id="4" name="TextBox 3"/>
           <p:cNvSpPr txBox="1"/>
           <p:nvPr/>
         </p:nvSpPr>
         <p:spPr>
           <a:xfrm>
-            <a:off x="609600" y="5016500"/>
-            <a:ext cx="5207000" cy="1143000"/>
+            <a:off x="685800" y="201168"/>
+            <a:ext cx="10817352" cy="256032"/>
           </a:xfrm>
           <a:prstGeom prst="rect">
             <a:avLst/>
@@ -3271,21 +3203,99 @@
           <a:noFill/>
         </p:spPr>
         <p:txBody>
+          <a:bodyPr wrap="none">
+            <a:spAutoFit/>
+          </a:bodyPr>
+          <a:lstStyle/>
+          <a:p>
+            <a:pPr algn="l"/>
+            <a:r>
+              <a:rPr sz="800">
+                <a:solidFill>
+                  <a:srgbClr val="C8D2E6"/>
+                </a:solidFill>
+                <a:latin typeface="JetBrains Mono"/>
+              </a:rPr>
+              <a:t>FKB CAMPUS  ·  FIRMENKUNDENAKADEMIE  ·  M15</a:t>
+            </a:r>
+          </a:p>
+        </p:txBody>
+      </p:sp>
+      <p:sp>
+        <p:nvSpPr>
+          <p:cNvPr id="5" name="TextBox 4"/>
+          <p:cNvSpPr txBox="1"/>
+          <p:nvPr/>
+        </p:nvSpPr>
+        <p:spPr>
+          <a:xfrm>
+            <a:off x="685800" y="1828800"/>
+            <a:ext cx="10817352" cy="2011680"/>
+          </a:xfrm>
+          <a:prstGeom prst="rect">
+            <a:avLst/>
+          </a:prstGeom>
+          <a:noFill/>
+        </p:spPr>
+        <p:txBody>
           <a:bodyPr wrap="square">
-            <a:normAutofit/>
+            <a:spAutoFit/>
           </a:bodyPr>
           <a:lstStyle/>
           <a:p>
             <a:pPr algn="l"/>
             <a:r>
-              <a:rPr sz="1400" b="0" i="1">
-                <a:solidFill>
-                  <a:srgbClr val="4D5270"/>
-                </a:solidFill>
-                <a:latin typeface="Georgia"/>
-              </a:rPr>
-              <a:t>Zielsegmente definieren, Marktpotenziale analysieren und eine eigene Vertriebsstrategie entwickeln</a:t>
-            </a:r>
+              <a:rPr sz="4600" b="1" i="0">
+                <a:solidFill>
+                  <a:srgbClr val="FFFFFF"/>
+                </a:solidFill>
+                <a:latin typeface="Source Serif 4"/>
+              </a:rPr>
+              <a:t>Marktbearbeitungsstrategie</a:t>
+            </a:r>
+          </a:p>
+        </p:txBody>
+      </p:sp>
+      <p:sp>
+        <p:nvSpPr>
+          <p:cNvPr id="6" name="Rectangle 5"/>
+          <p:cNvSpPr/>
+          <p:nvPr/>
+        </p:nvSpPr>
+        <p:spPr>
+          <a:xfrm>
+            <a:off x="685800" y="5029200"/>
+            <a:ext cx="10817352" cy="12700"/>
+          </a:xfrm>
+          <a:prstGeom prst="rect">
+            <a:avLst/>
+          </a:prstGeom>
+          <a:solidFill>
+            <a:srgbClr val="FFFFFF"/>
+          </a:solidFill>
+          <a:ln>
+            <a:noFill/>
+          </a:ln>
+        </p:spPr>
+        <p:style>
+          <a:lnRef idx="1">
+            <a:schemeClr val="accent1"/>
+          </a:lnRef>
+          <a:fillRef idx="3">
+            <a:schemeClr val="accent1"/>
+          </a:fillRef>
+          <a:effectRef idx="2">
+            <a:schemeClr val="accent1"/>
+          </a:effectRef>
+          <a:fontRef idx="minor">
+            <a:schemeClr val="lt1"/>
+          </a:fontRef>
+        </p:style>
+        <p:txBody>
+          <a:bodyPr rtlCol="0" anchor="ctr"/>
+          <a:lstStyle/>
+          <a:p>
+            <a:pPr algn="ctr"/>
           </a:p>
         </p:txBody>
       </p:sp>
@@ -3297,8 +3307,8 @@
         </p:nvSpPr>
         <p:spPr>
           <a:xfrm>
-            <a:off x="6032500" y="5016500"/>
-            <a:ext cx="2540000" cy="177800"/>
+            <a:off x="685800" y="5193792"/>
+            <a:ext cx="5408676" cy="201168"/>
           </a:xfrm>
           <a:prstGeom prst="rect">
             <a:avLst/>
@@ -3306,20 +3316,20 @@
           <a:noFill/>
         </p:spPr>
         <p:txBody>
-          <a:bodyPr wrap="square">
-            <a:normAutofit/>
+          <a:bodyPr wrap="none">
+            <a:spAutoFit/>
           </a:bodyPr>
           <a:lstStyle/>
           <a:p>
             <a:pPr algn="l"/>
             <a:r>
-              <a:rPr sz="900" b="0" i="0">
-                <a:solidFill>
-                  <a:srgbClr val="7B7FA0"/>
-                </a:solidFill>
-                <a:latin typeface="Courier New"/>
-              </a:rPr>
-              <a:t>ZIELSTUFE</a:t>
+              <a:rPr sz="700">
+                <a:solidFill>
+                  <a:srgbClr val="A0B4D2"/>
+                </a:solidFill>
+                <a:latin typeface="JetBrains Mono"/>
+              </a:rPr>
+              <a:t>KOMPETENZSTUFE</a:t>
             </a:r>
           </a:p>
         </p:txBody>
@@ -3332,8 +3342,8 @@
         </p:nvSpPr>
         <p:spPr>
           <a:xfrm>
-            <a:off x="6032500" y="5207000"/>
-            <a:ext cx="2540000" cy="508000"/>
+            <a:off x="685800" y="5394960"/>
+            <a:ext cx="5408676" cy="320040"/>
           </a:xfrm>
           <a:prstGeom prst="rect">
             <a:avLst/>
@@ -3342,17 +3352,17 @@
         </p:spPr>
         <p:txBody>
           <a:bodyPr wrap="square">
-            <a:normAutofit/>
+            <a:spAutoFit/>
           </a:bodyPr>
           <a:lstStyle/>
           <a:p>
             <a:pPr algn="l"/>
             <a:r>
-              <a:rPr sz="1400" b="0" i="0">
-                <a:solidFill>
-                  <a:srgbClr val="191D2E"/>
-                </a:solidFill>
-                <a:latin typeface="Georgia"/>
+              <a:rPr sz="1100" b="0" i="0">
+                <a:solidFill>
+                  <a:srgbClr val="FFFFFF"/>
+                </a:solidFill>
+                <a:latin typeface="Arial"/>
               </a:rPr>
               <a:t>Stratege</a:t>
             </a:r>
@@ -3367,8 +3377,8 @@
         </p:nvSpPr>
         <p:spPr>
           <a:xfrm>
-            <a:off x="8890000" y="5016500"/>
-            <a:ext cx="2667000" cy="177800"/>
+            <a:off x="6094476" y="5193792"/>
+            <a:ext cx="5408676" cy="201168"/>
           </a:xfrm>
           <a:prstGeom prst="rect">
             <a:avLst/>
@@ -3376,20 +3386,20 @@
           <a:noFill/>
         </p:spPr>
         <p:txBody>
-          <a:bodyPr wrap="square">
-            <a:normAutofit/>
+          <a:bodyPr wrap="none">
+            <a:spAutoFit/>
           </a:bodyPr>
           <a:lstStyle/>
           <a:p>
             <a:pPr algn="l"/>
             <a:r>
-              <a:rPr sz="900" b="0" i="0">
-                <a:solidFill>
-                  <a:srgbClr val="7B7FA0"/>
-                </a:solidFill>
-                <a:latin typeface="Courier New"/>
-              </a:rPr>
-              <a:t>DAUER</a:t>
+              <a:rPr sz="700">
+                <a:solidFill>
+                  <a:srgbClr val="A0B4D2"/>
+                </a:solidFill>
+                <a:latin typeface="JetBrains Mono"/>
+              </a:rPr>
+              <a:t>VERSION</a:t>
             </a:r>
           </a:p>
         </p:txBody>
@@ -3402,8 +3412,8 @@
         </p:nvSpPr>
         <p:spPr>
           <a:xfrm>
-            <a:off x="8890000" y="5207000"/>
-            <a:ext cx="2667000" cy="508000"/>
+            <a:off x="6094476" y="5394960"/>
+            <a:ext cx="5408676" cy="320040"/>
           </a:xfrm>
           <a:prstGeom prst="rect">
             <a:avLst/>
@@ -3412,19 +3422,132 @@
         </p:spPr>
         <p:txBody>
           <a:bodyPr wrap="square">
-            <a:normAutofit/>
+            <a:spAutoFit/>
           </a:bodyPr>
           <a:lstStyle/>
           <a:p>
             <a:pPr algn="l"/>
             <a:r>
-              <a:rPr sz="1400" b="0" i="0">
-                <a:solidFill>
-                  <a:srgbClr val="191D2E"/>
-                </a:solidFill>
-                <a:latin typeface="Georgia"/>
-              </a:rPr>
-              <a:t>1 Tag</a:t>
+              <a:rPr sz="1100" b="0" i="0">
+                <a:solidFill>
+                  <a:srgbClr val="FFFFFF"/>
+                </a:solidFill>
+                <a:latin typeface="Arial"/>
+              </a:rPr>
+              <a:t>v0.4</a:t>
+            </a:r>
+          </a:p>
+        </p:txBody>
+      </p:sp>
+      <p:sp>
+        <p:nvSpPr>
+          <p:cNvPr id="11" name="Rectangle 10"/>
+          <p:cNvSpPr/>
+          <p:nvPr/>
+        </p:nvSpPr>
+        <p:spPr>
+          <a:xfrm>
+            <a:off x="0" y="6510528"/>
+            <a:ext cx="12188952" cy="347472"/>
+          </a:xfrm>
+          <a:prstGeom prst="rect">
+            <a:avLst/>
+          </a:prstGeom>
+          <a:solidFill>
+            <a:srgbClr val="0A1937"/>
+          </a:solidFill>
+          <a:ln>
+            <a:noFill/>
+          </a:ln>
+        </p:spPr>
+        <p:style>
+          <a:lnRef idx="1">
+            <a:schemeClr val="accent1"/>
+          </a:lnRef>
+          <a:fillRef idx="3">
+            <a:schemeClr val="accent1"/>
+          </a:fillRef>
+          <a:effectRef idx="2">
+            <a:schemeClr val="accent1"/>
+          </a:effectRef>
+          <a:fontRef idx="minor">
+            <a:schemeClr val="lt1"/>
+          </a:fontRef>
+        </p:style>
+        <p:txBody>
+          <a:bodyPr rtlCol="0" anchor="ctr"/>
+          <a:lstStyle/>
+          <a:p>
+            <a:pPr algn="ctr"/>
+          </a:p>
+        </p:txBody>
+      </p:sp>
+      <p:sp>
+        <p:nvSpPr>
+          <p:cNvPr id="12" name="TextBox 11"/>
+          <p:cNvSpPr txBox="1"/>
+          <p:nvPr/>
+        </p:nvSpPr>
+        <p:spPr>
+          <a:xfrm>
+            <a:off x="685800" y="6583680"/>
+            <a:ext cx="5408676" cy="256032"/>
+          </a:xfrm>
+          <a:prstGeom prst="rect">
+            <a:avLst/>
+          </a:prstGeom>
+          <a:noFill/>
+        </p:spPr>
+        <p:txBody>
+          <a:bodyPr wrap="none">
+            <a:spAutoFit/>
+          </a:bodyPr>
+          <a:lstStyle/>
+          <a:p>
+            <a:pPr algn="l"/>
+            <a:r>
+              <a:rPr sz="700">
+                <a:solidFill>
+                  <a:srgbClr val="96A5BE"/>
+                </a:solidFill>
+                <a:latin typeface="JetBrains Mono"/>
+              </a:rPr>
+              <a:t>Benedikt Zoller Coaching  ·  FKB Campus  ·  2026</a:t>
+            </a:r>
+          </a:p>
+        </p:txBody>
+      </p:sp>
+      <p:sp>
+        <p:nvSpPr>
+          <p:cNvPr id="13" name="TextBox 12"/>
+          <p:cNvSpPr txBox="1"/>
+          <p:nvPr/>
+        </p:nvSpPr>
+        <p:spPr>
+          <a:xfrm>
+            <a:off x="6094476" y="6583680"/>
+            <a:ext cx="5408676" cy="256032"/>
+          </a:xfrm>
+          <a:prstGeom prst="rect">
+            <a:avLst/>
+          </a:prstGeom>
+          <a:noFill/>
+        </p:spPr>
+        <p:txBody>
+          <a:bodyPr wrap="none">
+            <a:spAutoFit/>
+          </a:bodyPr>
+          <a:lstStyle/>
+          <a:p>
+            <a:pPr algn="r"/>
+            <a:r>
+              <a:rPr sz="700">
+                <a:solidFill>
+                  <a:srgbClr val="96A5BE"/>
+                </a:solidFill>
+                <a:latin typeface="JetBrains Mono"/>
+              </a:rPr>
+              <a:t>Trainer-Präsentation</a:t>
             </a:r>
           </a:p>
         </p:txBody>
@@ -3440,14 +3563,6 @@
 <file path=ppt/slides/slide10.xml><?xml version="1.0" encoding="utf-8"?>
 <p:sld xmlns:a="http://schemas.openxmlformats.org/drawingml/2006/main" xmlns:p="http://schemas.openxmlformats.org/presentationml/2006/main" xmlns:r="http://schemas.openxmlformats.org/officeDocument/2006/relationships">
   <p:cSld>
-    <p:bg>
-      <p:bgPr>
-        <a:solidFill>
-          <a:srgbClr val="F8F8FA"/>
-        </a:solidFill>
-        <a:effectLst/>
-      </p:bgPr>
-    </p:bg>
     <p:spTree>
       <p:nvGrpSpPr>
         <p:cNvPr id="1" name=""/>
@@ -3457,125 +3572,20 @@
       <p:grpSpPr/>
       <p:sp>
         <p:nvSpPr>
-          <p:cNvPr id="2" name="TextBox 1"/>
-          <p:cNvSpPr txBox="1"/>
-          <p:nvPr/>
-        </p:nvSpPr>
-        <p:spPr>
-          <a:xfrm>
-            <a:off x="609600" y="279400"/>
-            <a:ext cx="2540000" cy="279400"/>
-          </a:xfrm>
-          <a:prstGeom prst="rect">
-            <a:avLst/>
-          </a:prstGeom>
-          <a:noFill/>
-        </p:spPr>
-        <p:txBody>
-          <a:bodyPr wrap="square">
-            <a:normAutofit/>
-          </a:bodyPr>
-          <a:lstStyle/>
-          <a:p>
-            <a:pPr algn="l"/>
-            <a:r>
-              <a:rPr sz="1000" b="1" i="0">
-                <a:solidFill>
-                  <a:srgbClr val="191D2E"/>
-                </a:solidFill>
-                <a:latin typeface="Arial"/>
-              </a:rPr>
-              <a:t>FKB  Campus</a:t>
-            </a:r>
-          </a:p>
-        </p:txBody>
-      </p:sp>
-      <p:sp>
-        <p:nvSpPr>
-          <p:cNvPr id="3" name="TextBox 2"/>
-          <p:cNvSpPr txBox="1"/>
-          <p:nvPr/>
-        </p:nvSpPr>
-        <p:spPr>
-          <a:xfrm>
-            <a:off x="609600" y="279400"/>
-            <a:ext cx="10972800" cy="279400"/>
-          </a:xfrm>
-          <a:prstGeom prst="rect">
-            <a:avLst/>
-          </a:prstGeom>
-          <a:noFill/>
-        </p:spPr>
-        <p:txBody>
-          <a:bodyPr wrap="square">
-            <a:normAutofit/>
-          </a:bodyPr>
-          <a:lstStyle/>
-          <a:p>
-            <a:pPr algn="r"/>
-            <a:r>
-              <a:rPr sz="900" b="0" i="0">
-                <a:solidFill>
-                  <a:srgbClr val="7B7FA0"/>
-                </a:solidFill>
-                <a:latin typeface="Courier New"/>
-              </a:rPr>
-              <a:t>III · STRATEGIE ENTWICKELN UND UMSETZEN</a:t>
-            </a:r>
-          </a:p>
-        </p:txBody>
-      </p:sp>
-      <p:sp>
-        <p:nvSpPr>
-          <p:cNvPr id="4" name="TextBox 3"/>
-          <p:cNvSpPr txBox="1"/>
-          <p:nvPr/>
-        </p:nvSpPr>
-        <p:spPr>
-          <a:xfrm>
-            <a:off x="609600" y="6426200"/>
-            <a:ext cx="10972800" cy="228600"/>
-          </a:xfrm>
-          <a:prstGeom prst="rect">
-            <a:avLst/>
-          </a:prstGeom>
-          <a:noFill/>
-        </p:spPr>
-        <p:txBody>
-          <a:bodyPr wrap="square">
-            <a:normAutofit/>
-          </a:bodyPr>
-          <a:lstStyle/>
-          <a:p>
-            <a:pPr algn="r"/>
-            <a:r>
-              <a:rPr sz="900" b="0" i="0">
-                <a:solidFill>
-                  <a:srgbClr val="7B7FA0"/>
-                </a:solidFill>
-                <a:latin typeface="Courier New"/>
-              </a:rPr>
-              <a:t>10</a:t>
-            </a:r>
-          </a:p>
-        </p:txBody>
-      </p:sp>
-      <p:sp>
-        <p:nvSpPr>
-          <p:cNvPr id="5" name="Rectangle 4"/>
+          <p:cNvPr id="2" name="Rectangle 1"/>
           <p:cNvSpPr/>
           <p:nvPr/>
         </p:nvSpPr>
         <p:spPr>
           <a:xfrm>
-            <a:off x="609600" y="825500"/>
-            <a:ext cx="10972800" cy="6350"/>
+            <a:off x="0" y="0"/>
+            <a:ext cx="12188952" cy="6858000"/>
           </a:xfrm>
           <a:prstGeom prst="rect">
             <a:avLst/>
           </a:prstGeom>
           <a:solidFill>
-            <a:srgbClr val="191D2E"/>
+            <a:srgbClr val="EDEDF3"/>
           </a:solidFill>
           <a:ln>
             <a:noFill/>
@@ -3605,55 +3615,20 @@
       </p:sp>
       <p:sp>
         <p:nvSpPr>
-          <p:cNvPr id="6" name="TextBox 5"/>
-          <p:cNvSpPr txBox="1"/>
-          <p:nvPr/>
-        </p:nvSpPr>
-        <p:spPr>
-          <a:xfrm>
-            <a:off x="609600" y="920750"/>
-            <a:ext cx="10972800" cy="1778000"/>
-          </a:xfrm>
-          <a:prstGeom prst="rect">
-            <a:avLst/>
-          </a:prstGeom>
-          <a:noFill/>
-        </p:spPr>
-        <p:txBody>
-          <a:bodyPr wrap="square">
-            <a:normAutofit/>
-          </a:bodyPr>
-          <a:lstStyle/>
-          <a:p>
-            <a:pPr algn="l"/>
-            <a:r>
-              <a:rPr sz="3800" b="0" i="0">
-                <a:solidFill>
-                  <a:srgbClr val="191D2E"/>
-                </a:solidFill>
-                <a:latin typeface="Georgia"/>
-              </a:rPr>
-              <a:t>Ihr Auftrag: Jahresplan auf einer Seite</a:t>
-            </a:r>
-          </a:p>
-        </p:txBody>
-      </p:sp>
-      <p:sp>
-        <p:nvSpPr>
-          <p:cNvPr id="7" name="Rectangle 6"/>
+          <p:cNvPr id="3" name="Rectangle 2"/>
           <p:cNvSpPr/>
           <p:nvPr/>
         </p:nvSpPr>
         <p:spPr>
           <a:xfrm>
-            <a:off x="609600" y="2762250"/>
-            <a:ext cx="10972800" cy="6350"/>
+            <a:off x="0" y="0"/>
+            <a:ext cx="12188952" cy="50292"/>
           </a:xfrm>
           <a:prstGeom prst="rect">
             <a:avLst/>
           </a:prstGeom>
           <a:solidFill>
-            <a:srgbClr val="E0E0E8"/>
+            <a:srgbClr val="1F2C56"/>
           </a:solidFill>
           <a:ln>
             <a:noFill/>
@@ -3683,14 +3658,14 @@
       </p:sp>
       <p:sp>
         <p:nvSpPr>
-          <p:cNvPr id="8" name="TextBox 7"/>
+          <p:cNvPr id="4" name="TextBox 3"/>
           <p:cNvSpPr txBox="1"/>
           <p:nvPr/>
         </p:nvSpPr>
         <p:spPr>
           <a:xfrm>
-            <a:off x="609600" y="2851150"/>
-            <a:ext cx="10972800" cy="3448050"/>
+            <a:off x="685800" y="109728"/>
+            <a:ext cx="10817352" cy="228600"/>
           </a:xfrm>
           <a:prstGeom prst="rect">
             <a:avLst/>
@@ -3698,84 +3673,219 @@
           <a:noFill/>
         </p:spPr>
         <p:txBody>
+          <a:bodyPr wrap="none">
+            <a:spAutoFit/>
+          </a:bodyPr>
+          <a:lstStyle/>
+          <a:p>
+            <a:pPr algn="l"/>
+            <a:r>
+              <a:rPr sz="750">
+                <a:solidFill>
+                  <a:srgbClr val="78808C"/>
+                </a:solidFill>
+                <a:latin typeface="JetBrains Mono"/>
+              </a:rPr>
+              <a:t>M15  ·  INHALT</a:t>
+            </a:r>
+          </a:p>
+        </p:txBody>
+      </p:sp>
+      <p:sp>
+        <p:nvSpPr>
+          <p:cNvPr id="5" name="Rectangle 4"/>
+          <p:cNvSpPr/>
+          <p:nvPr/>
+        </p:nvSpPr>
+        <p:spPr>
+          <a:xfrm>
+            <a:off x="0" y="1234440"/>
+            <a:ext cx="12188952" cy="12700"/>
+          </a:xfrm>
+          <a:prstGeom prst="rect">
+            <a:avLst/>
+          </a:prstGeom>
+          <a:solidFill>
+            <a:srgbClr val="D8DFE4"/>
+          </a:solidFill>
+          <a:ln>
+            <a:noFill/>
+          </a:ln>
+        </p:spPr>
+        <p:style>
+          <a:lnRef idx="1">
+            <a:schemeClr val="accent1"/>
+          </a:lnRef>
+          <a:fillRef idx="3">
+            <a:schemeClr val="accent1"/>
+          </a:fillRef>
+          <a:effectRef idx="2">
+            <a:schemeClr val="accent1"/>
+          </a:effectRef>
+          <a:fontRef idx="minor">
+            <a:schemeClr val="lt1"/>
+          </a:fontRef>
+        </p:style>
+        <p:txBody>
+          <a:bodyPr rtlCol="0" anchor="ctr"/>
+          <a:lstStyle/>
+          <a:p>
+            <a:pPr algn="ctr"/>
+          </a:p>
+        </p:txBody>
+      </p:sp>
+      <p:sp>
+        <p:nvSpPr>
+          <p:cNvPr id="6" name="Rectangle 5"/>
+          <p:cNvSpPr/>
+          <p:nvPr/>
+        </p:nvSpPr>
+        <p:spPr>
+          <a:xfrm>
+            <a:off x="685800" y="502920"/>
+            <a:ext cx="36576" cy="658368"/>
+          </a:xfrm>
+          <a:prstGeom prst="rect">
+            <a:avLst/>
+          </a:prstGeom>
+          <a:solidFill>
+            <a:srgbClr val="D9C089"/>
+          </a:solidFill>
+          <a:ln>
+            <a:noFill/>
+          </a:ln>
+        </p:spPr>
+        <p:style>
+          <a:lnRef idx="1">
+            <a:schemeClr val="accent1"/>
+          </a:lnRef>
+          <a:fillRef idx="3">
+            <a:schemeClr val="accent1"/>
+          </a:fillRef>
+          <a:effectRef idx="2">
+            <a:schemeClr val="accent1"/>
+          </a:effectRef>
+          <a:fontRef idx="minor">
+            <a:schemeClr val="lt1"/>
+          </a:fontRef>
+        </p:style>
+        <p:txBody>
+          <a:bodyPr rtlCol="0" anchor="ctr"/>
+          <a:lstStyle/>
+          <a:p>
+            <a:pPr algn="ctr"/>
+          </a:p>
+        </p:txBody>
+      </p:sp>
+      <p:sp>
+        <p:nvSpPr>
+          <p:cNvPr id="7" name="TextBox 6"/>
+          <p:cNvSpPr txBox="1"/>
+          <p:nvPr/>
+        </p:nvSpPr>
+        <p:spPr>
+          <a:xfrm>
+            <a:off x="813816" y="502920"/>
+            <a:ext cx="10634472" cy="685800"/>
+          </a:xfrm>
+          <a:prstGeom prst="rect">
+            <a:avLst/>
+          </a:prstGeom>
+          <a:noFill/>
+        </p:spPr>
+        <p:txBody>
           <a:bodyPr wrap="square">
-            <a:normAutofit/>
+            <a:spAutoFit/>
           </a:bodyPr>
           <a:lstStyle/>
           <a:p>
-            <a:pPr>
-              <a:spcBef>
-                <a:spcPts val="600"/>
-              </a:spcBef>
-              <a:spcAft>
-                <a:spcPts val="600"/>
-              </a:spcAft>
-            </a:pPr>
-            <a:r>
-              <a:rPr sz="1400">
-                <a:solidFill>
-                  <a:srgbClr val="191D2E"/>
-                </a:solidFill>
-                <a:latin typeface="Georgia"/>
-              </a:rPr>
-              <a:t>–  Zielsegment definieren (eine Branche, eine Größenklasse)</a:t>
-            </a:r>
-          </a:p>
-          <a:p>
-            <a:pPr>
-              <a:spcBef>
-                <a:spcPts val="600"/>
-              </a:spcBef>
-              <a:spcAft>
-                <a:spcPts val="600"/>
-              </a:spcAft>
-            </a:pPr>
-            <a:r>
-              <a:rPr sz="1400">
-                <a:solidFill>
-                  <a:srgbClr val="191D2E"/>
-                </a:solidFill>
-                <a:latin typeface="Georgia"/>
-              </a:rPr>
-              <a:t>–  Fünf Zielunternehmen benennen</a:t>
-            </a:r>
-          </a:p>
-          <a:p>
-            <a:pPr>
-              <a:spcBef>
-                <a:spcPts val="600"/>
-              </a:spcBef>
-              <a:spcAft>
-                <a:spcPts val="600"/>
-              </a:spcAft>
-            </a:pPr>
-            <a:r>
-              <a:rPr sz="1400">
-                <a:solidFill>
-                  <a:srgbClr val="191D2E"/>
-                </a:solidFill>
-                <a:latin typeface="Georgia"/>
-              </a:rPr>
-              <a:t>–  Wertversprechen in zwei Sätzen formulieren</a:t>
-            </a:r>
-          </a:p>
-          <a:p>
-            <a:pPr>
-              <a:spcBef>
-                <a:spcPts val="600"/>
-              </a:spcBef>
-              <a:spcAft>
-                <a:spcPts val="600"/>
-              </a:spcAft>
-            </a:pPr>
-            <a:r>
-              <a:rPr sz="1400">
-                <a:solidFill>
-                  <a:srgbClr val="191D2E"/>
-                </a:solidFill>
-                <a:latin typeface="Georgia"/>
-              </a:rPr>
-              <a:t>–  Drei konkrete Maßnahmen für das nächste Quartal</a:t>
+            <a:pPr algn="l"/>
+            <a:r>
+              <a:rPr sz="2400" b="1" i="0">
+                <a:solidFill>
+                  <a:srgbClr val="1F2C56"/>
+                </a:solidFill>
+                <a:latin typeface="Source Serif 4"/>
+              </a:rPr>
+              <a:t>Welche Kanäle funktionieren wirklich?</a:t>
+            </a:r>
+          </a:p>
+        </p:txBody>
+      </p:sp>
+      <p:sp>
+        <p:nvSpPr>
+          <p:cNvPr id="8" name="Rectangle 7"/>
+          <p:cNvSpPr/>
+          <p:nvPr/>
+        </p:nvSpPr>
+        <p:spPr>
+          <a:xfrm>
+            <a:off x="0" y="6510528"/>
+            <a:ext cx="12188952" cy="347472"/>
+          </a:xfrm>
+          <a:prstGeom prst="rect">
+            <a:avLst/>
+          </a:prstGeom>
+          <a:solidFill>
+            <a:srgbClr val="0A1937"/>
+          </a:solidFill>
+          <a:ln>
+            <a:noFill/>
+          </a:ln>
+        </p:spPr>
+        <p:style>
+          <a:lnRef idx="1">
+            <a:schemeClr val="accent1"/>
+          </a:lnRef>
+          <a:fillRef idx="3">
+            <a:schemeClr val="accent1"/>
+          </a:fillRef>
+          <a:effectRef idx="2">
+            <a:schemeClr val="accent1"/>
+          </a:effectRef>
+          <a:fontRef idx="minor">
+            <a:schemeClr val="lt1"/>
+          </a:fontRef>
+        </p:style>
+        <p:txBody>
+          <a:bodyPr rtlCol="0" anchor="ctr"/>
+          <a:lstStyle/>
+          <a:p>
+            <a:pPr algn="ctr"/>
+          </a:p>
+        </p:txBody>
+      </p:sp>
+      <p:sp>
+        <p:nvSpPr>
+          <p:cNvPr id="9" name="TextBox 8"/>
+          <p:cNvSpPr txBox="1"/>
+          <p:nvPr/>
+        </p:nvSpPr>
+        <p:spPr>
+          <a:xfrm>
+            <a:off x="685800" y="6583680"/>
+            <a:ext cx="6490411" cy="256032"/>
+          </a:xfrm>
+          <a:prstGeom prst="rect">
+            <a:avLst/>
+          </a:prstGeom>
+          <a:noFill/>
+        </p:spPr>
+        <p:txBody>
+          <a:bodyPr wrap="none">
+            <a:spAutoFit/>
+          </a:bodyPr>
+          <a:lstStyle/>
+          <a:p>
+            <a:pPr algn="l"/>
+            <a:r>
+              <a:rPr sz="700">
+                <a:solidFill>
+                  <a:srgbClr val="A0B4D2"/>
+                </a:solidFill>
+                <a:latin typeface="JetBrains Mono"/>
+              </a:rPr>
+              <a:t>Benedikt Zoller Coaching  ·  FKB Campus  ·  M15</a:t>
             </a:r>
           </a:p>
         </p:txBody>
@@ -3791,14 +3901,6 @@
 <file path=ppt/slides/slide11.xml><?xml version="1.0" encoding="utf-8"?>
 <p:sld xmlns:a="http://schemas.openxmlformats.org/drawingml/2006/main" xmlns:p="http://schemas.openxmlformats.org/presentationml/2006/main" xmlns:r="http://schemas.openxmlformats.org/officeDocument/2006/relationships">
   <p:cSld>
-    <p:bg>
-      <p:bgPr>
-        <a:solidFill>
-          <a:srgbClr val="F8F8FA"/>
-        </a:solidFill>
-        <a:effectLst/>
-      </p:bgPr>
-    </p:bg>
     <p:spTree>
       <p:nvGrpSpPr>
         <p:cNvPr id="1" name=""/>
@@ -3808,126 +3910,20 @@
       <p:grpSpPr/>
       <p:sp>
         <p:nvSpPr>
-          <p:cNvPr id="2" name="TextBox 1"/>
-          <p:cNvSpPr txBox="1"/>
-          <p:nvPr/>
-        </p:nvSpPr>
-        <p:spPr>
-          <a:xfrm>
-            <a:off x="609600" y="457200"/>
-            <a:ext cx="3175000" cy="279400"/>
-          </a:xfrm>
-          <a:prstGeom prst="rect">
-            <a:avLst/>
-          </a:prstGeom>
-          <a:noFill/>
-        </p:spPr>
-        <p:txBody>
-          <a:bodyPr wrap="square">
-            <a:normAutofit/>
-          </a:bodyPr>
-          <a:lstStyle/>
-          <a:p>
-            <a:pPr algn="l"/>
-            <a:r>
-              <a:rPr sz="1000" b="1" i="0">
-                <a:solidFill>
-                  <a:srgbClr val="191D2E"/>
-                </a:solidFill>
-                <a:latin typeface="Arial"/>
-              </a:rPr>
-              <a:t>FKB  Campus</a:t>
-            </a:r>
-          </a:p>
-        </p:txBody>
-      </p:sp>
-      <p:sp>
-        <p:nvSpPr>
-          <p:cNvPr id="3" name="TextBox 2"/>
-          <p:cNvSpPr txBox="1"/>
-          <p:nvPr/>
-        </p:nvSpPr>
-        <p:spPr>
-          <a:xfrm>
-            <a:off x="609600" y="457200"/>
-            <a:ext cx="10972800" cy="279400"/>
-          </a:xfrm>
-          <a:prstGeom prst="rect">
-            <a:avLst/>
-          </a:prstGeom>
-          <a:noFill/>
-        </p:spPr>
-        <p:txBody>
-          <a:bodyPr wrap="square">
-            <a:normAutofit/>
-          </a:bodyPr>
-          <a:lstStyle/>
-          <a:p>
-            <a:pPr algn="r"/>
-            <a:r>
-              <a:rPr sz="900" b="0" i="0">
-                <a:solidFill>
-                  <a:srgbClr val="7B7FA0"/>
-                </a:solidFill>
-                <a:latin typeface="Courier New"/>
-              </a:rPr>
-              <a:t>Ende · v0.4</a:t>
-            </a:r>
-          </a:p>
-        </p:txBody>
-      </p:sp>
-      <p:sp>
-        <p:nvSpPr>
-          <p:cNvPr id="4" name="TextBox 3"/>
-          <p:cNvSpPr txBox="1"/>
-          <p:nvPr/>
-        </p:nvSpPr>
-        <p:spPr>
-          <a:xfrm>
-            <a:off x="609600" y="1143000"/>
-            <a:ext cx="10972800" cy="3556000"/>
-          </a:xfrm>
-          <a:prstGeom prst="rect">
-            <a:avLst/>
-          </a:prstGeom>
-          <a:noFill/>
-        </p:spPr>
-        <p:txBody>
-          <a:bodyPr wrap="square">
-            <a:normAutofit/>
-          </a:bodyPr>
-          <a:lstStyle/>
-          <a:p>
-            <a:pPr algn="l"/>
-            <a:r>
-              <a:rPr sz="9600" b="0" i="0">
-                <a:solidFill>
-                  <a:srgbClr val="191D2E"/>
-                </a:solidFill>
-                <a:latin typeface="Georgia"/>
-              </a:rPr>
-              <a:t>Danke.
-Fragen?</a:t>
-            </a:r>
-          </a:p>
-        </p:txBody>
-      </p:sp>
-      <p:sp>
-        <p:nvSpPr>
-          <p:cNvPr id="5" name="Rectangle 4"/>
+          <p:cNvPr id="2" name="Rectangle 1"/>
           <p:cNvSpPr/>
           <p:nvPr/>
         </p:nvSpPr>
         <p:spPr>
           <a:xfrm>
-            <a:off x="609600" y="4826000"/>
-            <a:ext cx="10972800" cy="6350"/>
+            <a:off x="0" y="0"/>
+            <a:ext cx="12188952" cy="6858000"/>
           </a:xfrm>
           <a:prstGeom prst="rect">
             <a:avLst/>
           </a:prstGeom>
           <a:solidFill>
-            <a:srgbClr val="191D2E"/>
+            <a:srgbClr val="EDEDF3"/>
           </a:solidFill>
           <a:ln>
             <a:noFill/>
@@ -3957,14 +3953,57 @@
       </p:sp>
       <p:sp>
         <p:nvSpPr>
-          <p:cNvPr id="6" name="TextBox 5"/>
+          <p:cNvPr id="3" name="Rectangle 2"/>
+          <p:cNvSpPr/>
+          <p:nvPr/>
+        </p:nvSpPr>
+        <p:spPr>
+          <a:xfrm>
+            <a:off x="0" y="0"/>
+            <a:ext cx="12188952" cy="50292"/>
+          </a:xfrm>
+          <a:prstGeom prst="rect">
+            <a:avLst/>
+          </a:prstGeom>
+          <a:solidFill>
+            <a:srgbClr val="1F2C56"/>
+          </a:solidFill>
+          <a:ln>
+            <a:noFill/>
+          </a:ln>
+        </p:spPr>
+        <p:style>
+          <a:lnRef idx="1">
+            <a:schemeClr val="accent1"/>
+          </a:lnRef>
+          <a:fillRef idx="3">
+            <a:schemeClr val="accent1"/>
+          </a:fillRef>
+          <a:effectRef idx="2">
+            <a:schemeClr val="accent1"/>
+          </a:effectRef>
+          <a:fontRef idx="minor">
+            <a:schemeClr val="lt1"/>
+          </a:fontRef>
+        </p:style>
+        <p:txBody>
+          <a:bodyPr rtlCol="0" anchor="ctr"/>
+          <a:lstStyle/>
+          <a:p>
+            <a:pPr algn="ctr"/>
+          </a:p>
+        </p:txBody>
+      </p:sp>
+      <p:sp>
+        <p:nvSpPr>
+          <p:cNvPr id="4" name="TextBox 3"/>
           <p:cNvSpPr txBox="1"/>
           <p:nvPr/>
         </p:nvSpPr>
         <p:spPr>
           <a:xfrm>
-            <a:off x="609600" y="4953000"/>
-            <a:ext cx="5715000" cy="1143000"/>
+            <a:off x="685800" y="109728"/>
+            <a:ext cx="10817352" cy="228600"/>
           </a:xfrm>
           <a:prstGeom prst="rect">
             <a:avLst/>
@@ -3972,21 +4011,107 @@
           <a:noFill/>
         </p:spPr>
         <p:txBody>
-          <a:bodyPr wrap="square">
-            <a:normAutofit/>
+          <a:bodyPr wrap="none">
+            <a:spAutoFit/>
           </a:bodyPr>
           <a:lstStyle/>
           <a:p>
             <a:pPr algn="l"/>
             <a:r>
-              <a:rPr sz="1400" b="0" i="1">
-                <a:solidFill>
-                  <a:srgbClr val="191D2E"/>
-                </a:solidFill>
-                <a:latin typeface="Georgia"/>
-              </a:rPr>
-              <a:t>Modul «Marktbearbeitungsstrategie» auf FKB Campus — 5 Lernziele, Praxisfall und Quellenapparat.</a:t>
-            </a:r>
+              <a:rPr sz="750">
+                <a:solidFill>
+                  <a:srgbClr val="78808C"/>
+                </a:solidFill>
+                <a:latin typeface="JetBrains Mono"/>
+              </a:rPr>
+              <a:t>M15  ·  INHALT</a:t>
+            </a:r>
+          </a:p>
+        </p:txBody>
+      </p:sp>
+      <p:sp>
+        <p:nvSpPr>
+          <p:cNvPr id="5" name="Rectangle 4"/>
+          <p:cNvSpPr/>
+          <p:nvPr/>
+        </p:nvSpPr>
+        <p:spPr>
+          <a:xfrm>
+            <a:off x="0" y="1234440"/>
+            <a:ext cx="12188952" cy="12700"/>
+          </a:xfrm>
+          <a:prstGeom prst="rect">
+            <a:avLst/>
+          </a:prstGeom>
+          <a:solidFill>
+            <a:srgbClr val="D8DFE4"/>
+          </a:solidFill>
+          <a:ln>
+            <a:noFill/>
+          </a:ln>
+        </p:spPr>
+        <p:style>
+          <a:lnRef idx="1">
+            <a:schemeClr val="accent1"/>
+          </a:lnRef>
+          <a:fillRef idx="3">
+            <a:schemeClr val="accent1"/>
+          </a:fillRef>
+          <a:effectRef idx="2">
+            <a:schemeClr val="accent1"/>
+          </a:effectRef>
+          <a:fontRef idx="minor">
+            <a:schemeClr val="lt1"/>
+          </a:fontRef>
+        </p:style>
+        <p:txBody>
+          <a:bodyPr rtlCol="0" anchor="ctr"/>
+          <a:lstStyle/>
+          <a:p>
+            <a:pPr algn="ctr"/>
+          </a:p>
+        </p:txBody>
+      </p:sp>
+      <p:sp>
+        <p:nvSpPr>
+          <p:cNvPr id="6" name="Rectangle 5"/>
+          <p:cNvSpPr/>
+          <p:nvPr/>
+        </p:nvSpPr>
+        <p:spPr>
+          <a:xfrm>
+            <a:off x="685800" y="502920"/>
+            <a:ext cx="36576" cy="658368"/>
+          </a:xfrm>
+          <a:prstGeom prst="rect">
+            <a:avLst/>
+          </a:prstGeom>
+          <a:solidFill>
+            <a:srgbClr val="D9C089"/>
+          </a:solidFill>
+          <a:ln>
+            <a:noFill/>
+          </a:ln>
+        </p:spPr>
+        <p:style>
+          <a:lnRef idx="1">
+            <a:schemeClr val="accent1"/>
+          </a:lnRef>
+          <a:fillRef idx="3">
+            <a:schemeClr val="accent1"/>
+          </a:fillRef>
+          <a:effectRef idx="2">
+            <a:schemeClr val="accent1"/>
+          </a:effectRef>
+          <a:fontRef idx="minor">
+            <a:schemeClr val="lt1"/>
+          </a:fontRef>
+        </p:style>
+        <p:txBody>
+          <a:bodyPr rtlCol="0" anchor="ctr"/>
+          <a:lstStyle/>
+          <a:p>
+            <a:pPr algn="ctr"/>
           </a:p>
         </p:txBody>
       </p:sp>
@@ -3998,8 +4123,8 @@
         </p:nvSpPr>
         <p:spPr>
           <a:xfrm>
-            <a:off x="6731000" y="4953000"/>
-            <a:ext cx="2413000" cy="177800"/>
+            <a:off x="813816" y="502920"/>
+            <a:ext cx="10634472" cy="685800"/>
           </a:xfrm>
           <a:prstGeom prst="rect">
             <a:avLst/>
@@ -4008,19 +4133,19 @@
         </p:spPr>
         <p:txBody>
           <a:bodyPr wrap="square">
-            <a:normAutofit/>
+            <a:spAutoFit/>
           </a:bodyPr>
           <a:lstStyle/>
           <a:p>
             <a:pPr algn="l"/>
             <a:r>
-              <a:rPr sz="900" b="0" i="0">
-                <a:solidFill>
-                  <a:srgbClr val="7B7FA0"/>
-                </a:solidFill>
-                <a:latin typeface="Courier New"/>
-              </a:rPr>
-              <a:t>Trainer</a:t>
+              <a:rPr sz="2400" b="1" i="0">
+                <a:solidFill>
+                  <a:srgbClr val="1F2C56"/>
+                </a:solidFill>
+                <a:latin typeface="Source Serif 4"/>
+              </a:rPr>
+              <a:t>Empfehlungsmanagement systematisieren</a:t>
             </a:r>
           </a:p>
         </p:txBody>
@@ -4033,8 +4158,8 @@
         </p:nvSpPr>
         <p:spPr>
           <a:xfrm>
-            <a:off x="6731000" y="5156200"/>
-            <a:ext cx="2413000" cy="381000"/>
+            <a:off x="685800" y="1417320"/>
+            <a:ext cx="10817352" cy="5029200"/>
           </a:xfrm>
           <a:prstGeom prst="rect">
             <a:avLst/>
@@ -4043,55 +4168,279 @@
         </p:spPr>
         <p:txBody>
           <a:bodyPr wrap="square">
-            <a:normAutofit/>
+            <a:spAutoFit/>
           </a:bodyPr>
           <a:lstStyle/>
           <a:p>
-            <a:pPr algn="l"/>
-            <a:r>
-              <a:rPr sz="1400" b="0" i="0">
-                <a:solidFill>
-                  <a:srgbClr val="4D5270"/>
-                </a:solidFill>
-                <a:latin typeface="Georgia"/>
-              </a:rPr>
-              <a:t>[Name · Kontakt]</a:t>
-            </a:r>
-          </a:p>
-        </p:txBody>
-      </p:sp>
-      <p:sp>
-        <p:nvSpPr>
-          <p:cNvPr id="9" name="TextBox 8"/>
-          <p:cNvSpPr txBox="1"/>
-          <p:nvPr/>
-        </p:nvSpPr>
-        <p:spPr>
-          <a:xfrm>
-            <a:off x="9398000" y="4953000"/>
-            <a:ext cx="2184400" cy="177800"/>
-          </a:xfrm>
-          <a:prstGeom prst="rect">
-            <a:avLst/>
-          </a:prstGeom>
-          <a:noFill/>
-        </p:spPr>
-        <p:txBody>
-          <a:bodyPr wrap="square">
-            <a:normAutofit/>
-          </a:bodyPr>
-          <a:lstStyle/>
-          <a:p>
-            <a:pPr algn="l"/>
-            <a:r>
-              <a:rPr sz="900" b="0" i="0">
-                <a:solidFill>
-                  <a:srgbClr val="7B7FA0"/>
-                </a:solidFill>
-                <a:latin typeface="Courier New"/>
-              </a:rPr>
-              <a:t>Modul</a:t>
-            </a:r>
+            <a:pPr>
+              <a:spcBef>
+                <a:spcPts val="400"/>
+              </a:spcBef>
+              <a:spcAft>
+                <a:spcPts val="200"/>
+              </a:spcAft>
+            </a:pPr>
+            <a:r>
+              <a:rPr sz="1200">
+                <a:solidFill>
+                  <a:srgbClr val="3D5466"/>
+                </a:solidFill>
+                <a:latin typeface="Arial"/>
+              </a:rPr>
+              <a:t>Empfehlungen entstehen nicht zufällig. Ein aktives Empfehlungsmanagement umfasst:</a:t>
+            </a:r>
+          </a:p>
+          <a:p>
+            <a:pPr>
+              <a:spcBef>
+                <a:spcPts val="400"/>
+              </a:spcBef>
+              <a:spcAft>
+                <a:spcPts val="200"/>
+              </a:spcAft>
+            </a:pPr>
+            <a:r>
+              <a:rPr sz="1300">
+                <a:solidFill>
+                  <a:srgbClr val="3D5466"/>
+                </a:solidFill>
+                <a:latin typeface="Arial"/>
+              </a:rPr>
+              <a:t>▸  Identifizieren: Welche meiner Bestandskunden sind Meinungsführer in ihrem Branchenumfeld?</a:t>
+            </a:r>
+          </a:p>
+          <a:p>
+            <a:pPr>
+              <a:spcBef>
+                <a:spcPts val="400"/>
+              </a:spcBef>
+              <a:spcAft>
+                <a:spcPts val="200"/>
+              </a:spcAft>
+            </a:pPr>
+            <a:r>
+              <a:rPr sz="1300">
+                <a:solidFill>
+                  <a:srgbClr val="3D5466"/>
+                </a:solidFill>
+                <a:latin typeface="Arial"/>
+              </a:rPr>
+              <a:t>▸  Beziehung vertiefen: Diese Kunden erhalten besondere Aufmerksamkeit – nicht wegen der Empfehlung, sondern wegen ihres Werts.</a:t>
+            </a:r>
+          </a:p>
+          <a:p>
+            <a:pPr>
+              <a:spcBef>
+                <a:spcPts val="400"/>
+              </a:spcBef>
+              <a:spcAft>
+                <a:spcPts val="200"/>
+              </a:spcAft>
+            </a:pPr>
+            <a:r>
+              <a:rPr sz="1300">
+                <a:solidFill>
+                  <a:srgbClr val="3D5466"/>
+                </a:solidFill>
+                <a:latin typeface="Arial"/>
+              </a:rPr>
+              <a:t>▸  Aktiv bitten: Am Ende eines erfolgreichen Gesprächs: „Gibt es Unternehmen in Ihrem Umfeld, die unsere Zusammenarbeit kennenlernen sollten?"</a:t>
+            </a:r>
+          </a:p>
+          <a:p>
+            <a:pPr>
+              <a:spcBef>
+                <a:spcPts val="400"/>
+              </a:spcBef>
+              <a:spcAft>
+                <a:spcPts val="200"/>
+              </a:spcAft>
+            </a:pPr>
+            <a:r>
+              <a:rPr sz="1300">
+                <a:solidFill>
+                  <a:srgbClr val="3D5466"/>
+                </a:solidFill>
+                <a:latin typeface="Arial"/>
+              </a:rPr>
+              <a:t>▸  Danken und schließen: Rückmeldung geben, ob der Kontakt erfolgreich war.</a:t>
+            </a:r>
+          </a:p>
+          <a:p>
+            <a:pPr>
+              <a:spcBef>
+                <a:spcPts val="400"/>
+              </a:spcBef>
+              <a:spcAft>
+                <a:spcPts val="200"/>
+              </a:spcAft>
+            </a:pPr>
+            <a:r>
+              <a:rPr sz="1200">
+                <a:solidFill>
+                  <a:srgbClr val="3D5466"/>
+                </a:solidFill>
+                <a:latin typeface="Arial"/>
+              </a:rPr>
+              <a:t>## 4.6 Praxiscase: Thomas Gruber entwickelt seine Strategie für den Agrar-Markt</a:t>
+            </a:r>
+          </a:p>
+          <a:p>
+            <a:pPr>
+              <a:spcBef>
+                <a:spcPts val="400"/>
+              </a:spcBef>
+              <a:spcAft>
+                <a:spcPts val="200"/>
+              </a:spcAft>
+            </a:pPr>
+            <a:r>
+              <a:rPr sz="1200">
+                <a:solidFill>
+                  <a:srgbClr val="3D5466"/>
+                </a:solidFill>
+                <a:latin typeface="Arial"/>
+              </a:rPr>
+              <a:t>Ausgangssituation</a:t>
+            </a:r>
+          </a:p>
+          <a:p>
+            <a:pPr>
+              <a:spcBef>
+                <a:spcPts val="400"/>
+              </a:spcBef>
+              <a:spcAft>
+                <a:spcPts val="200"/>
+              </a:spcAft>
+            </a:pPr>
+            <a:r>
+              <a:rPr sz="1200">
+                <a:solidFill>
+                  <a:srgbClr val="3D5466"/>
+                </a:solidFill>
+                <a:latin typeface="Arial"/>
+              </a:rPr>
+              <a:t>Thomas entwickelt seine Marktbearbeitungsstrategie</a:t>
+            </a:r>
+          </a:p>
+          <a:p>
+            <a:pPr>
+              <a:spcBef>
+                <a:spcPts val="400"/>
+              </a:spcBef>
+              <a:spcAft>
+                <a:spcPts val="200"/>
+              </a:spcAft>
+            </a:pPr>
+            <a:r>
+              <a:rPr sz="1200">
+                <a:solidFill>
+                  <a:srgbClr val="3D5466"/>
+                </a:solidFill>
+                <a:latin typeface="Arial"/>
+              </a:rPr>
+              <a:t>Schritt 1: Segmentpriorisierung</a:t>
+            </a:r>
+          </a:p>
+          <a:p>
+            <a:pPr>
+              <a:spcBef>
+                <a:spcPts val="400"/>
+              </a:spcBef>
+              <a:spcAft>
+                <a:spcPts val="200"/>
+              </a:spcAft>
+            </a:pPr>
+            <a:r>
+              <a:rPr sz="1200">
+                <a:solidFill>
+                  <a:srgbClr val="3D5466"/>
+                </a:solidFill>
+                <a:latin typeface="Arial"/>
+              </a:rPr>
+              <a:t>Schritt 2: Marktpotenzial</a:t>
+            </a:r>
+          </a:p>
+          <a:p>
+            <a:pPr>
+              <a:spcBef>
+                <a:spcPts val="400"/>
+              </a:spcBef>
+              <a:spcAft>
+                <a:spcPts val="200"/>
+              </a:spcAft>
+            </a:pPr>
+            <a:r>
+              <a:rPr sz="1200">
+                <a:solidFill>
+                  <a:srgbClr val="3D5466"/>
+                </a:solidFill>
+                <a:latin typeface="Arial"/>
+              </a:rPr>
+              <a:t>Schritt 3: Wertversprechen</a:t>
+            </a:r>
+          </a:p>
+          <a:p>
+            <a:pPr>
+              <a:spcBef>
+                <a:spcPts val="400"/>
+              </a:spcBef>
+              <a:spcAft>
+                <a:spcPts val="200"/>
+              </a:spcAft>
+            </a:pPr>
+            <a:r>
+              <a:rPr sz="1200">
+                <a:solidFill>
+                  <a:srgbClr val="3D5466"/>
+                </a:solidFill>
+                <a:latin typeface="Arial"/>
+              </a:rPr>
+              <a:t>„Für landwirtschaftliche Betriebe in [Region] sind wir der Agrar-Spezialist der VR-Bank: schnelle Investitionsfinanzierungen, GAP-Expertise und ein Netzwerk in die wichtigsten Branchenverbände."</a:t>
+            </a:r>
+          </a:p>
+        </p:txBody>
+      </p:sp>
+      <p:sp>
+        <p:nvSpPr>
+          <p:cNvPr id="9" name="Rectangle 8"/>
+          <p:cNvSpPr/>
+          <p:nvPr/>
+        </p:nvSpPr>
+        <p:spPr>
+          <a:xfrm>
+            <a:off x="0" y="6510528"/>
+            <a:ext cx="12188952" cy="347472"/>
+          </a:xfrm>
+          <a:prstGeom prst="rect">
+            <a:avLst/>
+          </a:prstGeom>
+          <a:solidFill>
+            <a:srgbClr val="0A1937"/>
+          </a:solidFill>
+          <a:ln>
+            <a:noFill/>
+          </a:ln>
+        </p:spPr>
+        <p:style>
+          <a:lnRef idx="1">
+            <a:schemeClr val="accent1"/>
+          </a:lnRef>
+          <a:fillRef idx="3">
+            <a:schemeClr val="accent1"/>
+          </a:fillRef>
+          <a:effectRef idx="2">
+            <a:schemeClr val="accent1"/>
+          </a:effectRef>
+          <a:fontRef idx="minor">
+            <a:schemeClr val="lt1"/>
+          </a:fontRef>
+        </p:style>
+        <p:txBody>
+          <a:bodyPr rtlCol="0" anchor="ctr"/>
+          <a:lstStyle/>
+          <a:p>
+            <a:pPr algn="ctr"/>
           </a:p>
         </p:txBody>
       </p:sp>
@@ -4103,8 +4452,8 @@
         </p:nvSpPr>
         <p:spPr>
           <a:xfrm>
-            <a:off x="9398000" y="5156200"/>
-            <a:ext cx="2184400" cy="381000"/>
+            <a:off x="685800" y="6583680"/>
+            <a:ext cx="6490411" cy="256032"/>
           </a:xfrm>
           <a:prstGeom prst="rect">
             <a:avLst/>
@@ -4112,20 +4461,913 @@
           <a:noFill/>
         </p:spPr>
         <p:txBody>
+          <a:bodyPr wrap="none">
+            <a:spAutoFit/>
+          </a:bodyPr>
+          <a:lstStyle/>
+          <a:p>
+            <a:pPr algn="l"/>
+            <a:r>
+              <a:rPr sz="700">
+                <a:solidFill>
+                  <a:srgbClr val="A0B4D2"/>
+                </a:solidFill>
+                <a:latin typeface="JetBrains Mono"/>
+              </a:rPr>
+              <a:t>Benedikt Zoller Coaching  ·  FKB Campus  ·  M15</a:t>
+            </a:r>
+          </a:p>
+        </p:txBody>
+      </p:sp>
+    </p:spTree>
+  </p:cSld>
+  <p:clrMapOvr>
+    <a:masterClrMapping/>
+  </p:clrMapOvr>
+</p:sld>
+</file>
+
+<file path=ppt/slides/slide12.xml><?xml version="1.0" encoding="utf-8"?>
+<p:sld xmlns:a="http://schemas.openxmlformats.org/drawingml/2006/main" xmlns:p="http://schemas.openxmlformats.org/presentationml/2006/main" xmlns:r="http://schemas.openxmlformats.org/officeDocument/2006/relationships">
+  <p:cSld>
+    <p:spTree>
+      <p:nvGrpSpPr>
+        <p:cNvPr id="1" name=""/>
+        <p:cNvGrpSpPr/>
+        <p:nvPr/>
+      </p:nvGrpSpPr>
+      <p:grpSpPr/>
+      <p:sp>
+        <p:nvSpPr>
+          <p:cNvPr id="2" name="Rectangle 1"/>
+          <p:cNvSpPr/>
+          <p:nvPr/>
+        </p:nvSpPr>
+        <p:spPr>
+          <a:xfrm>
+            <a:off x="0" y="0"/>
+            <a:ext cx="12188952" cy="6858000"/>
+          </a:xfrm>
+          <a:prstGeom prst="rect">
+            <a:avLst/>
+          </a:prstGeom>
+          <a:solidFill>
+            <a:srgbClr val="EDEDF3"/>
+          </a:solidFill>
+          <a:ln>
+            <a:noFill/>
+          </a:ln>
+        </p:spPr>
+        <p:style>
+          <a:lnRef idx="1">
+            <a:schemeClr val="accent1"/>
+          </a:lnRef>
+          <a:fillRef idx="3">
+            <a:schemeClr val="accent1"/>
+          </a:fillRef>
+          <a:effectRef idx="2">
+            <a:schemeClr val="accent1"/>
+          </a:effectRef>
+          <a:fontRef idx="minor">
+            <a:schemeClr val="lt1"/>
+          </a:fontRef>
+        </p:style>
+        <p:txBody>
+          <a:bodyPr rtlCol="0" anchor="ctr"/>
+          <a:lstStyle/>
+          <a:p>
+            <a:pPr algn="ctr"/>
+          </a:p>
+        </p:txBody>
+      </p:sp>
+      <p:sp>
+        <p:nvSpPr>
+          <p:cNvPr id="3" name="Rectangle 2"/>
+          <p:cNvSpPr/>
+          <p:nvPr/>
+        </p:nvSpPr>
+        <p:spPr>
+          <a:xfrm>
+            <a:off x="0" y="0"/>
+            <a:ext cx="12188952" cy="50292"/>
+          </a:xfrm>
+          <a:prstGeom prst="rect">
+            <a:avLst/>
+          </a:prstGeom>
+          <a:solidFill>
+            <a:srgbClr val="1F2C56"/>
+          </a:solidFill>
+          <a:ln>
+            <a:noFill/>
+          </a:ln>
+        </p:spPr>
+        <p:style>
+          <a:lnRef idx="1">
+            <a:schemeClr val="accent1"/>
+          </a:lnRef>
+          <a:fillRef idx="3">
+            <a:schemeClr val="accent1"/>
+          </a:fillRef>
+          <a:effectRef idx="2">
+            <a:schemeClr val="accent1"/>
+          </a:effectRef>
+          <a:fontRef idx="minor">
+            <a:schemeClr val="lt1"/>
+          </a:fontRef>
+        </p:style>
+        <p:txBody>
+          <a:bodyPr rtlCol="0" anchor="ctr"/>
+          <a:lstStyle/>
+          <a:p>
+            <a:pPr algn="ctr"/>
+          </a:p>
+        </p:txBody>
+      </p:sp>
+      <p:sp>
+        <p:nvSpPr>
+          <p:cNvPr id="4" name="TextBox 3"/>
+          <p:cNvSpPr txBox="1"/>
+          <p:nvPr/>
+        </p:nvSpPr>
+        <p:spPr>
+          <a:xfrm>
+            <a:off x="685800" y="109728"/>
+            <a:ext cx="10817352" cy="228600"/>
+          </a:xfrm>
+          <a:prstGeom prst="rect">
+            <a:avLst/>
+          </a:prstGeom>
+          <a:noFill/>
+        </p:spPr>
+        <p:txBody>
+          <a:bodyPr wrap="none">
+            <a:spAutoFit/>
+          </a:bodyPr>
+          <a:lstStyle/>
+          <a:p>
+            <a:pPr algn="l"/>
+            <a:r>
+              <a:rPr sz="750">
+                <a:solidFill>
+                  <a:srgbClr val="78808C"/>
+                </a:solidFill>
+                <a:latin typeface="JetBrains Mono"/>
+              </a:rPr>
+              <a:t>M15  ·  INHALT</a:t>
+            </a:r>
+          </a:p>
+        </p:txBody>
+      </p:sp>
+      <p:sp>
+        <p:nvSpPr>
+          <p:cNvPr id="5" name="Rectangle 4"/>
+          <p:cNvSpPr/>
+          <p:nvPr/>
+        </p:nvSpPr>
+        <p:spPr>
+          <a:xfrm>
+            <a:off x="0" y="1234440"/>
+            <a:ext cx="12188952" cy="12700"/>
+          </a:xfrm>
+          <a:prstGeom prst="rect">
+            <a:avLst/>
+          </a:prstGeom>
+          <a:solidFill>
+            <a:srgbClr val="D8DFE4"/>
+          </a:solidFill>
+          <a:ln>
+            <a:noFill/>
+          </a:ln>
+        </p:spPr>
+        <p:style>
+          <a:lnRef idx="1">
+            <a:schemeClr val="accent1"/>
+          </a:lnRef>
+          <a:fillRef idx="3">
+            <a:schemeClr val="accent1"/>
+          </a:fillRef>
+          <a:effectRef idx="2">
+            <a:schemeClr val="accent1"/>
+          </a:effectRef>
+          <a:fontRef idx="minor">
+            <a:schemeClr val="lt1"/>
+          </a:fontRef>
+        </p:style>
+        <p:txBody>
+          <a:bodyPr rtlCol="0" anchor="ctr"/>
+          <a:lstStyle/>
+          <a:p>
+            <a:pPr algn="ctr"/>
+          </a:p>
+        </p:txBody>
+      </p:sp>
+      <p:sp>
+        <p:nvSpPr>
+          <p:cNvPr id="6" name="Rectangle 5"/>
+          <p:cNvSpPr/>
+          <p:nvPr/>
+        </p:nvSpPr>
+        <p:spPr>
+          <a:xfrm>
+            <a:off x="685800" y="502920"/>
+            <a:ext cx="36576" cy="658368"/>
+          </a:xfrm>
+          <a:prstGeom prst="rect">
+            <a:avLst/>
+          </a:prstGeom>
+          <a:solidFill>
+            <a:srgbClr val="D9C089"/>
+          </a:solidFill>
+          <a:ln>
+            <a:noFill/>
+          </a:ln>
+        </p:spPr>
+        <p:style>
+          <a:lnRef idx="1">
+            <a:schemeClr val="accent1"/>
+          </a:lnRef>
+          <a:fillRef idx="3">
+            <a:schemeClr val="accent1"/>
+          </a:fillRef>
+          <a:effectRef idx="2">
+            <a:schemeClr val="accent1"/>
+          </a:effectRef>
+          <a:fontRef idx="minor">
+            <a:schemeClr val="lt1"/>
+          </a:fontRef>
+        </p:style>
+        <p:txBody>
+          <a:bodyPr rtlCol="0" anchor="ctr"/>
+          <a:lstStyle/>
+          <a:p>
+            <a:pPr algn="ctr"/>
+          </a:p>
+        </p:txBody>
+      </p:sp>
+      <p:sp>
+        <p:nvSpPr>
+          <p:cNvPr id="7" name="TextBox 6"/>
+          <p:cNvSpPr txBox="1"/>
+          <p:nvPr/>
+        </p:nvSpPr>
+        <p:spPr>
+          <a:xfrm>
+            <a:off x="813816" y="502920"/>
+            <a:ext cx="10634472" cy="685800"/>
+          </a:xfrm>
+          <a:prstGeom prst="rect">
+            <a:avLst/>
+          </a:prstGeom>
+          <a:noFill/>
+        </p:spPr>
+        <p:txBody>
           <a:bodyPr wrap="square">
-            <a:normAutofit/>
+            <a:spAutoFit/>
           </a:bodyPr>
           <a:lstStyle/>
           <a:p>
             <a:pPr algn="l"/>
             <a:r>
-              <a:rPr sz="1400" b="0" i="0">
-                <a:solidFill>
-                  <a:srgbClr val="191D2E"/>
-                </a:solidFill>
-                <a:latin typeface="Georgia"/>
-              </a:rPr>
-              <a:t>M15 · Stratege</a:t>
+              <a:rPr sz="2400" b="1" i="0">
+                <a:solidFill>
+                  <a:srgbClr val="1F2C56"/>
+                </a:solidFill>
+                <a:latin typeface="Source Serif 4"/>
+              </a:rPr>
+              <a:t>Arbeitsblatt A: Segmentpriorisierung – Scoring</a:t>
+            </a:r>
+          </a:p>
+        </p:txBody>
+      </p:sp>
+      <p:sp>
+        <p:nvSpPr>
+          <p:cNvPr id="8" name="TextBox 7"/>
+          <p:cNvSpPr txBox="1"/>
+          <p:nvPr/>
+        </p:nvSpPr>
+        <p:spPr>
+          <a:xfrm>
+            <a:off x="685800" y="1417320"/>
+            <a:ext cx="10817352" cy="5029200"/>
+          </a:xfrm>
+          <a:prstGeom prst="rect">
+            <a:avLst/>
+          </a:prstGeom>
+          <a:noFill/>
+        </p:spPr>
+        <p:txBody>
+          <a:bodyPr wrap="square">
+            <a:spAutoFit/>
+          </a:bodyPr>
+          <a:lstStyle/>
+          <a:p>
+            <a:pPr>
+              <a:spcBef>
+                <a:spcPts val="400"/>
+              </a:spcBef>
+              <a:spcAft>
+                <a:spcPts val="200"/>
+              </a:spcAft>
+            </a:pPr>
+            <a:r>
+              <a:rPr sz="1200">
+                <a:solidFill>
+                  <a:srgbClr val="3D5466"/>
+                </a:solidFill>
+                <a:latin typeface="Arial"/>
+              </a:rPr>
+              <a:t>Meine drei Kandidatensegmente:</a:t>
+            </a:r>
+          </a:p>
+          <a:p>
+            <a:pPr>
+              <a:spcBef>
+                <a:spcPts val="400"/>
+              </a:spcBef>
+              <a:spcAft>
+                <a:spcPts val="200"/>
+              </a:spcAft>
+            </a:pPr>
+            <a:r>
+              <a:rPr sz="1200">
+                <a:solidFill>
+                  <a:srgbClr val="3D5466"/>
+                </a:solidFill>
+                <a:latin typeface="Arial"/>
+              </a:rPr>
+              <a:t>Mein Primärsegment: ___________________________</a:t>
+            </a:r>
+          </a:p>
+        </p:txBody>
+      </p:sp>
+      <p:sp>
+        <p:nvSpPr>
+          <p:cNvPr id="9" name="Rectangle 8"/>
+          <p:cNvSpPr/>
+          <p:nvPr/>
+        </p:nvSpPr>
+        <p:spPr>
+          <a:xfrm>
+            <a:off x="0" y="6510528"/>
+            <a:ext cx="12188952" cy="347472"/>
+          </a:xfrm>
+          <a:prstGeom prst="rect">
+            <a:avLst/>
+          </a:prstGeom>
+          <a:solidFill>
+            <a:srgbClr val="0A1937"/>
+          </a:solidFill>
+          <a:ln>
+            <a:noFill/>
+          </a:ln>
+        </p:spPr>
+        <p:style>
+          <a:lnRef idx="1">
+            <a:schemeClr val="accent1"/>
+          </a:lnRef>
+          <a:fillRef idx="3">
+            <a:schemeClr val="accent1"/>
+          </a:fillRef>
+          <a:effectRef idx="2">
+            <a:schemeClr val="accent1"/>
+          </a:effectRef>
+          <a:fontRef idx="minor">
+            <a:schemeClr val="lt1"/>
+          </a:fontRef>
+        </p:style>
+        <p:txBody>
+          <a:bodyPr rtlCol="0" anchor="ctr"/>
+          <a:lstStyle/>
+          <a:p>
+            <a:pPr algn="ctr"/>
+          </a:p>
+        </p:txBody>
+      </p:sp>
+      <p:sp>
+        <p:nvSpPr>
+          <p:cNvPr id="10" name="TextBox 9"/>
+          <p:cNvSpPr txBox="1"/>
+          <p:nvPr/>
+        </p:nvSpPr>
+        <p:spPr>
+          <a:xfrm>
+            <a:off x="685800" y="6583680"/>
+            <a:ext cx="6490411" cy="256032"/>
+          </a:xfrm>
+          <a:prstGeom prst="rect">
+            <a:avLst/>
+          </a:prstGeom>
+          <a:noFill/>
+        </p:spPr>
+        <p:txBody>
+          <a:bodyPr wrap="none">
+            <a:spAutoFit/>
+          </a:bodyPr>
+          <a:lstStyle/>
+          <a:p>
+            <a:pPr algn="l"/>
+            <a:r>
+              <a:rPr sz="700">
+                <a:solidFill>
+                  <a:srgbClr val="A0B4D2"/>
+                </a:solidFill>
+                <a:latin typeface="JetBrains Mono"/>
+              </a:rPr>
+              <a:t>Benedikt Zoller Coaching  ·  FKB Campus  ·  M15</a:t>
+            </a:r>
+          </a:p>
+        </p:txBody>
+      </p:sp>
+    </p:spTree>
+  </p:cSld>
+  <p:clrMapOvr>
+    <a:masterClrMapping/>
+  </p:clrMapOvr>
+</p:sld>
+</file>
+
+<file path=ppt/slides/slide13.xml><?xml version="1.0" encoding="utf-8"?>
+<p:sld xmlns:a="http://schemas.openxmlformats.org/drawingml/2006/main" xmlns:p="http://schemas.openxmlformats.org/presentationml/2006/main" xmlns:r="http://schemas.openxmlformats.org/officeDocument/2006/relationships">
+  <p:cSld>
+    <p:spTree>
+      <p:nvGrpSpPr>
+        <p:cNvPr id="1" name=""/>
+        <p:cNvGrpSpPr/>
+        <p:nvPr/>
+      </p:nvGrpSpPr>
+      <p:grpSpPr/>
+      <p:sp>
+        <p:nvSpPr>
+          <p:cNvPr id="2" name="Rectangle 1"/>
+          <p:cNvSpPr/>
+          <p:nvPr/>
+        </p:nvSpPr>
+        <p:spPr>
+          <a:xfrm>
+            <a:off x="0" y="0"/>
+            <a:ext cx="12188952" cy="6858000"/>
+          </a:xfrm>
+          <a:prstGeom prst="rect">
+            <a:avLst/>
+          </a:prstGeom>
+          <a:solidFill>
+            <a:srgbClr val="EDEDF3"/>
+          </a:solidFill>
+          <a:ln>
+            <a:noFill/>
+          </a:ln>
+        </p:spPr>
+        <p:style>
+          <a:lnRef idx="1">
+            <a:schemeClr val="accent1"/>
+          </a:lnRef>
+          <a:fillRef idx="3">
+            <a:schemeClr val="accent1"/>
+          </a:fillRef>
+          <a:effectRef idx="2">
+            <a:schemeClr val="accent1"/>
+          </a:effectRef>
+          <a:fontRef idx="minor">
+            <a:schemeClr val="lt1"/>
+          </a:fontRef>
+        </p:style>
+        <p:txBody>
+          <a:bodyPr rtlCol="0" anchor="ctr"/>
+          <a:lstStyle/>
+          <a:p>
+            <a:pPr algn="ctr"/>
+          </a:p>
+        </p:txBody>
+      </p:sp>
+      <p:sp>
+        <p:nvSpPr>
+          <p:cNvPr id="3" name="Rectangle 2"/>
+          <p:cNvSpPr/>
+          <p:nvPr/>
+        </p:nvSpPr>
+        <p:spPr>
+          <a:xfrm>
+            <a:off x="0" y="0"/>
+            <a:ext cx="12188952" cy="50292"/>
+          </a:xfrm>
+          <a:prstGeom prst="rect">
+            <a:avLst/>
+          </a:prstGeom>
+          <a:solidFill>
+            <a:srgbClr val="1F2C56"/>
+          </a:solidFill>
+          <a:ln>
+            <a:noFill/>
+          </a:ln>
+        </p:spPr>
+        <p:style>
+          <a:lnRef idx="1">
+            <a:schemeClr val="accent1"/>
+          </a:lnRef>
+          <a:fillRef idx="3">
+            <a:schemeClr val="accent1"/>
+          </a:fillRef>
+          <a:effectRef idx="2">
+            <a:schemeClr val="accent1"/>
+          </a:effectRef>
+          <a:fontRef idx="minor">
+            <a:schemeClr val="lt1"/>
+          </a:fontRef>
+        </p:style>
+        <p:txBody>
+          <a:bodyPr rtlCol="0" anchor="ctr"/>
+          <a:lstStyle/>
+          <a:p>
+            <a:pPr algn="ctr"/>
+          </a:p>
+        </p:txBody>
+      </p:sp>
+      <p:sp>
+        <p:nvSpPr>
+          <p:cNvPr id="4" name="TextBox 3"/>
+          <p:cNvSpPr txBox="1"/>
+          <p:nvPr/>
+        </p:nvSpPr>
+        <p:spPr>
+          <a:xfrm>
+            <a:off x="685800" y="109728"/>
+            <a:ext cx="10817352" cy="228600"/>
+          </a:xfrm>
+          <a:prstGeom prst="rect">
+            <a:avLst/>
+          </a:prstGeom>
+          <a:noFill/>
+        </p:spPr>
+        <p:txBody>
+          <a:bodyPr wrap="none">
+            <a:spAutoFit/>
+          </a:bodyPr>
+          <a:lstStyle/>
+          <a:p>
+            <a:pPr algn="l"/>
+            <a:r>
+              <a:rPr sz="750">
+                <a:solidFill>
+                  <a:srgbClr val="78808C"/>
+                </a:solidFill>
+                <a:latin typeface="JetBrains Mono"/>
+              </a:rPr>
+              <a:t>M15  ·  INHALT</a:t>
+            </a:r>
+          </a:p>
+        </p:txBody>
+      </p:sp>
+      <p:sp>
+        <p:nvSpPr>
+          <p:cNvPr id="5" name="Rectangle 4"/>
+          <p:cNvSpPr/>
+          <p:nvPr/>
+        </p:nvSpPr>
+        <p:spPr>
+          <a:xfrm>
+            <a:off x="0" y="1234440"/>
+            <a:ext cx="12188952" cy="12700"/>
+          </a:xfrm>
+          <a:prstGeom prst="rect">
+            <a:avLst/>
+          </a:prstGeom>
+          <a:solidFill>
+            <a:srgbClr val="D8DFE4"/>
+          </a:solidFill>
+          <a:ln>
+            <a:noFill/>
+          </a:ln>
+        </p:spPr>
+        <p:style>
+          <a:lnRef idx="1">
+            <a:schemeClr val="accent1"/>
+          </a:lnRef>
+          <a:fillRef idx="3">
+            <a:schemeClr val="accent1"/>
+          </a:fillRef>
+          <a:effectRef idx="2">
+            <a:schemeClr val="accent1"/>
+          </a:effectRef>
+          <a:fontRef idx="minor">
+            <a:schemeClr val="lt1"/>
+          </a:fontRef>
+        </p:style>
+        <p:txBody>
+          <a:bodyPr rtlCol="0" anchor="ctr"/>
+          <a:lstStyle/>
+          <a:p>
+            <a:pPr algn="ctr"/>
+          </a:p>
+        </p:txBody>
+      </p:sp>
+      <p:sp>
+        <p:nvSpPr>
+          <p:cNvPr id="6" name="Rectangle 5"/>
+          <p:cNvSpPr/>
+          <p:nvPr/>
+        </p:nvSpPr>
+        <p:spPr>
+          <a:xfrm>
+            <a:off x="685800" y="502920"/>
+            <a:ext cx="36576" cy="658368"/>
+          </a:xfrm>
+          <a:prstGeom prst="rect">
+            <a:avLst/>
+          </a:prstGeom>
+          <a:solidFill>
+            <a:srgbClr val="D9C089"/>
+          </a:solidFill>
+          <a:ln>
+            <a:noFill/>
+          </a:ln>
+        </p:spPr>
+        <p:style>
+          <a:lnRef idx="1">
+            <a:schemeClr val="accent1"/>
+          </a:lnRef>
+          <a:fillRef idx="3">
+            <a:schemeClr val="accent1"/>
+          </a:fillRef>
+          <a:effectRef idx="2">
+            <a:schemeClr val="accent1"/>
+          </a:effectRef>
+          <a:fontRef idx="minor">
+            <a:schemeClr val="lt1"/>
+          </a:fontRef>
+        </p:style>
+        <p:txBody>
+          <a:bodyPr rtlCol="0" anchor="ctr"/>
+          <a:lstStyle/>
+          <a:p>
+            <a:pPr algn="ctr"/>
+          </a:p>
+        </p:txBody>
+      </p:sp>
+      <p:sp>
+        <p:nvSpPr>
+          <p:cNvPr id="7" name="TextBox 6"/>
+          <p:cNvSpPr txBox="1"/>
+          <p:nvPr/>
+        </p:nvSpPr>
+        <p:spPr>
+          <a:xfrm>
+            <a:off x="813816" y="502920"/>
+            <a:ext cx="10634472" cy="685800"/>
+          </a:xfrm>
+          <a:prstGeom prst="rect">
+            <a:avLst/>
+          </a:prstGeom>
+          <a:noFill/>
+        </p:spPr>
+        <p:txBody>
+          <a:bodyPr wrap="square">
+            <a:spAutoFit/>
+          </a:bodyPr>
+          <a:lstStyle/>
+          <a:p>
+            <a:pPr algn="l"/>
+            <a:r>
+              <a:rPr sz="2400" b="1" i="0">
+                <a:solidFill>
+                  <a:srgbClr val="1F2C56"/>
+                </a:solidFill>
+                <a:latin typeface="Source Serif 4"/>
+              </a:rPr>
+              <a:t>Arbeitsblatt B: Marktbearbeitungs-Jahresplan</a:t>
+            </a:r>
+          </a:p>
+        </p:txBody>
+      </p:sp>
+      <p:sp>
+        <p:nvSpPr>
+          <p:cNvPr id="8" name="TextBox 7"/>
+          <p:cNvSpPr txBox="1"/>
+          <p:nvPr/>
+        </p:nvSpPr>
+        <p:spPr>
+          <a:xfrm>
+            <a:off x="685800" y="1417320"/>
+            <a:ext cx="10817352" cy="5029200"/>
+          </a:xfrm>
+          <a:prstGeom prst="rect">
+            <a:avLst/>
+          </a:prstGeom>
+          <a:noFill/>
+        </p:spPr>
+        <p:txBody>
+          <a:bodyPr wrap="square">
+            <a:spAutoFit/>
+          </a:bodyPr>
+          <a:lstStyle/>
+          <a:p>
+            <a:pPr>
+              <a:spcBef>
+                <a:spcPts val="400"/>
+              </a:spcBef>
+              <a:spcAft>
+                <a:spcPts val="200"/>
+              </a:spcAft>
+            </a:pPr>
+            <a:r>
+              <a:rPr sz="1200">
+                <a:solidFill>
+                  <a:srgbClr val="3D5466"/>
+                </a:solidFill>
+                <a:latin typeface="Arial"/>
+              </a:rPr>
+              <a:t>Zielsegment: ___________________________</a:t>
+            </a:r>
+          </a:p>
+          <a:p>
+            <a:pPr>
+              <a:spcBef>
+                <a:spcPts val="400"/>
+              </a:spcBef>
+              <a:spcAft>
+                <a:spcPts val="200"/>
+              </a:spcAft>
+            </a:pPr>
+            <a:r>
+              <a:rPr sz="1200">
+                <a:solidFill>
+                  <a:srgbClr val="3D5466"/>
+                </a:solidFill>
+                <a:latin typeface="Arial"/>
+              </a:rPr>
+              <a:t>Marktpotenzial: ___ Zielbetriebe – ___ bestehende Kunden = ___ Neukunden-Potenzial</a:t>
+            </a:r>
+          </a:p>
+          <a:p>
+            <a:pPr>
+              <a:spcBef>
+                <a:spcPts val="400"/>
+              </a:spcBef>
+              <a:spcAft>
+                <a:spcPts val="200"/>
+              </a:spcAft>
+            </a:pPr>
+            <a:r>
+              <a:rPr sz="1200">
+                <a:solidFill>
+                  <a:srgbClr val="3D5466"/>
+                </a:solidFill>
+                <a:latin typeface="Arial"/>
+              </a:rPr>
+              <a:t>Mein Wertversprechen (in einem Satz):</a:t>
+            </a:r>
+          </a:p>
+          <a:p>
+            <a:pPr>
+              <a:spcBef>
+                <a:spcPts val="400"/>
+              </a:spcBef>
+              <a:spcAft>
+                <a:spcPts val="200"/>
+              </a:spcAft>
+            </a:pPr>
+            <a:r>
+              <a:rPr sz="1200">
+                <a:solidFill>
+                  <a:srgbClr val="3D5466"/>
+                </a:solidFill>
+                <a:latin typeface="Arial"/>
+              </a:rPr>
+              <a:t>___________________________________________________________________________</a:t>
+            </a:r>
+          </a:p>
+          <a:p>
+            <a:pPr>
+              <a:spcBef>
+                <a:spcPts val="400"/>
+              </a:spcBef>
+              <a:spcAft>
+                <a:spcPts val="200"/>
+              </a:spcAft>
+            </a:pPr>
+            <a:r>
+              <a:rPr sz="1200">
+                <a:solidFill>
+                  <a:srgbClr val="3D5466"/>
+                </a:solidFill>
+                <a:latin typeface="Arial"/>
+              </a:rPr>
+              <a:t>Jahreszielsetzung: ___ Neukunden / ___ EUR Neuvolumen / ___ % Wallet-Share-Steigerung Bestand</a:t>
+            </a:r>
+          </a:p>
+          <a:p>
+            <a:pPr>
+              <a:spcBef>
+                <a:spcPts val="400"/>
+              </a:spcBef>
+              <a:spcAft>
+                <a:spcPts val="200"/>
+              </a:spcAft>
+            </a:pPr>
+            <a:r>
+              <a:rPr sz="1200">
+                <a:solidFill>
+                  <a:srgbClr val="3D5466"/>
+                </a:solidFill>
+                <a:latin typeface="Arial"/>
+              </a:rPr>
+              <a:t>Abstimmung mit Führungskraft: ○ Ja, abgestimmt am: ______ ○ Noch ausstehend bis: ______</a:t>
+            </a:r>
+          </a:p>
+          <a:p>
+            <a:pPr>
+              <a:spcBef>
+                <a:spcPts val="400"/>
+              </a:spcBef>
+              <a:spcAft>
+                <a:spcPts val="200"/>
+              </a:spcAft>
+            </a:pPr>
+            <a:r>
+              <a:rPr sz="1200">
+                <a:solidFill>
+                  <a:srgbClr val="3D5466"/>
+                </a:solidFill>
+                <a:latin typeface="Arial"/>
+              </a:rPr>
+              <a:t># 5. PRAXISTRANSFER</a:t>
+            </a:r>
+          </a:p>
+        </p:txBody>
+      </p:sp>
+      <p:sp>
+        <p:nvSpPr>
+          <p:cNvPr id="9" name="Rectangle 8"/>
+          <p:cNvSpPr/>
+          <p:nvPr/>
+        </p:nvSpPr>
+        <p:spPr>
+          <a:xfrm>
+            <a:off x="0" y="6510528"/>
+            <a:ext cx="12188952" cy="347472"/>
+          </a:xfrm>
+          <a:prstGeom prst="rect">
+            <a:avLst/>
+          </a:prstGeom>
+          <a:solidFill>
+            <a:srgbClr val="0A1937"/>
+          </a:solidFill>
+          <a:ln>
+            <a:noFill/>
+          </a:ln>
+        </p:spPr>
+        <p:style>
+          <a:lnRef idx="1">
+            <a:schemeClr val="accent1"/>
+          </a:lnRef>
+          <a:fillRef idx="3">
+            <a:schemeClr val="accent1"/>
+          </a:fillRef>
+          <a:effectRef idx="2">
+            <a:schemeClr val="accent1"/>
+          </a:effectRef>
+          <a:fontRef idx="minor">
+            <a:schemeClr val="lt1"/>
+          </a:fontRef>
+        </p:style>
+        <p:txBody>
+          <a:bodyPr rtlCol="0" anchor="ctr"/>
+          <a:lstStyle/>
+          <a:p>
+            <a:pPr algn="ctr"/>
+          </a:p>
+        </p:txBody>
+      </p:sp>
+      <p:sp>
+        <p:nvSpPr>
+          <p:cNvPr id="10" name="TextBox 9"/>
+          <p:cNvSpPr txBox="1"/>
+          <p:nvPr/>
+        </p:nvSpPr>
+        <p:spPr>
+          <a:xfrm>
+            <a:off x="685800" y="6583680"/>
+            <a:ext cx="6490411" cy="256032"/>
+          </a:xfrm>
+          <a:prstGeom prst="rect">
+            <a:avLst/>
+          </a:prstGeom>
+          <a:noFill/>
+        </p:spPr>
+        <p:txBody>
+          <a:bodyPr wrap="none">
+            <a:spAutoFit/>
+          </a:bodyPr>
+          <a:lstStyle/>
+          <a:p>
+            <a:pPr algn="l"/>
+            <a:r>
+              <a:rPr sz="700">
+                <a:solidFill>
+                  <a:srgbClr val="A0B4D2"/>
+                </a:solidFill>
+                <a:latin typeface="JetBrains Mono"/>
+              </a:rPr>
+              <a:t>Benedikt Zoller Coaching  ·  FKB Campus  ·  M15</a:t>
             </a:r>
           </a:p>
         </p:txBody>
@@ -4141,14 +5383,6 @@
 <file path=ppt/slides/slide2.xml><?xml version="1.0" encoding="utf-8"?>
 <p:sld xmlns:a="http://schemas.openxmlformats.org/drawingml/2006/main" xmlns:p="http://schemas.openxmlformats.org/presentationml/2006/main" xmlns:r="http://schemas.openxmlformats.org/officeDocument/2006/relationships">
   <p:cSld>
-    <p:bg>
-      <p:bgPr>
-        <a:solidFill>
-          <a:srgbClr val="F8F8FA"/>
-        </a:solidFill>
-        <a:effectLst/>
-      </p:bgPr>
-    </p:bg>
     <p:spTree>
       <p:nvGrpSpPr>
         <p:cNvPr id="1" name=""/>
@@ -4158,125 +5392,20 @@
       <p:grpSpPr/>
       <p:sp>
         <p:nvSpPr>
-          <p:cNvPr id="2" name="TextBox 1"/>
-          <p:cNvSpPr txBox="1"/>
-          <p:nvPr/>
-        </p:nvSpPr>
-        <p:spPr>
-          <a:xfrm>
-            <a:off x="609600" y="279400"/>
-            <a:ext cx="2540000" cy="279400"/>
-          </a:xfrm>
-          <a:prstGeom prst="rect">
-            <a:avLst/>
-          </a:prstGeom>
-          <a:noFill/>
-        </p:spPr>
-        <p:txBody>
-          <a:bodyPr wrap="square">
-            <a:normAutofit/>
-          </a:bodyPr>
-          <a:lstStyle/>
-          <a:p>
-            <a:pPr algn="l"/>
-            <a:r>
-              <a:rPr sz="1000" b="1" i="0">
-                <a:solidFill>
-                  <a:srgbClr val="191D2E"/>
-                </a:solidFill>
-                <a:latin typeface="Arial"/>
-              </a:rPr>
-              <a:t>FKB  Campus</a:t>
-            </a:r>
-          </a:p>
-        </p:txBody>
-      </p:sp>
-      <p:sp>
-        <p:nvSpPr>
-          <p:cNvPr id="3" name="TextBox 2"/>
-          <p:cNvSpPr txBox="1"/>
-          <p:nvPr/>
-        </p:nvSpPr>
-        <p:spPr>
-          <a:xfrm>
-            <a:off x="609600" y="279400"/>
-            <a:ext cx="10972800" cy="279400"/>
-          </a:xfrm>
-          <a:prstGeom prst="rect">
-            <a:avLst/>
-          </a:prstGeom>
-          <a:noFill/>
-        </p:spPr>
-        <p:txBody>
-          <a:bodyPr wrap="square">
-            <a:normAutofit/>
-          </a:bodyPr>
-          <a:lstStyle/>
-          <a:p>
-            <a:pPr algn="r"/>
-            <a:r>
-              <a:rPr sz="900" b="0" i="0">
-                <a:solidFill>
-                  <a:srgbClr val="7B7FA0"/>
-                </a:solidFill>
-                <a:latin typeface="Courier New"/>
-              </a:rPr>
-              <a:t>§ 00 — LERNZIELE</a:t>
-            </a:r>
-          </a:p>
-        </p:txBody>
-      </p:sp>
-      <p:sp>
-        <p:nvSpPr>
-          <p:cNvPr id="4" name="TextBox 3"/>
-          <p:cNvSpPr txBox="1"/>
-          <p:nvPr/>
-        </p:nvSpPr>
-        <p:spPr>
-          <a:xfrm>
-            <a:off x="609600" y="6426200"/>
-            <a:ext cx="10972800" cy="228600"/>
-          </a:xfrm>
-          <a:prstGeom prst="rect">
-            <a:avLst/>
-          </a:prstGeom>
-          <a:noFill/>
-        </p:spPr>
-        <p:txBody>
-          <a:bodyPr wrap="square">
-            <a:normAutofit/>
-          </a:bodyPr>
-          <a:lstStyle/>
-          <a:p>
-            <a:pPr algn="r"/>
-            <a:r>
-              <a:rPr sz="900" b="0" i="0">
-                <a:solidFill>
-                  <a:srgbClr val="7B7FA0"/>
-                </a:solidFill>
-                <a:latin typeface="Courier New"/>
-              </a:rPr>
-              <a:t>02</a:t>
-            </a:r>
-          </a:p>
-        </p:txBody>
-      </p:sp>
-      <p:sp>
-        <p:nvSpPr>
-          <p:cNvPr id="5" name="Rectangle 4"/>
+          <p:cNvPr id="2" name="Rectangle 1"/>
           <p:cNvSpPr/>
           <p:nvPr/>
         </p:nvSpPr>
         <p:spPr>
           <a:xfrm>
-            <a:off x="609600" y="825500"/>
-            <a:ext cx="10972800" cy="6350"/>
+            <a:off x="0" y="0"/>
+            <a:ext cx="12188952" cy="6858000"/>
           </a:xfrm>
           <a:prstGeom prst="rect">
             <a:avLst/>
           </a:prstGeom>
           <a:solidFill>
-            <a:srgbClr val="191D2E"/>
+            <a:srgbClr val="EDEDF3"/>
           </a:solidFill>
           <a:ln>
             <a:noFill/>
@@ -4306,55 +5435,20 @@
       </p:sp>
       <p:sp>
         <p:nvSpPr>
-          <p:cNvPr id="6" name="TextBox 5"/>
-          <p:cNvSpPr txBox="1"/>
-          <p:nvPr/>
-        </p:nvSpPr>
-        <p:spPr>
-          <a:xfrm>
-            <a:off x="609600" y="920750"/>
-            <a:ext cx="3175000" cy="1651000"/>
-          </a:xfrm>
-          <a:prstGeom prst="rect">
-            <a:avLst/>
-          </a:prstGeom>
-          <a:noFill/>
-        </p:spPr>
-        <p:txBody>
-          <a:bodyPr wrap="square">
-            <a:normAutofit/>
-          </a:bodyPr>
-          <a:lstStyle/>
-          <a:p>
-            <a:pPr algn="l"/>
-            <a:r>
-              <a:rPr sz="4800" b="0" i="1">
-                <a:solidFill>
-                  <a:srgbClr val="1F2B56"/>
-                </a:solidFill>
-                <a:latin typeface="Georgia"/>
-              </a:rPr>
-              <a:t>Inhalt.</a:t>
-            </a:r>
-          </a:p>
-        </p:txBody>
-      </p:sp>
-      <p:sp>
-        <p:nvSpPr>
-          <p:cNvPr id="7" name="Rectangle 6"/>
+          <p:cNvPr id="3" name="Rectangle 2"/>
           <p:cNvSpPr/>
           <p:nvPr/>
         </p:nvSpPr>
         <p:spPr>
           <a:xfrm>
-            <a:off x="4064000" y="889000"/>
-            <a:ext cx="7518399" cy="6350"/>
+            <a:off x="0" y="0"/>
+            <a:ext cx="12188952" cy="50292"/>
           </a:xfrm>
           <a:prstGeom prst="rect">
             <a:avLst/>
           </a:prstGeom>
           <a:solidFill>
-            <a:srgbClr val="E0E0E8"/>
+            <a:srgbClr val="1F2C56"/>
           </a:solidFill>
           <a:ln>
             <a:noFill/>
@@ -4384,14 +5478,14 @@
       </p:sp>
       <p:sp>
         <p:nvSpPr>
-          <p:cNvPr id="8" name="TextBox 7"/>
+          <p:cNvPr id="4" name="TextBox 3"/>
           <p:cNvSpPr txBox="1"/>
           <p:nvPr/>
         </p:nvSpPr>
         <p:spPr>
           <a:xfrm>
-            <a:off x="4064000" y="939799"/>
-            <a:ext cx="762000" cy="647700"/>
+            <a:off x="685800" y="109728"/>
+            <a:ext cx="10817352" cy="228600"/>
           </a:xfrm>
           <a:prstGeom prst="rect">
             <a:avLst/>
@@ -4400,74 +5494,39 @@
         </p:spPr>
         <p:txBody>
           <a:bodyPr wrap="none">
-            <a:normAutofit/>
+            <a:spAutoFit/>
           </a:bodyPr>
           <a:lstStyle/>
           <a:p>
             <a:pPr algn="l"/>
             <a:r>
-              <a:rPr sz="2400" b="0" i="1">
-                <a:solidFill>
-                  <a:srgbClr val="1F2B56"/>
-                </a:solidFill>
-                <a:latin typeface="Georgia"/>
-              </a:rPr>
-              <a:t>I</a:t>
-            </a:r>
-          </a:p>
-        </p:txBody>
-      </p:sp>
-      <p:sp>
-        <p:nvSpPr>
-          <p:cNvPr id="9" name="TextBox 8"/>
-          <p:cNvSpPr txBox="1"/>
-          <p:nvPr/>
-        </p:nvSpPr>
-        <p:spPr>
-          <a:xfrm>
-            <a:off x="4953000" y="952500"/>
-            <a:ext cx="6629400" cy="635000"/>
-          </a:xfrm>
-          <a:prstGeom prst="rect">
-            <a:avLst/>
-          </a:prstGeom>
-          <a:noFill/>
-        </p:spPr>
-        <p:txBody>
-          <a:bodyPr wrap="square">
-            <a:normAutofit/>
-          </a:bodyPr>
-          <a:lstStyle/>
-          <a:p>
-            <a:pPr algn="l"/>
-            <a:r>
-              <a:rPr sz="1400" b="0" i="0">
-                <a:solidFill>
-                  <a:srgbClr val="191D2E"/>
-                </a:solidFill>
-                <a:latin typeface="Georgia"/>
-              </a:rPr>
-              <a:t>Das Marktpotenzial in einem selbstgewählten Zielsegment analysieren und adressierbare Neukunden-Opportunitäten schätzen</a:t>
-            </a:r>
-          </a:p>
-        </p:txBody>
-      </p:sp>
-      <p:sp>
-        <p:nvSpPr>
-          <p:cNvPr id="10" name="Rectangle 9"/>
+              <a:rPr sz="750">
+                <a:solidFill>
+                  <a:srgbClr val="78808C"/>
+                </a:solidFill>
+                <a:latin typeface="JetBrains Mono"/>
+              </a:rPr>
+              <a:t>LERNZIELE  ·  M15</a:t>
+            </a:r>
+          </a:p>
+        </p:txBody>
+      </p:sp>
+      <p:sp>
+        <p:nvSpPr>
+          <p:cNvPr id="5" name="Rectangle 4"/>
           <p:cNvSpPr/>
           <p:nvPr/>
         </p:nvSpPr>
         <p:spPr>
           <a:xfrm>
-            <a:off x="4064000" y="1587500"/>
-            <a:ext cx="7518399" cy="6350"/>
+            <a:off x="0" y="1234440"/>
+            <a:ext cx="12188952" cy="12700"/>
           </a:xfrm>
           <a:prstGeom prst="rect">
             <a:avLst/>
           </a:prstGeom>
           <a:solidFill>
-            <a:srgbClr val="E0E0E8"/>
+            <a:srgbClr val="D8DFE4"/>
           </a:solidFill>
           <a:ln>
             <a:noFill/>
@@ -4497,14 +5556,14 @@
       </p:sp>
       <p:sp>
         <p:nvSpPr>
-          <p:cNvPr id="11" name="TextBox 10"/>
+          <p:cNvPr id="6" name="TextBox 5"/>
           <p:cNvSpPr txBox="1"/>
           <p:nvPr/>
         </p:nvSpPr>
         <p:spPr>
           <a:xfrm>
-            <a:off x="4064000" y="1638300"/>
-            <a:ext cx="762000" cy="647700"/>
+            <a:off x="685800" y="502920"/>
+            <a:ext cx="10817352" cy="658368"/>
           </a:xfrm>
           <a:prstGeom prst="rect">
             <a:avLst/>
@@ -4512,34 +5571,34 @@
           <a:noFill/>
         </p:spPr>
         <p:txBody>
-          <a:bodyPr wrap="none">
-            <a:normAutofit/>
+          <a:bodyPr wrap="square">
+            <a:spAutoFit/>
           </a:bodyPr>
           <a:lstStyle/>
           <a:p>
             <a:pPr algn="l"/>
             <a:r>
-              <a:rPr sz="2400" b="0" i="1">
-                <a:solidFill>
-                  <a:srgbClr val="1F2B56"/>
-                </a:solidFill>
-                <a:latin typeface="Georgia"/>
-              </a:rPr>
-              <a:t>II</a:t>
-            </a:r>
-          </a:p>
-        </p:txBody>
-      </p:sp>
-      <p:sp>
-        <p:nvSpPr>
-          <p:cNvPr id="12" name="TextBox 11"/>
+              <a:rPr sz="2600" b="1" i="0">
+                <a:solidFill>
+                  <a:srgbClr val="1F2C56"/>
+                </a:solidFill>
+                <a:latin typeface="Source Serif 4"/>
+              </a:rPr>
+              <a:t>Was Sie heute mitnehmen</a:t>
+            </a:r>
+          </a:p>
+        </p:txBody>
+      </p:sp>
+      <p:sp>
+        <p:nvSpPr>
+          <p:cNvPr id="7" name="TextBox 6"/>
           <p:cNvSpPr txBox="1"/>
           <p:nvPr/>
         </p:nvSpPr>
         <p:spPr>
           <a:xfrm>
-            <a:off x="4953000" y="1651000"/>
-            <a:ext cx="6629400" cy="635000"/>
+            <a:off x="685800" y="1371600"/>
+            <a:ext cx="10817352" cy="5120640"/>
           </a:xfrm>
           <a:prstGeom prst="rect">
             <a:avLst/>
@@ -4548,39 +5607,122 @@
         </p:spPr>
         <p:txBody>
           <a:bodyPr wrap="square">
-            <a:normAutofit/>
+            <a:spAutoFit/>
           </a:bodyPr>
           <a:lstStyle/>
           <a:p>
-            <a:pPr algn="l"/>
-            <a:r>
-              <a:rPr sz="1400" b="0" i="0">
-                <a:solidFill>
-                  <a:srgbClr val="191D2E"/>
-                </a:solidFill>
-                <a:latin typeface="Georgia"/>
-              </a:rPr>
-              <a:t>Die Wettbewerbsposition der eigenen Bank im Zielsegment anhand von Stärken, Schwächen und Differenzierungspotenzialen bewerten</a:t>
-            </a:r>
-          </a:p>
-        </p:txBody>
-      </p:sp>
-      <p:sp>
-        <p:nvSpPr>
-          <p:cNvPr id="13" name="Rectangle 12"/>
+            <a:pPr>
+              <a:spcBef>
+                <a:spcPts val="800"/>
+              </a:spcBef>
+              <a:spcAft>
+                <a:spcPts val="200"/>
+              </a:spcAft>
+            </a:pPr>
+            <a:r>
+              <a:rPr sz="1400">
+                <a:solidFill>
+                  <a:srgbClr val="3D5466"/>
+                </a:solidFill>
+                <a:latin typeface="Arial"/>
+              </a:rPr>
+              <a:t>▸  Das Marktpotenzial in einem selbstgewählten Zielsegment analysieren und adressierbare Neukunden-Opportunitäten schätzen</a:t>
+            </a:r>
+          </a:p>
+          <a:p>
+            <a:pPr>
+              <a:spcBef>
+                <a:spcPts val="800"/>
+              </a:spcBef>
+              <a:spcAft>
+                <a:spcPts val="200"/>
+              </a:spcAft>
+            </a:pPr>
+            <a:r>
+              <a:rPr sz="1400">
+                <a:solidFill>
+                  <a:srgbClr val="3D5466"/>
+                </a:solidFill>
+                <a:latin typeface="Arial"/>
+              </a:rPr>
+              <a:t>▸  Die Wettbewerbsposition der eigenen Bank im Zielsegment anhand von Stärken, Schwächen und Differenzierungspotenzialen bewerten</a:t>
+            </a:r>
+          </a:p>
+          <a:p>
+            <a:pPr>
+              <a:spcBef>
+                <a:spcPts val="800"/>
+              </a:spcBef>
+              <a:spcAft>
+                <a:spcPts val="200"/>
+              </a:spcAft>
+            </a:pPr>
+            <a:r>
+              <a:rPr sz="1400">
+                <a:solidFill>
+                  <a:srgbClr val="3D5466"/>
+                </a:solidFill>
+                <a:latin typeface="Arial"/>
+              </a:rPr>
+              <a:t>▸  Eine Marktbearbeitungsstrategie mit Zielkunden-Kriterien, Wertversprechen und Anspracheansatz entwickeln</a:t>
+            </a:r>
+          </a:p>
+          <a:p>
+            <a:pPr>
+              <a:spcBef>
+                <a:spcPts val="800"/>
+              </a:spcBef>
+              <a:spcAft>
+                <a:spcPts val="200"/>
+              </a:spcAft>
+            </a:pPr>
+            <a:r>
+              <a:rPr sz="1400">
+                <a:solidFill>
+                  <a:srgbClr val="3D5466"/>
+                </a:solidFill>
+                <a:latin typeface="Arial"/>
+              </a:rPr>
+              <a:t>▸  Die Eignung verschiedener Neukundenansprache-Kanäle für das Zielsegment bewerten und die zwei effektivsten wählen</a:t>
+            </a:r>
+          </a:p>
+          <a:p>
+            <a:pPr>
+              <a:spcBef>
+                <a:spcPts val="800"/>
+              </a:spcBef>
+              <a:spcAft>
+                <a:spcPts val="200"/>
+              </a:spcAft>
+            </a:pPr>
+            <a:r>
+              <a:rPr sz="1400">
+                <a:solidFill>
+                  <a:srgbClr val="3D5466"/>
+                </a:solidFill>
+                <a:latin typeface="Arial"/>
+              </a:rPr>
+              <a:t>▸  Einen strukturierten Jahresplan mit Zielgrößen, Maßnahmen und Meilensteinen erstellen</a:t>
+            </a:r>
+          </a:p>
+        </p:txBody>
+      </p:sp>
+      <p:sp>
+        <p:nvSpPr>
+          <p:cNvPr id="8" name="Rectangle 7"/>
           <p:cNvSpPr/>
           <p:nvPr/>
         </p:nvSpPr>
         <p:spPr>
           <a:xfrm>
-            <a:off x="4064000" y="2286000"/>
-            <a:ext cx="7518399" cy="6350"/>
+            <a:off x="0" y="6510528"/>
+            <a:ext cx="12188952" cy="347472"/>
           </a:xfrm>
           <a:prstGeom prst="rect">
             <a:avLst/>
           </a:prstGeom>
           <a:solidFill>
-            <a:srgbClr val="E0E0E8"/>
+            <a:srgbClr val="0A1937"/>
           </a:solidFill>
           <a:ln>
             <a:noFill/>
@@ -4610,14 +5752,14 @@
       </p:sp>
       <p:sp>
         <p:nvSpPr>
-          <p:cNvPr id="14" name="TextBox 13"/>
+          <p:cNvPr id="9" name="TextBox 8"/>
           <p:cNvSpPr txBox="1"/>
           <p:nvPr/>
         </p:nvSpPr>
         <p:spPr>
           <a:xfrm>
-            <a:off x="4064000" y="2336800"/>
-            <a:ext cx="762000" cy="647700"/>
+            <a:off x="685800" y="6583680"/>
+            <a:ext cx="6490411" cy="256032"/>
           </a:xfrm>
           <a:prstGeom prst="rect">
             <a:avLst/>
@@ -4626,280 +5768,19 @@
         </p:spPr>
         <p:txBody>
           <a:bodyPr wrap="none">
-            <a:normAutofit/>
+            <a:spAutoFit/>
           </a:bodyPr>
           <a:lstStyle/>
           <a:p>
             <a:pPr algn="l"/>
             <a:r>
-              <a:rPr sz="2400" b="0" i="1">
-                <a:solidFill>
-                  <a:srgbClr val="1F2B56"/>
-                </a:solidFill>
-                <a:latin typeface="Georgia"/>
-              </a:rPr>
-              <a:t>III</a:t>
-            </a:r>
-          </a:p>
-        </p:txBody>
-      </p:sp>
-      <p:sp>
-        <p:nvSpPr>
-          <p:cNvPr id="15" name="TextBox 14"/>
-          <p:cNvSpPr txBox="1"/>
-          <p:nvPr/>
-        </p:nvSpPr>
-        <p:spPr>
-          <a:xfrm>
-            <a:off x="4953000" y="2349500"/>
-            <a:ext cx="6629400" cy="635000"/>
-          </a:xfrm>
-          <a:prstGeom prst="rect">
-            <a:avLst/>
-          </a:prstGeom>
-          <a:noFill/>
-        </p:spPr>
-        <p:txBody>
-          <a:bodyPr wrap="square">
-            <a:normAutofit/>
-          </a:bodyPr>
-          <a:lstStyle/>
-          <a:p>
-            <a:pPr algn="l"/>
-            <a:r>
-              <a:rPr sz="1400" b="0" i="0">
-                <a:solidFill>
-                  <a:srgbClr val="191D2E"/>
-                </a:solidFill>
-                <a:latin typeface="Georgia"/>
-              </a:rPr>
-              <a:t>Eine Marktbearbeitungsstrategie mit Zielkunden-Kriterien, Wertversprechen und Anspracheansatz entwickeln</a:t>
-            </a:r>
-          </a:p>
-        </p:txBody>
-      </p:sp>
-      <p:sp>
-        <p:nvSpPr>
-          <p:cNvPr id="16" name="Rectangle 15"/>
-          <p:cNvSpPr/>
-          <p:nvPr/>
-        </p:nvSpPr>
-        <p:spPr>
-          <a:xfrm>
-            <a:off x="4064000" y="2984500"/>
-            <a:ext cx="7518399" cy="6350"/>
-          </a:xfrm>
-          <a:prstGeom prst="rect">
-            <a:avLst/>
-          </a:prstGeom>
-          <a:solidFill>
-            <a:srgbClr val="E0E0E8"/>
-          </a:solidFill>
-          <a:ln>
-            <a:noFill/>
-          </a:ln>
-        </p:spPr>
-        <p:style>
-          <a:lnRef idx="1">
-            <a:schemeClr val="accent1"/>
-          </a:lnRef>
-          <a:fillRef idx="3">
-            <a:schemeClr val="accent1"/>
-          </a:fillRef>
-          <a:effectRef idx="2">
-            <a:schemeClr val="accent1"/>
-          </a:effectRef>
-          <a:fontRef idx="minor">
-            <a:schemeClr val="lt1"/>
-          </a:fontRef>
-        </p:style>
-        <p:txBody>
-          <a:bodyPr rtlCol="0" anchor="ctr"/>
-          <a:lstStyle/>
-          <a:p>
-            <a:pPr algn="ctr"/>
-          </a:p>
-        </p:txBody>
-      </p:sp>
-      <p:sp>
-        <p:nvSpPr>
-          <p:cNvPr id="17" name="TextBox 16"/>
-          <p:cNvSpPr txBox="1"/>
-          <p:nvPr/>
-        </p:nvSpPr>
-        <p:spPr>
-          <a:xfrm>
-            <a:off x="4064000" y="3035300"/>
-            <a:ext cx="762000" cy="647700"/>
-          </a:xfrm>
-          <a:prstGeom prst="rect">
-            <a:avLst/>
-          </a:prstGeom>
-          <a:noFill/>
-        </p:spPr>
-        <p:txBody>
-          <a:bodyPr wrap="none">
-            <a:normAutofit/>
-          </a:bodyPr>
-          <a:lstStyle/>
-          <a:p>
-            <a:pPr algn="l"/>
-            <a:r>
-              <a:rPr sz="2400" b="0" i="1">
-                <a:solidFill>
-                  <a:srgbClr val="1F2B56"/>
-                </a:solidFill>
-                <a:latin typeface="Georgia"/>
-              </a:rPr>
-              <a:t>IV</a:t>
-            </a:r>
-          </a:p>
-        </p:txBody>
-      </p:sp>
-      <p:sp>
-        <p:nvSpPr>
-          <p:cNvPr id="18" name="TextBox 17"/>
-          <p:cNvSpPr txBox="1"/>
-          <p:nvPr/>
-        </p:nvSpPr>
-        <p:spPr>
-          <a:xfrm>
-            <a:off x="4953000" y="3048000"/>
-            <a:ext cx="6629400" cy="635000"/>
-          </a:xfrm>
-          <a:prstGeom prst="rect">
-            <a:avLst/>
-          </a:prstGeom>
-          <a:noFill/>
-        </p:spPr>
-        <p:txBody>
-          <a:bodyPr wrap="square">
-            <a:normAutofit/>
-          </a:bodyPr>
-          <a:lstStyle/>
-          <a:p>
-            <a:pPr algn="l"/>
-            <a:r>
-              <a:rPr sz="1400" b="0" i="0">
-                <a:solidFill>
-                  <a:srgbClr val="191D2E"/>
-                </a:solidFill>
-                <a:latin typeface="Georgia"/>
-              </a:rPr>
-              <a:t>Die Eignung verschiedener Neukundenansprache-Kanäle für das Zielsegment bewerten und die zwei effektivsten wählen</a:t>
-            </a:r>
-          </a:p>
-        </p:txBody>
-      </p:sp>
-      <p:sp>
-        <p:nvSpPr>
-          <p:cNvPr id="19" name="Rectangle 18"/>
-          <p:cNvSpPr/>
-          <p:nvPr/>
-        </p:nvSpPr>
-        <p:spPr>
-          <a:xfrm>
-            <a:off x="4064000" y="3683000"/>
-            <a:ext cx="7518399" cy="6350"/>
-          </a:xfrm>
-          <a:prstGeom prst="rect">
-            <a:avLst/>
-          </a:prstGeom>
-          <a:solidFill>
-            <a:srgbClr val="E0E0E8"/>
-          </a:solidFill>
-          <a:ln>
-            <a:noFill/>
-          </a:ln>
-        </p:spPr>
-        <p:style>
-          <a:lnRef idx="1">
-            <a:schemeClr val="accent1"/>
-          </a:lnRef>
-          <a:fillRef idx="3">
-            <a:schemeClr val="accent1"/>
-          </a:fillRef>
-          <a:effectRef idx="2">
-            <a:schemeClr val="accent1"/>
-          </a:effectRef>
-          <a:fontRef idx="minor">
-            <a:schemeClr val="lt1"/>
-          </a:fontRef>
-        </p:style>
-        <p:txBody>
-          <a:bodyPr rtlCol="0" anchor="ctr"/>
-          <a:lstStyle/>
-          <a:p>
-            <a:pPr algn="ctr"/>
-          </a:p>
-        </p:txBody>
-      </p:sp>
-      <p:sp>
-        <p:nvSpPr>
-          <p:cNvPr id="20" name="TextBox 19"/>
-          <p:cNvSpPr txBox="1"/>
-          <p:nvPr/>
-        </p:nvSpPr>
-        <p:spPr>
-          <a:xfrm>
-            <a:off x="4064000" y="3733799"/>
-            <a:ext cx="762000" cy="647700"/>
-          </a:xfrm>
-          <a:prstGeom prst="rect">
-            <a:avLst/>
-          </a:prstGeom>
-          <a:noFill/>
-        </p:spPr>
-        <p:txBody>
-          <a:bodyPr wrap="none">
-            <a:normAutofit/>
-          </a:bodyPr>
-          <a:lstStyle/>
-          <a:p>
-            <a:pPr algn="l"/>
-            <a:r>
-              <a:rPr sz="2400" b="0" i="1">
-                <a:solidFill>
-                  <a:srgbClr val="1F2B56"/>
-                </a:solidFill>
-                <a:latin typeface="Georgia"/>
-              </a:rPr>
-              <a:t>V</a:t>
-            </a:r>
-          </a:p>
-        </p:txBody>
-      </p:sp>
-      <p:sp>
-        <p:nvSpPr>
-          <p:cNvPr id="21" name="TextBox 20"/>
-          <p:cNvSpPr txBox="1"/>
-          <p:nvPr/>
-        </p:nvSpPr>
-        <p:spPr>
-          <a:xfrm>
-            <a:off x="4953000" y="3746500"/>
-            <a:ext cx="6629400" cy="635000"/>
-          </a:xfrm>
-          <a:prstGeom prst="rect">
-            <a:avLst/>
-          </a:prstGeom>
-          <a:noFill/>
-        </p:spPr>
-        <p:txBody>
-          <a:bodyPr wrap="square">
-            <a:normAutofit/>
-          </a:bodyPr>
-          <a:lstStyle/>
-          <a:p>
-            <a:pPr algn="l"/>
-            <a:r>
-              <a:rPr sz="1400" b="0" i="0">
-                <a:solidFill>
-                  <a:srgbClr val="191D2E"/>
-                </a:solidFill>
-                <a:latin typeface="Georgia"/>
-              </a:rPr>
-              <a:t>Einen strukturierten Jahresplan mit Zielgrößen, Maßnahmen und Meilensteinen erstellen</a:t>
+              <a:rPr sz="700">
+                <a:solidFill>
+                  <a:srgbClr val="A0B4D2"/>
+                </a:solidFill>
+                <a:latin typeface="JetBrains Mono"/>
+              </a:rPr>
+              <a:t>Benedikt Zoller Coaching  ·  FKB Campus  ·  M15</a:t>
             </a:r>
           </a:p>
         </p:txBody>
@@ -4915,14 +5796,6 @@
 <file path=ppt/slides/slide3.xml><?xml version="1.0" encoding="utf-8"?>
 <p:sld xmlns:a="http://schemas.openxmlformats.org/drawingml/2006/main" xmlns:p="http://schemas.openxmlformats.org/presentationml/2006/main" xmlns:r="http://schemas.openxmlformats.org/officeDocument/2006/relationships">
   <p:cSld>
-    <p:bg>
-      <p:bgPr>
-        <a:solidFill>
-          <a:srgbClr val="1F2B56"/>
-        </a:solidFill>
-        <a:effectLst/>
-      </p:bgPr>
-    </p:bg>
     <p:spTree>
       <p:nvGrpSpPr>
         <p:cNvPr id="1" name=""/>
@@ -4932,71 +5805,87 @@
       <p:grpSpPr/>
       <p:sp>
         <p:nvSpPr>
-          <p:cNvPr id="2" name="TextBox 1"/>
-          <p:cNvSpPr txBox="1"/>
-          <p:nvPr/>
-        </p:nvSpPr>
-        <p:spPr>
-          <a:xfrm>
-            <a:off x="609600" y="279400"/>
-            <a:ext cx="2540000" cy="279400"/>
-          </a:xfrm>
-          <a:prstGeom prst="rect">
-            <a:avLst/>
-          </a:prstGeom>
-          <a:noFill/>
-        </p:spPr>
-        <p:txBody>
-          <a:bodyPr wrap="square">
-            <a:normAutofit/>
-          </a:bodyPr>
-          <a:lstStyle/>
-          <a:p>
-            <a:pPr algn="l"/>
-            <a:r>
-              <a:rPr sz="1000" b="1" i="0">
-                <a:solidFill>
-                  <a:srgbClr val="F8F8FA"/>
-                </a:solidFill>
-                <a:latin typeface="Arial"/>
-              </a:rPr>
-              <a:t>FKB  Campus</a:t>
-            </a:r>
-          </a:p>
-        </p:txBody>
-      </p:sp>
-      <p:sp>
-        <p:nvSpPr>
-          <p:cNvPr id="3" name="TextBox 2"/>
-          <p:cNvSpPr txBox="1"/>
-          <p:nvPr/>
-        </p:nvSpPr>
-        <p:spPr>
-          <a:xfrm>
-            <a:off x="609600" y="279400"/>
-            <a:ext cx="10972800" cy="279400"/>
-          </a:xfrm>
-          <a:prstGeom prst="rect">
-            <a:avLst/>
-          </a:prstGeom>
-          <a:noFill/>
-        </p:spPr>
-        <p:txBody>
-          <a:bodyPr wrap="square">
-            <a:normAutofit/>
-          </a:bodyPr>
-          <a:lstStyle/>
-          <a:p>
-            <a:pPr algn="r"/>
-            <a:r>
-              <a:rPr sz="900" b="0" i="0">
-                <a:solidFill>
-                  <a:srgbClr val="7B7FA0"/>
-                </a:solidFill>
-                <a:latin typeface="Courier New"/>
-              </a:rPr>
-              <a:t>VOM REAKTIVEN ZUM STRATEGISCHEN VERTRIEB</a:t>
-            </a:r>
+          <p:cNvPr id="2" name="Rectangle 1"/>
+          <p:cNvSpPr/>
+          <p:nvPr/>
+        </p:nvSpPr>
+        <p:spPr>
+          <a:xfrm>
+            <a:off x="0" y="0"/>
+            <a:ext cx="12188952" cy="6858000"/>
+          </a:xfrm>
+          <a:prstGeom prst="rect">
+            <a:avLst/>
+          </a:prstGeom>
+          <a:solidFill>
+            <a:srgbClr val="EDEDF3"/>
+          </a:solidFill>
+          <a:ln>
+            <a:noFill/>
+          </a:ln>
+        </p:spPr>
+        <p:style>
+          <a:lnRef idx="1">
+            <a:schemeClr val="accent1"/>
+          </a:lnRef>
+          <a:fillRef idx="3">
+            <a:schemeClr val="accent1"/>
+          </a:fillRef>
+          <a:effectRef idx="2">
+            <a:schemeClr val="accent1"/>
+          </a:effectRef>
+          <a:fontRef idx="minor">
+            <a:schemeClr val="lt1"/>
+          </a:fontRef>
+        </p:style>
+        <p:txBody>
+          <a:bodyPr rtlCol="0" anchor="ctr"/>
+          <a:lstStyle/>
+          <a:p>
+            <a:pPr algn="ctr"/>
+          </a:p>
+        </p:txBody>
+      </p:sp>
+      <p:sp>
+        <p:nvSpPr>
+          <p:cNvPr id="3" name="Rectangle 2"/>
+          <p:cNvSpPr/>
+          <p:nvPr/>
+        </p:nvSpPr>
+        <p:spPr>
+          <a:xfrm>
+            <a:off x="0" y="0"/>
+            <a:ext cx="12188952" cy="50292"/>
+          </a:xfrm>
+          <a:prstGeom prst="rect">
+            <a:avLst/>
+          </a:prstGeom>
+          <a:solidFill>
+            <a:srgbClr val="1F2C56"/>
+          </a:solidFill>
+          <a:ln>
+            <a:noFill/>
+          </a:ln>
+        </p:spPr>
+        <p:style>
+          <a:lnRef idx="1">
+            <a:schemeClr val="accent1"/>
+          </a:lnRef>
+          <a:fillRef idx="3">
+            <a:schemeClr val="accent1"/>
+          </a:fillRef>
+          <a:effectRef idx="2">
+            <a:schemeClr val="accent1"/>
+          </a:effectRef>
+          <a:fontRef idx="minor">
+            <a:schemeClr val="lt1"/>
+          </a:fontRef>
+        </p:style>
+        <p:txBody>
+          <a:bodyPr rtlCol="0" anchor="ctr"/>
+          <a:lstStyle/>
+          <a:p>
+            <a:pPr algn="ctr"/>
           </a:p>
         </p:txBody>
       </p:sp>
@@ -5008,8 +5897,8 @@
         </p:nvSpPr>
         <p:spPr>
           <a:xfrm>
-            <a:off x="609600" y="6426200"/>
-            <a:ext cx="10972800" cy="228600"/>
+            <a:off x="685800" y="109728"/>
+            <a:ext cx="10817352" cy="228600"/>
           </a:xfrm>
           <a:prstGeom prst="rect">
             <a:avLst/>
@@ -5017,91 +5906,107 @@
           <a:noFill/>
         </p:spPr>
         <p:txBody>
-          <a:bodyPr wrap="square">
-            <a:normAutofit/>
+          <a:bodyPr wrap="none">
+            <a:spAutoFit/>
           </a:bodyPr>
           <a:lstStyle/>
           <a:p>
-            <a:pPr algn="r"/>
-            <a:r>
-              <a:rPr sz="900" b="0" i="0">
-                <a:solidFill>
-                  <a:srgbClr val="7B7FA0"/>
-                </a:solidFill>
-                <a:latin typeface="Courier New"/>
-              </a:rPr>
-              <a:t>03</a:t>
-            </a:r>
-          </a:p>
-        </p:txBody>
-      </p:sp>
-      <p:sp>
-        <p:nvSpPr>
-          <p:cNvPr id="5" name="TextBox 4"/>
-          <p:cNvSpPr txBox="1"/>
-          <p:nvPr/>
-        </p:nvSpPr>
-        <p:spPr>
-          <a:xfrm>
-            <a:off x="609600" y="635000"/>
-            <a:ext cx="5461000" cy="5461000"/>
-          </a:xfrm>
-          <a:prstGeom prst="rect">
-            <a:avLst/>
-          </a:prstGeom>
-          <a:noFill/>
-        </p:spPr>
-        <p:txBody>
-          <a:bodyPr wrap="square">
-            <a:normAutofit/>
-          </a:bodyPr>
-          <a:lstStyle/>
-          <a:p>
             <a:pPr algn="l"/>
             <a:r>
-              <a:rPr sz="28000" b="0" i="1">
-                <a:solidFill>
-                  <a:srgbClr val="D9BF7A"/>
-                </a:solidFill>
-                <a:latin typeface="Georgia"/>
-              </a:rPr>
-              <a:t>I</a:t>
-            </a:r>
-          </a:p>
-        </p:txBody>
-      </p:sp>
-      <p:sp>
-        <p:nvSpPr>
-          <p:cNvPr id="6" name="TextBox 5"/>
-          <p:cNvSpPr txBox="1"/>
-          <p:nvPr/>
-        </p:nvSpPr>
-        <p:spPr>
-          <a:xfrm>
-            <a:off x="6731000" y="4064000"/>
-            <a:ext cx="4851400" cy="1778000"/>
-          </a:xfrm>
-          <a:prstGeom prst="rect">
-            <a:avLst/>
-          </a:prstGeom>
-          <a:noFill/>
-        </p:spPr>
-        <p:txBody>
-          <a:bodyPr wrap="square">
-            <a:normAutofit/>
-          </a:bodyPr>
-          <a:lstStyle/>
-          <a:p>
-            <a:pPr algn="r"/>
-            <a:r>
-              <a:rPr sz="3800" b="0" i="0">
-                <a:solidFill>
-                  <a:srgbClr val="F8F8FA"/>
-                </a:solidFill>
-                <a:latin typeface="Georgia"/>
-              </a:rPr>
-              <a:t>Vom reaktiven zum strategischen Vertrieb</a:t>
-            </a:r>
+              <a:rPr sz="750">
+                <a:solidFill>
+                  <a:srgbClr val="78808C"/>
+                </a:solidFill>
+                <a:latin typeface="JetBrains Mono"/>
+              </a:rPr>
+              <a:t>M15  ·  INHALT</a:t>
+            </a:r>
+          </a:p>
+        </p:txBody>
+      </p:sp>
+      <p:sp>
+        <p:nvSpPr>
+          <p:cNvPr id="5" name="Rectangle 4"/>
+          <p:cNvSpPr/>
+          <p:nvPr/>
+        </p:nvSpPr>
+        <p:spPr>
+          <a:xfrm>
+            <a:off x="0" y="1234440"/>
+            <a:ext cx="12188952" cy="12700"/>
+          </a:xfrm>
+          <a:prstGeom prst="rect">
+            <a:avLst/>
+          </a:prstGeom>
+          <a:solidFill>
+            <a:srgbClr val="D8DFE4"/>
+          </a:solidFill>
+          <a:ln>
+            <a:noFill/>
+          </a:ln>
+        </p:spPr>
+        <p:style>
+          <a:lnRef idx="1">
+            <a:schemeClr val="accent1"/>
+          </a:lnRef>
+          <a:fillRef idx="3">
+            <a:schemeClr val="accent1"/>
+          </a:fillRef>
+          <a:effectRef idx="2">
+            <a:schemeClr val="accent1"/>
+          </a:effectRef>
+          <a:fontRef idx="minor">
+            <a:schemeClr val="lt1"/>
+          </a:fontRef>
+        </p:style>
+        <p:txBody>
+          <a:bodyPr rtlCol="0" anchor="ctr"/>
+          <a:lstStyle/>
+          <a:p>
+            <a:pPr algn="ctr"/>
+          </a:p>
+        </p:txBody>
+      </p:sp>
+      <p:sp>
+        <p:nvSpPr>
+          <p:cNvPr id="6" name="Rectangle 5"/>
+          <p:cNvSpPr/>
+          <p:nvPr/>
+        </p:nvSpPr>
+        <p:spPr>
+          <a:xfrm>
+            <a:off x="685800" y="502920"/>
+            <a:ext cx="36576" cy="658368"/>
+          </a:xfrm>
+          <a:prstGeom prst="rect">
+            <a:avLst/>
+          </a:prstGeom>
+          <a:solidFill>
+            <a:srgbClr val="D9C089"/>
+          </a:solidFill>
+          <a:ln>
+            <a:noFill/>
+          </a:ln>
+        </p:spPr>
+        <p:style>
+          <a:lnRef idx="1">
+            <a:schemeClr val="accent1"/>
+          </a:lnRef>
+          <a:fillRef idx="3">
+            <a:schemeClr val="accent1"/>
+          </a:fillRef>
+          <a:effectRef idx="2">
+            <a:schemeClr val="accent1"/>
+          </a:effectRef>
+          <a:fontRef idx="minor">
+            <a:schemeClr val="lt1"/>
+          </a:fontRef>
+        </p:style>
+        <p:txBody>
+          <a:bodyPr rtlCol="0" anchor="ctr"/>
+          <a:lstStyle/>
+          <a:p>
+            <a:pPr algn="ctr"/>
           </a:p>
         </p:txBody>
       </p:sp>
@@ -5113,8 +6018,8 @@
         </p:nvSpPr>
         <p:spPr>
           <a:xfrm>
-            <a:off x="6731000" y="5842000"/>
-            <a:ext cx="4851400" cy="635000"/>
+            <a:off x="813816" y="502920"/>
+            <a:ext cx="10634472" cy="685800"/>
           </a:xfrm>
           <a:prstGeom prst="rect">
             <a:avLst/>
@@ -5123,19 +6028,234 @@
         </p:spPr>
         <p:txBody>
           <a:bodyPr wrap="square">
-            <a:normAutofit/>
+            <a:spAutoFit/>
           </a:bodyPr>
           <a:lstStyle/>
           <a:p>
-            <a:pPr algn="r"/>
-            <a:r>
-              <a:rPr sz="1400" b="0" i="1">
-                <a:solidFill>
-                  <a:srgbClr val="7B7FA0"/>
-                </a:solidFill>
-                <a:latin typeface="Georgia"/>
-              </a:rPr>
-              <a:t>Wer wartet, verliert</a:t>
+            <a:pPr algn="l"/>
+            <a:r>
+              <a:rPr sz="2400" b="1" i="0">
+                <a:solidFill>
+                  <a:srgbClr val="1F2C56"/>
+                </a:solidFill>
+                <a:latin typeface="Source Serif 4"/>
+              </a:rPr>
+              <a:t>Vom reaktiven zum strategischen Vertrieb</a:t>
+            </a:r>
+          </a:p>
+        </p:txBody>
+      </p:sp>
+      <p:sp>
+        <p:nvSpPr>
+          <p:cNvPr id="8" name="TextBox 7"/>
+          <p:cNvSpPr txBox="1"/>
+          <p:nvPr/>
+        </p:nvSpPr>
+        <p:spPr>
+          <a:xfrm>
+            <a:off x="685800" y="1417320"/>
+            <a:ext cx="10817352" cy="5029200"/>
+          </a:xfrm>
+          <a:prstGeom prst="rect">
+            <a:avLst/>
+          </a:prstGeom>
+          <a:noFill/>
+        </p:spPr>
+        <p:txBody>
+          <a:bodyPr wrap="square">
+            <a:spAutoFit/>
+          </a:bodyPr>
+          <a:lstStyle/>
+          <a:p>
+            <a:pPr>
+              <a:spcBef>
+                <a:spcPts val="400"/>
+              </a:spcBef>
+              <a:spcAft>
+                <a:spcPts val="200"/>
+              </a:spcAft>
+            </a:pPr>
+            <a:r>
+              <a:rPr sz="1200">
+                <a:solidFill>
+                  <a:srgbClr val="3D5466"/>
+                </a:solidFill>
+                <a:latin typeface="Arial"/>
+              </a:rPr>
+              <a:t>Eine Marktbearbeitungsstrategie beantwortet vier Fragen:</a:t>
+            </a:r>
+          </a:p>
+          <a:p>
+            <a:pPr>
+              <a:spcBef>
+                <a:spcPts val="400"/>
+              </a:spcBef>
+              <a:spcAft>
+                <a:spcPts val="200"/>
+              </a:spcAft>
+            </a:pPr>
+            <a:r>
+              <a:rPr sz="1300">
+                <a:solidFill>
+                  <a:srgbClr val="3D5466"/>
+                </a:solidFill>
+                <a:latin typeface="Arial"/>
+              </a:rPr>
+              <a:t>▸  Wen? – Welches Kundensegment bearbeite ich mit Priorität?</a:t>
+            </a:r>
+          </a:p>
+          <a:p>
+            <a:pPr>
+              <a:spcBef>
+                <a:spcPts val="400"/>
+              </a:spcBef>
+              <a:spcAft>
+                <a:spcPts val="200"/>
+              </a:spcAft>
+            </a:pPr>
+            <a:r>
+              <a:rPr sz="1300">
+                <a:solidFill>
+                  <a:srgbClr val="3D5466"/>
+                </a:solidFill>
+                <a:latin typeface="Arial"/>
+              </a:rPr>
+              <a:t>▸  Womit? – Was ist mein Wertversprechen für dieses Segment?</a:t>
+            </a:r>
+          </a:p>
+          <a:p>
+            <a:pPr>
+              <a:spcBef>
+                <a:spcPts val="400"/>
+              </a:spcBef>
+              <a:spcAft>
+                <a:spcPts val="200"/>
+              </a:spcAft>
+            </a:pPr>
+            <a:r>
+              <a:rPr sz="1300">
+                <a:solidFill>
+                  <a:srgbClr val="3D5466"/>
+                </a:solidFill>
+                <a:latin typeface="Arial"/>
+              </a:rPr>
+              <a:t>▸  Wie? – Über welche Kanäle und Maßnahmen erreiche ich diese Kunden?</a:t>
+            </a:r>
+          </a:p>
+          <a:p>
+            <a:pPr>
+              <a:spcBef>
+                <a:spcPts val="400"/>
+              </a:spcBef>
+              <a:spcAft>
+                <a:spcPts val="200"/>
+              </a:spcAft>
+            </a:pPr>
+            <a:r>
+              <a:rPr sz="1300">
+                <a:solidFill>
+                  <a:srgbClr val="3D5466"/>
+                </a:solidFill>
+                <a:latin typeface="Arial"/>
+              </a:rPr>
+              <a:t>▸  Wann? – Welche Meilensteine und Zielgrößen setze ich uns?</a:t>
+            </a:r>
+          </a:p>
+          <a:p>
+            <a:pPr>
+              <a:spcBef>
+                <a:spcPts val="400"/>
+              </a:spcBef>
+              <a:spcAft>
+                <a:spcPts val="200"/>
+              </a:spcAft>
+            </a:pPr>
+            <a:r>
+              <a:rPr sz="1200">
+                <a:solidFill>
+                  <a:srgbClr val="3D5466"/>
+                </a:solidFill>
+                <a:latin typeface="Arial"/>
+              </a:rPr>
+              <a:t>## 4.2 Marktsegmentierung im Firmenkundengeschäft</a:t>
+            </a:r>
+          </a:p>
+        </p:txBody>
+      </p:sp>
+      <p:sp>
+        <p:nvSpPr>
+          <p:cNvPr id="9" name="Rectangle 8"/>
+          <p:cNvSpPr/>
+          <p:nvPr/>
+        </p:nvSpPr>
+        <p:spPr>
+          <a:xfrm>
+            <a:off x="0" y="6510528"/>
+            <a:ext cx="12188952" cy="347472"/>
+          </a:xfrm>
+          <a:prstGeom prst="rect">
+            <a:avLst/>
+          </a:prstGeom>
+          <a:solidFill>
+            <a:srgbClr val="0A1937"/>
+          </a:solidFill>
+          <a:ln>
+            <a:noFill/>
+          </a:ln>
+        </p:spPr>
+        <p:style>
+          <a:lnRef idx="1">
+            <a:schemeClr val="accent1"/>
+          </a:lnRef>
+          <a:fillRef idx="3">
+            <a:schemeClr val="accent1"/>
+          </a:fillRef>
+          <a:effectRef idx="2">
+            <a:schemeClr val="accent1"/>
+          </a:effectRef>
+          <a:fontRef idx="minor">
+            <a:schemeClr val="lt1"/>
+          </a:fontRef>
+        </p:style>
+        <p:txBody>
+          <a:bodyPr rtlCol="0" anchor="ctr"/>
+          <a:lstStyle/>
+          <a:p>
+            <a:pPr algn="ctr"/>
+          </a:p>
+        </p:txBody>
+      </p:sp>
+      <p:sp>
+        <p:nvSpPr>
+          <p:cNvPr id="10" name="TextBox 9"/>
+          <p:cNvSpPr txBox="1"/>
+          <p:nvPr/>
+        </p:nvSpPr>
+        <p:spPr>
+          <a:xfrm>
+            <a:off x="685800" y="6583680"/>
+            <a:ext cx="6490411" cy="256032"/>
+          </a:xfrm>
+          <a:prstGeom prst="rect">
+            <a:avLst/>
+          </a:prstGeom>
+          <a:noFill/>
+        </p:spPr>
+        <p:txBody>
+          <a:bodyPr wrap="none">
+            <a:spAutoFit/>
+          </a:bodyPr>
+          <a:lstStyle/>
+          <a:p>
+            <a:pPr algn="l"/>
+            <a:r>
+              <a:rPr sz="700">
+                <a:solidFill>
+                  <a:srgbClr val="A0B4D2"/>
+                </a:solidFill>
+                <a:latin typeface="JetBrains Mono"/>
+              </a:rPr>
+              <a:t>Benedikt Zoller Coaching  ·  FKB Campus  ·  M15</a:t>
             </a:r>
           </a:p>
         </p:txBody>
@@ -5151,14 +6271,6 @@
 <file path=ppt/slides/slide4.xml><?xml version="1.0" encoding="utf-8"?>
 <p:sld xmlns:a="http://schemas.openxmlformats.org/drawingml/2006/main" xmlns:p="http://schemas.openxmlformats.org/presentationml/2006/main" xmlns:r="http://schemas.openxmlformats.org/officeDocument/2006/relationships">
   <p:cSld>
-    <p:bg>
-      <p:bgPr>
-        <a:solidFill>
-          <a:srgbClr val="F8F8FA"/>
-        </a:solidFill>
-        <a:effectLst/>
-      </p:bgPr>
-    </p:bg>
     <p:spTree>
       <p:nvGrpSpPr>
         <p:cNvPr id="1" name=""/>
@@ -5168,125 +6280,20 @@
       <p:grpSpPr/>
       <p:sp>
         <p:nvSpPr>
-          <p:cNvPr id="2" name="TextBox 1"/>
-          <p:cNvSpPr txBox="1"/>
-          <p:nvPr/>
-        </p:nvSpPr>
-        <p:spPr>
-          <a:xfrm>
-            <a:off x="609600" y="279400"/>
-            <a:ext cx="2540000" cy="279400"/>
-          </a:xfrm>
-          <a:prstGeom prst="rect">
-            <a:avLst/>
-          </a:prstGeom>
-          <a:noFill/>
-        </p:spPr>
-        <p:txBody>
-          <a:bodyPr wrap="square">
-            <a:normAutofit/>
-          </a:bodyPr>
-          <a:lstStyle/>
-          <a:p>
-            <a:pPr algn="l"/>
-            <a:r>
-              <a:rPr sz="1000" b="1" i="0">
-                <a:solidFill>
-                  <a:srgbClr val="191D2E"/>
-                </a:solidFill>
-                <a:latin typeface="Arial"/>
-              </a:rPr>
-              <a:t>FKB  Campus</a:t>
-            </a:r>
-          </a:p>
-        </p:txBody>
-      </p:sp>
-      <p:sp>
-        <p:nvSpPr>
-          <p:cNvPr id="3" name="TextBox 2"/>
-          <p:cNvSpPr txBox="1"/>
-          <p:nvPr/>
-        </p:nvSpPr>
-        <p:spPr>
-          <a:xfrm>
-            <a:off x="609600" y="279400"/>
-            <a:ext cx="10972800" cy="279400"/>
-          </a:xfrm>
-          <a:prstGeom prst="rect">
-            <a:avLst/>
-          </a:prstGeom>
-          <a:noFill/>
-        </p:spPr>
-        <p:txBody>
-          <a:bodyPr wrap="square">
-            <a:normAutofit/>
-          </a:bodyPr>
-          <a:lstStyle/>
-          <a:p>
-            <a:pPr algn="r"/>
-            <a:r>
-              <a:rPr sz="900" b="0" i="0">
-                <a:solidFill>
-                  <a:srgbClr val="7B7FA0"/>
-                </a:solidFill>
-                <a:latin typeface="Courier New"/>
-              </a:rPr>
-              <a:t>I · VOM REAKTIVEN ZUM STRATEGISCHEN VERTRIEB</a:t>
-            </a:r>
-          </a:p>
-        </p:txBody>
-      </p:sp>
-      <p:sp>
-        <p:nvSpPr>
-          <p:cNvPr id="4" name="TextBox 3"/>
-          <p:cNvSpPr txBox="1"/>
-          <p:nvPr/>
-        </p:nvSpPr>
-        <p:spPr>
-          <a:xfrm>
-            <a:off x="609600" y="6426200"/>
-            <a:ext cx="10972800" cy="228600"/>
-          </a:xfrm>
-          <a:prstGeom prst="rect">
-            <a:avLst/>
-          </a:prstGeom>
-          <a:noFill/>
-        </p:spPr>
-        <p:txBody>
-          <a:bodyPr wrap="square">
-            <a:normAutofit/>
-          </a:bodyPr>
-          <a:lstStyle/>
-          <a:p>
-            <a:pPr algn="r"/>
-            <a:r>
-              <a:rPr sz="900" b="0" i="0">
-                <a:solidFill>
-                  <a:srgbClr val="7B7FA0"/>
-                </a:solidFill>
-                <a:latin typeface="Courier New"/>
-              </a:rPr>
-              <a:t>04</a:t>
-            </a:r>
-          </a:p>
-        </p:txBody>
-      </p:sp>
-      <p:sp>
-        <p:nvSpPr>
-          <p:cNvPr id="5" name="Rectangle 4"/>
+          <p:cNvPr id="2" name="Rectangle 1"/>
           <p:cNvSpPr/>
           <p:nvPr/>
         </p:nvSpPr>
         <p:spPr>
           <a:xfrm>
-            <a:off x="609600" y="825500"/>
-            <a:ext cx="10972800" cy="6350"/>
+            <a:off x="0" y="0"/>
+            <a:ext cx="12188952" cy="6858000"/>
           </a:xfrm>
           <a:prstGeom prst="rect">
             <a:avLst/>
           </a:prstGeom>
           <a:solidFill>
-            <a:srgbClr val="191D2E"/>
+            <a:srgbClr val="FFFFFF"/>
           </a:solidFill>
           <a:ln>
             <a:noFill/>
@@ -5316,90 +6323,20 @@
       </p:sp>
       <p:sp>
         <p:nvSpPr>
-          <p:cNvPr id="6" name="TextBox 5"/>
-          <p:cNvSpPr txBox="1"/>
-          <p:nvPr/>
-        </p:nvSpPr>
-        <p:spPr>
-          <a:xfrm>
-            <a:off x="609600" y="889000"/>
-            <a:ext cx="3810000" cy="177800"/>
-          </a:xfrm>
-          <a:prstGeom prst="rect">
-            <a:avLst/>
-          </a:prstGeom>
-          <a:noFill/>
-        </p:spPr>
-        <p:txBody>
-          <a:bodyPr wrap="square">
-            <a:normAutofit/>
-          </a:bodyPr>
-          <a:lstStyle/>
-          <a:p>
-            <a:pPr algn="l"/>
-            <a:r>
-              <a:rPr sz="900" b="0" i="0">
-                <a:solidFill>
-                  <a:srgbClr val="7B7FA0"/>
-                </a:solidFill>
-                <a:latin typeface="Courier New"/>
-              </a:rPr>
-              <a:t>Kernaussage</a:t>
-            </a:r>
-          </a:p>
-        </p:txBody>
-      </p:sp>
-      <p:sp>
-        <p:nvSpPr>
-          <p:cNvPr id="7" name="TextBox 6"/>
-          <p:cNvSpPr txBox="1"/>
-          <p:nvPr/>
-        </p:nvSpPr>
-        <p:spPr>
-          <a:xfrm>
-            <a:off x="609600" y="920750"/>
-            <a:ext cx="10972800" cy="1778000"/>
-          </a:xfrm>
-          <a:prstGeom prst="rect">
-            <a:avLst/>
-          </a:prstGeom>
-          <a:noFill/>
-        </p:spPr>
-        <p:txBody>
-          <a:bodyPr wrap="square">
-            <a:normAutofit/>
-          </a:bodyPr>
-          <a:lstStyle/>
-          <a:p>
-            <a:pPr algn="l"/>
-            <a:r>
-              <a:rPr sz="3800" b="0" i="0">
-                <a:solidFill>
-                  <a:srgbClr val="191D2E"/>
-                </a:solidFill>
-                <a:latin typeface="Georgia"/>
-              </a:rPr>
-              <a:t>Reaktiver Vertrieb: Der Kunde kommt, wenn er Probleme hat</a:t>
-            </a:r>
-          </a:p>
-        </p:txBody>
-      </p:sp>
-      <p:sp>
-        <p:nvSpPr>
-          <p:cNvPr id="8" name="Rectangle 7"/>
+          <p:cNvPr id="3" name="Rectangle 2"/>
           <p:cNvSpPr/>
           <p:nvPr/>
         </p:nvSpPr>
         <p:spPr>
           <a:xfrm>
-            <a:off x="609600" y="2762250"/>
-            <a:ext cx="10972800" cy="6350"/>
+            <a:off x="0" y="0"/>
+            <a:ext cx="12188952" cy="50292"/>
           </a:xfrm>
           <a:prstGeom prst="rect">
             <a:avLst/>
           </a:prstGeom>
           <a:solidFill>
-            <a:srgbClr val="191D2E"/>
+            <a:srgbClr val="1F2C56"/>
           </a:solidFill>
           <a:ln>
             <a:noFill/>
@@ -5429,14 +6366,194 @@
       </p:sp>
       <p:sp>
         <p:nvSpPr>
+          <p:cNvPr id="4" name="TextBox 3"/>
+          <p:cNvSpPr txBox="1"/>
+          <p:nvPr/>
+        </p:nvSpPr>
+        <p:spPr>
+          <a:xfrm>
+            <a:off x="685800" y="109728"/>
+            <a:ext cx="10817352" cy="228600"/>
+          </a:xfrm>
+          <a:prstGeom prst="rect">
+            <a:avLst/>
+          </a:prstGeom>
+          <a:noFill/>
+        </p:spPr>
+        <p:txBody>
+          <a:bodyPr wrap="none">
+            <a:spAutoFit/>
+          </a:bodyPr>
+          <a:lstStyle/>
+          <a:p>
+            <a:pPr algn="l"/>
+            <a:r>
+              <a:rPr sz="750">
+                <a:solidFill>
+                  <a:srgbClr val="78808C"/>
+                </a:solidFill>
+                <a:latin typeface="JetBrains Mono"/>
+              </a:rPr>
+              <a:t>M15  ·  SCHAUBILD</a:t>
+            </a:r>
+          </a:p>
+        </p:txBody>
+      </p:sp>
+      <p:sp>
+        <p:nvSpPr>
+          <p:cNvPr id="5" name="TextBox 4"/>
+          <p:cNvSpPr txBox="1"/>
+          <p:nvPr/>
+        </p:nvSpPr>
+        <p:spPr>
+          <a:xfrm>
+            <a:off x="685800" y="502920"/>
+            <a:ext cx="10817352" cy="594360"/>
+          </a:xfrm>
+          <a:prstGeom prst="rect">
+            <a:avLst/>
+          </a:prstGeom>
+          <a:noFill/>
+        </p:spPr>
+        <p:txBody>
+          <a:bodyPr wrap="square">
+            <a:spAutoFit/>
+          </a:bodyPr>
+          <a:lstStyle/>
+          <a:p>
+            <a:pPr algn="l"/>
+            <a:r>
+              <a:rPr sz="2000" b="1" i="0">
+                <a:solidFill>
+                  <a:srgbClr val="1F2C56"/>
+                </a:solidFill>
+                <a:latin typeface="Source Serif 4"/>
+              </a:rPr>
+              <a:t>Strategie-Landkarte</a:t>
+            </a:r>
+          </a:p>
+        </p:txBody>
+      </p:sp>
+      <p:sp>
+        <p:nvSpPr>
+          <p:cNvPr id="6" name="Rectangle 5"/>
+          <p:cNvSpPr/>
+          <p:nvPr/>
+        </p:nvSpPr>
+        <p:spPr>
+          <a:xfrm>
+            <a:off x="685800" y="1143000"/>
+            <a:ext cx="10817352" cy="25400"/>
+          </a:xfrm>
+          <a:prstGeom prst="rect">
+            <a:avLst/>
+          </a:prstGeom>
+          <a:solidFill>
+            <a:srgbClr val="D9C089"/>
+          </a:solidFill>
+          <a:ln>
+            <a:noFill/>
+          </a:ln>
+        </p:spPr>
+        <p:style>
+          <a:lnRef idx="1">
+            <a:schemeClr val="accent1"/>
+          </a:lnRef>
+          <a:fillRef idx="3">
+            <a:schemeClr val="accent1"/>
+          </a:fillRef>
+          <a:effectRef idx="2">
+            <a:schemeClr val="accent1"/>
+          </a:effectRef>
+          <a:fontRef idx="minor">
+            <a:schemeClr val="lt1"/>
+          </a:fontRef>
+        </p:style>
+        <p:txBody>
+          <a:bodyPr rtlCol="0" anchor="ctr"/>
+          <a:lstStyle/>
+          <a:p>
+            <a:pPr algn="ctr"/>
+          </a:p>
+        </p:txBody>
+      </p:sp>
+      <p:pic>
+        <p:nvPicPr>
+          <p:cNvPr id="7" name="Picture 6" descr="image.png"/>
+          <p:cNvPicPr>
+            <a:picLocks noChangeAspect="1"/>
+          </p:cNvPicPr>
+          <p:nvPr/>
+        </p:nvPicPr>
+        <p:blipFill>
+          <a:blip r:embed="rId2"/>
+          <a:stretch>
+            <a:fillRect/>
+          </a:stretch>
+        </p:blipFill>
+        <p:spPr>
+          <a:xfrm>
+            <a:off x="2303489" y="1325880"/>
+            <a:ext cx="7581973" cy="4937760"/>
+          </a:xfrm>
+          <a:prstGeom prst="rect">
+            <a:avLst/>
+          </a:prstGeom>
+        </p:spPr>
+      </p:pic>
+      <p:sp>
+        <p:nvSpPr>
+          <p:cNvPr id="8" name="Rectangle 7"/>
+          <p:cNvSpPr/>
+          <p:nvPr/>
+        </p:nvSpPr>
+        <p:spPr>
+          <a:xfrm>
+            <a:off x="0" y="6510528"/>
+            <a:ext cx="12188952" cy="347472"/>
+          </a:xfrm>
+          <a:prstGeom prst="rect">
+            <a:avLst/>
+          </a:prstGeom>
+          <a:solidFill>
+            <a:srgbClr val="0A1937"/>
+          </a:solidFill>
+          <a:ln>
+            <a:noFill/>
+          </a:ln>
+        </p:spPr>
+        <p:style>
+          <a:lnRef idx="1">
+            <a:schemeClr val="accent1"/>
+          </a:lnRef>
+          <a:fillRef idx="3">
+            <a:schemeClr val="accent1"/>
+          </a:fillRef>
+          <a:effectRef idx="2">
+            <a:schemeClr val="accent1"/>
+          </a:effectRef>
+          <a:fontRef idx="minor">
+            <a:schemeClr val="lt1"/>
+          </a:fontRef>
+        </p:style>
+        <p:txBody>
+          <a:bodyPr rtlCol="0" anchor="ctr"/>
+          <a:lstStyle/>
+          <a:p>
+            <a:pPr algn="ctr"/>
+          </a:p>
+        </p:txBody>
+      </p:sp>
+      <p:sp>
+        <p:nvSpPr>
           <p:cNvPr id="9" name="TextBox 8"/>
           <p:cNvSpPr txBox="1"/>
           <p:nvPr/>
         </p:nvSpPr>
         <p:spPr>
           <a:xfrm>
-            <a:off x="609600" y="2825750"/>
-            <a:ext cx="5207000" cy="2857500"/>
+            <a:off x="685800" y="6583680"/>
+            <a:ext cx="6490411" cy="256032"/>
           </a:xfrm>
           <a:prstGeom prst="rect">
             <a:avLst/>
@@ -5444,20 +6561,20 @@
           <a:noFill/>
         </p:spPr>
         <p:txBody>
-          <a:bodyPr wrap="square">
-            <a:normAutofit/>
+          <a:bodyPr wrap="none">
+            <a:spAutoFit/>
           </a:bodyPr>
           <a:lstStyle/>
           <a:p>
             <a:pPr algn="l"/>
             <a:r>
-              <a:rPr sz="1400" b="0" i="0">
-                <a:solidFill>
-                  <a:srgbClr val="191D2E"/>
-                </a:solidFill>
-                <a:latin typeface="Georgia"/>
-              </a:rPr>
-              <a:t>Reaktiver Vertrieb ist bequem aber gefährlich. Wer nur bedient, was kommt, verliert den strategischen Überblick — und Kunden an Wettbewerber, die aktiver sind.</a:t>
+              <a:rPr sz="700">
+                <a:solidFill>
+                  <a:srgbClr val="A0B4D2"/>
+                </a:solidFill>
+                <a:latin typeface="JetBrains Mono"/>
+              </a:rPr>
+              <a:t>Benedikt Zoller Coaching  ·  FKB Campus  ·  M15</a:t>
             </a:r>
           </a:p>
         </p:txBody>
@@ -5470,8 +6587,8 @@
         </p:nvSpPr>
         <p:spPr>
           <a:xfrm>
-            <a:off x="6096000" y="2825750"/>
-            <a:ext cx="4851400" cy="177800"/>
+            <a:off x="7176211" y="6583680"/>
+            <a:ext cx="4326940" cy="256032"/>
           </a:xfrm>
           <a:prstGeom prst="rect">
             <a:avLst/>
@@ -5479,55 +6596,20 @@
           <a:noFill/>
         </p:spPr>
         <p:txBody>
-          <a:bodyPr wrap="square">
-            <a:normAutofit/>
+          <a:bodyPr wrap="none">
+            <a:spAutoFit/>
           </a:bodyPr>
           <a:lstStyle/>
           <a:p>
-            <a:pPr algn="l"/>
-            <a:r>
-              <a:rPr sz="900" b="0" i="0">
-                <a:solidFill>
-                  <a:srgbClr val="1F2B56"/>
-                </a:solidFill>
-                <a:latin typeface="Courier New"/>
-              </a:rPr>
-              <a:t>Mitnahme</a:t>
-            </a:r>
-          </a:p>
-        </p:txBody>
-      </p:sp>
-      <p:sp>
-        <p:nvSpPr>
-          <p:cNvPr id="11" name="TextBox 10"/>
-          <p:cNvSpPr txBox="1"/>
-          <p:nvPr/>
-        </p:nvSpPr>
-        <p:spPr>
-          <a:xfrm>
-            <a:off x="6096000" y="3041650"/>
-            <a:ext cx="4851400" cy="2667000"/>
-          </a:xfrm>
-          <a:prstGeom prst="rect">
-            <a:avLst/>
-          </a:prstGeom>
-          <a:noFill/>
-        </p:spPr>
-        <p:txBody>
-          <a:bodyPr wrap="square">
-            <a:normAutofit/>
-          </a:bodyPr>
-          <a:lstStyle/>
-          <a:p>
-            <a:pPr algn="l"/>
-            <a:r>
-              <a:rPr sz="1400" b="0" i="1">
-                <a:solidFill>
-                  <a:srgbClr val="191D2E"/>
-                </a:solidFill>
-                <a:latin typeface="Georgia"/>
-              </a:rPr>
-              <a:t>Strategischer Vertrieb heißt: Ich weiß, wen ich wann und warum anspreche. Ich warte nicht auf den Anruf.</a:t>
+            <a:pPr algn="r"/>
+            <a:r>
+              <a:rPr sz="700">
+                <a:solidFill>
+                  <a:srgbClr val="A0B4D2"/>
+                </a:solidFill>
+                <a:latin typeface="JetBrains Mono"/>
+              </a:rPr>
+              <a:t>Schaubild</a:t>
             </a:r>
           </a:p>
         </p:txBody>
@@ -5543,14 +6625,6 @@
 <file path=ppt/slides/slide5.xml><?xml version="1.0" encoding="utf-8"?>
 <p:sld xmlns:a="http://schemas.openxmlformats.org/drawingml/2006/main" xmlns:p="http://schemas.openxmlformats.org/presentationml/2006/main" xmlns:r="http://schemas.openxmlformats.org/officeDocument/2006/relationships">
   <p:cSld>
-    <p:bg>
-      <p:bgPr>
-        <a:solidFill>
-          <a:srgbClr val="1F2B56"/>
-        </a:solidFill>
-        <a:effectLst/>
-      </p:bgPr>
-    </p:bg>
     <p:spTree>
       <p:nvGrpSpPr>
         <p:cNvPr id="1" name=""/>
@@ -5560,71 +6634,87 @@
       <p:grpSpPr/>
       <p:sp>
         <p:nvSpPr>
-          <p:cNvPr id="2" name="TextBox 1"/>
-          <p:cNvSpPr txBox="1"/>
-          <p:nvPr/>
-        </p:nvSpPr>
-        <p:spPr>
-          <a:xfrm>
-            <a:off x="609600" y="279400"/>
-            <a:ext cx="2540000" cy="279400"/>
-          </a:xfrm>
-          <a:prstGeom prst="rect">
-            <a:avLst/>
-          </a:prstGeom>
-          <a:noFill/>
-        </p:spPr>
-        <p:txBody>
-          <a:bodyPr wrap="square">
-            <a:normAutofit/>
-          </a:bodyPr>
-          <a:lstStyle/>
-          <a:p>
-            <a:pPr algn="l"/>
-            <a:r>
-              <a:rPr sz="1000" b="1" i="0">
-                <a:solidFill>
-                  <a:srgbClr val="F8F8FA"/>
-                </a:solidFill>
-                <a:latin typeface="Arial"/>
-              </a:rPr>
-              <a:t>FKB  Campus</a:t>
-            </a:r>
-          </a:p>
-        </p:txBody>
-      </p:sp>
-      <p:sp>
-        <p:nvSpPr>
-          <p:cNvPr id="3" name="TextBox 2"/>
-          <p:cNvSpPr txBox="1"/>
-          <p:nvPr/>
-        </p:nvSpPr>
-        <p:spPr>
-          <a:xfrm>
-            <a:off x="609600" y="279400"/>
-            <a:ext cx="10972800" cy="279400"/>
-          </a:xfrm>
-          <a:prstGeom prst="rect">
-            <a:avLst/>
-          </a:prstGeom>
-          <a:noFill/>
-        </p:spPr>
-        <p:txBody>
-          <a:bodyPr wrap="square">
-            <a:normAutofit/>
-          </a:bodyPr>
-          <a:lstStyle/>
-          <a:p>
-            <a:pPr algn="r"/>
-            <a:r>
-              <a:rPr sz="900" b="0" i="0">
-                <a:solidFill>
-                  <a:srgbClr val="7B7FA0"/>
-                </a:solidFill>
-                <a:latin typeface="Courier New"/>
-              </a:rPr>
-              <a:t>MARKTPOTENZIALE ANALYSIEREN</a:t>
-            </a:r>
+          <p:cNvPr id="2" name="Rectangle 1"/>
+          <p:cNvSpPr/>
+          <p:nvPr/>
+        </p:nvSpPr>
+        <p:spPr>
+          <a:xfrm>
+            <a:off x="0" y="0"/>
+            <a:ext cx="12188952" cy="6858000"/>
+          </a:xfrm>
+          <a:prstGeom prst="rect">
+            <a:avLst/>
+          </a:prstGeom>
+          <a:solidFill>
+            <a:srgbClr val="EDEDF3"/>
+          </a:solidFill>
+          <a:ln>
+            <a:noFill/>
+          </a:ln>
+        </p:spPr>
+        <p:style>
+          <a:lnRef idx="1">
+            <a:schemeClr val="accent1"/>
+          </a:lnRef>
+          <a:fillRef idx="3">
+            <a:schemeClr val="accent1"/>
+          </a:fillRef>
+          <a:effectRef idx="2">
+            <a:schemeClr val="accent1"/>
+          </a:effectRef>
+          <a:fontRef idx="minor">
+            <a:schemeClr val="lt1"/>
+          </a:fontRef>
+        </p:style>
+        <p:txBody>
+          <a:bodyPr rtlCol="0" anchor="ctr"/>
+          <a:lstStyle/>
+          <a:p>
+            <a:pPr algn="ctr"/>
+          </a:p>
+        </p:txBody>
+      </p:sp>
+      <p:sp>
+        <p:nvSpPr>
+          <p:cNvPr id="3" name="Rectangle 2"/>
+          <p:cNvSpPr/>
+          <p:nvPr/>
+        </p:nvSpPr>
+        <p:spPr>
+          <a:xfrm>
+            <a:off x="0" y="0"/>
+            <a:ext cx="12188952" cy="50292"/>
+          </a:xfrm>
+          <a:prstGeom prst="rect">
+            <a:avLst/>
+          </a:prstGeom>
+          <a:solidFill>
+            <a:srgbClr val="1F2C56"/>
+          </a:solidFill>
+          <a:ln>
+            <a:noFill/>
+          </a:ln>
+        </p:spPr>
+        <p:style>
+          <a:lnRef idx="1">
+            <a:schemeClr val="accent1"/>
+          </a:lnRef>
+          <a:fillRef idx="3">
+            <a:schemeClr val="accent1"/>
+          </a:fillRef>
+          <a:effectRef idx="2">
+            <a:schemeClr val="accent1"/>
+          </a:effectRef>
+          <a:fontRef idx="minor">
+            <a:schemeClr val="lt1"/>
+          </a:fontRef>
+        </p:style>
+        <p:txBody>
+          <a:bodyPr rtlCol="0" anchor="ctr"/>
+          <a:lstStyle/>
+          <a:p>
+            <a:pPr algn="ctr"/>
           </a:p>
         </p:txBody>
       </p:sp>
@@ -5636,8 +6726,8 @@
         </p:nvSpPr>
         <p:spPr>
           <a:xfrm>
-            <a:off x="609600" y="6426200"/>
-            <a:ext cx="10972800" cy="228600"/>
+            <a:off x="685800" y="109728"/>
+            <a:ext cx="10817352" cy="228600"/>
           </a:xfrm>
           <a:prstGeom prst="rect">
             <a:avLst/>
@@ -5645,91 +6735,107 @@
           <a:noFill/>
         </p:spPr>
         <p:txBody>
-          <a:bodyPr wrap="square">
-            <a:normAutofit/>
+          <a:bodyPr wrap="none">
+            <a:spAutoFit/>
           </a:bodyPr>
           <a:lstStyle/>
           <a:p>
-            <a:pPr algn="r"/>
-            <a:r>
-              <a:rPr sz="900" b="0" i="0">
-                <a:solidFill>
-                  <a:srgbClr val="7B7FA0"/>
-                </a:solidFill>
-                <a:latin typeface="Courier New"/>
-              </a:rPr>
-              <a:t>05</a:t>
-            </a:r>
-          </a:p>
-        </p:txBody>
-      </p:sp>
-      <p:sp>
-        <p:nvSpPr>
-          <p:cNvPr id="5" name="TextBox 4"/>
-          <p:cNvSpPr txBox="1"/>
-          <p:nvPr/>
-        </p:nvSpPr>
-        <p:spPr>
-          <a:xfrm>
-            <a:off x="609600" y="635000"/>
-            <a:ext cx="5461000" cy="5461000"/>
-          </a:xfrm>
-          <a:prstGeom prst="rect">
-            <a:avLst/>
-          </a:prstGeom>
-          <a:noFill/>
-        </p:spPr>
-        <p:txBody>
-          <a:bodyPr wrap="square">
-            <a:normAutofit/>
-          </a:bodyPr>
-          <a:lstStyle/>
-          <a:p>
             <a:pPr algn="l"/>
             <a:r>
-              <a:rPr sz="28000" b="0" i="1">
-                <a:solidFill>
-                  <a:srgbClr val="D9BF7A"/>
-                </a:solidFill>
-                <a:latin typeface="Georgia"/>
-              </a:rPr>
-              <a:t>II</a:t>
-            </a:r>
-          </a:p>
-        </p:txBody>
-      </p:sp>
-      <p:sp>
-        <p:nvSpPr>
-          <p:cNvPr id="6" name="TextBox 5"/>
-          <p:cNvSpPr txBox="1"/>
-          <p:nvPr/>
-        </p:nvSpPr>
-        <p:spPr>
-          <a:xfrm>
-            <a:off x="6731000" y="4064000"/>
-            <a:ext cx="4851400" cy="1778000"/>
-          </a:xfrm>
-          <a:prstGeom prst="rect">
-            <a:avLst/>
-          </a:prstGeom>
-          <a:noFill/>
-        </p:spPr>
-        <p:txBody>
-          <a:bodyPr wrap="square">
-            <a:normAutofit/>
-          </a:bodyPr>
-          <a:lstStyle/>
-          <a:p>
-            <a:pPr algn="r"/>
-            <a:r>
-              <a:rPr sz="3800" b="0" i="0">
-                <a:solidFill>
-                  <a:srgbClr val="F8F8FA"/>
-                </a:solidFill>
-                <a:latin typeface="Georgia"/>
-              </a:rPr>
-              <a:t>Marktpotenziale analysieren</a:t>
-            </a:r>
+              <a:rPr sz="750">
+                <a:solidFill>
+                  <a:srgbClr val="78808C"/>
+                </a:solidFill>
+                <a:latin typeface="JetBrains Mono"/>
+              </a:rPr>
+              <a:t>M15  ·  INHALT</a:t>
+            </a:r>
+          </a:p>
+        </p:txBody>
+      </p:sp>
+      <p:sp>
+        <p:nvSpPr>
+          <p:cNvPr id="5" name="Rectangle 4"/>
+          <p:cNvSpPr/>
+          <p:nvPr/>
+        </p:nvSpPr>
+        <p:spPr>
+          <a:xfrm>
+            <a:off x="0" y="1234440"/>
+            <a:ext cx="12188952" cy="12700"/>
+          </a:xfrm>
+          <a:prstGeom prst="rect">
+            <a:avLst/>
+          </a:prstGeom>
+          <a:solidFill>
+            <a:srgbClr val="D8DFE4"/>
+          </a:solidFill>
+          <a:ln>
+            <a:noFill/>
+          </a:ln>
+        </p:spPr>
+        <p:style>
+          <a:lnRef idx="1">
+            <a:schemeClr val="accent1"/>
+          </a:lnRef>
+          <a:fillRef idx="3">
+            <a:schemeClr val="accent1"/>
+          </a:fillRef>
+          <a:effectRef idx="2">
+            <a:schemeClr val="accent1"/>
+          </a:effectRef>
+          <a:fontRef idx="minor">
+            <a:schemeClr val="lt1"/>
+          </a:fontRef>
+        </p:style>
+        <p:txBody>
+          <a:bodyPr rtlCol="0" anchor="ctr"/>
+          <a:lstStyle/>
+          <a:p>
+            <a:pPr algn="ctr"/>
+          </a:p>
+        </p:txBody>
+      </p:sp>
+      <p:sp>
+        <p:nvSpPr>
+          <p:cNvPr id="6" name="Rectangle 5"/>
+          <p:cNvSpPr/>
+          <p:nvPr/>
+        </p:nvSpPr>
+        <p:spPr>
+          <a:xfrm>
+            <a:off x="685800" y="502920"/>
+            <a:ext cx="36576" cy="658368"/>
+          </a:xfrm>
+          <a:prstGeom prst="rect">
+            <a:avLst/>
+          </a:prstGeom>
+          <a:solidFill>
+            <a:srgbClr val="D9C089"/>
+          </a:solidFill>
+          <a:ln>
+            <a:noFill/>
+          </a:ln>
+        </p:spPr>
+        <p:style>
+          <a:lnRef idx="1">
+            <a:schemeClr val="accent1"/>
+          </a:lnRef>
+          <a:fillRef idx="3">
+            <a:schemeClr val="accent1"/>
+          </a:fillRef>
+          <a:effectRef idx="2">
+            <a:schemeClr val="accent1"/>
+          </a:effectRef>
+          <a:fontRef idx="minor">
+            <a:schemeClr val="lt1"/>
+          </a:fontRef>
+        </p:style>
+        <p:txBody>
+          <a:bodyPr rtlCol="0" anchor="ctr"/>
+          <a:lstStyle/>
+          <a:p>
+            <a:pPr algn="ctr"/>
           </a:p>
         </p:txBody>
       </p:sp>
@@ -5741,8 +6847,8 @@
         </p:nvSpPr>
         <p:spPr>
           <a:xfrm>
-            <a:off x="6731000" y="5842000"/>
-            <a:ext cx="4851400" cy="635000"/>
+            <a:off x="813816" y="502920"/>
+            <a:ext cx="10634472" cy="685800"/>
           </a:xfrm>
           <a:prstGeom prst="rect">
             <a:avLst/>
@@ -5751,19 +6857,158 @@
         </p:spPr>
         <p:txBody>
           <a:bodyPr wrap="square">
-            <a:normAutofit/>
+            <a:spAutoFit/>
           </a:bodyPr>
           <a:lstStyle/>
           <a:p>
-            <a:pPr algn="r"/>
-            <a:r>
-              <a:rPr sz="1400" b="0" i="1">
-                <a:solidFill>
-                  <a:srgbClr val="7B7FA0"/>
-                </a:solidFill>
-                <a:latin typeface="Georgia"/>
-              </a:rPr>
-              <a:t>Wer ist mein Zielsegment — und wie groß ist das Potenzial?</a:t>
+            <a:pPr algn="l"/>
+            <a:r>
+              <a:rPr sz="2400" b="1" i="0">
+                <a:solidFill>
+                  <a:srgbClr val="1F2C56"/>
+                </a:solidFill>
+                <a:latin typeface="Source Serif 4"/>
+              </a:rPr>
+              <a:t>Segmentierungskriterien</a:t>
+            </a:r>
+          </a:p>
+        </p:txBody>
+      </p:sp>
+      <p:sp>
+        <p:nvSpPr>
+          <p:cNvPr id="8" name="TextBox 7"/>
+          <p:cNvSpPr txBox="1"/>
+          <p:nvPr/>
+        </p:nvSpPr>
+        <p:spPr>
+          <a:xfrm>
+            <a:off x="685800" y="1417320"/>
+            <a:ext cx="10817352" cy="5029200"/>
+          </a:xfrm>
+          <a:prstGeom prst="rect">
+            <a:avLst/>
+          </a:prstGeom>
+          <a:noFill/>
+        </p:spPr>
+        <p:txBody>
+          <a:bodyPr wrap="square">
+            <a:spAutoFit/>
+          </a:bodyPr>
+          <a:lstStyle/>
+          <a:p>
+            <a:pPr>
+              <a:spcBef>
+                <a:spcPts val="400"/>
+              </a:spcBef>
+              <a:spcAft>
+                <a:spcPts val="200"/>
+              </a:spcAft>
+            </a:pPr>
+            <a:r>
+              <a:rPr sz="1200">
+                <a:solidFill>
+                  <a:srgbClr val="3D5466"/>
+                </a:solidFill>
+                <a:latin typeface="Arial"/>
+              </a:rPr>
+              <a:t>Nicht jeder Firmenkunde ist gleich attraktiv. Eine sinnvolle Segmentierung kombiniert mehrere Kriterien:</a:t>
+            </a:r>
+          </a:p>
+          <a:p>
+            <a:pPr>
+              <a:spcBef>
+                <a:spcPts val="400"/>
+              </a:spcBef>
+              <a:spcAft>
+                <a:spcPts val="200"/>
+              </a:spcAft>
+            </a:pPr>
+            <a:r>
+              <a:rPr sz="1200">
+                <a:solidFill>
+                  <a:srgbClr val="3D5466"/>
+                </a:solidFill>
+                <a:latin typeface="Arial"/>
+              </a:rPr>
+              <a:t>Empfehlung: Wählen Sie maximal zwei Primärsegmente. Breite schlägt Tiefe nur in sehr seltenen Fällen.</a:t>
+            </a:r>
+          </a:p>
+        </p:txBody>
+      </p:sp>
+      <p:sp>
+        <p:nvSpPr>
+          <p:cNvPr id="9" name="Rectangle 8"/>
+          <p:cNvSpPr/>
+          <p:nvPr/>
+        </p:nvSpPr>
+        <p:spPr>
+          <a:xfrm>
+            <a:off x="0" y="6510528"/>
+            <a:ext cx="12188952" cy="347472"/>
+          </a:xfrm>
+          <a:prstGeom prst="rect">
+            <a:avLst/>
+          </a:prstGeom>
+          <a:solidFill>
+            <a:srgbClr val="0A1937"/>
+          </a:solidFill>
+          <a:ln>
+            <a:noFill/>
+          </a:ln>
+        </p:spPr>
+        <p:style>
+          <a:lnRef idx="1">
+            <a:schemeClr val="accent1"/>
+          </a:lnRef>
+          <a:fillRef idx="3">
+            <a:schemeClr val="accent1"/>
+          </a:fillRef>
+          <a:effectRef idx="2">
+            <a:schemeClr val="accent1"/>
+          </a:effectRef>
+          <a:fontRef idx="minor">
+            <a:schemeClr val="lt1"/>
+          </a:fontRef>
+        </p:style>
+        <p:txBody>
+          <a:bodyPr rtlCol="0" anchor="ctr"/>
+          <a:lstStyle/>
+          <a:p>
+            <a:pPr algn="ctr"/>
+          </a:p>
+        </p:txBody>
+      </p:sp>
+      <p:sp>
+        <p:nvSpPr>
+          <p:cNvPr id="10" name="TextBox 9"/>
+          <p:cNvSpPr txBox="1"/>
+          <p:nvPr/>
+        </p:nvSpPr>
+        <p:spPr>
+          <a:xfrm>
+            <a:off x="685800" y="6583680"/>
+            <a:ext cx="6490411" cy="256032"/>
+          </a:xfrm>
+          <a:prstGeom prst="rect">
+            <a:avLst/>
+          </a:prstGeom>
+          <a:noFill/>
+        </p:spPr>
+        <p:txBody>
+          <a:bodyPr wrap="none">
+            <a:spAutoFit/>
+          </a:bodyPr>
+          <a:lstStyle/>
+          <a:p>
+            <a:pPr algn="l"/>
+            <a:r>
+              <a:rPr sz="700">
+                <a:solidFill>
+                  <a:srgbClr val="A0B4D2"/>
+                </a:solidFill>
+                <a:latin typeface="JetBrains Mono"/>
+              </a:rPr>
+              <a:t>Benedikt Zoller Coaching  ·  FKB Campus  ·  M15</a:t>
             </a:r>
           </a:p>
         </p:txBody>
@@ -5779,14 +7024,6 @@
 <file path=ppt/slides/slide6.xml><?xml version="1.0" encoding="utf-8"?>
 <p:sld xmlns:a="http://schemas.openxmlformats.org/drawingml/2006/main" xmlns:p="http://schemas.openxmlformats.org/presentationml/2006/main" xmlns:r="http://schemas.openxmlformats.org/officeDocument/2006/relationships">
   <p:cSld>
-    <p:bg>
-      <p:bgPr>
-        <a:solidFill>
-          <a:srgbClr val="F8F8FA"/>
-        </a:solidFill>
-        <a:effectLst/>
-      </p:bgPr>
-    </p:bg>
     <p:spTree>
       <p:nvGrpSpPr>
         <p:cNvPr id="1" name=""/>
@@ -5796,125 +7033,20 @@
       <p:grpSpPr/>
       <p:sp>
         <p:nvSpPr>
-          <p:cNvPr id="2" name="TextBox 1"/>
-          <p:cNvSpPr txBox="1"/>
-          <p:nvPr/>
-        </p:nvSpPr>
-        <p:spPr>
-          <a:xfrm>
-            <a:off x="609600" y="279400"/>
-            <a:ext cx="2540000" cy="279400"/>
-          </a:xfrm>
-          <a:prstGeom prst="rect">
-            <a:avLst/>
-          </a:prstGeom>
-          <a:noFill/>
-        </p:spPr>
-        <p:txBody>
-          <a:bodyPr wrap="square">
-            <a:normAutofit/>
-          </a:bodyPr>
-          <a:lstStyle/>
-          <a:p>
-            <a:pPr algn="l"/>
-            <a:r>
-              <a:rPr sz="1000" b="1" i="0">
-                <a:solidFill>
-                  <a:srgbClr val="191D2E"/>
-                </a:solidFill>
-                <a:latin typeface="Arial"/>
-              </a:rPr>
-              <a:t>FKB  Campus</a:t>
-            </a:r>
-          </a:p>
-        </p:txBody>
-      </p:sp>
-      <p:sp>
-        <p:nvSpPr>
-          <p:cNvPr id="3" name="TextBox 2"/>
-          <p:cNvSpPr txBox="1"/>
-          <p:nvPr/>
-        </p:nvSpPr>
-        <p:spPr>
-          <a:xfrm>
-            <a:off x="609600" y="279400"/>
-            <a:ext cx="10972800" cy="279400"/>
-          </a:xfrm>
-          <a:prstGeom prst="rect">
-            <a:avLst/>
-          </a:prstGeom>
-          <a:noFill/>
-        </p:spPr>
-        <p:txBody>
-          <a:bodyPr wrap="square">
-            <a:normAutofit/>
-          </a:bodyPr>
-          <a:lstStyle/>
-          <a:p>
-            <a:pPr algn="r"/>
-            <a:r>
-              <a:rPr sz="900" b="0" i="0">
-                <a:solidFill>
-                  <a:srgbClr val="7B7FA0"/>
-                </a:solidFill>
-                <a:latin typeface="Courier New"/>
-              </a:rPr>
-              <a:t>II · MARKTPOTENZIALE ANALYSIEREN</a:t>
-            </a:r>
-          </a:p>
-        </p:txBody>
-      </p:sp>
-      <p:sp>
-        <p:nvSpPr>
-          <p:cNvPr id="4" name="TextBox 3"/>
-          <p:cNvSpPr txBox="1"/>
-          <p:nvPr/>
-        </p:nvSpPr>
-        <p:spPr>
-          <a:xfrm>
-            <a:off x="609600" y="6426200"/>
-            <a:ext cx="10972800" cy="228600"/>
-          </a:xfrm>
-          <a:prstGeom prst="rect">
-            <a:avLst/>
-          </a:prstGeom>
-          <a:noFill/>
-        </p:spPr>
-        <p:txBody>
-          <a:bodyPr wrap="square">
-            <a:normAutofit/>
-          </a:bodyPr>
-          <a:lstStyle/>
-          <a:p>
-            <a:pPr algn="r"/>
-            <a:r>
-              <a:rPr sz="900" b="0" i="0">
-                <a:solidFill>
-                  <a:srgbClr val="7B7FA0"/>
-                </a:solidFill>
-                <a:latin typeface="Courier New"/>
-              </a:rPr>
-              <a:t>06</a:t>
-            </a:r>
-          </a:p>
-        </p:txBody>
-      </p:sp>
-      <p:sp>
-        <p:nvSpPr>
-          <p:cNvPr id="5" name="Rectangle 4"/>
+          <p:cNvPr id="2" name="Rectangle 1"/>
           <p:cNvSpPr/>
           <p:nvPr/>
         </p:nvSpPr>
         <p:spPr>
           <a:xfrm>
-            <a:off x="609600" y="825500"/>
-            <a:ext cx="10972800" cy="6350"/>
+            <a:off x="0" y="0"/>
+            <a:ext cx="12188952" cy="6858000"/>
           </a:xfrm>
           <a:prstGeom prst="rect">
             <a:avLst/>
           </a:prstGeom>
           <a:solidFill>
-            <a:srgbClr val="191D2E"/>
+            <a:srgbClr val="EDEDF3"/>
           </a:solidFill>
           <a:ln>
             <a:noFill/>
@@ -5944,55 +7076,20 @@
       </p:sp>
       <p:sp>
         <p:nvSpPr>
-          <p:cNvPr id="6" name="TextBox 5"/>
-          <p:cNvSpPr txBox="1"/>
-          <p:nvPr/>
-        </p:nvSpPr>
-        <p:spPr>
-          <a:xfrm>
-            <a:off x="609600" y="920750"/>
-            <a:ext cx="10972800" cy="1778000"/>
-          </a:xfrm>
-          <a:prstGeom prst="rect">
-            <a:avLst/>
-          </a:prstGeom>
-          <a:noFill/>
-        </p:spPr>
-        <p:txBody>
-          <a:bodyPr wrap="square">
-            <a:normAutofit/>
-          </a:bodyPr>
-          <a:lstStyle/>
-          <a:p>
-            <a:pPr algn="l"/>
-            <a:r>
-              <a:rPr sz="3800" b="0" i="0">
-                <a:solidFill>
-                  <a:srgbClr val="191D2E"/>
-                </a:solidFill>
-                <a:latin typeface="Georgia"/>
-              </a:rPr>
-              <a:t>Marktpotenzial: Wo steckt das Wachstum?</a:t>
-            </a:r>
-          </a:p>
-        </p:txBody>
-      </p:sp>
-      <p:sp>
-        <p:nvSpPr>
-          <p:cNvPr id="7" name="Rectangle 6"/>
+          <p:cNvPr id="3" name="Rectangle 2"/>
           <p:cNvSpPr/>
           <p:nvPr/>
         </p:nvSpPr>
         <p:spPr>
           <a:xfrm>
-            <a:off x="609600" y="2762250"/>
-            <a:ext cx="10972800" cy="6350"/>
+            <a:off x="0" y="0"/>
+            <a:ext cx="12188952" cy="50292"/>
           </a:xfrm>
           <a:prstGeom prst="rect">
             <a:avLst/>
           </a:prstGeom>
           <a:solidFill>
-            <a:srgbClr val="E0E0E8"/>
+            <a:srgbClr val="1F2C56"/>
           </a:solidFill>
           <a:ln>
             <a:noFill/>
@@ -6022,14 +7119,170 @@
       </p:sp>
       <p:sp>
         <p:nvSpPr>
+          <p:cNvPr id="4" name="TextBox 3"/>
+          <p:cNvSpPr txBox="1"/>
+          <p:nvPr/>
+        </p:nvSpPr>
+        <p:spPr>
+          <a:xfrm>
+            <a:off x="685800" y="109728"/>
+            <a:ext cx="10817352" cy="228600"/>
+          </a:xfrm>
+          <a:prstGeom prst="rect">
+            <a:avLst/>
+          </a:prstGeom>
+          <a:noFill/>
+        </p:spPr>
+        <p:txBody>
+          <a:bodyPr wrap="none">
+            <a:spAutoFit/>
+          </a:bodyPr>
+          <a:lstStyle/>
+          <a:p>
+            <a:pPr algn="l"/>
+            <a:r>
+              <a:rPr sz="750">
+                <a:solidFill>
+                  <a:srgbClr val="78808C"/>
+                </a:solidFill>
+                <a:latin typeface="JetBrains Mono"/>
+              </a:rPr>
+              <a:t>M15  ·  INHALT</a:t>
+            </a:r>
+          </a:p>
+        </p:txBody>
+      </p:sp>
+      <p:sp>
+        <p:nvSpPr>
+          <p:cNvPr id="5" name="Rectangle 4"/>
+          <p:cNvSpPr/>
+          <p:nvPr/>
+        </p:nvSpPr>
+        <p:spPr>
+          <a:xfrm>
+            <a:off x="0" y="1234440"/>
+            <a:ext cx="12188952" cy="12700"/>
+          </a:xfrm>
+          <a:prstGeom prst="rect">
+            <a:avLst/>
+          </a:prstGeom>
+          <a:solidFill>
+            <a:srgbClr val="D8DFE4"/>
+          </a:solidFill>
+          <a:ln>
+            <a:noFill/>
+          </a:ln>
+        </p:spPr>
+        <p:style>
+          <a:lnRef idx="1">
+            <a:schemeClr val="accent1"/>
+          </a:lnRef>
+          <a:fillRef idx="3">
+            <a:schemeClr val="accent1"/>
+          </a:fillRef>
+          <a:effectRef idx="2">
+            <a:schemeClr val="accent1"/>
+          </a:effectRef>
+          <a:fontRef idx="minor">
+            <a:schemeClr val="lt1"/>
+          </a:fontRef>
+        </p:style>
+        <p:txBody>
+          <a:bodyPr rtlCol="0" anchor="ctr"/>
+          <a:lstStyle/>
+          <a:p>
+            <a:pPr algn="ctr"/>
+          </a:p>
+        </p:txBody>
+      </p:sp>
+      <p:sp>
+        <p:nvSpPr>
+          <p:cNvPr id="6" name="Rectangle 5"/>
+          <p:cNvSpPr/>
+          <p:nvPr/>
+        </p:nvSpPr>
+        <p:spPr>
+          <a:xfrm>
+            <a:off x="685800" y="502920"/>
+            <a:ext cx="36576" cy="658368"/>
+          </a:xfrm>
+          <a:prstGeom prst="rect">
+            <a:avLst/>
+          </a:prstGeom>
+          <a:solidFill>
+            <a:srgbClr val="D9C089"/>
+          </a:solidFill>
+          <a:ln>
+            <a:noFill/>
+          </a:ln>
+        </p:spPr>
+        <p:style>
+          <a:lnRef idx="1">
+            <a:schemeClr val="accent1"/>
+          </a:lnRef>
+          <a:fillRef idx="3">
+            <a:schemeClr val="accent1"/>
+          </a:fillRef>
+          <a:effectRef idx="2">
+            <a:schemeClr val="accent1"/>
+          </a:effectRef>
+          <a:fontRef idx="minor">
+            <a:schemeClr val="lt1"/>
+          </a:fontRef>
+        </p:style>
+        <p:txBody>
+          <a:bodyPr rtlCol="0" anchor="ctr"/>
+          <a:lstStyle/>
+          <a:p>
+            <a:pPr algn="ctr"/>
+          </a:p>
+        </p:txBody>
+      </p:sp>
+      <p:sp>
+        <p:nvSpPr>
+          <p:cNvPr id="7" name="TextBox 6"/>
+          <p:cNvSpPr txBox="1"/>
+          <p:nvPr/>
+        </p:nvSpPr>
+        <p:spPr>
+          <a:xfrm>
+            <a:off x="813816" y="502920"/>
+            <a:ext cx="10634472" cy="685800"/>
+          </a:xfrm>
+          <a:prstGeom prst="rect">
+            <a:avLst/>
+          </a:prstGeom>
+          <a:noFill/>
+        </p:spPr>
+        <p:txBody>
+          <a:bodyPr wrap="square">
+            <a:spAutoFit/>
+          </a:bodyPr>
+          <a:lstStyle/>
+          <a:p>
+            <a:pPr algn="l"/>
+            <a:r>
+              <a:rPr sz="2400" b="1" i="0">
+                <a:solidFill>
+                  <a:srgbClr val="1F2C56"/>
+                </a:solidFill>
+                <a:latin typeface="Source Serif 4"/>
+              </a:rPr>
+              <a:t>Das Scoring-Modell zur Segmentpriorisierung</a:t>
+            </a:r>
+          </a:p>
+        </p:txBody>
+      </p:sp>
+      <p:sp>
+        <p:nvSpPr>
           <p:cNvPr id="8" name="TextBox 7"/>
           <p:cNvSpPr txBox="1"/>
           <p:nvPr/>
         </p:nvSpPr>
         <p:spPr>
           <a:xfrm>
-            <a:off x="609600" y="2851150"/>
-            <a:ext cx="10972800" cy="3448050"/>
+            <a:off x="685800" y="1417320"/>
+            <a:ext cx="10817352" cy="5029200"/>
           </a:xfrm>
           <a:prstGeom prst="rect">
             <a:avLst/>
@@ -6038,83 +7291,142 @@
         </p:spPr>
         <p:txBody>
           <a:bodyPr wrap="square">
-            <a:normAutofit/>
+            <a:spAutoFit/>
           </a:bodyPr>
           <a:lstStyle/>
           <a:p>
             <a:pPr>
               <a:spcBef>
-                <a:spcPts val="600"/>
+                <a:spcPts val="400"/>
               </a:spcBef>
               <a:spcAft>
-                <a:spcPts val="600"/>
+                <a:spcPts val="200"/>
               </a:spcAft>
             </a:pPr>
             <a:r>
-              <a:rPr sz="1400">
-                <a:solidFill>
-                  <a:srgbClr val="191D2E"/>
-                </a:solidFill>
-                <a:latin typeface="Georgia"/>
-              </a:rPr>
-              <a:t>–  Bestandskundenpotenzial: Wallet-Share noch nicht ausgeschöpft</a:t>
+              <a:rPr sz="1200">
+                <a:solidFill>
+                  <a:srgbClr val="3D5466"/>
+                </a:solidFill>
+                <a:latin typeface="Arial"/>
+              </a:rPr>
+              <a:t>Ein einfaches Scoring-Modell hilft bei der Auswahl des Primärsegments:</a:t>
             </a:r>
           </a:p>
           <a:p>
             <a:pPr>
               <a:spcBef>
-                <a:spcPts val="600"/>
+                <a:spcPts val="400"/>
               </a:spcBef>
               <a:spcAft>
-                <a:spcPts val="600"/>
+                <a:spcPts val="200"/>
               </a:spcAft>
             </a:pPr>
             <a:r>
-              <a:rPr sz="1400">
-                <a:solidFill>
-                  <a:srgbClr val="191D2E"/>
-                </a:solidFill>
-                <a:latin typeface="Georgia"/>
-              </a:rPr>
-              <a:t>–  Neukunden in Zielbranchen: Welche Unternehmen passen zu uns?</a:t>
+              <a:rPr sz="1200">
+                <a:solidFill>
+                  <a:srgbClr val="3D5466"/>
+                </a:solidFill>
+                <a:latin typeface="Arial"/>
+              </a:rPr>
+              <a:t>Bewertung je Kriterium: 1 (schwach) bis 5 (sehr stark).</a:t>
             </a:r>
           </a:p>
           <a:p>
             <a:pPr>
               <a:spcBef>
-                <a:spcPts val="600"/>
+                <a:spcPts val="400"/>
               </a:spcBef>
               <a:spcAft>
-                <a:spcPts val="600"/>
+                <a:spcPts val="200"/>
               </a:spcAft>
             </a:pPr>
             <a:r>
-              <a:rPr sz="1400">
-                <a:solidFill>
-                  <a:srgbClr val="191D2E"/>
-                </a:solidFill>
-                <a:latin typeface="Georgia"/>
-              </a:rPr>
-              <a:t>–  Regionaler Marktanteil: Was ist unser Anteil am Firmenkunden-Kreditmarkt?</a:t>
-            </a:r>
-          </a:p>
-          <a:p>
-            <a:pPr>
-              <a:spcBef>
-                <a:spcPts val="600"/>
-              </a:spcBef>
-              <a:spcAft>
-                <a:spcPts val="600"/>
-              </a:spcAft>
-            </a:pPr>
-            <a:r>
-              <a:rPr sz="1400">
-                <a:solidFill>
-                  <a:srgbClr val="191D2E"/>
-                </a:solidFill>
-                <a:latin typeface="Georgia"/>
-              </a:rPr>
-              <a:t>–  Wettbewerbsanalyse: Wer ist stark wo wir schwach sind?</a:t>
+              <a:rPr sz="1200">
+                <a:solidFill>
+                  <a:srgbClr val="3D5466"/>
+                </a:solidFill>
+                <a:latin typeface="Arial"/>
+              </a:rPr>
+              <a:t>## 4.3 Marktpotenzialanalyse</a:t>
+            </a:r>
+          </a:p>
+        </p:txBody>
+      </p:sp>
+      <p:sp>
+        <p:nvSpPr>
+          <p:cNvPr id="9" name="Rectangle 8"/>
+          <p:cNvSpPr/>
+          <p:nvPr/>
+        </p:nvSpPr>
+        <p:spPr>
+          <a:xfrm>
+            <a:off x="0" y="6510528"/>
+            <a:ext cx="12188952" cy="347472"/>
+          </a:xfrm>
+          <a:prstGeom prst="rect">
+            <a:avLst/>
+          </a:prstGeom>
+          <a:solidFill>
+            <a:srgbClr val="0A1937"/>
+          </a:solidFill>
+          <a:ln>
+            <a:noFill/>
+          </a:ln>
+        </p:spPr>
+        <p:style>
+          <a:lnRef idx="1">
+            <a:schemeClr val="accent1"/>
+          </a:lnRef>
+          <a:fillRef idx="3">
+            <a:schemeClr val="accent1"/>
+          </a:fillRef>
+          <a:effectRef idx="2">
+            <a:schemeClr val="accent1"/>
+          </a:effectRef>
+          <a:fontRef idx="minor">
+            <a:schemeClr val="lt1"/>
+          </a:fontRef>
+        </p:style>
+        <p:txBody>
+          <a:bodyPr rtlCol="0" anchor="ctr"/>
+          <a:lstStyle/>
+          <a:p>
+            <a:pPr algn="ctr"/>
+          </a:p>
+        </p:txBody>
+      </p:sp>
+      <p:sp>
+        <p:nvSpPr>
+          <p:cNvPr id="10" name="TextBox 9"/>
+          <p:cNvSpPr txBox="1"/>
+          <p:nvPr/>
+        </p:nvSpPr>
+        <p:spPr>
+          <a:xfrm>
+            <a:off x="685800" y="6583680"/>
+            <a:ext cx="6490411" cy="256032"/>
+          </a:xfrm>
+          <a:prstGeom prst="rect">
+            <a:avLst/>
+          </a:prstGeom>
+          <a:noFill/>
+        </p:spPr>
+        <p:txBody>
+          <a:bodyPr wrap="none">
+            <a:spAutoFit/>
+          </a:bodyPr>
+          <a:lstStyle/>
+          <a:p>
+            <a:pPr algn="l"/>
+            <a:r>
+              <a:rPr sz="700">
+                <a:solidFill>
+                  <a:srgbClr val="A0B4D2"/>
+                </a:solidFill>
+                <a:latin typeface="JetBrains Mono"/>
+              </a:rPr>
+              <a:t>Benedikt Zoller Coaching  ·  FKB Campus  ·  M15</a:t>
             </a:r>
           </a:p>
         </p:txBody>
@@ -6130,14 +7442,6 @@
 <file path=ppt/slides/slide7.xml><?xml version="1.0" encoding="utf-8"?>
 <p:sld xmlns:a="http://schemas.openxmlformats.org/drawingml/2006/main" xmlns:p="http://schemas.openxmlformats.org/presentationml/2006/main" xmlns:r="http://schemas.openxmlformats.org/officeDocument/2006/relationships">
   <p:cSld>
-    <p:bg>
-      <p:bgPr>
-        <a:solidFill>
-          <a:srgbClr val="1F2B56"/>
-        </a:solidFill>
-        <a:effectLst/>
-      </p:bgPr>
-    </p:bg>
     <p:spTree>
       <p:nvGrpSpPr>
         <p:cNvPr id="1" name=""/>
@@ -6147,71 +7451,87 @@
       <p:grpSpPr/>
       <p:sp>
         <p:nvSpPr>
-          <p:cNvPr id="2" name="TextBox 1"/>
-          <p:cNvSpPr txBox="1"/>
-          <p:nvPr/>
-        </p:nvSpPr>
-        <p:spPr>
-          <a:xfrm>
-            <a:off x="609600" y="279400"/>
-            <a:ext cx="2540000" cy="279400"/>
-          </a:xfrm>
-          <a:prstGeom prst="rect">
-            <a:avLst/>
-          </a:prstGeom>
-          <a:noFill/>
-        </p:spPr>
-        <p:txBody>
-          <a:bodyPr wrap="square">
-            <a:normAutofit/>
-          </a:bodyPr>
-          <a:lstStyle/>
-          <a:p>
-            <a:pPr algn="l"/>
-            <a:r>
-              <a:rPr sz="1000" b="1" i="0">
-                <a:solidFill>
-                  <a:srgbClr val="F8F8FA"/>
-                </a:solidFill>
-                <a:latin typeface="Arial"/>
-              </a:rPr>
-              <a:t>FKB  Campus</a:t>
-            </a:r>
-          </a:p>
-        </p:txBody>
-      </p:sp>
-      <p:sp>
-        <p:nvSpPr>
-          <p:cNvPr id="3" name="TextBox 2"/>
-          <p:cNvSpPr txBox="1"/>
-          <p:nvPr/>
-        </p:nvSpPr>
-        <p:spPr>
-          <a:xfrm>
-            <a:off x="609600" y="279400"/>
-            <a:ext cx="10972800" cy="279400"/>
-          </a:xfrm>
-          <a:prstGeom prst="rect">
-            <a:avLst/>
-          </a:prstGeom>
-          <a:noFill/>
-        </p:spPr>
-        <p:txBody>
-          <a:bodyPr wrap="square">
-            <a:normAutofit/>
-          </a:bodyPr>
-          <a:lstStyle/>
-          <a:p>
-            <a:pPr algn="r"/>
-            <a:r>
-              <a:rPr sz="900" b="0" i="0">
-                <a:solidFill>
-                  <a:srgbClr val="7B7FA0"/>
-                </a:solidFill>
-                <a:latin typeface="Courier New"/>
-              </a:rPr>
-              <a:t>STRATEGIE ENTWICKELN UND UMSETZEN</a:t>
-            </a:r>
+          <p:cNvPr id="2" name="Rectangle 1"/>
+          <p:cNvSpPr/>
+          <p:nvPr/>
+        </p:nvSpPr>
+        <p:spPr>
+          <a:xfrm>
+            <a:off x="0" y="0"/>
+            <a:ext cx="12188952" cy="6858000"/>
+          </a:xfrm>
+          <a:prstGeom prst="rect">
+            <a:avLst/>
+          </a:prstGeom>
+          <a:solidFill>
+            <a:srgbClr val="EDEDF3"/>
+          </a:solidFill>
+          <a:ln>
+            <a:noFill/>
+          </a:ln>
+        </p:spPr>
+        <p:style>
+          <a:lnRef idx="1">
+            <a:schemeClr val="accent1"/>
+          </a:lnRef>
+          <a:fillRef idx="3">
+            <a:schemeClr val="accent1"/>
+          </a:fillRef>
+          <a:effectRef idx="2">
+            <a:schemeClr val="accent1"/>
+          </a:effectRef>
+          <a:fontRef idx="minor">
+            <a:schemeClr val="lt1"/>
+          </a:fontRef>
+        </p:style>
+        <p:txBody>
+          <a:bodyPr rtlCol="0" anchor="ctr"/>
+          <a:lstStyle/>
+          <a:p>
+            <a:pPr algn="ctr"/>
+          </a:p>
+        </p:txBody>
+      </p:sp>
+      <p:sp>
+        <p:nvSpPr>
+          <p:cNvPr id="3" name="Rectangle 2"/>
+          <p:cNvSpPr/>
+          <p:nvPr/>
+        </p:nvSpPr>
+        <p:spPr>
+          <a:xfrm>
+            <a:off x="0" y="0"/>
+            <a:ext cx="12188952" cy="50292"/>
+          </a:xfrm>
+          <a:prstGeom prst="rect">
+            <a:avLst/>
+          </a:prstGeom>
+          <a:solidFill>
+            <a:srgbClr val="1F2C56"/>
+          </a:solidFill>
+          <a:ln>
+            <a:noFill/>
+          </a:ln>
+        </p:spPr>
+        <p:style>
+          <a:lnRef idx="1">
+            <a:schemeClr val="accent1"/>
+          </a:lnRef>
+          <a:fillRef idx="3">
+            <a:schemeClr val="accent1"/>
+          </a:fillRef>
+          <a:effectRef idx="2">
+            <a:schemeClr val="accent1"/>
+          </a:effectRef>
+          <a:fontRef idx="minor">
+            <a:schemeClr val="lt1"/>
+          </a:fontRef>
+        </p:style>
+        <p:txBody>
+          <a:bodyPr rtlCol="0" anchor="ctr"/>
+          <a:lstStyle/>
+          <a:p>
+            <a:pPr algn="ctr"/>
           </a:p>
         </p:txBody>
       </p:sp>
@@ -6223,8 +7543,8 @@
         </p:nvSpPr>
         <p:spPr>
           <a:xfrm>
-            <a:off x="609600" y="6426200"/>
-            <a:ext cx="10972800" cy="228600"/>
+            <a:off x="685800" y="109728"/>
+            <a:ext cx="10817352" cy="228600"/>
           </a:xfrm>
           <a:prstGeom prst="rect">
             <a:avLst/>
@@ -6232,91 +7552,107 @@
           <a:noFill/>
         </p:spPr>
         <p:txBody>
-          <a:bodyPr wrap="square">
-            <a:normAutofit/>
+          <a:bodyPr wrap="none">
+            <a:spAutoFit/>
           </a:bodyPr>
           <a:lstStyle/>
           <a:p>
-            <a:pPr algn="r"/>
-            <a:r>
-              <a:rPr sz="900" b="0" i="0">
-                <a:solidFill>
-                  <a:srgbClr val="7B7FA0"/>
-                </a:solidFill>
-                <a:latin typeface="Courier New"/>
-              </a:rPr>
-              <a:t>07</a:t>
-            </a:r>
-          </a:p>
-        </p:txBody>
-      </p:sp>
-      <p:sp>
-        <p:nvSpPr>
-          <p:cNvPr id="5" name="TextBox 4"/>
-          <p:cNvSpPr txBox="1"/>
-          <p:nvPr/>
-        </p:nvSpPr>
-        <p:spPr>
-          <a:xfrm>
-            <a:off x="609600" y="635000"/>
-            <a:ext cx="5461000" cy="5461000"/>
-          </a:xfrm>
-          <a:prstGeom prst="rect">
-            <a:avLst/>
-          </a:prstGeom>
-          <a:noFill/>
-        </p:spPr>
-        <p:txBody>
-          <a:bodyPr wrap="square">
-            <a:normAutofit/>
-          </a:bodyPr>
-          <a:lstStyle/>
-          <a:p>
             <a:pPr algn="l"/>
             <a:r>
-              <a:rPr sz="28000" b="0" i="1">
-                <a:solidFill>
-                  <a:srgbClr val="D9BF7A"/>
-                </a:solidFill>
-                <a:latin typeface="Georgia"/>
-              </a:rPr>
-              <a:t>III</a:t>
-            </a:r>
-          </a:p>
-        </p:txBody>
-      </p:sp>
-      <p:sp>
-        <p:nvSpPr>
-          <p:cNvPr id="6" name="TextBox 5"/>
-          <p:cNvSpPr txBox="1"/>
-          <p:nvPr/>
-        </p:nvSpPr>
-        <p:spPr>
-          <a:xfrm>
-            <a:off x="6731000" y="4064000"/>
-            <a:ext cx="4851400" cy="1778000"/>
-          </a:xfrm>
-          <a:prstGeom prst="rect">
-            <a:avLst/>
-          </a:prstGeom>
-          <a:noFill/>
-        </p:spPr>
-        <p:txBody>
-          <a:bodyPr wrap="square">
-            <a:normAutofit/>
-          </a:bodyPr>
-          <a:lstStyle/>
-          <a:p>
-            <a:pPr algn="r"/>
-            <a:r>
-              <a:rPr sz="3800" b="0" i="0">
-                <a:solidFill>
-                  <a:srgbClr val="F8F8FA"/>
-                </a:solidFill>
-                <a:latin typeface="Georgia"/>
-              </a:rPr>
-              <a:t>Strategie entwickeln und umsetzen</a:t>
-            </a:r>
+              <a:rPr sz="750">
+                <a:solidFill>
+                  <a:srgbClr val="78808C"/>
+                </a:solidFill>
+                <a:latin typeface="JetBrains Mono"/>
+              </a:rPr>
+              <a:t>M15  ·  INHALT</a:t>
+            </a:r>
+          </a:p>
+        </p:txBody>
+      </p:sp>
+      <p:sp>
+        <p:nvSpPr>
+          <p:cNvPr id="5" name="Rectangle 4"/>
+          <p:cNvSpPr/>
+          <p:nvPr/>
+        </p:nvSpPr>
+        <p:spPr>
+          <a:xfrm>
+            <a:off x="0" y="1234440"/>
+            <a:ext cx="12188952" cy="12700"/>
+          </a:xfrm>
+          <a:prstGeom prst="rect">
+            <a:avLst/>
+          </a:prstGeom>
+          <a:solidFill>
+            <a:srgbClr val="D8DFE4"/>
+          </a:solidFill>
+          <a:ln>
+            <a:noFill/>
+          </a:ln>
+        </p:spPr>
+        <p:style>
+          <a:lnRef idx="1">
+            <a:schemeClr val="accent1"/>
+          </a:lnRef>
+          <a:fillRef idx="3">
+            <a:schemeClr val="accent1"/>
+          </a:fillRef>
+          <a:effectRef idx="2">
+            <a:schemeClr val="accent1"/>
+          </a:effectRef>
+          <a:fontRef idx="minor">
+            <a:schemeClr val="lt1"/>
+          </a:fontRef>
+        </p:style>
+        <p:txBody>
+          <a:bodyPr rtlCol="0" anchor="ctr"/>
+          <a:lstStyle/>
+          <a:p>
+            <a:pPr algn="ctr"/>
+          </a:p>
+        </p:txBody>
+      </p:sp>
+      <p:sp>
+        <p:nvSpPr>
+          <p:cNvPr id="6" name="Rectangle 5"/>
+          <p:cNvSpPr/>
+          <p:nvPr/>
+        </p:nvSpPr>
+        <p:spPr>
+          <a:xfrm>
+            <a:off x="685800" y="502920"/>
+            <a:ext cx="36576" cy="658368"/>
+          </a:xfrm>
+          <a:prstGeom prst="rect">
+            <a:avLst/>
+          </a:prstGeom>
+          <a:solidFill>
+            <a:srgbClr val="D9C089"/>
+          </a:solidFill>
+          <a:ln>
+            <a:noFill/>
+          </a:ln>
+        </p:spPr>
+        <p:style>
+          <a:lnRef idx="1">
+            <a:schemeClr val="accent1"/>
+          </a:lnRef>
+          <a:fillRef idx="3">
+            <a:schemeClr val="accent1"/>
+          </a:fillRef>
+          <a:effectRef idx="2">
+            <a:schemeClr val="accent1"/>
+          </a:effectRef>
+          <a:fontRef idx="minor">
+            <a:schemeClr val="lt1"/>
+          </a:fontRef>
+        </p:style>
+        <p:txBody>
+          <a:bodyPr rtlCol="0" anchor="ctr"/>
+          <a:lstStyle/>
+          <a:p>
+            <a:pPr algn="ctr"/>
           </a:p>
         </p:txBody>
       </p:sp>
@@ -6328,8 +7664,8 @@
         </p:nvSpPr>
         <p:spPr>
           <a:xfrm>
-            <a:off x="6731000" y="5842000"/>
-            <a:ext cx="4851400" cy="635000"/>
+            <a:off x="813816" y="502920"/>
+            <a:ext cx="10634472" cy="685800"/>
           </a:xfrm>
           <a:prstGeom prst="rect">
             <a:avLst/>
@@ -6338,19 +7674,291 @@
         </p:spPr>
         <p:txBody>
           <a:bodyPr wrap="square">
-            <a:normAutofit/>
+            <a:spAutoFit/>
           </a:bodyPr>
           <a:lstStyle/>
           <a:p>
-            <a:pPr algn="r"/>
-            <a:r>
-              <a:rPr sz="1400" b="0" i="1">
-                <a:solidFill>
-                  <a:srgbClr val="7B7FA0"/>
-                </a:solidFill>
-                <a:latin typeface="Georgia"/>
-              </a:rPr>
-              <a:t>Jahresplan mit Zielen, Maßnahmen, Meilensteinen</a:t>
+            <a:pPr algn="l"/>
+            <a:r>
+              <a:rPr sz="2400" b="1" i="0">
+                <a:solidFill>
+                  <a:srgbClr val="1F2C56"/>
+                </a:solidFill>
+                <a:latin typeface="Source Serif 4"/>
+              </a:rPr>
+              <a:t>Wie groß ist mein adressierbarer Markt?</a:t>
+            </a:r>
+          </a:p>
+        </p:txBody>
+      </p:sp>
+      <p:sp>
+        <p:nvSpPr>
+          <p:cNvPr id="8" name="TextBox 7"/>
+          <p:cNvSpPr txBox="1"/>
+          <p:nvPr/>
+        </p:nvSpPr>
+        <p:spPr>
+          <a:xfrm>
+            <a:off x="685800" y="1417320"/>
+            <a:ext cx="10817352" cy="5029200"/>
+          </a:xfrm>
+          <a:prstGeom prst="rect">
+            <a:avLst/>
+          </a:prstGeom>
+          <a:noFill/>
+        </p:spPr>
+        <p:txBody>
+          <a:bodyPr wrap="square">
+            <a:spAutoFit/>
+          </a:bodyPr>
+          <a:lstStyle/>
+          <a:p>
+            <a:pPr>
+              <a:spcBef>
+                <a:spcPts val="400"/>
+              </a:spcBef>
+              <a:spcAft>
+                <a:spcPts val="200"/>
+              </a:spcAft>
+            </a:pPr>
+            <a:r>
+              <a:rPr sz="1200">
+                <a:solidFill>
+                  <a:srgbClr val="3D5466"/>
+                </a:solidFill>
+                <a:latin typeface="Arial"/>
+              </a:rPr>
+              <a:t>Vor dem strategischen Einstieg in ein Segment steht die Potenzialschätzung. Die Frage: Wie viele Unternehmen im Zielsegment gibt es in meiner Region, und wie viele davon betreuen wir noch nicht?</a:t>
+            </a:r>
+          </a:p>
+          <a:p>
+            <a:pPr>
+              <a:spcBef>
+                <a:spcPts val="400"/>
+              </a:spcBef>
+              <a:spcAft>
+                <a:spcPts val="200"/>
+              </a:spcAft>
+            </a:pPr>
+            <a:r>
+              <a:rPr sz="1200">
+                <a:solidFill>
+                  <a:srgbClr val="3D5466"/>
+                </a:solidFill>
+                <a:latin typeface="Arial"/>
+              </a:rPr>
+              <a:t>Datenquellen für die Potenzialschätzung:</a:t>
+            </a:r>
+          </a:p>
+          <a:p>
+            <a:pPr>
+              <a:spcBef>
+                <a:spcPts val="400"/>
+              </a:spcBef>
+              <a:spcAft>
+                <a:spcPts val="200"/>
+              </a:spcAft>
+            </a:pPr>
+            <a:r>
+              <a:rPr sz="1200">
+                <a:solidFill>
+                  <a:srgbClr val="3D5466"/>
+                </a:solidFill>
+                <a:latin typeface="Arial"/>
+              </a:rPr>
+              <a:t>Vereinfachte Potenzialrechnung:</a:t>
+            </a:r>
+          </a:p>
+          <a:p>
+            <a:pPr>
+              <a:spcBef>
+                <a:spcPts val="400"/>
+              </a:spcBef>
+              <a:spcAft>
+                <a:spcPts val="200"/>
+              </a:spcAft>
+            </a:pPr>
+            <a:r>
+              <a:rPr sz="1300">
+                <a:solidFill>
+                  <a:srgbClr val="3D5466"/>
+                </a:solidFill>
+                <a:latin typeface="Arial"/>
+              </a:rPr>
+              <a:t>▸  Zielunternehmen in Region: X</a:t>
+            </a:r>
+          </a:p>
+          <a:p>
+            <a:pPr>
+              <a:spcBef>
+                <a:spcPts val="400"/>
+              </a:spcBef>
+              <a:spcAft>
+                <a:spcPts val="200"/>
+              </a:spcAft>
+            </a:pPr>
+            <a:r>
+              <a:rPr sz="1300">
+                <a:solidFill>
+                  <a:srgbClr val="3D5466"/>
+                </a:solidFill>
+                <a:latin typeface="Arial"/>
+              </a:rPr>
+              <a:t>▸  Davon bereits Kunden: Y</a:t>
+            </a:r>
+          </a:p>
+          <a:p>
+            <a:pPr>
+              <a:spcBef>
+                <a:spcPts val="400"/>
+              </a:spcBef>
+              <a:spcAft>
+                <a:spcPts val="200"/>
+              </a:spcAft>
+            </a:pPr>
+            <a:r>
+              <a:rPr sz="1300">
+                <a:solidFill>
+                  <a:srgbClr val="3D5466"/>
+                </a:solidFill>
+                <a:latin typeface="Arial"/>
+              </a:rPr>
+              <a:t>▸  Adressierbares Neukundenpotenzial: X − Y</a:t>
+            </a:r>
+          </a:p>
+          <a:p>
+            <a:pPr>
+              <a:spcBef>
+                <a:spcPts val="400"/>
+              </a:spcBef>
+              <a:spcAft>
+                <a:spcPts val="200"/>
+              </a:spcAft>
+            </a:pPr>
+            <a:r>
+              <a:rPr sz="1300">
+                <a:solidFill>
+                  <a:srgbClr val="3D5466"/>
+                </a:solidFill>
+                <a:latin typeface="Arial"/>
+              </a:rPr>
+              <a:t>▸  Realistisch erreichbar in 12 Monaten (Marktdurchdringungsrate 2–5 %): Z</a:t>
+            </a:r>
+          </a:p>
+          <a:p>
+            <a:pPr>
+              <a:spcBef>
+                <a:spcPts val="600"/>
+              </a:spcBef>
+              <a:spcAft>
+                <a:spcPts val="200"/>
+              </a:spcAft>
+            </a:pPr>
+            <a:r>
+              <a:rPr sz="1200" i="1">
+                <a:solidFill>
+                  <a:srgbClr val="3D5466"/>
+                </a:solidFill>
+                <a:latin typeface="Arial"/>
+              </a:rPr>
+              <a:t>→  Praxistipp: Unterschätzen Sie die bestehenden Daten in agree nicht. Eine saubere Branchencodierung und ein aktuelles CRM sind die Basis jeder Potenzialanalyse.</a:t>
+            </a:r>
+          </a:p>
+          <a:p>
+            <a:pPr>
+              <a:spcBef>
+                <a:spcPts val="400"/>
+              </a:spcBef>
+              <a:spcAft>
+                <a:spcPts val="200"/>
+              </a:spcAft>
+            </a:pPr>
+            <a:r>
+              <a:rPr sz="1200">
+                <a:solidFill>
+                  <a:srgbClr val="3D5466"/>
+                </a:solidFill>
+                <a:latin typeface="Arial"/>
+              </a:rPr>
+              <a:t>## 4.4 Strategische Positionierung: Stärken-Schwächen vs. Wettbewerb</a:t>
+            </a:r>
+          </a:p>
+        </p:txBody>
+      </p:sp>
+      <p:sp>
+        <p:nvSpPr>
+          <p:cNvPr id="9" name="Rectangle 8"/>
+          <p:cNvSpPr/>
+          <p:nvPr/>
+        </p:nvSpPr>
+        <p:spPr>
+          <a:xfrm>
+            <a:off x="0" y="6510528"/>
+            <a:ext cx="12188952" cy="347472"/>
+          </a:xfrm>
+          <a:prstGeom prst="rect">
+            <a:avLst/>
+          </a:prstGeom>
+          <a:solidFill>
+            <a:srgbClr val="0A1937"/>
+          </a:solidFill>
+          <a:ln>
+            <a:noFill/>
+          </a:ln>
+        </p:spPr>
+        <p:style>
+          <a:lnRef idx="1">
+            <a:schemeClr val="accent1"/>
+          </a:lnRef>
+          <a:fillRef idx="3">
+            <a:schemeClr val="accent1"/>
+          </a:fillRef>
+          <a:effectRef idx="2">
+            <a:schemeClr val="accent1"/>
+          </a:effectRef>
+          <a:fontRef idx="minor">
+            <a:schemeClr val="lt1"/>
+          </a:fontRef>
+        </p:style>
+        <p:txBody>
+          <a:bodyPr rtlCol="0" anchor="ctr"/>
+          <a:lstStyle/>
+          <a:p>
+            <a:pPr algn="ctr"/>
+          </a:p>
+        </p:txBody>
+      </p:sp>
+      <p:sp>
+        <p:nvSpPr>
+          <p:cNvPr id="10" name="TextBox 9"/>
+          <p:cNvSpPr txBox="1"/>
+          <p:nvPr/>
+        </p:nvSpPr>
+        <p:spPr>
+          <a:xfrm>
+            <a:off x="685800" y="6583680"/>
+            <a:ext cx="6490411" cy="256032"/>
+          </a:xfrm>
+          <a:prstGeom prst="rect">
+            <a:avLst/>
+          </a:prstGeom>
+          <a:noFill/>
+        </p:spPr>
+        <p:txBody>
+          <a:bodyPr wrap="none">
+            <a:spAutoFit/>
+          </a:bodyPr>
+          <a:lstStyle/>
+          <a:p>
+            <a:pPr algn="l"/>
+            <a:r>
+              <a:rPr sz="700">
+                <a:solidFill>
+                  <a:srgbClr val="A0B4D2"/>
+                </a:solidFill>
+                <a:latin typeface="JetBrains Mono"/>
+              </a:rPr>
+              <a:t>Benedikt Zoller Coaching  ·  FKB Campus  ·  M15</a:t>
             </a:r>
           </a:p>
         </p:txBody>
@@ -6366,14 +7974,6 @@
 <file path=ppt/slides/slide8.xml><?xml version="1.0" encoding="utf-8"?>
 <p:sld xmlns:a="http://schemas.openxmlformats.org/drawingml/2006/main" xmlns:p="http://schemas.openxmlformats.org/presentationml/2006/main" xmlns:r="http://schemas.openxmlformats.org/officeDocument/2006/relationships">
   <p:cSld>
-    <p:bg>
-      <p:bgPr>
-        <a:solidFill>
-          <a:srgbClr val="F8F8FA"/>
-        </a:solidFill>
-        <a:effectLst/>
-      </p:bgPr>
-    </p:bg>
     <p:spTree>
       <p:nvGrpSpPr>
         <p:cNvPr id="1" name=""/>
@@ -6383,125 +7983,20 @@
       <p:grpSpPr/>
       <p:sp>
         <p:nvSpPr>
-          <p:cNvPr id="2" name="TextBox 1"/>
-          <p:cNvSpPr txBox="1"/>
-          <p:nvPr/>
-        </p:nvSpPr>
-        <p:spPr>
-          <a:xfrm>
-            <a:off x="609600" y="279400"/>
-            <a:ext cx="2540000" cy="279400"/>
-          </a:xfrm>
-          <a:prstGeom prst="rect">
-            <a:avLst/>
-          </a:prstGeom>
-          <a:noFill/>
-        </p:spPr>
-        <p:txBody>
-          <a:bodyPr wrap="square">
-            <a:normAutofit/>
-          </a:bodyPr>
-          <a:lstStyle/>
-          <a:p>
-            <a:pPr algn="l"/>
-            <a:r>
-              <a:rPr sz="1000" b="1" i="0">
-                <a:solidFill>
-                  <a:srgbClr val="191D2E"/>
-                </a:solidFill>
-                <a:latin typeface="Arial"/>
-              </a:rPr>
-              <a:t>FKB  Campus</a:t>
-            </a:r>
-          </a:p>
-        </p:txBody>
-      </p:sp>
-      <p:sp>
-        <p:nvSpPr>
-          <p:cNvPr id="3" name="TextBox 2"/>
-          <p:cNvSpPr txBox="1"/>
-          <p:nvPr/>
-        </p:nvSpPr>
-        <p:spPr>
-          <a:xfrm>
-            <a:off x="609600" y="279400"/>
-            <a:ext cx="10972800" cy="279400"/>
-          </a:xfrm>
-          <a:prstGeom prst="rect">
-            <a:avLst/>
-          </a:prstGeom>
-          <a:noFill/>
-        </p:spPr>
-        <p:txBody>
-          <a:bodyPr wrap="square">
-            <a:normAutofit/>
-          </a:bodyPr>
-          <a:lstStyle/>
-          <a:p>
-            <a:pPr algn="r"/>
-            <a:r>
-              <a:rPr sz="900" b="0" i="0">
-                <a:solidFill>
-                  <a:srgbClr val="7B7FA0"/>
-                </a:solidFill>
-                <a:latin typeface="Courier New"/>
-              </a:rPr>
-              <a:t>III · STRATEGIE ENTWICKELN UND UMSETZEN</a:t>
-            </a:r>
-          </a:p>
-        </p:txBody>
-      </p:sp>
-      <p:sp>
-        <p:nvSpPr>
-          <p:cNvPr id="4" name="TextBox 3"/>
-          <p:cNvSpPr txBox="1"/>
-          <p:nvPr/>
-        </p:nvSpPr>
-        <p:spPr>
-          <a:xfrm>
-            <a:off x="609600" y="6426200"/>
-            <a:ext cx="10972800" cy="228600"/>
-          </a:xfrm>
-          <a:prstGeom prst="rect">
-            <a:avLst/>
-          </a:prstGeom>
-          <a:noFill/>
-        </p:spPr>
-        <p:txBody>
-          <a:bodyPr wrap="square">
-            <a:normAutofit/>
-          </a:bodyPr>
-          <a:lstStyle/>
-          <a:p>
-            <a:pPr algn="r"/>
-            <a:r>
-              <a:rPr sz="900" b="0" i="0">
-                <a:solidFill>
-                  <a:srgbClr val="7B7FA0"/>
-                </a:solidFill>
-                <a:latin typeface="Courier New"/>
-              </a:rPr>
-              <a:t>08</a:t>
-            </a:r>
-          </a:p>
-        </p:txBody>
-      </p:sp>
-      <p:sp>
-        <p:nvSpPr>
-          <p:cNvPr id="5" name="Rectangle 4"/>
+          <p:cNvPr id="2" name="Rectangle 1"/>
           <p:cNvSpPr/>
           <p:nvPr/>
         </p:nvSpPr>
         <p:spPr>
           <a:xfrm>
-            <a:off x="609600" y="825500"/>
-            <a:ext cx="10972800" cy="6350"/>
+            <a:off x="0" y="0"/>
+            <a:ext cx="12188952" cy="6858000"/>
           </a:xfrm>
           <a:prstGeom prst="rect">
             <a:avLst/>
           </a:prstGeom>
           <a:solidFill>
-            <a:srgbClr val="191D2E"/>
+            <a:srgbClr val="EDEDF3"/>
           </a:solidFill>
           <a:ln>
             <a:noFill/>
@@ -6531,55 +8026,20 @@
       </p:sp>
       <p:sp>
         <p:nvSpPr>
-          <p:cNvPr id="6" name="TextBox 5"/>
-          <p:cNvSpPr txBox="1"/>
-          <p:nvPr/>
-        </p:nvSpPr>
-        <p:spPr>
-          <a:xfrm>
-            <a:off x="609600" y="920750"/>
-            <a:ext cx="10972800" cy="1778000"/>
-          </a:xfrm>
-          <a:prstGeom prst="rect">
-            <a:avLst/>
-          </a:prstGeom>
-          <a:noFill/>
-        </p:spPr>
-        <p:txBody>
-          <a:bodyPr wrap="square">
-            <a:normAutofit/>
-          </a:bodyPr>
-          <a:lstStyle/>
-          <a:p>
-            <a:pPr algn="l"/>
-            <a:r>
-              <a:rPr sz="3800" b="0" i="0">
-                <a:solidFill>
-                  <a:srgbClr val="191D2E"/>
-                </a:solidFill>
-                <a:latin typeface="Georgia"/>
-              </a:rPr>
-              <a:t>Strategie in drei Dimensionen</a:t>
-            </a:r>
-          </a:p>
-        </p:txBody>
-      </p:sp>
-      <p:sp>
-        <p:nvSpPr>
-          <p:cNvPr id="7" name="Rectangle 6"/>
+          <p:cNvPr id="3" name="Rectangle 2"/>
           <p:cNvSpPr/>
           <p:nvPr/>
         </p:nvSpPr>
         <p:spPr>
           <a:xfrm>
-            <a:off x="609600" y="2762250"/>
-            <a:ext cx="10972800" cy="6350"/>
+            <a:off x="0" y="0"/>
+            <a:ext cx="12188952" cy="50292"/>
           </a:xfrm>
           <a:prstGeom prst="rect">
             <a:avLst/>
           </a:prstGeom>
           <a:solidFill>
-            <a:srgbClr val="E0E0E8"/>
+            <a:srgbClr val="1F2C56"/>
           </a:solidFill>
           <a:ln>
             <a:noFill/>
@@ -6609,14 +8069,14 @@
       </p:sp>
       <p:sp>
         <p:nvSpPr>
-          <p:cNvPr id="8" name="TextBox 7"/>
+          <p:cNvPr id="4" name="TextBox 3"/>
           <p:cNvSpPr txBox="1"/>
           <p:nvPr/>
         </p:nvSpPr>
         <p:spPr>
           <a:xfrm>
-            <a:off x="609600" y="2851150"/>
-            <a:ext cx="10972800" cy="3448050"/>
+            <a:off x="685800" y="109728"/>
+            <a:ext cx="10817352" cy="228600"/>
           </a:xfrm>
           <a:prstGeom prst="rect">
             <a:avLst/>
@@ -6624,65 +8084,219 @@
           <a:noFill/>
         </p:spPr>
         <p:txBody>
+          <a:bodyPr wrap="none">
+            <a:spAutoFit/>
+          </a:bodyPr>
+          <a:lstStyle/>
+          <a:p>
+            <a:pPr algn="l"/>
+            <a:r>
+              <a:rPr sz="750">
+                <a:solidFill>
+                  <a:srgbClr val="78808C"/>
+                </a:solidFill>
+                <a:latin typeface="JetBrains Mono"/>
+              </a:rPr>
+              <a:t>M15  ·  INHALT</a:t>
+            </a:r>
+          </a:p>
+        </p:txBody>
+      </p:sp>
+      <p:sp>
+        <p:nvSpPr>
+          <p:cNvPr id="5" name="Rectangle 4"/>
+          <p:cNvSpPr/>
+          <p:nvPr/>
+        </p:nvSpPr>
+        <p:spPr>
+          <a:xfrm>
+            <a:off x="0" y="1234440"/>
+            <a:ext cx="12188952" cy="12700"/>
+          </a:xfrm>
+          <a:prstGeom prst="rect">
+            <a:avLst/>
+          </a:prstGeom>
+          <a:solidFill>
+            <a:srgbClr val="D8DFE4"/>
+          </a:solidFill>
+          <a:ln>
+            <a:noFill/>
+          </a:ln>
+        </p:spPr>
+        <p:style>
+          <a:lnRef idx="1">
+            <a:schemeClr val="accent1"/>
+          </a:lnRef>
+          <a:fillRef idx="3">
+            <a:schemeClr val="accent1"/>
+          </a:fillRef>
+          <a:effectRef idx="2">
+            <a:schemeClr val="accent1"/>
+          </a:effectRef>
+          <a:fontRef idx="minor">
+            <a:schemeClr val="lt1"/>
+          </a:fontRef>
+        </p:style>
+        <p:txBody>
+          <a:bodyPr rtlCol="0" anchor="ctr"/>
+          <a:lstStyle/>
+          <a:p>
+            <a:pPr algn="ctr"/>
+          </a:p>
+        </p:txBody>
+      </p:sp>
+      <p:sp>
+        <p:nvSpPr>
+          <p:cNvPr id="6" name="Rectangle 5"/>
+          <p:cNvSpPr/>
+          <p:nvPr/>
+        </p:nvSpPr>
+        <p:spPr>
+          <a:xfrm>
+            <a:off x="685800" y="502920"/>
+            <a:ext cx="36576" cy="658368"/>
+          </a:xfrm>
+          <a:prstGeom prst="rect">
+            <a:avLst/>
+          </a:prstGeom>
+          <a:solidFill>
+            <a:srgbClr val="D9C089"/>
+          </a:solidFill>
+          <a:ln>
+            <a:noFill/>
+          </a:ln>
+        </p:spPr>
+        <p:style>
+          <a:lnRef idx="1">
+            <a:schemeClr val="accent1"/>
+          </a:lnRef>
+          <a:fillRef idx="3">
+            <a:schemeClr val="accent1"/>
+          </a:fillRef>
+          <a:effectRef idx="2">
+            <a:schemeClr val="accent1"/>
+          </a:effectRef>
+          <a:fontRef idx="minor">
+            <a:schemeClr val="lt1"/>
+          </a:fontRef>
+        </p:style>
+        <p:txBody>
+          <a:bodyPr rtlCol="0" anchor="ctr"/>
+          <a:lstStyle/>
+          <a:p>
+            <a:pPr algn="ctr"/>
+          </a:p>
+        </p:txBody>
+      </p:sp>
+      <p:sp>
+        <p:nvSpPr>
+          <p:cNvPr id="7" name="TextBox 6"/>
+          <p:cNvSpPr txBox="1"/>
+          <p:nvPr/>
+        </p:nvSpPr>
+        <p:spPr>
+          <a:xfrm>
+            <a:off x="813816" y="502920"/>
+            <a:ext cx="10634472" cy="685800"/>
+          </a:xfrm>
+          <a:prstGeom prst="rect">
+            <a:avLst/>
+          </a:prstGeom>
+          <a:noFill/>
+        </p:spPr>
+        <p:txBody>
           <a:bodyPr wrap="square">
-            <a:normAutofit/>
+            <a:spAutoFit/>
           </a:bodyPr>
           <a:lstStyle/>
           <a:p>
-            <a:pPr>
-              <a:spcBef>
-                <a:spcPts val="600"/>
-              </a:spcBef>
-              <a:spcAft>
-                <a:spcPts val="600"/>
-              </a:spcAft>
-            </a:pPr>
-            <a:r>
-              <a:rPr sz="1400">
-                <a:solidFill>
-                  <a:srgbClr val="191D2E"/>
-                </a:solidFill>
-                <a:latin typeface="Georgia"/>
-              </a:rPr>
-              <a:t>–  Zielkunden-Kriterien: Welche Unternehmen wollen wir? (Branche, Größe, Potenzial)</a:t>
-            </a:r>
-          </a:p>
-          <a:p>
-            <a:pPr>
-              <a:spcBef>
-                <a:spcPts val="600"/>
-              </a:spcBef>
-              <a:spcAft>
-                <a:spcPts val="600"/>
-              </a:spcAft>
-            </a:pPr>
-            <a:r>
-              <a:rPr sz="1400">
-                <a:solidFill>
-                  <a:srgbClr val="191D2E"/>
-                </a:solidFill>
-                <a:latin typeface="Georgia"/>
-              </a:rPr>
-              <a:t>–  Wertversprechen: Warum sollten sie zu uns kommen — nicht zur Sparkasse?</a:t>
-            </a:r>
-          </a:p>
-          <a:p>
-            <a:pPr>
-              <a:spcBef>
-                <a:spcPts val="600"/>
-              </a:spcBef>
-              <a:spcAft>
-                <a:spcPts val="600"/>
-              </a:spcAft>
-            </a:pPr>
-            <a:r>
-              <a:rPr sz="1400">
-                <a:solidFill>
-                  <a:srgbClr val="191D2E"/>
-                </a:solidFill>
-                <a:latin typeface="Georgia"/>
-              </a:rPr>
-              <a:t>–  Ansprachekanäle: Empfehlung, Veranstaltung, LinkedIn, Steuerberater-Kooperation</a:t>
+            <a:pPr algn="l"/>
+            <a:r>
+              <a:rPr sz="2400" b="1" i="0">
+                <a:solidFill>
+                  <a:srgbClr val="1F2C56"/>
+                </a:solidFill>
+                <a:latin typeface="Source Serif 4"/>
+              </a:rPr>
+              <a:t>SWOT im Firmenkundensegment</a:t>
+            </a:r>
+          </a:p>
+        </p:txBody>
+      </p:sp>
+      <p:sp>
+        <p:nvSpPr>
+          <p:cNvPr id="8" name="Rectangle 7"/>
+          <p:cNvSpPr/>
+          <p:nvPr/>
+        </p:nvSpPr>
+        <p:spPr>
+          <a:xfrm>
+            <a:off x="0" y="6510528"/>
+            <a:ext cx="12188952" cy="347472"/>
+          </a:xfrm>
+          <a:prstGeom prst="rect">
+            <a:avLst/>
+          </a:prstGeom>
+          <a:solidFill>
+            <a:srgbClr val="0A1937"/>
+          </a:solidFill>
+          <a:ln>
+            <a:noFill/>
+          </a:ln>
+        </p:spPr>
+        <p:style>
+          <a:lnRef idx="1">
+            <a:schemeClr val="accent1"/>
+          </a:lnRef>
+          <a:fillRef idx="3">
+            <a:schemeClr val="accent1"/>
+          </a:fillRef>
+          <a:effectRef idx="2">
+            <a:schemeClr val="accent1"/>
+          </a:effectRef>
+          <a:fontRef idx="minor">
+            <a:schemeClr val="lt1"/>
+          </a:fontRef>
+        </p:style>
+        <p:txBody>
+          <a:bodyPr rtlCol="0" anchor="ctr"/>
+          <a:lstStyle/>
+          <a:p>
+            <a:pPr algn="ctr"/>
+          </a:p>
+        </p:txBody>
+      </p:sp>
+      <p:sp>
+        <p:nvSpPr>
+          <p:cNvPr id="9" name="TextBox 8"/>
+          <p:cNvSpPr txBox="1"/>
+          <p:nvPr/>
+        </p:nvSpPr>
+        <p:spPr>
+          <a:xfrm>
+            <a:off x="685800" y="6583680"/>
+            <a:ext cx="6490411" cy="256032"/>
+          </a:xfrm>
+          <a:prstGeom prst="rect">
+            <a:avLst/>
+          </a:prstGeom>
+          <a:noFill/>
+        </p:spPr>
+        <p:txBody>
+          <a:bodyPr wrap="none">
+            <a:spAutoFit/>
+          </a:bodyPr>
+          <a:lstStyle/>
+          <a:p>
+            <a:pPr algn="l"/>
+            <a:r>
+              <a:rPr sz="700">
+                <a:solidFill>
+                  <a:srgbClr val="A0B4D2"/>
+                </a:solidFill>
+                <a:latin typeface="JetBrains Mono"/>
+              </a:rPr>
+              <a:t>Benedikt Zoller Coaching  ·  FKB Campus  ·  M15</a:t>
             </a:r>
           </a:p>
         </p:txBody>
@@ -6698,14 +8312,6 @@
 <file path=ppt/slides/slide9.xml><?xml version="1.0" encoding="utf-8"?>
 <p:sld xmlns:a="http://schemas.openxmlformats.org/drawingml/2006/main" xmlns:p="http://schemas.openxmlformats.org/presentationml/2006/main" xmlns:r="http://schemas.openxmlformats.org/officeDocument/2006/relationships">
   <p:cSld>
-    <p:bg>
-      <p:bgPr>
-        <a:solidFill>
-          <a:srgbClr val="F8F8FA"/>
-        </a:solidFill>
-        <a:effectLst/>
-      </p:bgPr>
-    </p:bg>
     <p:spTree>
       <p:nvGrpSpPr>
         <p:cNvPr id="1" name=""/>
@@ -6715,125 +8321,20 @@
       <p:grpSpPr/>
       <p:sp>
         <p:nvSpPr>
-          <p:cNvPr id="2" name="TextBox 1"/>
-          <p:cNvSpPr txBox="1"/>
-          <p:nvPr/>
-        </p:nvSpPr>
-        <p:spPr>
-          <a:xfrm>
-            <a:off x="609600" y="279400"/>
-            <a:ext cx="2540000" cy="279400"/>
-          </a:xfrm>
-          <a:prstGeom prst="rect">
-            <a:avLst/>
-          </a:prstGeom>
-          <a:noFill/>
-        </p:spPr>
-        <p:txBody>
-          <a:bodyPr wrap="square">
-            <a:normAutofit/>
-          </a:bodyPr>
-          <a:lstStyle/>
-          <a:p>
-            <a:pPr algn="l"/>
-            <a:r>
-              <a:rPr sz="1000" b="1" i="0">
-                <a:solidFill>
-                  <a:srgbClr val="191D2E"/>
-                </a:solidFill>
-                <a:latin typeface="Arial"/>
-              </a:rPr>
-              <a:t>FKB  Campus</a:t>
-            </a:r>
-          </a:p>
-        </p:txBody>
-      </p:sp>
-      <p:sp>
-        <p:nvSpPr>
-          <p:cNvPr id="3" name="TextBox 2"/>
-          <p:cNvSpPr txBox="1"/>
-          <p:nvPr/>
-        </p:nvSpPr>
-        <p:spPr>
-          <a:xfrm>
-            <a:off x="609600" y="279400"/>
-            <a:ext cx="10972800" cy="279400"/>
-          </a:xfrm>
-          <a:prstGeom prst="rect">
-            <a:avLst/>
-          </a:prstGeom>
-          <a:noFill/>
-        </p:spPr>
-        <p:txBody>
-          <a:bodyPr wrap="square">
-            <a:normAutofit/>
-          </a:bodyPr>
-          <a:lstStyle/>
-          <a:p>
-            <a:pPr algn="r"/>
-            <a:r>
-              <a:rPr sz="900" b="0" i="0">
-                <a:solidFill>
-                  <a:srgbClr val="7B7FA0"/>
-                </a:solidFill>
-                <a:latin typeface="Courier New"/>
-              </a:rPr>
-              <a:t>III · STRATEGIE ENTWICKELN UND UMSETZEN</a:t>
-            </a:r>
-          </a:p>
-        </p:txBody>
-      </p:sp>
-      <p:sp>
-        <p:nvSpPr>
-          <p:cNvPr id="4" name="TextBox 3"/>
-          <p:cNvSpPr txBox="1"/>
-          <p:nvPr/>
-        </p:nvSpPr>
-        <p:spPr>
-          <a:xfrm>
-            <a:off x="609600" y="6426200"/>
-            <a:ext cx="10972800" cy="228600"/>
-          </a:xfrm>
-          <a:prstGeom prst="rect">
-            <a:avLst/>
-          </a:prstGeom>
-          <a:noFill/>
-        </p:spPr>
-        <p:txBody>
-          <a:bodyPr wrap="square">
-            <a:normAutofit/>
-          </a:bodyPr>
-          <a:lstStyle/>
-          <a:p>
-            <a:pPr algn="r"/>
-            <a:r>
-              <a:rPr sz="900" b="0" i="0">
-                <a:solidFill>
-                  <a:srgbClr val="7B7FA0"/>
-                </a:solidFill>
-                <a:latin typeface="Courier New"/>
-              </a:rPr>
-              <a:t>09</a:t>
-            </a:r>
-          </a:p>
-        </p:txBody>
-      </p:sp>
-      <p:sp>
-        <p:nvSpPr>
-          <p:cNvPr id="5" name="Rectangle 4"/>
+          <p:cNvPr id="2" name="Rectangle 1"/>
           <p:cNvSpPr/>
           <p:nvPr/>
         </p:nvSpPr>
         <p:spPr>
           <a:xfrm>
-            <a:off x="609600" y="825500"/>
-            <a:ext cx="10972800" cy="6350"/>
+            <a:off x="0" y="0"/>
+            <a:ext cx="12188952" cy="6858000"/>
           </a:xfrm>
           <a:prstGeom prst="rect">
             <a:avLst/>
           </a:prstGeom>
           <a:solidFill>
-            <a:srgbClr val="191D2E"/>
+            <a:srgbClr val="EDEDF3"/>
           </a:solidFill>
           <a:ln>
             <a:noFill/>
@@ -6863,55 +8364,20 @@
       </p:sp>
       <p:sp>
         <p:nvSpPr>
-          <p:cNvPr id="6" name="TextBox 5"/>
-          <p:cNvSpPr txBox="1"/>
-          <p:nvPr/>
-        </p:nvSpPr>
-        <p:spPr>
-          <a:xfrm>
-            <a:off x="609600" y="920750"/>
-            <a:ext cx="10972800" cy="1778000"/>
-          </a:xfrm>
-          <a:prstGeom prst="rect">
-            <a:avLst/>
-          </a:prstGeom>
-          <a:noFill/>
-        </p:spPr>
-        <p:txBody>
-          <a:bodyPr wrap="square">
-            <a:normAutofit/>
-          </a:bodyPr>
-          <a:lstStyle/>
-          <a:p>
-            <a:pPr algn="l"/>
-            <a:r>
-              <a:rPr sz="3800" b="0" i="0">
-                <a:solidFill>
-                  <a:srgbClr val="191D2E"/>
-                </a:solidFill>
-                <a:latin typeface="Georgia"/>
-              </a:rPr>
-              <a:t>Neukundenansprache: Was wirklich funktioniert</a:t>
-            </a:r>
-          </a:p>
-        </p:txBody>
-      </p:sp>
-      <p:sp>
-        <p:nvSpPr>
-          <p:cNvPr id="7" name="Rectangle 6"/>
+          <p:cNvPr id="3" name="Rectangle 2"/>
           <p:cNvSpPr/>
           <p:nvPr/>
         </p:nvSpPr>
         <p:spPr>
           <a:xfrm>
-            <a:off x="609600" y="2762250"/>
-            <a:ext cx="10972800" cy="6350"/>
+            <a:off x="0" y="0"/>
+            <a:ext cx="12188952" cy="50292"/>
           </a:xfrm>
           <a:prstGeom prst="rect">
             <a:avLst/>
           </a:prstGeom>
           <a:solidFill>
-            <a:srgbClr val="E0E0E8"/>
+            <a:srgbClr val="1F2C56"/>
           </a:solidFill>
           <a:ln>
             <a:noFill/>
@@ -6941,14 +8407,170 @@
       </p:sp>
       <p:sp>
         <p:nvSpPr>
+          <p:cNvPr id="4" name="TextBox 3"/>
+          <p:cNvSpPr txBox="1"/>
+          <p:nvPr/>
+        </p:nvSpPr>
+        <p:spPr>
+          <a:xfrm>
+            <a:off x="685800" y="109728"/>
+            <a:ext cx="10817352" cy="228600"/>
+          </a:xfrm>
+          <a:prstGeom prst="rect">
+            <a:avLst/>
+          </a:prstGeom>
+          <a:noFill/>
+        </p:spPr>
+        <p:txBody>
+          <a:bodyPr wrap="none">
+            <a:spAutoFit/>
+          </a:bodyPr>
+          <a:lstStyle/>
+          <a:p>
+            <a:pPr algn="l"/>
+            <a:r>
+              <a:rPr sz="750">
+                <a:solidFill>
+                  <a:srgbClr val="78808C"/>
+                </a:solidFill>
+                <a:latin typeface="JetBrains Mono"/>
+              </a:rPr>
+              <a:t>M15  ·  INHALT</a:t>
+            </a:r>
+          </a:p>
+        </p:txBody>
+      </p:sp>
+      <p:sp>
+        <p:nvSpPr>
+          <p:cNvPr id="5" name="Rectangle 4"/>
+          <p:cNvSpPr/>
+          <p:nvPr/>
+        </p:nvSpPr>
+        <p:spPr>
+          <a:xfrm>
+            <a:off x="0" y="1234440"/>
+            <a:ext cx="12188952" cy="12700"/>
+          </a:xfrm>
+          <a:prstGeom prst="rect">
+            <a:avLst/>
+          </a:prstGeom>
+          <a:solidFill>
+            <a:srgbClr val="D8DFE4"/>
+          </a:solidFill>
+          <a:ln>
+            <a:noFill/>
+          </a:ln>
+        </p:spPr>
+        <p:style>
+          <a:lnRef idx="1">
+            <a:schemeClr val="accent1"/>
+          </a:lnRef>
+          <a:fillRef idx="3">
+            <a:schemeClr val="accent1"/>
+          </a:fillRef>
+          <a:effectRef idx="2">
+            <a:schemeClr val="accent1"/>
+          </a:effectRef>
+          <a:fontRef idx="minor">
+            <a:schemeClr val="lt1"/>
+          </a:fontRef>
+        </p:style>
+        <p:txBody>
+          <a:bodyPr rtlCol="0" anchor="ctr"/>
+          <a:lstStyle/>
+          <a:p>
+            <a:pPr algn="ctr"/>
+          </a:p>
+        </p:txBody>
+      </p:sp>
+      <p:sp>
+        <p:nvSpPr>
+          <p:cNvPr id="6" name="Rectangle 5"/>
+          <p:cNvSpPr/>
+          <p:nvPr/>
+        </p:nvSpPr>
+        <p:spPr>
+          <a:xfrm>
+            <a:off x="685800" y="502920"/>
+            <a:ext cx="36576" cy="658368"/>
+          </a:xfrm>
+          <a:prstGeom prst="rect">
+            <a:avLst/>
+          </a:prstGeom>
+          <a:solidFill>
+            <a:srgbClr val="D9C089"/>
+          </a:solidFill>
+          <a:ln>
+            <a:noFill/>
+          </a:ln>
+        </p:spPr>
+        <p:style>
+          <a:lnRef idx="1">
+            <a:schemeClr val="accent1"/>
+          </a:lnRef>
+          <a:fillRef idx="3">
+            <a:schemeClr val="accent1"/>
+          </a:fillRef>
+          <a:effectRef idx="2">
+            <a:schemeClr val="accent1"/>
+          </a:effectRef>
+          <a:fontRef idx="minor">
+            <a:schemeClr val="lt1"/>
+          </a:fontRef>
+        </p:style>
+        <p:txBody>
+          <a:bodyPr rtlCol="0" anchor="ctr"/>
+          <a:lstStyle/>
+          <a:p>
+            <a:pPr algn="ctr"/>
+          </a:p>
+        </p:txBody>
+      </p:sp>
+      <p:sp>
+        <p:nvSpPr>
+          <p:cNvPr id="7" name="TextBox 6"/>
+          <p:cNvSpPr txBox="1"/>
+          <p:nvPr/>
+        </p:nvSpPr>
+        <p:spPr>
+          <a:xfrm>
+            <a:off x="813816" y="502920"/>
+            <a:ext cx="10634472" cy="685800"/>
+          </a:xfrm>
+          <a:prstGeom prst="rect">
+            <a:avLst/>
+          </a:prstGeom>
+          <a:noFill/>
+        </p:spPr>
+        <p:txBody>
+          <a:bodyPr wrap="square">
+            <a:spAutoFit/>
+          </a:bodyPr>
+          <a:lstStyle/>
+          <a:p>
+            <a:pPr algn="l"/>
+            <a:r>
+              <a:rPr sz="2400" b="1" i="0">
+                <a:solidFill>
+                  <a:srgbClr val="1F2C56"/>
+                </a:solidFill>
+                <a:latin typeface="Source Serif 4"/>
+              </a:rPr>
+              <a:t>Wertversprechen formulieren</a:t>
+            </a:r>
+          </a:p>
+        </p:txBody>
+      </p:sp>
+      <p:sp>
+        <p:nvSpPr>
           <p:cNvPr id="8" name="TextBox 7"/>
           <p:cNvSpPr txBox="1"/>
           <p:nvPr/>
         </p:nvSpPr>
         <p:spPr>
           <a:xfrm>
-            <a:off x="609600" y="2851150"/>
-            <a:ext cx="10972800" cy="3448050"/>
+            <a:off x="685800" y="1417320"/>
+            <a:ext cx="10817352" cy="5029200"/>
           </a:xfrm>
           <a:prstGeom prst="rect">
             <a:avLst/>
@@ -6957,102 +8579,199 @@
         </p:spPr>
         <p:txBody>
           <a:bodyPr wrap="square">
-            <a:normAutofit/>
+            <a:spAutoFit/>
           </a:bodyPr>
           <a:lstStyle/>
           <a:p>
             <a:pPr>
               <a:spcBef>
-                <a:spcPts val="600"/>
+                <a:spcPts val="400"/>
               </a:spcBef>
               <a:spcAft>
-                <a:spcPts val="600"/>
+                <a:spcPts val="200"/>
               </a:spcAft>
             </a:pPr>
             <a:r>
-              <a:rPr sz="1400">
-                <a:solidFill>
-                  <a:srgbClr val="191D2E"/>
-                </a:solidFill>
-                <a:latin typeface="Georgia"/>
-              </a:rPr>
-              <a:t>–  Empfehlungsmarketing: Bestehende Kunden empfehlen aktiv</a:t>
+              <a:rPr sz="1200">
+                <a:solidFill>
+                  <a:srgbClr val="3D5466"/>
+                </a:solidFill>
+                <a:latin typeface="Arial"/>
+              </a:rPr>
+              <a:t>Das Wertversprechen (Value Proposition) beantwortet: Warum sollte ein Unternehmen aus meinem Zielsegment zu uns wechseln – oder bleiben?</a:t>
             </a:r>
           </a:p>
           <a:p>
             <a:pPr>
               <a:spcBef>
-                <a:spcPts val="600"/>
+                <a:spcPts val="400"/>
               </a:spcBef>
               <a:spcAft>
-                <a:spcPts val="600"/>
+                <a:spcPts val="200"/>
               </a:spcAft>
             </a:pPr>
             <a:r>
-              <a:rPr sz="1400">
-                <a:solidFill>
-                  <a:srgbClr val="191D2E"/>
-                </a:solidFill>
-                <a:latin typeface="Georgia"/>
-              </a:rPr>
-              <a:t>–  Steuerberater-Kooperation: Gemeinsame Zielkunden, gegenseitige Empfehlung</a:t>
+              <a:rPr sz="1200">
+                <a:solidFill>
+                  <a:srgbClr val="3D5466"/>
+                </a:solidFill>
+                <a:latin typeface="Arial"/>
+              </a:rPr>
+              <a:t>Ein wirksames Wertversprechen im Firmenkundengeschäft ist:</a:t>
             </a:r>
           </a:p>
           <a:p>
             <a:pPr>
               <a:spcBef>
-                <a:spcPts val="600"/>
+                <a:spcPts val="400"/>
               </a:spcBef>
               <a:spcAft>
-                <a:spcPts val="600"/>
+                <a:spcPts val="200"/>
               </a:spcAft>
             </a:pPr>
             <a:r>
-              <a:rPr sz="1400">
-                <a:solidFill>
-                  <a:srgbClr val="191D2E"/>
-                </a:solidFill>
-                <a:latin typeface="Georgia"/>
-              </a:rPr>
-              <a:t>–  Branchenveranstaltungen: Sichtbarkeit als Fachexperte aufbauen</a:t>
+              <a:rPr sz="1300">
+                <a:solidFill>
+                  <a:srgbClr val="3D5466"/>
+                </a:solidFill>
+                <a:latin typeface="Arial"/>
+              </a:rPr>
+              <a:t>▸  Spezifisch (nicht „wir sind die beste Bank"): „Für Handwerksbetriebe in der Region sind wir der Partner, der Finanzierungsentscheidungen in 48 Stunden trifft."</a:t>
             </a:r>
           </a:p>
           <a:p>
             <a:pPr>
               <a:spcBef>
-                <a:spcPts val="600"/>
+                <a:spcPts val="400"/>
               </a:spcBef>
               <a:spcAft>
-                <a:spcPts val="600"/>
+                <a:spcPts val="200"/>
               </a:spcAft>
             </a:pPr>
             <a:r>
-              <a:rPr sz="1400">
-                <a:solidFill>
-                  <a:srgbClr val="191D2E"/>
-                </a:solidFill>
-                <a:latin typeface="Georgia"/>
-              </a:rPr>
-              <a:t>–  LinkedIn: Content zu Fachthemen schafft Reichweite ohne Kaltakquise</a:t>
+              <a:rPr sz="1300">
+                <a:solidFill>
+                  <a:srgbClr val="3D5466"/>
+                </a:solidFill>
+                <a:latin typeface="Arial"/>
+              </a:rPr>
+              <a:t>▸  Belegbar: Konkrete Referenzen, Bearbeitungszeiten, Verbundpartner-Einbindung</a:t>
             </a:r>
           </a:p>
           <a:p>
             <a:pPr>
               <a:spcBef>
-                <a:spcPts val="600"/>
+                <a:spcPts val="400"/>
               </a:spcBef>
               <a:spcAft>
-                <a:spcPts val="600"/>
+                <a:spcPts val="200"/>
               </a:spcAft>
             </a:pPr>
             <a:r>
-              <a:rPr sz="1400">
-                <a:solidFill>
-                  <a:srgbClr val="191D2E"/>
-                </a:solidFill>
-                <a:latin typeface="Georgia"/>
-              </a:rPr>
-              <a:t>–  Cold Outreach: Nur mit persönlichem Bezug — nie generisch</a:t>
+              <a:rPr sz="1300">
+                <a:solidFill>
+                  <a:srgbClr val="3D5466"/>
+                </a:solidFill>
+                <a:latin typeface="Arial"/>
+              </a:rPr>
+              <a:t>▸  Differenzierend: Was kann ich, was die Sparkasse oder Commerzbank nicht kann?</a:t>
+            </a:r>
+          </a:p>
+          <a:p>
+            <a:pPr>
+              <a:spcBef>
+                <a:spcPts val="400"/>
+              </a:spcBef>
+              <a:spcAft>
+                <a:spcPts val="200"/>
+              </a:spcAft>
+            </a:pPr>
+            <a:r>
+              <a:rPr sz="1200">
+                <a:solidFill>
+                  <a:srgbClr val="3D5466"/>
+                </a:solidFill>
+                <a:latin typeface="Arial"/>
+              </a:rPr>
+              <a:t>## 4.5 Neukundenansprache: Kanäle und Maßnahmen</a:t>
+            </a:r>
+          </a:p>
+        </p:txBody>
+      </p:sp>
+      <p:sp>
+        <p:nvSpPr>
+          <p:cNvPr id="9" name="Rectangle 8"/>
+          <p:cNvSpPr/>
+          <p:nvPr/>
+        </p:nvSpPr>
+        <p:spPr>
+          <a:xfrm>
+            <a:off x="0" y="6510528"/>
+            <a:ext cx="12188952" cy="347472"/>
+          </a:xfrm>
+          <a:prstGeom prst="rect">
+            <a:avLst/>
+          </a:prstGeom>
+          <a:solidFill>
+            <a:srgbClr val="0A1937"/>
+          </a:solidFill>
+          <a:ln>
+            <a:noFill/>
+          </a:ln>
+        </p:spPr>
+        <p:style>
+          <a:lnRef idx="1">
+            <a:schemeClr val="accent1"/>
+          </a:lnRef>
+          <a:fillRef idx="3">
+            <a:schemeClr val="accent1"/>
+          </a:fillRef>
+          <a:effectRef idx="2">
+            <a:schemeClr val="accent1"/>
+          </a:effectRef>
+          <a:fontRef idx="minor">
+            <a:schemeClr val="lt1"/>
+          </a:fontRef>
+        </p:style>
+        <p:txBody>
+          <a:bodyPr rtlCol="0" anchor="ctr"/>
+          <a:lstStyle/>
+          <a:p>
+            <a:pPr algn="ctr"/>
+          </a:p>
+        </p:txBody>
+      </p:sp>
+      <p:sp>
+        <p:nvSpPr>
+          <p:cNvPr id="10" name="TextBox 9"/>
+          <p:cNvSpPr txBox="1"/>
+          <p:nvPr/>
+        </p:nvSpPr>
+        <p:spPr>
+          <a:xfrm>
+            <a:off x="685800" y="6583680"/>
+            <a:ext cx="6490411" cy="256032"/>
+          </a:xfrm>
+          <a:prstGeom prst="rect">
+            <a:avLst/>
+          </a:prstGeom>
+          <a:noFill/>
+        </p:spPr>
+        <p:txBody>
+          <a:bodyPr wrap="none">
+            <a:spAutoFit/>
+          </a:bodyPr>
+          <a:lstStyle/>
+          <a:p>
+            <a:pPr algn="l"/>
+            <a:r>
+              <a:rPr sz="700">
+                <a:solidFill>
+                  <a:srgbClr val="A0B4D2"/>
+                </a:solidFill>
+                <a:latin typeface="JetBrains Mono"/>
+              </a:rPr>
+              <a:t>Benedikt Zoller Coaching  ·  FKB Campus  ·  M15</a:t>
             </a:r>
           </a:p>
         </p:txBody>

--- a/public/downloads/praesentation/M15.pptx
+++ b/public/downloads/praesentation/M15.pptx
@@ -3258,7 +3258,42 @@
       </p:sp>
       <p:sp>
         <p:nvSpPr>
-          <p:cNvPr id="6" name="Rectangle 5"/>
+          <p:cNvPr id="6" name="TextBox 5"/>
+          <p:cNvSpPr txBox="1"/>
+          <p:nvPr/>
+        </p:nvSpPr>
+        <p:spPr>
+          <a:xfrm>
+            <a:off x="685800" y="3977639"/>
+            <a:ext cx="10817352" cy="731520"/>
+          </a:xfrm>
+          <a:prstGeom prst="rect">
+            <a:avLst/>
+          </a:prstGeom>
+          <a:noFill/>
+        </p:spPr>
+        <p:txBody>
+          <a:bodyPr wrap="square">
+            <a:spAutoFit/>
+          </a:bodyPr>
+          <a:lstStyle/>
+          <a:p>
+            <a:pPr algn="l"/>
+            <a:r>
+              <a:rPr sz="1900" b="0" i="1">
+                <a:solidFill>
+                  <a:srgbClr val="BECDE6"/>
+                </a:solidFill>
+                <a:latin typeface="Source Serif 4"/>
+              </a:rPr>
+              <a:t>Zielsegmente definieren, Marktpotenziale analysieren und eine eigene Vertriebsstrategie entwickeln</a:t>
+            </a:r>
+          </a:p>
+        </p:txBody>
+      </p:sp>
+      <p:sp>
+        <p:nvSpPr>
+          <p:cNvPr id="7" name="Rectangle 6"/>
           <p:cNvSpPr/>
           <p:nvPr/>
         </p:nvSpPr>
@@ -3301,14 +3336,14 @@
       </p:sp>
       <p:sp>
         <p:nvSpPr>
-          <p:cNvPr id="7" name="TextBox 6"/>
+          <p:cNvPr id="8" name="TextBox 7"/>
           <p:cNvSpPr txBox="1"/>
           <p:nvPr/>
         </p:nvSpPr>
         <p:spPr>
           <a:xfrm>
             <a:off x="685800" y="5193792"/>
-            <a:ext cx="5408676" cy="201168"/>
+            <a:ext cx="3605784" cy="201168"/>
           </a:xfrm>
           <a:prstGeom prst="rect">
             <a:avLst/>
@@ -3329,21 +3364,21 @@
                 </a:solidFill>
                 <a:latin typeface="JetBrains Mono"/>
               </a:rPr>
-              <a:t>KOMPETENZSTUFE</a:t>
-            </a:r>
-          </a:p>
-        </p:txBody>
-      </p:sp>
-      <p:sp>
-        <p:nvSpPr>
-          <p:cNvPr id="8" name="TextBox 7"/>
+              <a:t>KOMPETENZFELD</a:t>
+            </a:r>
+          </a:p>
+        </p:txBody>
+      </p:sp>
+      <p:sp>
+        <p:nvSpPr>
+          <p:cNvPr id="9" name="TextBox 8"/>
           <p:cNvSpPr txBox="1"/>
           <p:nvPr/>
         </p:nvSpPr>
         <p:spPr>
           <a:xfrm>
             <a:off x="685800" y="5394960"/>
-            <a:ext cx="5408676" cy="320040"/>
+            <a:ext cx="3605784" cy="320040"/>
           </a:xfrm>
           <a:prstGeom prst="rect">
             <a:avLst/>
@@ -3364,21 +3399,21 @@
                 </a:solidFill>
                 <a:latin typeface="Arial"/>
               </a:rPr>
-              <a:t>Stratege</a:t>
-            </a:r>
-          </a:p>
-        </p:txBody>
-      </p:sp>
-      <p:sp>
-        <p:nvSpPr>
-          <p:cNvPr id="9" name="TextBox 8"/>
+              <a:t>K-04 Vertrieb &amp; Ertragsoptimierung</a:t>
+            </a:r>
+          </a:p>
+        </p:txBody>
+      </p:sp>
+      <p:sp>
+        <p:nvSpPr>
+          <p:cNvPr id="10" name="TextBox 9"/>
           <p:cNvSpPr txBox="1"/>
           <p:nvPr/>
         </p:nvSpPr>
         <p:spPr>
           <a:xfrm>
-            <a:off x="6094476" y="5193792"/>
-            <a:ext cx="5408676" cy="201168"/>
+            <a:off x="4291584" y="5193792"/>
+            <a:ext cx="3605784" cy="201168"/>
           </a:xfrm>
           <a:prstGeom prst="rect">
             <a:avLst/>
@@ -3399,21 +3434,21 @@
                 </a:solidFill>
                 <a:latin typeface="JetBrains Mono"/>
               </a:rPr>
-              <a:t>VERSION</a:t>
-            </a:r>
-          </a:p>
-        </p:txBody>
-      </p:sp>
-      <p:sp>
-        <p:nvSpPr>
-          <p:cNvPr id="10" name="TextBox 9"/>
+              <a:t>KOMPETENZSTUFE</a:t>
+            </a:r>
+          </a:p>
+        </p:txBody>
+      </p:sp>
+      <p:sp>
+        <p:nvSpPr>
+          <p:cNvPr id="11" name="TextBox 10"/>
           <p:cNvSpPr txBox="1"/>
           <p:nvPr/>
         </p:nvSpPr>
         <p:spPr>
           <a:xfrm>
-            <a:off x="6094476" y="5394960"/>
-            <a:ext cx="5408676" cy="320040"/>
+            <a:off x="4291584" y="5394960"/>
+            <a:ext cx="3605784" cy="320040"/>
           </a:xfrm>
           <a:prstGeom prst="rect">
             <a:avLst/>
@@ -3434,6 +3469,76 @@
                 </a:solidFill>
                 <a:latin typeface="Arial"/>
               </a:rPr>
+              <a:t>Stratege</a:t>
+            </a:r>
+          </a:p>
+        </p:txBody>
+      </p:sp>
+      <p:sp>
+        <p:nvSpPr>
+          <p:cNvPr id="12" name="TextBox 11"/>
+          <p:cNvSpPr txBox="1"/>
+          <p:nvPr/>
+        </p:nvSpPr>
+        <p:spPr>
+          <a:xfrm>
+            <a:off x="7897368" y="5193792"/>
+            <a:ext cx="3605784" cy="201168"/>
+          </a:xfrm>
+          <a:prstGeom prst="rect">
+            <a:avLst/>
+          </a:prstGeom>
+          <a:noFill/>
+        </p:spPr>
+        <p:txBody>
+          <a:bodyPr wrap="none">
+            <a:spAutoFit/>
+          </a:bodyPr>
+          <a:lstStyle/>
+          <a:p>
+            <a:pPr algn="l"/>
+            <a:r>
+              <a:rPr sz="700">
+                <a:solidFill>
+                  <a:srgbClr val="A0B4D2"/>
+                </a:solidFill>
+                <a:latin typeface="JetBrains Mono"/>
+              </a:rPr>
+              <a:t>VERSION</a:t>
+            </a:r>
+          </a:p>
+        </p:txBody>
+      </p:sp>
+      <p:sp>
+        <p:nvSpPr>
+          <p:cNvPr id="13" name="TextBox 12"/>
+          <p:cNvSpPr txBox="1"/>
+          <p:nvPr/>
+        </p:nvSpPr>
+        <p:spPr>
+          <a:xfrm>
+            <a:off x="7897368" y="5394960"/>
+            <a:ext cx="3605784" cy="320040"/>
+          </a:xfrm>
+          <a:prstGeom prst="rect">
+            <a:avLst/>
+          </a:prstGeom>
+          <a:noFill/>
+        </p:spPr>
+        <p:txBody>
+          <a:bodyPr wrap="square">
+            <a:spAutoFit/>
+          </a:bodyPr>
+          <a:lstStyle/>
+          <a:p>
+            <a:pPr algn="l"/>
+            <a:r>
+              <a:rPr sz="1100" b="0" i="0">
+                <a:solidFill>
+                  <a:srgbClr val="FFFFFF"/>
+                </a:solidFill>
+                <a:latin typeface="Arial"/>
+              </a:rPr>
               <a:t>v0.4</a:t>
             </a:r>
           </a:p>
@@ -3441,7 +3546,7 @@
       </p:sp>
       <p:sp>
         <p:nvSpPr>
-          <p:cNvPr id="11" name="Rectangle 10"/>
+          <p:cNvPr id="14" name="Rectangle 13"/>
           <p:cNvSpPr/>
           <p:nvPr/>
         </p:nvSpPr>
@@ -3484,7 +3589,7 @@
       </p:sp>
       <p:sp>
         <p:nvSpPr>
-          <p:cNvPr id="12" name="TextBox 11"/>
+          <p:cNvPr id="15" name="TextBox 14"/>
           <p:cNvSpPr txBox="1"/>
           <p:nvPr/>
         </p:nvSpPr>
@@ -3519,7 +3624,7 @@
       </p:sp>
       <p:sp>
         <p:nvSpPr>
-          <p:cNvPr id="13" name="TextBox 12"/>
+          <p:cNvPr id="16" name="TextBox 15"/>
           <p:cNvSpPr txBox="1"/>
           <p:nvPr/>
         </p:nvSpPr>
